--- a/slides/gbt.pptx
+++ b/slides/gbt.pptx
@@ -5,7 +5,7 @@
     <p:sldMasterId id="2147483708" r:id="rId1"/>
   </p:sldMasterIdLst>
   <p:notesMasterIdLst>
-    <p:notesMasterId r:id="rId46"/>
+    <p:notesMasterId r:id="rId48"/>
   </p:notesMasterIdLst>
   <p:sldIdLst>
     <p:sldId id="256" r:id="rId2"/>
@@ -29,29 +29,31 @@
     <p:sldId id="269" r:id="rId20"/>
     <p:sldId id="342" r:id="rId21"/>
     <p:sldId id="341" r:id="rId22"/>
-    <p:sldId id="343" r:id="rId23"/>
-    <p:sldId id="349" r:id="rId24"/>
-    <p:sldId id="344" r:id="rId25"/>
-    <p:sldId id="345" r:id="rId26"/>
-    <p:sldId id="346" r:id="rId27"/>
-    <p:sldId id="347" r:id="rId28"/>
-    <p:sldId id="270" r:id="rId29"/>
-    <p:sldId id="336" r:id="rId30"/>
-    <p:sldId id="271" r:id="rId31"/>
-    <p:sldId id="348" r:id="rId32"/>
-    <p:sldId id="278" r:id="rId33"/>
-    <p:sldId id="279" r:id="rId34"/>
-    <p:sldId id="280" r:id="rId35"/>
-    <p:sldId id="274" r:id="rId36"/>
-    <p:sldId id="272" r:id="rId37"/>
-    <p:sldId id="277" r:id="rId38"/>
-    <p:sldId id="276" r:id="rId39"/>
-    <p:sldId id="288" r:id="rId40"/>
-    <p:sldId id="289" r:id="rId41"/>
-    <p:sldId id="290" r:id="rId42"/>
-    <p:sldId id="292" r:id="rId43"/>
-    <p:sldId id="327" r:id="rId44"/>
-    <p:sldId id="334" r:id="rId45"/>
+    <p:sldId id="351" r:id="rId23"/>
+    <p:sldId id="343" r:id="rId24"/>
+    <p:sldId id="350" r:id="rId25"/>
+    <p:sldId id="349" r:id="rId26"/>
+    <p:sldId id="344" r:id="rId27"/>
+    <p:sldId id="345" r:id="rId28"/>
+    <p:sldId id="346" r:id="rId29"/>
+    <p:sldId id="347" r:id="rId30"/>
+    <p:sldId id="270" r:id="rId31"/>
+    <p:sldId id="336" r:id="rId32"/>
+    <p:sldId id="271" r:id="rId33"/>
+    <p:sldId id="348" r:id="rId34"/>
+    <p:sldId id="278" r:id="rId35"/>
+    <p:sldId id="279" r:id="rId36"/>
+    <p:sldId id="280" r:id="rId37"/>
+    <p:sldId id="274" r:id="rId38"/>
+    <p:sldId id="272" r:id="rId39"/>
+    <p:sldId id="277" r:id="rId40"/>
+    <p:sldId id="276" r:id="rId41"/>
+    <p:sldId id="288" r:id="rId42"/>
+    <p:sldId id="289" r:id="rId43"/>
+    <p:sldId id="290" r:id="rId44"/>
+    <p:sldId id="292" r:id="rId45"/>
+    <p:sldId id="327" r:id="rId46"/>
+    <p:sldId id="334" r:id="rId47"/>
   </p:sldIdLst>
   <p:sldSz cx="9144000" cy="6858000" type="screen4x3"/>
   <p:notesSz cx="6858000" cy="9144000"/>
@@ -323,7 +325,7 @@
               <a:pPr>
                 <a:defRPr/>
               </a:pPr>
-              <a:t>28-04-2025</a:t>
+              <a:t>11-04-2026</a:t>
             </a:fld>
             <a:endParaRPr lang="en-US"/>
           </a:p>
@@ -982,7 +984,7 @@
               <a:pPr>
                 <a:defRPr/>
               </a:pPr>
-              <a:t>22</a:t>
+              <a:t>23</a:t>
             </a:fld>
             <a:endParaRPr lang="en-US"/>
           </a:p>
@@ -1075,7 +1077,7 @@
               <a:pPr>
                 <a:defRPr/>
               </a:pPr>
-              <a:t>23</a:t>
+              <a:t>24</a:t>
             </a:fld>
             <a:endParaRPr lang="en-US"/>
           </a:p>
@@ -1084,7 +1086,7 @@
     </p:spTree>
     <p:extLst>
       <p:ext uri="{BB962C8B-B14F-4D97-AF65-F5344CB8AC3E}">
-        <p14:creationId xmlns:p14="http://schemas.microsoft.com/office/powerpoint/2010/main" val="1711930730"/>
+        <p14:creationId xmlns:p14="http://schemas.microsoft.com/office/powerpoint/2010/main" val="2314860988"/>
       </p:ext>
     </p:extLst>
   </p:cSld>
@@ -1138,7 +1140,10 @@
           <a:bodyPr/>
           <a:lstStyle/>
           <a:p>
-            <a:endParaRPr lang="en-NL" dirty="0"/>
+            <a:r>
+              <a:rPr lang="en-NL" dirty="0"/>
+              <a:t>Note that circuit is not exactly the same as circular simple path.</a:t>
+            </a:r>
           </a:p>
         </p:txBody>
       </p:sp>
@@ -1165,7 +1170,7 @@
               <a:pPr>
                 <a:defRPr/>
               </a:pPr>
-              <a:t>24</a:t>
+              <a:t>25</a:t>
             </a:fld>
             <a:endParaRPr lang="en-US"/>
           </a:p>
@@ -1174,7 +1179,7 @@
     </p:spTree>
     <p:extLst>
       <p:ext uri="{BB962C8B-B14F-4D97-AF65-F5344CB8AC3E}">
-        <p14:creationId xmlns:p14="http://schemas.microsoft.com/office/powerpoint/2010/main" val="4057068099"/>
+        <p14:creationId xmlns:p14="http://schemas.microsoft.com/office/powerpoint/2010/main" val="1711930730"/>
       </p:ext>
     </p:extLst>
   </p:cSld>
@@ -1255,7 +1260,7 @@
               <a:pPr>
                 <a:defRPr/>
               </a:pPr>
-              <a:t>25</a:t>
+              <a:t>26</a:t>
             </a:fld>
             <a:endParaRPr lang="en-US"/>
           </a:p>
@@ -1264,7 +1269,7 @@
     </p:spTree>
     <p:extLst>
       <p:ext uri="{BB962C8B-B14F-4D97-AF65-F5344CB8AC3E}">
-        <p14:creationId xmlns:p14="http://schemas.microsoft.com/office/powerpoint/2010/main" val="3943465698"/>
+        <p14:creationId xmlns:p14="http://schemas.microsoft.com/office/powerpoint/2010/main" val="4057068099"/>
       </p:ext>
     </p:extLst>
   </p:cSld>
@@ -1345,7 +1350,7 @@
               <a:pPr>
                 <a:defRPr/>
               </a:pPr>
-              <a:t>26</a:t>
+              <a:t>27</a:t>
             </a:fld>
             <a:endParaRPr lang="en-US"/>
           </a:p>
@@ -1354,7 +1359,7 @@
     </p:spTree>
     <p:extLst>
       <p:ext uri="{BB962C8B-B14F-4D97-AF65-F5344CB8AC3E}">
-        <p14:creationId xmlns:p14="http://schemas.microsoft.com/office/powerpoint/2010/main" val="118667253"/>
+        <p14:creationId xmlns:p14="http://schemas.microsoft.com/office/powerpoint/2010/main" val="3943465698"/>
       </p:ext>
     </p:extLst>
   </p:cSld>
@@ -1435,7 +1440,7 @@
               <a:pPr>
                 <a:defRPr/>
               </a:pPr>
-              <a:t>27</a:t>
+              <a:t>28</a:t>
             </a:fld>
             <a:endParaRPr lang="en-US"/>
           </a:p>
@@ -1444,7 +1449,7 @@
     </p:spTree>
     <p:extLst>
       <p:ext uri="{BB962C8B-B14F-4D97-AF65-F5344CB8AC3E}">
-        <p14:creationId xmlns:p14="http://schemas.microsoft.com/office/powerpoint/2010/main" val="4188118705"/>
+        <p14:creationId xmlns:p14="http://schemas.microsoft.com/office/powerpoint/2010/main" val="118667253"/>
       </p:ext>
     </p:extLst>
   </p:cSld>
@@ -1498,42 +1503,7 @@
           <a:bodyPr/>
           <a:lstStyle/>
           <a:p>
-            <a:r>
-              <a:rPr lang="en-US" dirty="0"/>
-              <a:t>Prime</a:t>
-            </a:r>
-            <a:r>
-              <a:rPr lang="en-US" baseline="0" dirty="0"/>
-              <a:t> paths:</a:t>
-            </a:r>
-            <a:br>
-              <a:rPr lang="en-US" baseline="0" dirty="0"/>
-            </a:br>
-            <a:endParaRPr lang="en-US" baseline="0" dirty="0"/>
-          </a:p>
-          <a:p>
-            <a:r>
-              <a:rPr lang="en-US" baseline="0" dirty="0"/>
-              <a:t>Starting from:</a:t>
-            </a:r>
-          </a:p>
-          <a:p>
-            <a:r>
-              <a:rPr lang="en-US" baseline="0" dirty="0"/>
-              <a:t>0:  [01,0]  [0,1,2]   </a:t>
-            </a:r>
-          </a:p>
-          <a:p>
-            <a:r>
-              <a:rPr lang="en-US" baseline="0" dirty="0"/>
-              <a:t>1:  [1,0,1]    .... This may seem to be overkill; but the rationale is as follows: assignment in 1 may affect subsequent iteration, therefore we insist on testing 101.</a:t>
-            </a:r>
-          </a:p>
-          <a:p>
-            <a:r>
-              <a:rPr lang="en-US" baseline="0" dirty="0"/>
-              <a:t>2: none</a:t>
-            </a:r>
+            <a:endParaRPr lang="en-NL" dirty="0"/>
           </a:p>
         </p:txBody>
       </p:sp>
@@ -1544,7 +1514,7 @@
             <a:spLocks noGrp="1"/>
           </p:cNvSpPr>
           <p:nvPr>
-            <p:ph type="sldNum" sz="quarter" idx="10"/>
+            <p:ph type="sldNum" sz="quarter" idx="5"/>
           </p:nvPr>
         </p:nvSpPr>
         <p:spPr/>
@@ -1560,7 +1530,7 @@
               <a:pPr>
                 <a:defRPr/>
               </a:pPr>
-              <a:t>28</a:t>
+              <a:t>29</a:t>
             </a:fld>
             <a:endParaRPr lang="en-US"/>
           </a:p>
@@ -1569,7 +1539,7 @@
     </p:spTree>
     <p:extLst>
       <p:ext uri="{BB962C8B-B14F-4D97-AF65-F5344CB8AC3E}">
-        <p14:creationId xmlns:p14="http://schemas.microsoft.com/office/powerpoint/2010/main" val="764958124"/>
+        <p14:creationId xmlns:p14="http://schemas.microsoft.com/office/powerpoint/2010/main" val="4188118705"/>
       </p:ext>
     </p:extLst>
   </p:cSld>
@@ -1645,25 +1615,19 @@
           <a:p>
             <a:r>
               <a:rPr lang="en-US" baseline="0" dirty="0"/>
-              <a:t>0:  [0,,1,0]  [0,1,3]</a:t>
+              <a:t>0:  [01,0]  [0,1,2]   </a:t>
             </a:r>
           </a:p>
           <a:p>
             <a:r>
               <a:rPr lang="en-US" baseline="0" dirty="0"/>
-              <a:t>1:  [1,0,1]  [1,0,2,3]</a:t>
+              <a:t>1:  [1,0,1]    .... This may seem to be overkill; but the rationale is as follows: assignment in 1 may affect subsequent iteration, therefore we insist on testing 101.</a:t>
             </a:r>
           </a:p>
           <a:p>
             <a:r>
               <a:rPr lang="en-US" baseline="0" dirty="0"/>
               <a:t>2: none</a:t>
-            </a:r>
-          </a:p>
-          <a:p>
-            <a:r>
-              <a:rPr lang="en-US" baseline="0" dirty="0"/>
-              <a:t>3:  none</a:t>
             </a:r>
           </a:p>
         </p:txBody>
@@ -1691,7 +1655,7 @@
               <a:pPr>
                 <a:defRPr/>
               </a:pPr>
-              <a:t>29</a:t>
+              <a:t>30</a:t>
             </a:fld>
             <a:endParaRPr lang="en-US"/>
           </a:p>
@@ -1700,7 +1664,7 @@
     </p:spTree>
     <p:extLst>
       <p:ext uri="{BB962C8B-B14F-4D97-AF65-F5344CB8AC3E}">
-        <p14:creationId xmlns:p14="http://schemas.microsoft.com/office/powerpoint/2010/main" val="1132626587"/>
+        <p14:creationId xmlns:p14="http://schemas.microsoft.com/office/powerpoint/2010/main" val="764958124"/>
       </p:ext>
     </p:extLst>
   </p:cSld>
@@ -1876,29 +1840,19 @@
       </p:grpSpPr>
       <p:sp>
         <p:nvSpPr>
-          <p:cNvPr id="45058" name="Slide Image Placeholder 1"/>
+          <p:cNvPr id="2" name="Slide Image Placeholder 1"/>
           <p:cNvSpPr>
-            <a:spLocks noGrp="1" noRot="1" noChangeAspect="1" noTextEdit="1"/>
+            <a:spLocks noGrp="1" noRot="1" noChangeAspect="1"/>
           </p:cNvSpPr>
           <p:nvPr>
             <p:ph type="sldImg"/>
           </p:nvPr>
         </p:nvSpPr>
-        <p:spPr bwMode="auto">
-          <a:noFill/>
-          <a:ln>
-            <a:solidFill>
-              <a:srgbClr val="000000"/>
-            </a:solidFill>
-            <a:miter lim="800000"/>
-            <a:headEnd/>
-            <a:tailEnd/>
-          </a:ln>
-        </p:spPr>
-      </p:sp>
-      <p:sp>
-        <p:nvSpPr>
-          <p:cNvPr id="45059" name="Notes Placeholder 2"/>
+        <p:spPr/>
+      </p:sp>
+      <p:sp>
+        <p:nvSpPr>
+          <p:cNvPr id="3" name="Notes Placeholder 2"/>
           <p:cNvSpPr>
             <a:spLocks noGrp="1"/>
           </p:cNvSpPr>
@@ -1906,78 +1860,89 @@
             <p:ph type="body" idx="1"/>
           </p:nvPr>
         </p:nvSpPr>
-        <p:spPr bwMode="auto">
-          <a:noFill/>
-        </p:spPr>
-        <p:txBody>
-          <a:bodyPr wrap="square" numCol="1" anchor="t" anchorCtr="0" compatLnSpc="1">
-            <a:prstTxWarp prst="textNoShape">
-              <a:avLst/>
-            </a:prstTxWarp>
-          </a:bodyPr>
+        <p:spPr/>
+        <p:txBody>
+          <a:bodyPr/>
           <a:lstStyle/>
           <a:p>
             <a:r>
               <a:rPr lang="en-US" dirty="0"/>
-              <a:t>Perhaps a bit surprisingly, a single test can tour the above TR, namely  01012.</a:t>
-            </a:r>
-          </a:p>
-          <a:p>
-            <a:endParaRPr lang="en-US" dirty="0"/>
-          </a:p>
-          <a:p>
-            <a:r>
-              <a:rPr lang="en-US" dirty="0"/>
-              <a:t>Note that PPC is not the same as, nor implies that you must cover each loop  by doing no iteration and at least one iteration, as shown by the above single test-case.</a:t>
-            </a:r>
-          </a:p>
-        </p:txBody>
-      </p:sp>
-      <p:sp>
-        <p:nvSpPr>
-          <p:cNvPr id="45060" name="Slide Number Placeholder 3"/>
+              <a:t>Prime</a:t>
+            </a:r>
+            <a:r>
+              <a:rPr lang="en-US" baseline="0" dirty="0"/>
+              <a:t> paths:</a:t>
+            </a:r>
+            <a:br>
+              <a:rPr lang="en-US" baseline="0" dirty="0"/>
+            </a:br>
+            <a:endParaRPr lang="en-US" baseline="0" dirty="0"/>
+          </a:p>
+          <a:p>
+            <a:r>
+              <a:rPr lang="en-US" baseline="0" dirty="0"/>
+              <a:t>Starting from:</a:t>
+            </a:r>
+          </a:p>
+          <a:p>
+            <a:r>
+              <a:rPr lang="en-US" baseline="0" dirty="0"/>
+              <a:t>0:  [0,,1,0]  [0,1,3]</a:t>
+            </a:r>
+          </a:p>
+          <a:p>
+            <a:r>
+              <a:rPr lang="en-US" baseline="0" dirty="0"/>
+              <a:t>1:  [1,0,1]  [1,0,2,3]</a:t>
+            </a:r>
+          </a:p>
+          <a:p>
+            <a:r>
+              <a:rPr lang="en-US" baseline="0" dirty="0"/>
+              <a:t>2: none</a:t>
+            </a:r>
+          </a:p>
+          <a:p>
+            <a:r>
+              <a:rPr lang="en-US" baseline="0" dirty="0"/>
+              <a:t>3:  none</a:t>
+            </a:r>
+          </a:p>
+        </p:txBody>
+      </p:sp>
+      <p:sp>
+        <p:nvSpPr>
+          <p:cNvPr id="4" name="Slide Number Placeholder 3"/>
           <p:cNvSpPr>
             <a:spLocks noGrp="1"/>
           </p:cNvSpPr>
           <p:nvPr>
-            <p:ph type="sldNum" sz="quarter" idx="5"/>
+            <p:ph type="sldNum" sz="quarter" idx="10"/>
           </p:nvPr>
         </p:nvSpPr>
-        <p:spPr bwMode="auto">
-          <a:noFill/>
-          <a:ln>
-            <a:miter lim="800000"/>
-            <a:headEnd/>
-            <a:tailEnd/>
-          </a:ln>
-        </p:spPr>
-        <p:txBody>
-          <a:bodyPr wrap="square" numCol="1" anchorCtr="0" compatLnSpc="1">
-            <a:prstTxWarp prst="textNoShape">
-              <a:avLst/>
-            </a:prstTxWarp>
-          </a:bodyPr>
+        <p:spPr/>
+        <p:txBody>
+          <a:bodyPr/>
           <a:lstStyle/>
           <a:p>
-            <a:fld id="{E3B461F1-450E-495C-9012-1239B066433C}" type="slidenum">
-              <a:rPr lang="en-US" smtClean="0">
-                <a:latin typeface="Arial" charset="0"/>
-                <a:cs typeface="Arial" charset="0"/>
-              </a:rPr>
-              <a:pPr/>
-              <a:t>30</a:t>
+            <a:pPr>
+              <a:defRPr/>
+            </a:pPr>
+            <a:fld id="{5B90836E-2851-478D-B8E0-4CBCFBE2CBFD}" type="slidenum">
+              <a:rPr lang="en-US" smtClean="0"/>
+              <a:pPr>
+                <a:defRPr/>
+              </a:pPr>
+              <a:t>31</a:t>
             </a:fld>
-            <a:endParaRPr lang="en-US">
-              <a:latin typeface="Arial" charset="0"/>
-              <a:cs typeface="Arial" charset="0"/>
-            </a:endParaRPr>
+            <a:endParaRPr lang="en-US"/>
           </a:p>
         </p:txBody>
       </p:sp>
     </p:spTree>
     <p:extLst>
       <p:ext uri="{BB962C8B-B14F-4D97-AF65-F5344CB8AC3E}">
-        <p14:creationId xmlns:p14="http://schemas.microsoft.com/office/powerpoint/2010/main" val="1866558959"/>
+        <p14:creationId xmlns:p14="http://schemas.microsoft.com/office/powerpoint/2010/main" val="1132626587"/>
       </p:ext>
     </p:extLst>
   </p:cSld>
@@ -2006,7 +1971,7 @@
       </p:grpSpPr>
       <p:sp>
         <p:nvSpPr>
-          <p:cNvPr id="47106" name="Slide Image Placeholder 1"/>
+          <p:cNvPr id="45058" name="Slide Image Placeholder 1"/>
           <p:cNvSpPr>
             <a:spLocks noGrp="1" noRot="1" noChangeAspect="1" noTextEdit="1"/>
           </p:cNvSpPr>
@@ -2028,7 +1993,7 @@
       </p:sp>
       <p:sp>
         <p:nvSpPr>
-          <p:cNvPr id="3" name="Notes Placeholder 2"/>
+          <p:cNvPr id="45059" name="Notes Placeholder 2"/>
           <p:cNvSpPr>
             <a:spLocks noGrp="1"/>
           </p:cNvSpPr>
@@ -2036,57 +2001,36 @@
             <p:ph type="body" idx="1"/>
           </p:nvPr>
         </p:nvSpPr>
-        <p:spPr/>
-        <p:txBody>
-          <a:bodyPr/>
+        <p:spPr bwMode="auto">
+          <a:noFill/>
+        </p:spPr>
+        <p:txBody>
+          <a:bodyPr wrap="square" numCol="1" anchor="t" anchorCtr="0" compatLnSpc="1">
+            <a:prstTxWarp prst="textNoShape">
+              <a:avLst/>
+            </a:prstTxWarp>
+          </a:bodyPr>
           <a:lstStyle/>
           <a:p>
-            <a:pPr>
-              <a:defRPr/>
-            </a:pPr>
             <a:r>
               <a:rPr lang="en-US" dirty="0"/>
-              <a:t>A simple path s cannot be extended at the end-side to s++[v]  if one of these happen:</a:t>
-            </a:r>
-          </a:p>
-          <a:p>
-            <a:pPr marL="228600" indent="-228600">
-              <a:buFontTx/>
-              <a:buAutoNum type="arabicParenBoth"/>
-              <a:defRPr/>
-            </a:pPr>
+              <a:t>Perhaps a bit surprisingly, a single test can tour the above TR, namely  01012.</a:t>
+            </a:r>
+          </a:p>
+          <a:p>
+            <a:endParaRPr lang="en-US" dirty="0"/>
+          </a:p>
+          <a:p>
             <a:r>
               <a:rPr lang="en-US" dirty="0"/>
-              <a:t>the last node of s is already a terminal node</a:t>
-            </a:r>
-          </a:p>
-          <a:p>
-            <a:pPr marL="228600" indent="-228600">
-              <a:buFontTx/>
-              <a:buAutoNum type="arabicParenBoth"/>
-              <a:defRPr/>
-            </a:pPr>
-            <a:r>
-              <a:rPr lang="en-US" dirty="0"/>
-              <a:t>s++[v] is not a simple path because it cycles into the middle of s</a:t>
-            </a:r>
-          </a:p>
-          <a:p>
-            <a:pPr marL="228600" indent="-228600">
-              <a:buFontTx/>
-              <a:buAutoNum type="arabicParenBoth"/>
-              <a:defRPr/>
-            </a:pPr>
-            <a:r>
-              <a:rPr lang="en-US" dirty="0"/>
-              <a:t>s is already a cycle</a:t>
-            </a:r>
-          </a:p>
-        </p:txBody>
-      </p:sp>
-      <p:sp>
-        <p:nvSpPr>
-          <p:cNvPr id="47108" name="Slide Number Placeholder 3"/>
+              <a:t>Note that PPC is not the same as, nor implies that you must cover each loop  by doing no iteration and at least one iteration, as shown by the above single test-case.</a:t>
+            </a:r>
+          </a:p>
+        </p:txBody>
+      </p:sp>
+      <p:sp>
+        <p:nvSpPr>
+          <p:cNvPr id="45060" name="Slide Number Placeholder 3"/>
           <p:cNvSpPr>
             <a:spLocks noGrp="1"/>
           </p:cNvSpPr>
@@ -2110,13 +2054,13 @@
           </a:bodyPr>
           <a:lstStyle/>
           <a:p>
-            <a:fld id="{5FA92A6E-13EA-4910-BE0D-B15803590F62}" type="slidenum">
+            <a:fld id="{E3B461F1-450E-495C-9012-1239B066433C}" type="slidenum">
               <a:rPr lang="en-US" smtClean="0">
                 <a:latin typeface="Arial" charset="0"/>
                 <a:cs typeface="Arial" charset="0"/>
               </a:rPr>
               <a:pPr/>
-              <a:t>31</a:t>
+              <a:t>32</a:t>
             </a:fld>
             <a:endParaRPr lang="en-US">
               <a:latin typeface="Arial" charset="0"/>
@@ -2128,7 +2072,7 @@
     </p:spTree>
     <p:extLst>
       <p:ext uri="{BB962C8B-B14F-4D97-AF65-F5344CB8AC3E}">
-        <p14:creationId xmlns:p14="http://schemas.microsoft.com/office/powerpoint/2010/main" val="2138567598"/>
+        <p14:creationId xmlns:p14="http://schemas.microsoft.com/office/powerpoint/2010/main" val="1866558959"/>
       </p:ext>
     </p:extLst>
   </p:cSld>
@@ -2157,7 +2101,7 @@
       </p:grpSpPr>
       <p:sp>
         <p:nvSpPr>
-          <p:cNvPr id="46082" name="Slide Image Placeholder 1"/>
+          <p:cNvPr id="47106" name="Slide Image Placeholder 1"/>
           <p:cNvSpPr>
             <a:spLocks noGrp="1" noRot="1" noChangeAspect="1" noTextEdit="1"/>
           </p:cNvSpPr>
@@ -2179,7 +2123,7 @@
       </p:sp>
       <p:sp>
         <p:nvSpPr>
-          <p:cNvPr id="46083" name="Notes Placeholder 2"/>
+          <p:cNvPr id="3" name="Notes Placeholder 2"/>
           <p:cNvSpPr>
             <a:spLocks noGrp="1"/>
           </p:cNvSpPr>
@@ -2187,39 +2131,57 @@
             <p:ph type="body" idx="1"/>
           </p:nvPr>
         </p:nvSpPr>
-        <p:spPr bwMode="auto">
-          <a:noFill/>
-        </p:spPr>
-        <p:txBody>
-          <a:bodyPr wrap="square" numCol="1" anchor="t" anchorCtr="0" compatLnSpc="1">
-            <a:prstTxWarp prst="textNoShape">
-              <a:avLst/>
-            </a:prstTxWarp>
-          </a:bodyPr>
+        <p:spPr/>
+        <p:txBody>
+          <a:bodyPr/>
           <a:lstStyle/>
           <a:p>
-            <a:r>
-              <a:rPr lang="en-US"/>
-              <a:t>The length of any simple path is bounded by N, where N is the number of nodes in G. </a:t>
-            </a:r>
+            <a:pPr>
+              <a:defRPr/>
+            </a:pPr>
             <a:r>
               <a:rPr lang="en-US" dirty="0"/>
-              <a:t>Since a prime path is also a simple </a:t>
-            </a:r>
-            <a:r>
-              <a:rPr lang="en-US" dirty="0" err="1"/>
-              <a:t>parth</a:t>
-            </a:r>
+              <a:t>A simple path s cannot be extended at the end-side to s++[v]  if one of these happen:</a:t>
+            </a:r>
+          </a:p>
+          <a:p>
+            <a:pPr marL="228600" indent="-228600">
+              <a:buFontTx/>
+              <a:buAutoNum type="arabicParenBoth"/>
+              <a:defRPr/>
+            </a:pPr>
             <a:r>
               <a:rPr lang="en-US" dirty="0"/>
-              <a:t>, it follows that the number of prime paths is finite, so they can be systematically computed.</a:t>
-            </a:r>
-          </a:p>
-        </p:txBody>
-      </p:sp>
-      <p:sp>
-        <p:nvSpPr>
-          <p:cNvPr id="46084" name="Slide Number Placeholder 3"/>
+              <a:t>the last node of s is already a terminal node</a:t>
+            </a:r>
+          </a:p>
+          <a:p>
+            <a:pPr marL="228600" indent="-228600">
+              <a:buFontTx/>
+              <a:buAutoNum type="arabicParenBoth"/>
+              <a:defRPr/>
+            </a:pPr>
+            <a:r>
+              <a:rPr lang="en-US" dirty="0"/>
+              <a:t>s++[v] is not a simple path because it cycles into the middle of s</a:t>
+            </a:r>
+          </a:p>
+          <a:p>
+            <a:pPr marL="228600" indent="-228600">
+              <a:buFontTx/>
+              <a:buAutoNum type="arabicParenBoth"/>
+              <a:defRPr/>
+            </a:pPr>
+            <a:r>
+              <a:rPr lang="en-US" dirty="0"/>
+              <a:t>s is already a cycle</a:t>
+            </a:r>
+          </a:p>
+        </p:txBody>
+      </p:sp>
+      <p:sp>
+        <p:nvSpPr>
+          <p:cNvPr id="47108" name="Slide Number Placeholder 3"/>
           <p:cNvSpPr>
             <a:spLocks noGrp="1"/>
           </p:cNvSpPr>
@@ -2243,13 +2205,13 @@
           </a:bodyPr>
           <a:lstStyle/>
           <a:p>
-            <a:fld id="{D00ACAE5-8472-42D2-ABC4-ED6745FF8213}" type="slidenum">
+            <a:fld id="{5FA92A6E-13EA-4910-BE0D-B15803590F62}" type="slidenum">
               <a:rPr lang="en-US" smtClean="0">
                 <a:latin typeface="Arial" charset="0"/>
                 <a:cs typeface="Arial" charset="0"/>
               </a:rPr>
               <a:pPr/>
-              <a:t>32</a:t>
+              <a:t>33</a:t>
             </a:fld>
             <a:endParaRPr lang="en-US">
               <a:latin typeface="Arial" charset="0"/>
@@ -2261,7 +2223,7 @@
     </p:spTree>
     <p:extLst>
       <p:ext uri="{BB962C8B-B14F-4D97-AF65-F5344CB8AC3E}">
-        <p14:creationId xmlns:p14="http://schemas.microsoft.com/office/powerpoint/2010/main" val="815308537"/>
+        <p14:creationId xmlns:p14="http://schemas.microsoft.com/office/powerpoint/2010/main" val="2138567598"/>
       </p:ext>
     </p:extLst>
   </p:cSld>
@@ -2290,7 +2252,7 @@
       </p:grpSpPr>
       <p:sp>
         <p:nvSpPr>
-          <p:cNvPr id="47106" name="Slide Image Placeholder 1"/>
+          <p:cNvPr id="46082" name="Slide Image Placeholder 1"/>
           <p:cNvSpPr>
             <a:spLocks noGrp="1" noRot="1" noChangeAspect="1" noTextEdit="1"/>
           </p:cNvSpPr>
@@ -2312,7 +2274,7 @@
       </p:sp>
       <p:sp>
         <p:nvSpPr>
-          <p:cNvPr id="3" name="Notes Placeholder 2"/>
+          <p:cNvPr id="46083" name="Notes Placeholder 2"/>
           <p:cNvSpPr>
             <a:spLocks noGrp="1"/>
           </p:cNvSpPr>
@@ -2320,57 +2282,39 @@
             <p:ph type="body" idx="1"/>
           </p:nvPr>
         </p:nvSpPr>
-        <p:spPr/>
-        <p:txBody>
-          <a:bodyPr/>
+        <p:spPr bwMode="auto">
+          <a:noFill/>
+        </p:spPr>
+        <p:txBody>
+          <a:bodyPr wrap="square" numCol="1" anchor="t" anchorCtr="0" compatLnSpc="1">
+            <a:prstTxWarp prst="textNoShape">
+              <a:avLst/>
+            </a:prstTxWarp>
+          </a:bodyPr>
           <a:lstStyle/>
           <a:p>
-            <a:pPr>
-              <a:defRPr/>
-            </a:pPr>
+            <a:r>
+              <a:rPr lang="en-US"/>
+              <a:t>The length of any simple path is bounded by N, where N is the number of nodes in G. </a:t>
+            </a:r>
             <a:r>
               <a:rPr lang="en-US" dirty="0"/>
-              <a:t>A simple path s cannot be extended at the end-side to s++[v]  if one of these happen:</a:t>
-            </a:r>
-          </a:p>
-          <a:p>
-            <a:pPr marL="228600" indent="-228600">
-              <a:buFontTx/>
-              <a:buAutoNum type="arabicParenBoth"/>
-              <a:defRPr/>
-            </a:pPr>
+              <a:t>Since a prime path is also a simple </a:t>
+            </a:r>
+            <a:r>
+              <a:rPr lang="en-US" dirty="0" err="1"/>
+              <a:t>parth</a:t>
+            </a:r>
             <a:r>
               <a:rPr lang="en-US" dirty="0"/>
-              <a:t>the last node of s is already a terminal node</a:t>
-            </a:r>
-          </a:p>
-          <a:p>
-            <a:pPr marL="228600" indent="-228600">
-              <a:buFontTx/>
-              <a:buAutoNum type="arabicParenBoth"/>
-              <a:defRPr/>
-            </a:pPr>
-            <a:r>
-              <a:rPr lang="en-US" dirty="0"/>
-              <a:t>s++[v] is not a simple path because it cycles into the middle of s</a:t>
-            </a:r>
-          </a:p>
-          <a:p>
-            <a:pPr marL="228600" indent="-228600">
-              <a:buFontTx/>
-              <a:buAutoNum type="arabicParenBoth"/>
-              <a:defRPr/>
-            </a:pPr>
-            <a:r>
-              <a:rPr lang="en-US" dirty="0"/>
-              <a:t>s is already a cycle</a:t>
-            </a:r>
-          </a:p>
-        </p:txBody>
-      </p:sp>
-      <p:sp>
-        <p:nvSpPr>
-          <p:cNvPr id="47108" name="Slide Number Placeholder 3"/>
+              <a:t>, it follows that the number of prime paths is finite, so they can be systematically computed.</a:t>
+            </a:r>
+          </a:p>
+        </p:txBody>
+      </p:sp>
+      <p:sp>
+        <p:nvSpPr>
+          <p:cNvPr id="46084" name="Slide Number Placeholder 3"/>
           <p:cNvSpPr>
             <a:spLocks noGrp="1"/>
           </p:cNvSpPr>
@@ -2394,13 +2338,13 @@
           </a:bodyPr>
           <a:lstStyle/>
           <a:p>
-            <a:fld id="{5FA92A6E-13EA-4910-BE0D-B15803590F62}" type="slidenum">
+            <a:fld id="{D00ACAE5-8472-42D2-ABC4-ED6745FF8213}" type="slidenum">
               <a:rPr lang="en-US" smtClean="0">
                 <a:latin typeface="Arial" charset="0"/>
                 <a:cs typeface="Arial" charset="0"/>
               </a:rPr>
               <a:pPr/>
-              <a:t>33</a:t>
+              <a:t>34</a:t>
             </a:fld>
             <a:endParaRPr lang="en-US">
               <a:latin typeface="Arial" charset="0"/>
@@ -2412,7 +2356,7 @@
     </p:spTree>
     <p:extLst>
       <p:ext uri="{BB962C8B-B14F-4D97-AF65-F5344CB8AC3E}">
-        <p14:creationId xmlns:p14="http://schemas.microsoft.com/office/powerpoint/2010/main" val="1944913499"/>
+        <p14:creationId xmlns:p14="http://schemas.microsoft.com/office/powerpoint/2010/main" val="815308537"/>
       </p:ext>
     </p:extLst>
   </p:cSld>
@@ -2441,15 +2385,25 @@
       </p:grpSpPr>
       <p:sp>
         <p:nvSpPr>
-          <p:cNvPr id="2" name="Slide Image Placeholder 1"/>
+          <p:cNvPr id="47106" name="Slide Image Placeholder 1"/>
           <p:cNvSpPr>
-            <a:spLocks noGrp="1" noRot="1" noChangeAspect="1"/>
+            <a:spLocks noGrp="1" noRot="1" noChangeAspect="1" noTextEdit="1"/>
           </p:cNvSpPr>
           <p:nvPr>
             <p:ph type="sldImg"/>
           </p:nvPr>
         </p:nvSpPr>
-        <p:spPr/>
+        <p:spPr bwMode="auto">
+          <a:noFill/>
+          <a:ln>
+            <a:solidFill>
+              <a:srgbClr val="000000"/>
+            </a:solidFill>
+            <a:miter lim="800000"/>
+            <a:headEnd/>
+            <a:tailEnd/>
+          </a:ln>
+        </p:spPr>
       </p:sp>
       <p:sp>
         <p:nvSpPr>
@@ -2466,13 +2420,52 @@
           <a:bodyPr/>
           <a:lstStyle/>
           <a:p>
-            <a:endParaRPr lang="en-US" dirty="0"/>
-          </a:p>
-        </p:txBody>
-      </p:sp>
-      <p:sp>
-        <p:nvSpPr>
-          <p:cNvPr id="4" name="Slide Number Placeholder 3"/>
+            <a:pPr>
+              <a:defRPr/>
+            </a:pPr>
+            <a:r>
+              <a:rPr lang="en-US" dirty="0"/>
+              <a:t>A simple path s cannot be extended at the end-side to s++[v]  if one of these happen:</a:t>
+            </a:r>
+          </a:p>
+          <a:p>
+            <a:pPr marL="228600" indent="-228600">
+              <a:buFontTx/>
+              <a:buAutoNum type="arabicParenBoth"/>
+              <a:defRPr/>
+            </a:pPr>
+            <a:r>
+              <a:rPr lang="en-US" dirty="0"/>
+              <a:t>the last node of s is already a terminal node</a:t>
+            </a:r>
+          </a:p>
+          <a:p>
+            <a:pPr marL="228600" indent="-228600">
+              <a:buFontTx/>
+              <a:buAutoNum type="arabicParenBoth"/>
+              <a:defRPr/>
+            </a:pPr>
+            <a:r>
+              <a:rPr lang="en-US" dirty="0"/>
+              <a:t>s++[v] is not a simple path because it cycles into the middle of s</a:t>
+            </a:r>
+          </a:p>
+          <a:p>
+            <a:pPr marL="228600" indent="-228600">
+              <a:buFontTx/>
+              <a:buAutoNum type="arabicParenBoth"/>
+              <a:defRPr/>
+            </a:pPr>
+            <a:r>
+              <a:rPr lang="en-US" dirty="0"/>
+              <a:t>s is already a cycle</a:t>
+            </a:r>
+          </a:p>
+        </p:txBody>
+      </p:sp>
+      <p:sp>
+        <p:nvSpPr>
+          <p:cNvPr id="47108" name="Slide Number Placeholder 3"/>
           <p:cNvSpPr>
             <a:spLocks noGrp="1"/>
           </p:cNvSpPr>
@@ -2480,29 +2473,41 @@
             <p:ph type="sldNum" sz="quarter" idx="5"/>
           </p:nvPr>
         </p:nvSpPr>
-        <p:spPr/>
-        <p:txBody>
-          <a:bodyPr/>
+        <p:spPr bwMode="auto">
+          <a:noFill/>
+          <a:ln>
+            <a:miter lim="800000"/>
+            <a:headEnd/>
+            <a:tailEnd/>
+          </a:ln>
+        </p:spPr>
+        <p:txBody>
+          <a:bodyPr wrap="square" numCol="1" anchorCtr="0" compatLnSpc="1">
+            <a:prstTxWarp prst="textNoShape">
+              <a:avLst/>
+            </a:prstTxWarp>
+          </a:bodyPr>
           <a:lstStyle/>
           <a:p>
-            <a:pPr>
-              <a:defRPr/>
-            </a:pPr>
-            <a:fld id="{5B90836E-2851-478D-B8E0-4CBCFBE2CBFD}" type="slidenum">
-              <a:rPr lang="en-US" smtClean="0"/>
-              <a:pPr>
-                <a:defRPr/>
-              </a:pPr>
-              <a:t>34</a:t>
+            <a:fld id="{5FA92A6E-13EA-4910-BE0D-B15803590F62}" type="slidenum">
+              <a:rPr lang="en-US" smtClean="0">
+                <a:latin typeface="Arial" charset="0"/>
+                <a:cs typeface="Arial" charset="0"/>
+              </a:rPr>
+              <a:pPr/>
+              <a:t>35</a:t>
             </a:fld>
-            <a:endParaRPr lang="en-US"/>
+            <a:endParaRPr lang="en-US">
+              <a:latin typeface="Arial" charset="0"/>
+              <a:cs typeface="Arial" charset="0"/>
+            </a:endParaRPr>
           </a:p>
         </p:txBody>
       </p:sp>
     </p:spTree>
     <p:extLst>
       <p:ext uri="{BB962C8B-B14F-4D97-AF65-F5344CB8AC3E}">
-        <p14:creationId xmlns:p14="http://schemas.microsoft.com/office/powerpoint/2010/main" val="128857185"/>
+        <p14:creationId xmlns:p14="http://schemas.microsoft.com/office/powerpoint/2010/main" val="1944913499"/>
       </p:ext>
     </p:extLst>
   </p:cSld>
@@ -2531,29 +2536,19 @@
       </p:grpSpPr>
       <p:sp>
         <p:nvSpPr>
-          <p:cNvPr id="48130" name="Slide Image Placeholder 1"/>
+          <p:cNvPr id="2" name="Slide Image Placeholder 1"/>
           <p:cNvSpPr>
-            <a:spLocks noGrp="1" noRot="1" noChangeAspect="1" noTextEdit="1"/>
+            <a:spLocks noGrp="1" noRot="1" noChangeAspect="1"/>
           </p:cNvSpPr>
           <p:nvPr>
             <p:ph type="sldImg"/>
           </p:nvPr>
         </p:nvSpPr>
-        <p:spPr bwMode="auto">
-          <a:noFill/>
-          <a:ln>
-            <a:solidFill>
-              <a:srgbClr val="000000"/>
-            </a:solidFill>
-            <a:miter lim="800000"/>
-            <a:headEnd/>
-            <a:tailEnd/>
-          </a:ln>
-        </p:spPr>
-      </p:sp>
-      <p:sp>
-        <p:nvSpPr>
-          <p:cNvPr id="48131" name="Notes Placeholder 2"/>
+        <p:spPr/>
+      </p:sp>
+      <p:sp>
+        <p:nvSpPr>
+          <p:cNvPr id="3" name="Notes Placeholder 2"/>
           <p:cNvSpPr>
             <a:spLocks noGrp="1"/>
           </p:cNvSpPr>
@@ -2561,55 +2556,18 @@
             <p:ph type="body" idx="1"/>
           </p:nvPr>
         </p:nvSpPr>
-        <p:spPr bwMode="auto">
-          <a:noFill/>
-        </p:spPr>
-        <p:txBody>
-          <a:bodyPr wrap="square" numCol="1" anchor="t" anchorCtr="0" compatLnSpc="1">
-            <a:prstTxWarp prst="textNoShape">
-              <a:avLst/>
-            </a:prstTxWarp>
-          </a:bodyPr>
+        <p:spPr/>
+        <p:txBody>
+          <a:bodyPr/>
           <a:lstStyle/>
           <a:p>
-            <a:r>
-              <a:rPr lang="en-US"/>
-              <a:t>First line may throw file-not-exists exception</a:t>
-            </a:r>
-          </a:p>
-          <a:p>
-            <a:r>
-              <a:rPr lang="en-US"/>
-              <a:t>2</a:t>
-            </a:r>
-            <a:r>
-              <a:rPr lang="en-US" baseline="30000"/>
-              <a:t>nd</a:t>
-            </a:r>
-            <a:r>
-              <a:rPr lang="en-US"/>
-              <a:t> line may throw an exception if the file does not contain an int</a:t>
-            </a:r>
-          </a:p>
-          <a:p>
-            <a:r>
-              <a:rPr lang="en-US"/>
-              <a:t>3</a:t>
-            </a:r>
-            <a:r>
-              <a:rPr lang="en-US" baseline="30000"/>
-              <a:t>rd</a:t>
-            </a:r>
-            <a:r>
-              <a:rPr lang="en-US"/>
-              <a:t> line throws an exception if x is 0</a:t>
-            </a:r>
-          </a:p>
-        </p:txBody>
-      </p:sp>
-      <p:sp>
-        <p:nvSpPr>
-          <p:cNvPr id="48132" name="Slide Number Placeholder 3"/>
+            <a:endParaRPr lang="en-US" dirty="0"/>
+          </a:p>
+        </p:txBody>
+      </p:sp>
+      <p:sp>
+        <p:nvSpPr>
+          <p:cNvPr id="4" name="Slide Number Placeholder 3"/>
           <p:cNvSpPr>
             <a:spLocks noGrp="1"/>
           </p:cNvSpPr>
@@ -2617,41 +2575,29 @@
             <p:ph type="sldNum" sz="quarter" idx="5"/>
           </p:nvPr>
         </p:nvSpPr>
-        <p:spPr bwMode="auto">
-          <a:noFill/>
-          <a:ln>
-            <a:miter lim="800000"/>
-            <a:headEnd/>
-            <a:tailEnd/>
-          </a:ln>
-        </p:spPr>
-        <p:txBody>
-          <a:bodyPr wrap="square" numCol="1" anchorCtr="0" compatLnSpc="1">
-            <a:prstTxWarp prst="textNoShape">
-              <a:avLst/>
-            </a:prstTxWarp>
-          </a:bodyPr>
+        <p:spPr/>
+        <p:txBody>
+          <a:bodyPr/>
           <a:lstStyle/>
           <a:p>
-            <a:fld id="{A0865316-948F-4C3D-B72C-098DB267E9E4}" type="slidenum">
-              <a:rPr lang="en-US" smtClean="0">
-                <a:latin typeface="Arial" charset="0"/>
-                <a:cs typeface="Arial" charset="0"/>
-              </a:rPr>
-              <a:pPr/>
-              <a:t>41</a:t>
+            <a:pPr>
+              <a:defRPr/>
+            </a:pPr>
+            <a:fld id="{5B90836E-2851-478D-B8E0-4CBCFBE2CBFD}" type="slidenum">
+              <a:rPr lang="en-US" smtClean="0"/>
+              <a:pPr>
+                <a:defRPr/>
+              </a:pPr>
+              <a:t>36</a:t>
             </a:fld>
-            <a:endParaRPr lang="en-US">
-              <a:latin typeface="Arial" charset="0"/>
-              <a:cs typeface="Arial" charset="0"/>
-            </a:endParaRPr>
+            <a:endParaRPr lang="en-US"/>
           </a:p>
         </p:txBody>
       </p:sp>
     </p:spTree>
     <p:extLst>
       <p:ext uri="{BB962C8B-B14F-4D97-AF65-F5344CB8AC3E}">
-        <p14:creationId xmlns:p14="http://schemas.microsoft.com/office/powerpoint/2010/main" val="1312586706"/>
+        <p14:creationId xmlns:p14="http://schemas.microsoft.com/office/powerpoint/2010/main" val="128857185"/>
       </p:ext>
     </p:extLst>
   </p:cSld>
@@ -2680,19 +2626,29 @@
       </p:grpSpPr>
       <p:sp>
         <p:nvSpPr>
-          <p:cNvPr id="2" name="Slide Image Placeholder 1"/>
+          <p:cNvPr id="48130" name="Slide Image Placeholder 1"/>
           <p:cNvSpPr>
-            <a:spLocks noGrp="1" noRot="1" noChangeAspect="1"/>
+            <a:spLocks noGrp="1" noRot="1" noChangeAspect="1" noTextEdit="1"/>
           </p:cNvSpPr>
           <p:nvPr>
             <p:ph type="sldImg"/>
           </p:nvPr>
         </p:nvSpPr>
-        <p:spPr/>
-      </p:sp>
-      <p:sp>
-        <p:nvSpPr>
-          <p:cNvPr id="3" name="Notes Placeholder 2"/>
+        <p:spPr bwMode="auto">
+          <a:noFill/>
+          <a:ln>
+            <a:solidFill>
+              <a:srgbClr val="000000"/>
+            </a:solidFill>
+            <a:miter lim="800000"/>
+            <a:headEnd/>
+            <a:tailEnd/>
+          </a:ln>
+        </p:spPr>
+      </p:sp>
+      <p:sp>
+        <p:nvSpPr>
+          <p:cNvPr id="48131" name="Notes Placeholder 2"/>
           <p:cNvSpPr>
             <a:spLocks noGrp="1"/>
           </p:cNvSpPr>
@@ -2700,48 +2656,97 @@
             <p:ph type="body" idx="1"/>
           </p:nvPr>
         </p:nvSpPr>
-        <p:spPr/>
-        <p:txBody>
-          <a:bodyPr/>
+        <p:spPr bwMode="auto">
+          <a:noFill/>
+        </p:spPr>
+        <p:txBody>
+          <a:bodyPr wrap="square" numCol="1" anchor="t" anchorCtr="0" compatLnSpc="1">
+            <a:prstTxWarp prst="textNoShape">
+              <a:avLst/>
+            </a:prstTxWarp>
+          </a:bodyPr>
           <a:lstStyle/>
           <a:p>
-            <a:endParaRPr lang="en-US" dirty="0"/>
-          </a:p>
-        </p:txBody>
-      </p:sp>
-      <p:sp>
-        <p:nvSpPr>
-          <p:cNvPr id="4" name="Slide Number Placeholder 3"/>
+            <a:r>
+              <a:rPr lang="en-US"/>
+              <a:t>First line may throw file-not-exists exception</a:t>
+            </a:r>
+          </a:p>
+          <a:p>
+            <a:r>
+              <a:rPr lang="en-US"/>
+              <a:t>2</a:t>
+            </a:r>
+            <a:r>
+              <a:rPr lang="en-US" baseline="30000"/>
+              <a:t>nd</a:t>
+            </a:r>
+            <a:r>
+              <a:rPr lang="en-US"/>
+              <a:t> line may throw an exception if the file does not contain an int</a:t>
+            </a:r>
+          </a:p>
+          <a:p>
+            <a:r>
+              <a:rPr lang="en-US"/>
+              <a:t>3</a:t>
+            </a:r>
+            <a:r>
+              <a:rPr lang="en-US" baseline="30000"/>
+              <a:t>rd</a:t>
+            </a:r>
+            <a:r>
+              <a:rPr lang="en-US"/>
+              <a:t> line throws an exception if x is 0</a:t>
+            </a:r>
+          </a:p>
+        </p:txBody>
+      </p:sp>
+      <p:sp>
+        <p:nvSpPr>
+          <p:cNvPr id="48132" name="Slide Number Placeholder 3"/>
           <p:cNvSpPr>
             <a:spLocks noGrp="1"/>
           </p:cNvSpPr>
           <p:nvPr>
-            <p:ph type="sldNum" sz="quarter" idx="10"/>
+            <p:ph type="sldNum" sz="quarter" idx="5"/>
           </p:nvPr>
         </p:nvSpPr>
-        <p:spPr/>
-        <p:txBody>
-          <a:bodyPr/>
+        <p:spPr bwMode="auto">
+          <a:noFill/>
+          <a:ln>
+            <a:miter lim="800000"/>
+            <a:headEnd/>
+            <a:tailEnd/>
+          </a:ln>
+        </p:spPr>
+        <p:txBody>
+          <a:bodyPr wrap="square" numCol="1" anchorCtr="0" compatLnSpc="1">
+            <a:prstTxWarp prst="textNoShape">
+              <a:avLst/>
+            </a:prstTxWarp>
+          </a:bodyPr>
           <a:lstStyle/>
           <a:p>
-            <a:pPr>
-              <a:defRPr/>
-            </a:pPr>
-            <a:fld id="{5B90836E-2851-478D-B8E0-4CBCFBE2CBFD}" type="slidenum">
-              <a:rPr lang="en-US" smtClean="0"/>
-              <a:pPr>
-                <a:defRPr/>
-              </a:pPr>
-              <a:t>42</a:t>
+            <a:fld id="{A0865316-948F-4C3D-B72C-098DB267E9E4}" type="slidenum">
+              <a:rPr lang="en-US" smtClean="0">
+                <a:latin typeface="Arial" charset="0"/>
+                <a:cs typeface="Arial" charset="0"/>
+              </a:rPr>
+              <a:pPr/>
+              <a:t>43</a:t>
             </a:fld>
-            <a:endParaRPr lang="en-US"/>
+            <a:endParaRPr lang="en-US">
+              <a:latin typeface="Arial" charset="0"/>
+              <a:cs typeface="Arial" charset="0"/>
+            </a:endParaRPr>
           </a:p>
         </p:txBody>
       </p:sp>
     </p:spTree>
     <p:extLst>
       <p:ext uri="{BB962C8B-B14F-4D97-AF65-F5344CB8AC3E}">
-        <p14:creationId xmlns:p14="http://schemas.microsoft.com/office/powerpoint/2010/main" val="2029439400"/>
+        <p14:creationId xmlns:p14="http://schemas.microsoft.com/office/powerpoint/2010/main" val="1312586706"/>
       </p:ext>
     </p:extLst>
   </p:cSld>
@@ -2795,10 +2800,7 @@
           <a:bodyPr/>
           <a:lstStyle/>
           <a:p>
-            <a:r>
-              <a:rPr lang="en-US" dirty="0"/>
-              <a:t>This is getting complicated. You need a stack to keep track where to return.</a:t>
-            </a:r>
+            <a:endParaRPr lang="en-US" dirty="0"/>
           </a:p>
         </p:txBody>
       </p:sp>
@@ -2809,7 +2811,7 @@
             <a:spLocks noGrp="1"/>
           </p:cNvSpPr>
           <p:nvPr>
-            <p:ph type="sldNum" sz="quarter" idx="5"/>
+            <p:ph type="sldNum" sz="quarter" idx="10"/>
           </p:nvPr>
         </p:nvSpPr>
         <p:spPr/>
@@ -2826,6 +2828,99 @@
                 <a:defRPr/>
               </a:pPr>
               <a:t>44</a:t>
+            </a:fld>
+            <a:endParaRPr lang="en-US"/>
+          </a:p>
+        </p:txBody>
+      </p:sp>
+    </p:spTree>
+    <p:extLst>
+      <p:ext uri="{BB962C8B-B14F-4D97-AF65-F5344CB8AC3E}">
+        <p14:creationId xmlns:p14="http://schemas.microsoft.com/office/powerpoint/2010/main" val="2029439400"/>
+      </p:ext>
+    </p:extLst>
+  </p:cSld>
+  <p:clrMapOvr>
+    <a:masterClrMapping/>
+  </p:clrMapOvr>
+</p:notes>
+</file>
+
+<file path=ppt/notesSlides/notesSlide28.xml><?xml version="1.0" encoding="utf-8"?>
+<p:notes xmlns:a="http://schemas.openxmlformats.org/drawingml/2006/main" xmlns:r="http://schemas.openxmlformats.org/officeDocument/2006/relationships" xmlns:p="http://schemas.openxmlformats.org/presentationml/2006/main">
+  <p:cSld>
+    <p:spTree>
+      <p:nvGrpSpPr>
+        <p:cNvPr id="1" name=""/>
+        <p:cNvGrpSpPr/>
+        <p:nvPr/>
+      </p:nvGrpSpPr>
+      <p:grpSpPr>
+        <a:xfrm>
+          <a:off x="0" y="0"/>
+          <a:ext cx="0" cy="0"/>
+          <a:chOff x="0" y="0"/>
+          <a:chExt cx="0" cy="0"/>
+        </a:xfrm>
+      </p:grpSpPr>
+      <p:sp>
+        <p:nvSpPr>
+          <p:cNvPr id="2" name="Slide Image Placeholder 1"/>
+          <p:cNvSpPr>
+            <a:spLocks noGrp="1" noRot="1" noChangeAspect="1"/>
+          </p:cNvSpPr>
+          <p:nvPr>
+            <p:ph type="sldImg"/>
+          </p:nvPr>
+        </p:nvSpPr>
+        <p:spPr/>
+      </p:sp>
+      <p:sp>
+        <p:nvSpPr>
+          <p:cNvPr id="3" name="Notes Placeholder 2"/>
+          <p:cNvSpPr>
+            <a:spLocks noGrp="1"/>
+          </p:cNvSpPr>
+          <p:nvPr>
+            <p:ph type="body" idx="1"/>
+          </p:nvPr>
+        </p:nvSpPr>
+        <p:spPr/>
+        <p:txBody>
+          <a:bodyPr/>
+          <a:lstStyle/>
+          <a:p>
+            <a:r>
+              <a:rPr lang="en-US" dirty="0"/>
+              <a:t>This is getting complicated. You need a stack to keep track where to return.</a:t>
+            </a:r>
+          </a:p>
+        </p:txBody>
+      </p:sp>
+      <p:sp>
+        <p:nvSpPr>
+          <p:cNvPr id="4" name="Slide Number Placeholder 3"/>
+          <p:cNvSpPr>
+            <a:spLocks noGrp="1"/>
+          </p:cNvSpPr>
+          <p:nvPr>
+            <p:ph type="sldNum" sz="quarter" idx="5"/>
+          </p:nvPr>
+        </p:nvSpPr>
+        <p:spPr/>
+        <p:txBody>
+          <a:bodyPr/>
+          <a:lstStyle/>
+          <a:p>
+            <a:pPr>
+              <a:defRPr/>
+            </a:pPr>
+            <a:fld id="{5B90836E-2851-478D-B8E0-4CBCFBE2CBFD}" type="slidenum">
+              <a:rPr lang="en-US" smtClean="0"/>
+              <a:pPr>
+                <a:defRPr/>
+              </a:pPr>
+              <a:t>46</a:t>
             </a:fld>
             <a:endParaRPr lang="en-US"/>
           </a:p>
@@ -3786,7 +3881,7 @@
               <a:pPr>
                 <a:defRPr/>
               </a:pPr>
-              <a:t>28-04-2025</a:t>
+              <a:t>11-04-2026</a:t>
             </a:fld>
             <a:endParaRPr lang="en-US"/>
           </a:p>
@@ -3976,7 +4071,7 @@
               <a:pPr>
                 <a:defRPr/>
               </a:pPr>
-              <a:t>28-04-2025</a:t>
+              <a:t>11-04-2026</a:t>
             </a:fld>
             <a:endParaRPr lang="en-US"/>
           </a:p>
@@ -4176,7 +4271,7 @@
               <a:pPr>
                 <a:defRPr/>
               </a:pPr>
-              <a:t>28-04-2025</a:t>
+              <a:t>11-04-2026</a:t>
             </a:fld>
             <a:endParaRPr lang="en-US"/>
           </a:p>
@@ -4372,7 +4467,7 @@
               <a:pPr>
                 <a:defRPr/>
               </a:pPr>
-              <a:t>28-04-2025</a:t>
+              <a:t>11-04-2026</a:t>
             </a:fld>
             <a:endParaRPr lang="en-US"/>
           </a:p>
@@ -4639,7 +4734,7 @@
               <a:pPr>
                 <a:defRPr/>
               </a:pPr>
-              <a:t>28-04-2025</a:t>
+              <a:t>11-04-2026</a:t>
             </a:fld>
             <a:endParaRPr lang="en-US"/>
           </a:p>
@@ -4946,7 +5041,7 @@
               <a:pPr>
                 <a:defRPr/>
               </a:pPr>
-              <a:t>28-04-2025</a:t>
+              <a:t>11-04-2026</a:t>
             </a:fld>
             <a:endParaRPr lang="en-US"/>
           </a:p>
@@ -5387,7 +5482,7 @@
               <a:pPr>
                 <a:defRPr/>
               </a:pPr>
-              <a:t>28-04-2025</a:t>
+              <a:t>11-04-2026</a:t>
             </a:fld>
             <a:endParaRPr lang="en-US"/>
           </a:p>
@@ -5532,7 +5627,7 @@
               <a:pPr>
                 <a:defRPr/>
               </a:pPr>
-              <a:t>28-04-2025</a:t>
+              <a:t>11-04-2026</a:t>
             </a:fld>
             <a:endParaRPr lang="en-US"/>
           </a:p>
@@ -5649,7 +5744,7 @@
               <a:pPr>
                 <a:defRPr/>
               </a:pPr>
-              <a:t>28-04-2025</a:t>
+              <a:t>11-04-2026</a:t>
             </a:fld>
             <a:endParaRPr lang="en-US"/>
           </a:p>
@@ -5946,7 +6041,7 @@
               <a:pPr>
                 <a:defRPr/>
               </a:pPr>
-              <a:t>28-04-2025</a:t>
+              <a:t>11-04-2026</a:t>
             </a:fld>
             <a:endParaRPr lang="en-US"/>
           </a:p>
@@ -6226,7 +6321,7 @@
               <a:pPr>
                 <a:defRPr/>
               </a:pPr>
-              <a:t>28-04-2025</a:t>
+              <a:t>11-04-2026</a:t>
             </a:fld>
             <a:endParaRPr lang="en-US"/>
           </a:p>
@@ -6482,7 +6577,7 @@
               <a:pPr>
                 <a:defRPr/>
               </a:pPr>
-              <a:t>28-04-2025</a:t>
+              <a:t>11-04-2026</a:t>
             </a:fld>
             <a:endParaRPr lang="en-US"/>
           </a:p>
@@ -15333,6 +15428,12 @@
             </a:r>
           </a:p>
           <a:p>
+            <a:r>
+              <a:rPr lang="en-US" dirty="0"/>
+              <a:t>Constructing CFG from code</a:t>
+            </a:r>
+          </a:p>
+          <a:p>
             <a:endParaRPr lang="en-US" dirty="0"/>
           </a:p>
         </p:txBody>
@@ -15844,6 +15945,56 @@
           </a:p>
         </p:txBody>
       </p:sp>
+      <p:sp>
+        <p:nvSpPr>
+          <p:cNvPr id="2" name="Rectangle 1">
+            <a:extLst>
+              <a:ext uri="{FF2B5EF4-FFF2-40B4-BE49-F238E27FC236}">
+                <a16:creationId xmlns:a16="http://schemas.microsoft.com/office/drawing/2014/main" id="{35174DF2-7C02-E03F-58A3-8F15D7F45456}"/>
+              </a:ext>
+            </a:extLst>
+          </p:cNvPr>
+          <p:cNvSpPr/>
+          <p:nvPr/>
+        </p:nvSpPr>
+        <p:spPr>
+          <a:xfrm>
+            <a:off x="4343400" y="3429000"/>
+            <a:ext cx="1308720" cy="360040"/>
+          </a:xfrm>
+          <a:prstGeom prst="rect">
+            <a:avLst/>
+          </a:prstGeom>
+          <a:noFill/>
+          <a:ln>
+            <a:prstDash val="dash"/>
+          </a:ln>
+        </p:spPr>
+        <p:style>
+          <a:lnRef idx="2">
+            <a:schemeClr val="accent1">
+              <a:shade val="50000"/>
+            </a:schemeClr>
+          </a:lnRef>
+          <a:fillRef idx="1">
+            <a:schemeClr val="accent1"/>
+          </a:fillRef>
+          <a:effectRef idx="0">
+            <a:schemeClr val="accent1"/>
+          </a:effectRef>
+          <a:fontRef idx="minor">
+            <a:schemeClr val="lt1"/>
+          </a:fontRef>
+        </p:style>
+        <p:txBody>
+          <a:bodyPr rtlCol="0" anchor="ctr"/>
+          <a:lstStyle/>
+          <a:p>
+            <a:pPr algn="ctr"/>
+            <a:endParaRPr lang="en-NL"/>
+          </a:p>
+        </p:txBody>
+      </p:sp>
     </p:spTree>
     <p:extLst>
       <p:ext uri="{BB962C8B-B14F-4D97-AF65-F5344CB8AC3E}">
@@ -15879,6 +16030,211 @@
           <p:cNvPr id="2" name="Title 1">
             <a:extLst>
               <a:ext uri="{FF2B5EF4-FFF2-40B4-BE49-F238E27FC236}">
+                <a16:creationId xmlns:a16="http://schemas.microsoft.com/office/drawing/2014/main" id="{F22D9BF5-0058-9F0F-A89A-E0F0F8AD12B6}"/>
+              </a:ext>
+            </a:extLst>
+          </p:cNvPr>
+          <p:cNvSpPr>
+            <a:spLocks noGrp="1"/>
+          </p:cNvSpPr>
+          <p:nvPr>
+            <p:ph type="title"/>
+          </p:nvPr>
+        </p:nvSpPr>
+        <p:spPr/>
+        <p:txBody>
+          <a:bodyPr/>
+          <a:lstStyle/>
+          <a:p>
+            <a:r>
+              <a:rPr lang="en-NL" sz="3600" dirty="0"/>
+              <a:t>Connection with program complexity and testing</a:t>
+            </a:r>
+          </a:p>
+        </p:txBody>
+      </p:sp>
+      <p:sp>
+        <p:nvSpPr>
+          <p:cNvPr id="3" name="Content Placeholder 2">
+            <a:extLst>
+              <a:ext uri="{FF2B5EF4-FFF2-40B4-BE49-F238E27FC236}">
+                <a16:creationId xmlns:a16="http://schemas.microsoft.com/office/drawing/2014/main" id="{38991B26-55C6-B967-C161-74E0ADBED81F}"/>
+              </a:ext>
+            </a:extLst>
+          </p:cNvPr>
+          <p:cNvSpPr>
+            <a:spLocks noGrp="1"/>
+          </p:cNvSpPr>
+          <p:nvPr>
+            <p:ph idx="1"/>
+          </p:nvPr>
+        </p:nvSpPr>
+        <p:spPr>
+          <a:xfrm>
+            <a:off x="457200" y="1844824"/>
+            <a:ext cx="8229600" cy="4281339"/>
+          </a:xfrm>
+        </p:spPr>
+        <p:txBody>
+          <a:bodyPr/>
+          <a:lstStyle/>
+          <a:p>
+            <a:pPr marL="0" indent="0" algn="ctr">
+              <a:buNone/>
+            </a:pPr>
+            <a:r>
+              <a:rPr lang="en-NL" sz="2800" dirty="0"/>
+              <a:t>Premise: the circuits (“loops”) are the main source of a program’s complexity. So we should at least test them all.</a:t>
+            </a:r>
+          </a:p>
+          <a:p>
+            <a:pPr marL="0" indent="0">
+              <a:buNone/>
+            </a:pPr>
+            <a:endParaRPr lang="en-NL" sz="2800" dirty="0"/>
+          </a:p>
+          <a:p>
+            <a:r>
+              <a:rPr lang="en-NL" sz="2800" dirty="0"/>
+              <a:t>Linearly independent circuits “corresponds” to ”elementary” loops you have in the program.</a:t>
+            </a:r>
+          </a:p>
+          <a:p>
+            <a:r>
+              <a:rPr lang="en-NL" sz="2800" dirty="0"/>
+              <a:t>Question: what happen with a program without loop?</a:t>
+            </a:r>
+          </a:p>
+        </p:txBody>
+      </p:sp>
+      <p:sp>
+        <p:nvSpPr>
+          <p:cNvPr id="4" name="Slide Number Placeholder 3">
+            <a:extLst>
+              <a:ext uri="{FF2B5EF4-FFF2-40B4-BE49-F238E27FC236}">
+                <a16:creationId xmlns:a16="http://schemas.microsoft.com/office/drawing/2014/main" id="{2DCCC0DA-E9AC-0640-C46C-8F23EC04ABC4}"/>
+              </a:ext>
+            </a:extLst>
+          </p:cNvPr>
+          <p:cNvSpPr>
+            <a:spLocks noGrp="1"/>
+          </p:cNvSpPr>
+          <p:nvPr>
+            <p:ph type="sldNum" sz="quarter" idx="12"/>
+          </p:nvPr>
+        </p:nvSpPr>
+        <p:spPr/>
+        <p:txBody>
+          <a:bodyPr/>
+          <a:lstStyle/>
+          <a:p>
+            <a:pPr>
+              <a:defRPr/>
+            </a:pPr>
+            <a:fld id="{F7C0A3F7-46F3-44CF-95B7-0304031AA6EA}" type="slidenum">
+              <a:rPr lang="en-US" smtClean="0"/>
+              <a:pPr>
+                <a:defRPr/>
+              </a:pPr>
+              <a:t>22</a:t>
+            </a:fld>
+            <a:endParaRPr lang="en-US"/>
+          </a:p>
+        </p:txBody>
+      </p:sp>
+      <p:sp>
+        <p:nvSpPr>
+          <p:cNvPr id="5" name="Rounded Rectangle 4">
+            <a:extLst>
+              <a:ext uri="{FF2B5EF4-FFF2-40B4-BE49-F238E27FC236}">
+                <a16:creationId xmlns:a16="http://schemas.microsoft.com/office/drawing/2014/main" id="{4F5C99A5-57EB-C2B2-98C1-DAA716C5B938}"/>
+              </a:ext>
+            </a:extLst>
+          </p:cNvPr>
+          <p:cNvSpPr/>
+          <p:nvPr/>
+        </p:nvSpPr>
+        <p:spPr>
+          <a:xfrm>
+            <a:off x="367998" y="1772815"/>
+            <a:ext cx="8318802" cy="1436707"/>
+          </a:xfrm>
+          <a:prstGeom prst="roundRect">
+            <a:avLst>
+              <a:gd name="adj" fmla="val 25954"/>
+            </a:avLst>
+          </a:prstGeom>
+          <a:solidFill>
+            <a:srgbClr val="FFC000">
+              <a:alpha val="25000"/>
+            </a:srgbClr>
+          </a:solidFill>
+          <a:ln>
+            <a:solidFill>
+              <a:srgbClr val="FFC000"/>
+            </a:solidFill>
+          </a:ln>
+        </p:spPr>
+        <p:style>
+          <a:lnRef idx="2">
+            <a:schemeClr val="accent1">
+              <a:shade val="50000"/>
+            </a:schemeClr>
+          </a:lnRef>
+          <a:fillRef idx="1">
+            <a:schemeClr val="accent1"/>
+          </a:fillRef>
+          <a:effectRef idx="0">
+            <a:schemeClr val="accent1"/>
+          </a:effectRef>
+          <a:fontRef idx="minor">
+            <a:schemeClr val="lt1"/>
+          </a:fontRef>
+        </p:style>
+        <p:txBody>
+          <a:bodyPr rtlCol="0" anchor="ctr"/>
+          <a:lstStyle/>
+          <a:p>
+            <a:pPr algn="ctr"/>
+            <a:endParaRPr lang="en-US"/>
+          </a:p>
+        </p:txBody>
+      </p:sp>
+    </p:spTree>
+    <p:extLst>
+      <p:ext uri="{BB962C8B-B14F-4D97-AF65-F5344CB8AC3E}">
+        <p14:creationId xmlns:p14="http://schemas.microsoft.com/office/powerpoint/2010/main" val="3986634714"/>
+      </p:ext>
+    </p:extLst>
+  </p:cSld>
+  <p:clrMapOvr>
+    <a:masterClrMapping/>
+  </p:clrMapOvr>
+</p:sld>
+</file>
+
+<file path=ppt/slides/slide23.xml><?xml version="1.0" encoding="utf-8"?>
+<p:sld xmlns:a="http://schemas.openxmlformats.org/drawingml/2006/main" xmlns:r="http://schemas.openxmlformats.org/officeDocument/2006/relationships" xmlns:p="http://schemas.openxmlformats.org/presentationml/2006/main">
+  <p:cSld>
+    <p:spTree>
+      <p:nvGrpSpPr>
+        <p:cNvPr id="1" name=""/>
+        <p:cNvGrpSpPr/>
+        <p:nvPr/>
+      </p:nvGrpSpPr>
+      <p:grpSpPr>
+        <a:xfrm>
+          <a:off x="0" y="0"/>
+          <a:ext cx="0" cy="0"/>
+          <a:chOff x="0" y="0"/>
+          <a:chExt cx="0" cy="0"/>
+        </a:xfrm>
+      </p:grpSpPr>
+      <p:sp>
+        <p:nvSpPr>
+          <p:cNvPr id="2" name="Title 1">
+            <a:extLst>
+              <a:ext uri="{FF2B5EF4-FFF2-40B4-BE49-F238E27FC236}">
                 <a16:creationId xmlns:a16="http://schemas.microsoft.com/office/drawing/2014/main" id="{604F2C54-0A09-BA26-FF22-F9D7948274F8}"/>
               </a:ext>
             </a:extLst>
@@ -15931,7 +16287,7 @@
               <a:pPr>
                 <a:defRPr/>
               </a:pPr>
-              <a:t>22</a:t>
+              <a:t>23</a:t>
             </a:fld>
             <a:endParaRPr lang="en-US"/>
           </a:p>
@@ -16397,7 +16753,7 @@
 </p:sld>
 </file>
 
-<file path=ppt/slides/slide23.xml><?xml version="1.0" encoding="utf-8"?>
+<file path=ppt/slides/slide24.xml><?xml version="1.0" encoding="utf-8"?>
 <p:sld xmlns:a="http://schemas.openxmlformats.org/drawingml/2006/main" xmlns:r="http://schemas.openxmlformats.org/officeDocument/2006/relationships" xmlns:p="http://schemas.openxmlformats.org/presentationml/2006/main">
   <p:cSld>
     <p:spTree>
@@ -16437,7 +16793,7 @@
           <a:p>
             <a:r>
               <a:rPr lang="en-NL" dirty="0"/>
-              <a:t>Some note: circuit vs simple path</a:t>
+              <a:t>linearly (in)dependent circuits</a:t>
             </a:r>
           </a:p>
         </p:txBody>
@@ -16471,7 +16827,7 @@
               <a:pPr>
                 <a:defRPr/>
               </a:pPr>
-              <a:t>23</a:t>
+              <a:t>24</a:t>
             </a:fld>
             <a:endParaRPr lang="en-US"/>
           </a:p>
@@ -16787,97 +17143,6 @@
       </p:cxnSp>
       <p:sp>
         <p:nvSpPr>
-          <p:cNvPr id="20" name="TextBox 19">
-            <a:extLst>
-              <a:ext uri="{FF2B5EF4-FFF2-40B4-BE49-F238E27FC236}">
-                <a16:creationId xmlns:a16="http://schemas.microsoft.com/office/drawing/2014/main" id="{4ABD07C2-B89F-5D77-EF03-EE8E6FC21C1A}"/>
-              </a:ext>
-            </a:extLst>
-          </p:cNvPr>
-          <p:cNvSpPr txBox="1"/>
-          <p:nvPr/>
-        </p:nvSpPr>
-        <p:spPr>
-          <a:xfrm>
-            <a:off x="590872" y="3295408"/>
-            <a:ext cx="8229600" cy="2246769"/>
-          </a:xfrm>
-          <a:prstGeom prst="rect">
-            <a:avLst/>
-          </a:prstGeom>
-          <a:noFill/>
-        </p:spPr>
-        <p:txBody>
-          <a:bodyPr wrap="square" rtlCol="0">
-            <a:spAutoFit/>
-          </a:bodyPr>
-          <a:lstStyle/>
-          <a:p>
-            <a:pPr marL="342900" indent="-342900">
-              <a:buFont typeface="Arial" panose="020B0604020202020204" pitchFamily="34" charset="0"/>
-              <a:buChar char="•"/>
-            </a:pPr>
-            <a:r>
-              <a:rPr lang="en-NL" sz="2000" dirty="0"/>
-              <a:t>A circuit does not pass the same edge twice. </a:t>
-            </a:r>
-          </a:p>
-          <a:p>
-            <a:pPr marL="342900" indent="-342900">
-              <a:buFont typeface="Arial" panose="020B0604020202020204" pitchFamily="34" charset="0"/>
-              <a:buChar char="•"/>
-            </a:pPr>
-            <a:r>
-              <a:rPr lang="en-NL" sz="2000" dirty="0"/>
-              <a:t>A simple path does not pass the same node twice, except the start and end node.</a:t>
-            </a:r>
-          </a:p>
-          <a:p>
-            <a:pPr marL="342900" indent="-342900">
-              <a:buFont typeface="Arial" panose="020B0604020202020204" pitchFamily="34" charset="0"/>
-              <a:buChar char="•"/>
-            </a:pPr>
-            <a:endParaRPr lang="en-NL" sz="2000" dirty="0"/>
-          </a:p>
-          <a:p>
-            <a:pPr marL="342900" indent="-342900">
-              <a:buFont typeface="Arial" panose="020B0604020202020204" pitchFamily="34" charset="0"/>
-              <a:buChar char="•"/>
-            </a:pPr>
-            <a:r>
-              <a:rPr lang="en-NL" sz="2000" dirty="0"/>
-              <a:t>[0,1,2,0] and [0,3,0] are circuits. They are also (cyclic) simple paths.</a:t>
-            </a:r>
-          </a:p>
-          <a:p>
-            <a:pPr marL="342900" indent="-342900">
-              <a:buFont typeface="Arial" panose="020B0604020202020204" pitchFamily="34" charset="0"/>
-              <a:buChar char="•"/>
-            </a:pPr>
-            <a:endParaRPr lang="en-NL" sz="2000" dirty="0"/>
-          </a:p>
-          <a:p>
-            <a:pPr marL="342900" indent="-342900">
-              <a:buFont typeface="Arial" panose="020B0604020202020204" pitchFamily="34" charset="0"/>
-              <a:buChar char="•"/>
-            </a:pPr>
-            <a:r>
-              <a:rPr lang="en-NL" sz="2000" dirty="0"/>
-              <a:t>[0,3,0,1,2,0] is also a circuit, </a:t>
-            </a:r>
-            <a:r>
-              <a:rPr lang="en-NL" sz="2000" b="1" dirty="0"/>
-              <a:t>but</a:t>
-            </a:r>
-            <a:r>
-              <a:rPr lang="en-NL" sz="2000" dirty="0"/>
-              <a:t> not a simple path.</a:t>
-            </a:r>
-          </a:p>
-        </p:txBody>
-      </p:sp>
-      <p:sp>
-        <p:nvSpPr>
           <p:cNvPr id="12" name="Oval 11">
             <a:extLst>
               <a:ext uri="{FF2B5EF4-FFF2-40B4-BE49-F238E27FC236}">
@@ -17026,10 +17291,1127 @@
           </a:fontRef>
         </p:style>
       </p:cxnSp>
+      <p:sp>
+        <p:nvSpPr>
+          <p:cNvPr id="3" name="TextBox 2">
+            <a:extLst>
+              <a:ext uri="{FF2B5EF4-FFF2-40B4-BE49-F238E27FC236}">
+                <a16:creationId xmlns:a16="http://schemas.microsoft.com/office/drawing/2014/main" id="{7E46EC5C-D3A5-1D74-2559-A55550DFBE9D}"/>
+              </a:ext>
+            </a:extLst>
+          </p:cNvPr>
+          <p:cNvSpPr txBox="1"/>
+          <p:nvPr/>
+        </p:nvSpPr>
+        <p:spPr>
+          <a:xfrm>
+            <a:off x="4355893" y="2305971"/>
+            <a:ext cx="312906" cy="369332"/>
+          </a:xfrm>
+          <a:prstGeom prst="rect">
+            <a:avLst/>
+          </a:prstGeom>
+          <a:noFill/>
+        </p:spPr>
+        <p:txBody>
+          <a:bodyPr wrap="none" rtlCol="0">
+            <a:spAutoFit/>
+          </a:bodyPr>
+          <a:lstStyle/>
+          <a:p>
+            <a:r>
+              <a:rPr lang="en-NL" dirty="0">
+                <a:solidFill>
+                  <a:srgbClr val="FF0000"/>
+                </a:solidFill>
+              </a:rPr>
+              <a:t>a</a:t>
+            </a:r>
+          </a:p>
+        </p:txBody>
+      </p:sp>
+      <p:sp>
+        <p:nvSpPr>
+          <p:cNvPr id="7" name="TextBox 6">
+            <a:extLst>
+              <a:ext uri="{FF2B5EF4-FFF2-40B4-BE49-F238E27FC236}">
+                <a16:creationId xmlns:a16="http://schemas.microsoft.com/office/drawing/2014/main" id="{0D75238B-E316-210B-EF9C-4F69B00D449A}"/>
+              </a:ext>
+            </a:extLst>
+          </p:cNvPr>
+          <p:cNvSpPr txBox="1"/>
+          <p:nvPr/>
+        </p:nvSpPr>
+        <p:spPr>
+          <a:xfrm>
+            <a:off x="4118779" y="2878973"/>
+            <a:ext cx="312906" cy="369332"/>
+          </a:xfrm>
+          <a:prstGeom prst="rect">
+            <a:avLst/>
+          </a:prstGeom>
+          <a:noFill/>
+        </p:spPr>
+        <p:txBody>
+          <a:bodyPr wrap="none" rtlCol="0">
+            <a:spAutoFit/>
+          </a:bodyPr>
+          <a:lstStyle/>
+          <a:p>
+            <a:r>
+              <a:rPr lang="en-NL" dirty="0">
+                <a:solidFill>
+                  <a:srgbClr val="FF0000"/>
+                </a:solidFill>
+              </a:rPr>
+              <a:t>b</a:t>
+            </a:r>
+          </a:p>
+        </p:txBody>
+      </p:sp>
+      <p:sp>
+        <p:nvSpPr>
+          <p:cNvPr id="9" name="TextBox 8">
+            <a:extLst>
+              <a:ext uri="{FF2B5EF4-FFF2-40B4-BE49-F238E27FC236}">
+                <a16:creationId xmlns:a16="http://schemas.microsoft.com/office/drawing/2014/main" id="{76C81A6B-4CF9-D739-8300-B900F2BA25CE}"/>
+              </a:ext>
+            </a:extLst>
+          </p:cNvPr>
+          <p:cNvSpPr txBox="1"/>
+          <p:nvPr/>
+        </p:nvSpPr>
+        <p:spPr>
+          <a:xfrm>
+            <a:off x="3678036" y="2322245"/>
+            <a:ext cx="300082" cy="369332"/>
+          </a:xfrm>
+          <a:prstGeom prst="rect">
+            <a:avLst/>
+          </a:prstGeom>
+          <a:noFill/>
+        </p:spPr>
+        <p:txBody>
+          <a:bodyPr wrap="none" rtlCol="0">
+            <a:spAutoFit/>
+          </a:bodyPr>
+          <a:lstStyle/>
+          <a:p>
+            <a:r>
+              <a:rPr lang="en-NL" dirty="0">
+                <a:solidFill>
+                  <a:srgbClr val="FF0000"/>
+                </a:solidFill>
+              </a:rPr>
+              <a:t>c</a:t>
+            </a:r>
+          </a:p>
+        </p:txBody>
+      </p:sp>
+      <p:sp>
+        <p:nvSpPr>
+          <p:cNvPr id="14" name="TextBox 13">
+            <a:extLst>
+              <a:ext uri="{FF2B5EF4-FFF2-40B4-BE49-F238E27FC236}">
+                <a16:creationId xmlns:a16="http://schemas.microsoft.com/office/drawing/2014/main" id="{D3A2589E-E48B-B05D-01EB-B982D4A576D0}"/>
+              </a:ext>
+            </a:extLst>
+          </p:cNvPr>
+          <p:cNvSpPr txBox="1"/>
+          <p:nvPr/>
+        </p:nvSpPr>
+        <p:spPr>
+          <a:xfrm>
+            <a:off x="4559522" y="1895400"/>
+            <a:ext cx="312906" cy="369332"/>
+          </a:xfrm>
+          <a:prstGeom prst="rect">
+            <a:avLst/>
+          </a:prstGeom>
+          <a:noFill/>
+        </p:spPr>
+        <p:txBody>
+          <a:bodyPr wrap="none" rtlCol="0">
+            <a:spAutoFit/>
+          </a:bodyPr>
+          <a:lstStyle/>
+          <a:p>
+            <a:r>
+              <a:rPr lang="en-NL" dirty="0">
+                <a:solidFill>
+                  <a:srgbClr val="FF0000"/>
+                </a:solidFill>
+              </a:rPr>
+              <a:t>d</a:t>
+            </a:r>
+          </a:p>
+        </p:txBody>
+      </p:sp>
+      <p:sp>
+        <p:nvSpPr>
+          <p:cNvPr id="15" name="TextBox 14">
+            <a:extLst>
+              <a:ext uri="{FF2B5EF4-FFF2-40B4-BE49-F238E27FC236}">
+                <a16:creationId xmlns:a16="http://schemas.microsoft.com/office/drawing/2014/main" id="{036CDE85-4FF8-6164-481B-A0804DCF17A2}"/>
+              </a:ext>
+            </a:extLst>
+          </p:cNvPr>
+          <p:cNvSpPr txBox="1"/>
+          <p:nvPr/>
+        </p:nvSpPr>
+        <p:spPr>
+          <a:xfrm>
+            <a:off x="4512346" y="1513517"/>
+            <a:ext cx="312906" cy="369332"/>
+          </a:xfrm>
+          <a:prstGeom prst="rect">
+            <a:avLst/>
+          </a:prstGeom>
+          <a:noFill/>
+        </p:spPr>
+        <p:txBody>
+          <a:bodyPr wrap="none" rtlCol="0">
+            <a:spAutoFit/>
+          </a:bodyPr>
+          <a:lstStyle/>
+          <a:p>
+            <a:r>
+              <a:rPr lang="en-NL" dirty="0">
+                <a:solidFill>
+                  <a:srgbClr val="FF0000"/>
+                </a:solidFill>
+              </a:rPr>
+              <a:t>e</a:t>
+            </a:r>
+          </a:p>
+        </p:txBody>
+      </p:sp>
+      <p:graphicFrame>
+        <p:nvGraphicFramePr>
+          <p:cNvPr id="18" name="Table 20">
+            <a:extLst>
+              <a:ext uri="{FF2B5EF4-FFF2-40B4-BE49-F238E27FC236}">
+                <a16:creationId xmlns:a16="http://schemas.microsoft.com/office/drawing/2014/main" id="{40C4BF63-8F98-F2C7-4DEA-EA85487341DF}"/>
+              </a:ext>
+            </a:extLst>
+          </p:cNvPr>
+          <p:cNvGraphicFramePr>
+            <a:graphicFrameLocks noGrp="1"/>
+          </p:cNvGraphicFramePr>
+          <p:nvPr>
+            <p:extLst>
+              <p:ext uri="{D42A27DB-BD31-4B8C-83A1-F6EECF244321}">
+                <p14:modId xmlns:p14="http://schemas.microsoft.com/office/powerpoint/2010/main" val="470053632"/>
+              </p:ext>
+            </p:extLst>
+          </p:nvPr>
+        </p:nvGraphicFramePr>
+        <p:xfrm>
+          <a:off x="2334117" y="3237943"/>
+          <a:ext cx="4475766" cy="1483360"/>
+        </p:xfrm>
+        <a:graphic>
+          <a:graphicData uri="http://schemas.openxmlformats.org/drawingml/2006/table">
+            <a:tbl>
+              <a:tblPr firstRow="1" bandRow="1">
+                <a:tableStyleId>{93296810-A885-4BE3-A3E7-6D5BEEA58F35}</a:tableStyleId>
+              </a:tblPr>
+              <a:tblGrid>
+                <a:gridCol w="2747572">
+                  <a:extLst>
+                    <a:ext uri="{9D8B030D-6E8A-4147-A177-3AD203B41FA5}">
+                      <a16:colId xmlns:a16="http://schemas.microsoft.com/office/drawing/2014/main" val="3197199221"/>
+                    </a:ext>
+                  </a:extLst>
+                </a:gridCol>
+                <a:gridCol w="360040">
+                  <a:extLst>
+                    <a:ext uri="{9D8B030D-6E8A-4147-A177-3AD203B41FA5}">
+                      <a16:colId xmlns:a16="http://schemas.microsoft.com/office/drawing/2014/main" val="3855053121"/>
+                    </a:ext>
+                  </a:extLst>
+                </a:gridCol>
+                <a:gridCol w="288032">
+                  <a:extLst>
+                    <a:ext uri="{9D8B030D-6E8A-4147-A177-3AD203B41FA5}">
+                      <a16:colId xmlns:a16="http://schemas.microsoft.com/office/drawing/2014/main" val="1256686142"/>
+                    </a:ext>
+                  </a:extLst>
+                </a:gridCol>
+                <a:gridCol w="360040">
+                  <a:extLst>
+                    <a:ext uri="{9D8B030D-6E8A-4147-A177-3AD203B41FA5}">
+                      <a16:colId xmlns:a16="http://schemas.microsoft.com/office/drawing/2014/main" val="1373789303"/>
+                    </a:ext>
+                  </a:extLst>
+                </a:gridCol>
+                <a:gridCol w="360040">
+                  <a:extLst>
+                    <a:ext uri="{9D8B030D-6E8A-4147-A177-3AD203B41FA5}">
+                      <a16:colId xmlns:a16="http://schemas.microsoft.com/office/drawing/2014/main" val="1692796465"/>
+                    </a:ext>
+                  </a:extLst>
+                </a:gridCol>
+                <a:gridCol w="360042">
+                  <a:extLst>
+                    <a:ext uri="{9D8B030D-6E8A-4147-A177-3AD203B41FA5}">
+                      <a16:colId xmlns:a16="http://schemas.microsoft.com/office/drawing/2014/main" val="383136513"/>
+                    </a:ext>
+                  </a:extLst>
+                </a:gridCol>
+              </a:tblGrid>
+              <a:tr h="370840">
+                <a:tc>
+                  <a:txBody>
+                    <a:bodyPr/>
+                    <a:lstStyle/>
+                    <a:p>
+                      <a:endParaRPr lang="en-NL" b="0">
+                        <a:solidFill>
+                          <a:schemeClr val="tx1"/>
+                        </a:solidFill>
+                      </a:endParaRPr>
+                    </a:p>
+                  </a:txBody>
+                  <a:tcPr>
+                    <a:solidFill>
+                      <a:schemeClr val="accent5">
+                        <a:lumMod val="20000"/>
+                        <a:lumOff val="80000"/>
+                      </a:schemeClr>
+                    </a:solidFill>
+                  </a:tcPr>
+                </a:tc>
+                <a:tc>
+                  <a:txBody>
+                    <a:bodyPr/>
+                    <a:lstStyle/>
+                    <a:p>
+                      <a:r>
+                        <a:rPr lang="en-NL" b="0" dirty="0">
+                          <a:solidFill>
+                            <a:schemeClr val="tx1"/>
+                          </a:solidFill>
+                        </a:rPr>
+                        <a:t>a</a:t>
+                      </a:r>
+                    </a:p>
+                  </a:txBody>
+                  <a:tcPr>
+                    <a:solidFill>
+                      <a:schemeClr val="accent5">
+                        <a:lumMod val="20000"/>
+                        <a:lumOff val="80000"/>
+                      </a:schemeClr>
+                    </a:solidFill>
+                  </a:tcPr>
+                </a:tc>
+                <a:tc>
+                  <a:txBody>
+                    <a:bodyPr/>
+                    <a:lstStyle/>
+                    <a:p>
+                      <a:r>
+                        <a:rPr lang="en-NL" b="0" dirty="0">
+                          <a:solidFill>
+                            <a:schemeClr val="tx1"/>
+                          </a:solidFill>
+                        </a:rPr>
+                        <a:t>b</a:t>
+                      </a:r>
+                    </a:p>
+                  </a:txBody>
+                  <a:tcPr>
+                    <a:solidFill>
+                      <a:schemeClr val="accent5">
+                        <a:lumMod val="20000"/>
+                        <a:lumOff val="80000"/>
+                      </a:schemeClr>
+                    </a:solidFill>
+                  </a:tcPr>
+                </a:tc>
+                <a:tc>
+                  <a:txBody>
+                    <a:bodyPr/>
+                    <a:lstStyle/>
+                    <a:p>
+                      <a:r>
+                        <a:rPr lang="en-NL" b="0" dirty="0">
+                          <a:solidFill>
+                            <a:schemeClr val="tx1"/>
+                          </a:solidFill>
+                        </a:rPr>
+                        <a:t>c</a:t>
+                      </a:r>
+                    </a:p>
+                  </a:txBody>
+                  <a:tcPr>
+                    <a:solidFill>
+                      <a:schemeClr val="accent5">
+                        <a:lumMod val="20000"/>
+                        <a:lumOff val="80000"/>
+                      </a:schemeClr>
+                    </a:solidFill>
+                  </a:tcPr>
+                </a:tc>
+                <a:tc>
+                  <a:txBody>
+                    <a:bodyPr/>
+                    <a:lstStyle/>
+                    <a:p>
+                      <a:r>
+                        <a:rPr lang="en-NL" b="0" dirty="0">
+                          <a:solidFill>
+                            <a:schemeClr val="tx1"/>
+                          </a:solidFill>
+                        </a:rPr>
+                        <a:t>d</a:t>
+                      </a:r>
+                    </a:p>
+                  </a:txBody>
+                  <a:tcPr>
+                    <a:solidFill>
+                      <a:schemeClr val="accent5">
+                        <a:lumMod val="20000"/>
+                        <a:lumOff val="80000"/>
+                      </a:schemeClr>
+                    </a:solidFill>
+                  </a:tcPr>
+                </a:tc>
+                <a:tc>
+                  <a:txBody>
+                    <a:bodyPr/>
+                    <a:lstStyle/>
+                    <a:p>
+                      <a:r>
+                        <a:rPr lang="en-NL" b="0" dirty="0">
+                          <a:solidFill>
+                            <a:schemeClr val="tx1"/>
+                          </a:solidFill>
+                        </a:rPr>
+                        <a:t>e</a:t>
+                      </a:r>
+                    </a:p>
+                  </a:txBody>
+                  <a:tcPr>
+                    <a:solidFill>
+                      <a:schemeClr val="accent5">
+                        <a:lumMod val="20000"/>
+                        <a:lumOff val="80000"/>
+                      </a:schemeClr>
+                    </a:solidFill>
+                  </a:tcPr>
+                </a:tc>
+                <a:extLst>
+                  <a:ext uri="{0D108BD9-81ED-4DB2-BD59-A6C34878D82A}">
+                    <a16:rowId xmlns:a16="http://schemas.microsoft.com/office/drawing/2014/main" val="1937155199"/>
+                  </a:ext>
+                </a:extLst>
+              </a:tr>
+              <a:tr h="370840">
+                <a:tc>
+                  <a:txBody>
+                    <a:bodyPr/>
+                    <a:lstStyle/>
+                    <a:p>
+                      <a:r>
+                        <a:rPr lang="en-NL" b="0" dirty="0">
+                          <a:solidFill>
+                            <a:schemeClr val="tx1"/>
+                          </a:solidFill>
+                        </a:rPr>
+                        <a:t>c</a:t>
+                      </a:r>
+                      <a:r>
+                        <a:rPr lang="en-NL" b="0" baseline="-25000" dirty="0">
+                          <a:solidFill>
+                            <a:schemeClr val="tx1"/>
+                          </a:solidFill>
+                        </a:rPr>
+                        <a:t>1</a:t>
+                      </a:r>
+                      <a:r>
+                        <a:rPr lang="en-NL" b="0" dirty="0">
+                          <a:solidFill>
+                            <a:schemeClr val="tx1"/>
+                          </a:solidFill>
+                        </a:rPr>
+                        <a:t> = [0,3,0]</a:t>
+                      </a:r>
+                    </a:p>
+                  </a:txBody>
+                  <a:tcPr>
+                    <a:solidFill>
+                      <a:schemeClr val="tx2">
+                        <a:lumMod val="20000"/>
+                        <a:lumOff val="80000"/>
+                      </a:schemeClr>
+                    </a:solidFill>
+                  </a:tcPr>
+                </a:tc>
+                <a:tc>
+                  <a:txBody>
+                    <a:bodyPr/>
+                    <a:lstStyle/>
+                    <a:p>
+                      <a:r>
+                        <a:rPr lang="en-NL" b="0" dirty="0">
+                          <a:solidFill>
+                            <a:schemeClr val="tx1"/>
+                          </a:solidFill>
+                        </a:rPr>
+                        <a:t>0</a:t>
+                      </a:r>
+                    </a:p>
+                  </a:txBody>
+                  <a:tcPr>
+                    <a:solidFill>
+                      <a:schemeClr val="tx2">
+                        <a:lumMod val="20000"/>
+                        <a:lumOff val="80000"/>
+                      </a:schemeClr>
+                    </a:solidFill>
+                  </a:tcPr>
+                </a:tc>
+                <a:tc>
+                  <a:txBody>
+                    <a:bodyPr/>
+                    <a:lstStyle/>
+                    <a:p>
+                      <a:r>
+                        <a:rPr lang="en-NL" b="0" dirty="0">
+                          <a:solidFill>
+                            <a:schemeClr val="tx1"/>
+                          </a:solidFill>
+                        </a:rPr>
+                        <a:t>0</a:t>
+                      </a:r>
+                    </a:p>
+                  </a:txBody>
+                  <a:tcPr>
+                    <a:solidFill>
+                      <a:schemeClr val="tx2">
+                        <a:lumMod val="20000"/>
+                        <a:lumOff val="80000"/>
+                      </a:schemeClr>
+                    </a:solidFill>
+                  </a:tcPr>
+                </a:tc>
+                <a:tc>
+                  <a:txBody>
+                    <a:bodyPr/>
+                    <a:lstStyle/>
+                    <a:p>
+                      <a:r>
+                        <a:rPr lang="en-NL" b="0" dirty="0">
+                          <a:solidFill>
+                            <a:schemeClr val="tx1"/>
+                          </a:solidFill>
+                        </a:rPr>
+                        <a:t>0</a:t>
+                      </a:r>
+                    </a:p>
+                  </a:txBody>
+                  <a:tcPr>
+                    <a:solidFill>
+                      <a:schemeClr val="tx2">
+                        <a:lumMod val="20000"/>
+                        <a:lumOff val="80000"/>
+                      </a:schemeClr>
+                    </a:solidFill>
+                  </a:tcPr>
+                </a:tc>
+                <a:tc>
+                  <a:txBody>
+                    <a:bodyPr/>
+                    <a:lstStyle/>
+                    <a:p>
+                      <a:r>
+                        <a:rPr lang="en-NL" b="0" dirty="0">
+                          <a:solidFill>
+                            <a:schemeClr val="tx1"/>
+                          </a:solidFill>
+                        </a:rPr>
+                        <a:t>1</a:t>
+                      </a:r>
+                    </a:p>
+                  </a:txBody>
+                  <a:tcPr>
+                    <a:solidFill>
+                      <a:schemeClr val="tx2">
+                        <a:lumMod val="20000"/>
+                        <a:lumOff val="80000"/>
+                      </a:schemeClr>
+                    </a:solidFill>
+                  </a:tcPr>
+                </a:tc>
+                <a:tc>
+                  <a:txBody>
+                    <a:bodyPr/>
+                    <a:lstStyle/>
+                    <a:p>
+                      <a:r>
+                        <a:rPr lang="en-NL" b="0" dirty="0">
+                          <a:solidFill>
+                            <a:schemeClr val="tx1"/>
+                          </a:solidFill>
+                        </a:rPr>
+                        <a:t>1</a:t>
+                      </a:r>
+                    </a:p>
+                  </a:txBody>
+                  <a:tcPr>
+                    <a:solidFill>
+                      <a:schemeClr val="tx2">
+                        <a:lumMod val="20000"/>
+                        <a:lumOff val="80000"/>
+                      </a:schemeClr>
+                    </a:solidFill>
+                  </a:tcPr>
+                </a:tc>
+                <a:extLst>
+                  <a:ext uri="{0D108BD9-81ED-4DB2-BD59-A6C34878D82A}">
+                    <a16:rowId xmlns:a16="http://schemas.microsoft.com/office/drawing/2014/main" val="1011075740"/>
+                  </a:ext>
+                </a:extLst>
+              </a:tr>
+              <a:tr h="370840">
+                <a:tc>
+                  <a:txBody>
+                    <a:bodyPr/>
+                    <a:lstStyle/>
+                    <a:p>
+                      <a:r>
+                        <a:rPr lang="en-NL" b="0" dirty="0">
+                          <a:solidFill>
+                            <a:schemeClr val="tx1"/>
+                          </a:solidFill>
+                        </a:rPr>
+                        <a:t>c</a:t>
+                      </a:r>
+                      <a:r>
+                        <a:rPr lang="en-NL" b="0" baseline="-25000" dirty="0">
+                          <a:solidFill>
+                            <a:schemeClr val="tx1"/>
+                          </a:solidFill>
+                        </a:rPr>
+                        <a:t>2</a:t>
+                      </a:r>
+                      <a:r>
+                        <a:rPr lang="en-NL" b="0" dirty="0">
+                          <a:solidFill>
+                            <a:schemeClr val="tx1"/>
+                          </a:solidFill>
+                        </a:rPr>
+                        <a:t> = [2,1,0,2]</a:t>
+                      </a:r>
+                    </a:p>
+                  </a:txBody>
+                  <a:tcPr>
+                    <a:solidFill>
+                      <a:schemeClr val="tx2">
+                        <a:lumMod val="20000"/>
+                        <a:lumOff val="80000"/>
+                      </a:schemeClr>
+                    </a:solidFill>
+                  </a:tcPr>
+                </a:tc>
+                <a:tc>
+                  <a:txBody>
+                    <a:bodyPr/>
+                    <a:lstStyle/>
+                    <a:p>
+                      <a:r>
+                        <a:rPr lang="en-NL" b="0" dirty="0">
+                          <a:solidFill>
+                            <a:schemeClr val="tx1"/>
+                          </a:solidFill>
+                        </a:rPr>
+                        <a:t>1</a:t>
+                      </a:r>
+                    </a:p>
+                  </a:txBody>
+                  <a:tcPr>
+                    <a:solidFill>
+                      <a:schemeClr val="tx2">
+                        <a:lumMod val="20000"/>
+                        <a:lumOff val="80000"/>
+                      </a:schemeClr>
+                    </a:solidFill>
+                  </a:tcPr>
+                </a:tc>
+                <a:tc>
+                  <a:txBody>
+                    <a:bodyPr/>
+                    <a:lstStyle/>
+                    <a:p>
+                      <a:r>
+                        <a:rPr lang="en-NL" b="0" dirty="0">
+                          <a:solidFill>
+                            <a:schemeClr val="tx1"/>
+                          </a:solidFill>
+                        </a:rPr>
+                        <a:t>1</a:t>
+                      </a:r>
+                    </a:p>
+                  </a:txBody>
+                  <a:tcPr>
+                    <a:solidFill>
+                      <a:schemeClr val="tx2">
+                        <a:lumMod val="20000"/>
+                        <a:lumOff val="80000"/>
+                      </a:schemeClr>
+                    </a:solidFill>
+                  </a:tcPr>
+                </a:tc>
+                <a:tc>
+                  <a:txBody>
+                    <a:bodyPr/>
+                    <a:lstStyle/>
+                    <a:p>
+                      <a:r>
+                        <a:rPr lang="en-NL" b="0" dirty="0">
+                          <a:solidFill>
+                            <a:schemeClr val="tx1"/>
+                          </a:solidFill>
+                        </a:rPr>
+                        <a:t>1</a:t>
+                      </a:r>
+                    </a:p>
+                  </a:txBody>
+                  <a:tcPr>
+                    <a:solidFill>
+                      <a:schemeClr val="tx2">
+                        <a:lumMod val="20000"/>
+                        <a:lumOff val="80000"/>
+                      </a:schemeClr>
+                    </a:solidFill>
+                  </a:tcPr>
+                </a:tc>
+                <a:tc>
+                  <a:txBody>
+                    <a:bodyPr/>
+                    <a:lstStyle/>
+                    <a:p>
+                      <a:r>
+                        <a:rPr lang="en-NL" b="0" dirty="0">
+                          <a:solidFill>
+                            <a:schemeClr val="tx1"/>
+                          </a:solidFill>
+                        </a:rPr>
+                        <a:t>0</a:t>
+                      </a:r>
+                    </a:p>
+                  </a:txBody>
+                  <a:tcPr>
+                    <a:solidFill>
+                      <a:schemeClr val="tx2">
+                        <a:lumMod val="20000"/>
+                        <a:lumOff val="80000"/>
+                      </a:schemeClr>
+                    </a:solidFill>
+                  </a:tcPr>
+                </a:tc>
+                <a:tc>
+                  <a:txBody>
+                    <a:bodyPr/>
+                    <a:lstStyle/>
+                    <a:p>
+                      <a:r>
+                        <a:rPr lang="en-NL" b="0" dirty="0">
+                          <a:solidFill>
+                            <a:schemeClr val="tx1"/>
+                          </a:solidFill>
+                        </a:rPr>
+                        <a:t>0</a:t>
+                      </a:r>
+                    </a:p>
+                  </a:txBody>
+                  <a:tcPr>
+                    <a:solidFill>
+                      <a:schemeClr val="tx2">
+                        <a:lumMod val="20000"/>
+                        <a:lumOff val="80000"/>
+                      </a:schemeClr>
+                    </a:solidFill>
+                  </a:tcPr>
+                </a:tc>
+                <a:extLst>
+                  <a:ext uri="{0D108BD9-81ED-4DB2-BD59-A6C34878D82A}">
+                    <a16:rowId xmlns:a16="http://schemas.microsoft.com/office/drawing/2014/main" val="1712407274"/>
+                  </a:ext>
+                </a:extLst>
+              </a:tr>
+              <a:tr h="370840">
+                <a:tc>
+                  <a:txBody>
+                    <a:bodyPr/>
+                    <a:lstStyle/>
+                    <a:p>
+                      <a:r>
+                        <a:rPr lang="en-NL" b="0" dirty="0">
+                          <a:solidFill>
+                            <a:schemeClr val="tx1"/>
+                          </a:solidFill>
+                        </a:rPr>
+                        <a:t>c</a:t>
+                      </a:r>
+                      <a:r>
+                        <a:rPr lang="en-NL" b="0" baseline="-25000" dirty="0">
+                          <a:solidFill>
+                            <a:schemeClr val="tx1"/>
+                          </a:solidFill>
+                        </a:rPr>
+                        <a:t>3</a:t>
+                      </a:r>
+                      <a:r>
+                        <a:rPr lang="en-NL" b="0" dirty="0">
+                          <a:solidFill>
+                            <a:schemeClr val="tx1"/>
+                          </a:solidFill>
+                        </a:rPr>
+                        <a:t> = [0,3,0,1,2,0]</a:t>
+                      </a:r>
+                    </a:p>
+                  </a:txBody>
+                  <a:tcPr>
+                    <a:solidFill>
+                      <a:schemeClr val="tx2">
+                        <a:lumMod val="20000"/>
+                        <a:lumOff val="80000"/>
+                      </a:schemeClr>
+                    </a:solidFill>
+                  </a:tcPr>
+                </a:tc>
+                <a:tc>
+                  <a:txBody>
+                    <a:bodyPr/>
+                    <a:lstStyle/>
+                    <a:p>
+                      <a:r>
+                        <a:rPr lang="en-NL" b="0" dirty="0">
+                          <a:solidFill>
+                            <a:schemeClr val="tx1"/>
+                          </a:solidFill>
+                        </a:rPr>
+                        <a:t>1</a:t>
+                      </a:r>
+                    </a:p>
+                  </a:txBody>
+                  <a:tcPr>
+                    <a:solidFill>
+                      <a:schemeClr val="tx2">
+                        <a:lumMod val="20000"/>
+                        <a:lumOff val="80000"/>
+                      </a:schemeClr>
+                    </a:solidFill>
+                  </a:tcPr>
+                </a:tc>
+                <a:tc>
+                  <a:txBody>
+                    <a:bodyPr/>
+                    <a:lstStyle/>
+                    <a:p>
+                      <a:r>
+                        <a:rPr lang="en-NL" b="0" dirty="0">
+                          <a:solidFill>
+                            <a:schemeClr val="tx1"/>
+                          </a:solidFill>
+                        </a:rPr>
+                        <a:t>1</a:t>
+                      </a:r>
+                    </a:p>
+                  </a:txBody>
+                  <a:tcPr>
+                    <a:solidFill>
+                      <a:schemeClr val="tx2">
+                        <a:lumMod val="20000"/>
+                        <a:lumOff val="80000"/>
+                      </a:schemeClr>
+                    </a:solidFill>
+                  </a:tcPr>
+                </a:tc>
+                <a:tc>
+                  <a:txBody>
+                    <a:bodyPr/>
+                    <a:lstStyle/>
+                    <a:p>
+                      <a:r>
+                        <a:rPr lang="en-NL" b="0" dirty="0">
+                          <a:solidFill>
+                            <a:schemeClr val="tx1"/>
+                          </a:solidFill>
+                        </a:rPr>
+                        <a:t>1</a:t>
+                      </a:r>
+                    </a:p>
+                  </a:txBody>
+                  <a:tcPr>
+                    <a:solidFill>
+                      <a:schemeClr val="tx2">
+                        <a:lumMod val="20000"/>
+                        <a:lumOff val="80000"/>
+                      </a:schemeClr>
+                    </a:solidFill>
+                  </a:tcPr>
+                </a:tc>
+                <a:tc>
+                  <a:txBody>
+                    <a:bodyPr/>
+                    <a:lstStyle/>
+                    <a:p>
+                      <a:r>
+                        <a:rPr lang="en-NL" b="0" dirty="0">
+                          <a:solidFill>
+                            <a:schemeClr val="tx1"/>
+                          </a:solidFill>
+                        </a:rPr>
+                        <a:t>1</a:t>
+                      </a:r>
+                    </a:p>
+                  </a:txBody>
+                  <a:tcPr>
+                    <a:solidFill>
+                      <a:schemeClr val="tx2">
+                        <a:lumMod val="20000"/>
+                        <a:lumOff val="80000"/>
+                      </a:schemeClr>
+                    </a:solidFill>
+                  </a:tcPr>
+                </a:tc>
+                <a:tc>
+                  <a:txBody>
+                    <a:bodyPr/>
+                    <a:lstStyle/>
+                    <a:p>
+                      <a:r>
+                        <a:rPr lang="en-NL" b="0" dirty="0">
+                          <a:solidFill>
+                            <a:schemeClr val="tx1"/>
+                          </a:solidFill>
+                        </a:rPr>
+                        <a:t>1</a:t>
+                      </a:r>
+                    </a:p>
+                  </a:txBody>
+                  <a:tcPr>
+                    <a:solidFill>
+                      <a:schemeClr val="tx2">
+                        <a:lumMod val="20000"/>
+                        <a:lumOff val="80000"/>
+                      </a:schemeClr>
+                    </a:solidFill>
+                  </a:tcPr>
+                </a:tc>
+                <a:extLst>
+                  <a:ext uri="{0D108BD9-81ED-4DB2-BD59-A6C34878D82A}">
+                    <a16:rowId xmlns:a16="http://schemas.microsoft.com/office/drawing/2014/main" val="21163178"/>
+                  </a:ext>
+                </a:extLst>
+              </a:tr>
+            </a:tbl>
+          </a:graphicData>
+        </a:graphic>
+      </p:graphicFrame>
+      <p:sp>
+        <p:nvSpPr>
+          <p:cNvPr id="21" name="TextBox 20">
+            <a:extLst>
+              <a:ext uri="{FF2B5EF4-FFF2-40B4-BE49-F238E27FC236}">
+                <a16:creationId xmlns:a16="http://schemas.microsoft.com/office/drawing/2014/main" id="{2419835F-81CB-CF35-2EE7-4544912BCD96}"/>
+              </a:ext>
+            </a:extLst>
+          </p:cNvPr>
+          <p:cNvSpPr txBox="1"/>
+          <p:nvPr/>
+        </p:nvSpPr>
+        <p:spPr>
+          <a:xfrm>
+            <a:off x="1115436" y="1902454"/>
+            <a:ext cx="2082621" cy="369332"/>
+          </a:xfrm>
+          <a:prstGeom prst="rect">
+            <a:avLst/>
+          </a:prstGeom>
+          <a:noFill/>
+        </p:spPr>
+        <p:txBody>
+          <a:bodyPr wrap="none" rtlCol="0">
+            <a:spAutoFit/>
+          </a:bodyPr>
+          <a:lstStyle/>
+          <a:p>
+            <a:r>
+              <a:rPr lang="en-NL" dirty="0"/>
+              <a:t>naming the edges:</a:t>
+            </a:r>
+          </a:p>
+        </p:txBody>
+      </p:sp>
+      <p:sp>
+        <p:nvSpPr>
+          <p:cNvPr id="22" name="TextBox 21">
+            <a:extLst>
+              <a:ext uri="{FF2B5EF4-FFF2-40B4-BE49-F238E27FC236}">
+                <a16:creationId xmlns:a16="http://schemas.microsoft.com/office/drawing/2014/main" id="{DDA72E3D-AC20-B67C-50E5-595C11474154}"/>
+              </a:ext>
+            </a:extLst>
+          </p:cNvPr>
+          <p:cNvSpPr txBox="1"/>
+          <p:nvPr/>
+        </p:nvSpPr>
+        <p:spPr>
+          <a:xfrm>
+            <a:off x="437716" y="4928720"/>
+            <a:ext cx="8526771" cy="1754326"/>
+          </a:xfrm>
+          <a:prstGeom prst="rect">
+            <a:avLst/>
+          </a:prstGeom>
+          <a:noFill/>
+        </p:spPr>
+        <p:txBody>
+          <a:bodyPr wrap="square" rtlCol="0">
+            <a:spAutoFit/>
+          </a:bodyPr>
+          <a:lstStyle/>
+          <a:p>
+            <a:pPr algn="just"/>
+            <a:r>
+              <a:rPr lang="en-NL" dirty="0"/>
+              <a:t>A path in the graph can be represented as a vector over edges, as shown in the examples in the tables above. </a:t>
+            </a:r>
+          </a:p>
+          <a:p>
+            <a:pPr marL="285750" indent="-285750" algn="just">
+              <a:buFont typeface="Arial" panose="020B0604020202020204" pitchFamily="34" charset="0"/>
+              <a:buChar char="•"/>
+            </a:pPr>
+            <a:r>
+              <a:rPr lang="en-NL" dirty="0"/>
+              <a:t>The vector c</a:t>
+            </a:r>
+            <a:r>
+              <a:rPr lang="en-NL" baseline="-25000" dirty="0"/>
+              <a:t>3</a:t>
+            </a:r>
+            <a:r>
+              <a:rPr lang="en-NL" dirty="0"/>
+              <a:t> can be expressed as the sum 𝛼c</a:t>
+            </a:r>
+            <a:r>
+              <a:rPr lang="en-NL" baseline="-25000" dirty="0"/>
+              <a:t>1</a:t>
+            </a:r>
+            <a:r>
+              <a:rPr lang="en-NL" dirty="0"/>
+              <a:t>+𝛽c</a:t>
+            </a:r>
+            <a:r>
+              <a:rPr lang="en-NL" baseline="-25000" dirty="0"/>
+              <a:t>2</a:t>
+            </a:r>
+            <a:r>
+              <a:rPr lang="en-NL" dirty="0"/>
+              <a:t>, with 𝛼,𝛽=1. So c</a:t>
+            </a:r>
+            <a:r>
+              <a:rPr lang="en-NL" baseline="-25000" dirty="0"/>
+              <a:t>3</a:t>
+            </a:r>
+            <a:r>
+              <a:rPr lang="en-NL" dirty="0"/>
+              <a:t> is </a:t>
+            </a:r>
+            <a:r>
+              <a:rPr lang="en-NL" b="1" dirty="0"/>
+              <a:t>not</a:t>
+            </a:r>
+            <a:r>
+              <a:rPr lang="en-NL" dirty="0"/>
+              <a:t> linearly independent from {c</a:t>
+            </a:r>
+            <a:r>
+              <a:rPr lang="en-NL" baseline="-25000" dirty="0"/>
+              <a:t>1 </a:t>
+            </a:r>
+            <a:r>
+              <a:rPr lang="en-NL" dirty="0"/>
+              <a:t>, c</a:t>
+            </a:r>
+            <a:r>
+              <a:rPr lang="en-NL" baseline="-25000" dirty="0"/>
+              <a:t>2</a:t>
+            </a:r>
+            <a:r>
+              <a:rPr lang="en-NL" dirty="0"/>
+              <a:t>} . </a:t>
+            </a:r>
+          </a:p>
+          <a:p>
+            <a:pPr marL="285750" indent="-285750" algn="just">
+              <a:buFont typeface="Arial" panose="020B0604020202020204" pitchFamily="34" charset="0"/>
+              <a:buChar char="•"/>
+            </a:pPr>
+            <a:r>
+              <a:rPr lang="en-NL" dirty="0"/>
+              <a:t>However, c</a:t>
+            </a:r>
+            <a:r>
+              <a:rPr lang="en-NL" baseline="-25000" dirty="0"/>
+              <a:t>1</a:t>
+            </a:r>
+            <a:r>
+              <a:rPr lang="en-NL" dirty="0"/>
+              <a:t> and c</a:t>
+            </a:r>
+            <a:r>
+              <a:rPr lang="en-NL" baseline="-25000" dirty="0"/>
+              <a:t>2</a:t>
+            </a:r>
+            <a:r>
+              <a:rPr lang="en-NL" dirty="0"/>
+              <a:t> are linearly independent from each other as c</a:t>
+            </a:r>
+            <a:r>
+              <a:rPr lang="en-NL" baseline="-25000" dirty="0"/>
+              <a:t>1</a:t>
+            </a:r>
+            <a:r>
+              <a:rPr lang="en-NL" dirty="0"/>
+              <a:t> cannot be expressed as a linear sum over c</a:t>
+            </a:r>
+            <a:r>
+              <a:rPr lang="en-NL" baseline="-25000" dirty="0"/>
+              <a:t>2</a:t>
+            </a:r>
+            <a:r>
+              <a:rPr lang="en-NL" dirty="0"/>
+              <a:t>. (c</a:t>
+            </a:r>
+            <a:r>
+              <a:rPr lang="en-NL" baseline="-25000" dirty="0"/>
+              <a:t>1</a:t>
+            </a:r>
+            <a:r>
+              <a:rPr lang="en-NL" dirty="0"/>
+              <a:t> ≠ 𝛼c</a:t>
+            </a:r>
+            <a:r>
+              <a:rPr lang="en-NL" baseline="-25000" dirty="0"/>
+              <a:t>1 </a:t>
+            </a:r>
+            <a:r>
+              <a:rPr lang="en-NL" dirty="0"/>
+              <a:t>, for any 𝛼)</a:t>
+            </a:r>
+          </a:p>
+        </p:txBody>
+      </p:sp>
     </p:spTree>
     <p:extLst>
       <p:ext uri="{BB962C8B-B14F-4D97-AF65-F5344CB8AC3E}">
-        <p14:creationId xmlns:p14="http://schemas.microsoft.com/office/powerpoint/2010/main" val="4178613977"/>
+        <p14:creationId xmlns:p14="http://schemas.microsoft.com/office/powerpoint/2010/main" val="3657222011"/>
       </p:ext>
     </p:extLst>
   </p:cSld>
@@ -17039,7 +18421,7 @@
 </p:sld>
 </file>
 
-<file path=ppt/slides/slide24.xml><?xml version="1.0" encoding="utf-8"?>
+<file path=ppt/slides/slide25.xml><?xml version="1.0" encoding="utf-8"?>
 <p:sld xmlns:a="http://schemas.openxmlformats.org/drawingml/2006/main" xmlns:r="http://schemas.openxmlformats.org/officeDocument/2006/relationships" xmlns:p="http://schemas.openxmlformats.org/presentationml/2006/main">
   <p:cSld>
     <p:spTree>
@@ -17079,7 +18461,7 @@
           <a:p>
             <a:r>
               <a:rPr lang="en-NL" dirty="0"/>
-              <a:t>Linearly Independent Circuits</a:t>
+              <a:t>Some note: circuit vs simple path</a:t>
             </a:r>
           </a:p>
         </p:txBody>
@@ -17113,7 +18495,649 @@
               <a:pPr>
                 <a:defRPr/>
               </a:pPr>
-              <a:t>24</a:t>
+              <a:t>25</a:t>
+            </a:fld>
+            <a:endParaRPr lang="en-US"/>
+          </a:p>
+        </p:txBody>
+      </p:sp>
+      <p:sp>
+        <p:nvSpPr>
+          <p:cNvPr id="5" name="Oval 4">
+            <a:extLst>
+              <a:ext uri="{FF2B5EF4-FFF2-40B4-BE49-F238E27FC236}">
+                <a16:creationId xmlns:a16="http://schemas.microsoft.com/office/drawing/2014/main" id="{232FEF39-82AB-9D81-70AF-5793A93B5B4D}"/>
+              </a:ext>
+            </a:extLst>
+          </p:cNvPr>
+          <p:cNvSpPr/>
+          <p:nvPr/>
+        </p:nvSpPr>
+        <p:spPr>
+          <a:xfrm>
+            <a:off x="4038117" y="2060849"/>
+            <a:ext cx="288032" cy="288032"/>
+          </a:xfrm>
+          <a:prstGeom prst="ellipse">
+            <a:avLst/>
+          </a:prstGeom>
+          <a:solidFill>
+            <a:schemeClr val="accent5">
+              <a:lumMod val="75000"/>
+            </a:schemeClr>
+          </a:solidFill>
+          <a:ln>
+            <a:noFill/>
+          </a:ln>
+        </p:spPr>
+        <p:style>
+          <a:lnRef idx="2">
+            <a:schemeClr val="accent1">
+              <a:shade val="50000"/>
+            </a:schemeClr>
+          </a:lnRef>
+          <a:fillRef idx="1">
+            <a:schemeClr val="accent1"/>
+          </a:fillRef>
+          <a:effectRef idx="0">
+            <a:schemeClr val="accent1"/>
+          </a:effectRef>
+          <a:fontRef idx="minor">
+            <a:schemeClr val="lt1"/>
+          </a:fontRef>
+        </p:style>
+        <p:txBody>
+          <a:bodyPr rtlCol="0" anchor="ctr"/>
+          <a:lstStyle/>
+          <a:p>
+            <a:pPr algn="ctr"/>
+            <a:r>
+              <a:rPr lang="en-NL" dirty="0"/>
+              <a:t>0</a:t>
+            </a:r>
+          </a:p>
+        </p:txBody>
+      </p:sp>
+      <p:sp>
+        <p:nvSpPr>
+          <p:cNvPr id="6" name="Oval 5">
+            <a:extLst>
+              <a:ext uri="{FF2B5EF4-FFF2-40B4-BE49-F238E27FC236}">
+                <a16:creationId xmlns:a16="http://schemas.microsoft.com/office/drawing/2014/main" id="{B500C469-FE41-3BA8-C98B-2CF6BA744150}"/>
+              </a:ext>
+            </a:extLst>
+          </p:cNvPr>
+          <p:cNvSpPr/>
+          <p:nvPr/>
+        </p:nvSpPr>
+        <p:spPr>
+          <a:xfrm>
+            <a:off x="4470165" y="2742494"/>
+            <a:ext cx="288032" cy="288032"/>
+          </a:xfrm>
+          <a:prstGeom prst="ellipse">
+            <a:avLst/>
+          </a:prstGeom>
+          <a:solidFill>
+            <a:schemeClr val="accent5">
+              <a:lumMod val="75000"/>
+            </a:schemeClr>
+          </a:solidFill>
+          <a:ln>
+            <a:noFill/>
+          </a:ln>
+        </p:spPr>
+        <p:style>
+          <a:lnRef idx="2">
+            <a:schemeClr val="accent1">
+              <a:shade val="50000"/>
+            </a:schemeClr>
+          </a:lnRef>
+          <a:fillRef idx="1">
+            <a:schemeClr val="accent1"/>
+          </a:fillRef>
+          <a:effectRef idx="0">
+            <a:schemeClr val="accent1"/>
+          </a:effectRef>
+          <a:fontRef idx="minor">
+            <a:schemeClr val="lt1"/>
+          </a:fontRef>
+        </p:style>
+        <p:txBody>
+          <a:bodyPr rtlCol="0" anchor="ctr"/>
+          <a:lstStyle/>
+          <a:p>
+            <a:pPr algn="ctr"/>
+            <a:r>
+              <a:rPr lang="en-NL" dirty="0"/>
+              <a:t>1</a:t>
+            </a:r>
+          </a:p>
+        </p:txBody>
+      </p:sp>
+      <p:sp>
+        <p:nvSpPr>
+          <p:cNvPr id="8" name="Oval 7">
+            <a:extLst>
+              <a:ext uri="{FF2B5EF4-FFF2-40B4-BE49-F238E27FC236}">
+                <a16:creationId xmlns:a16="http://schemas.microsoft.com/office/drawing/2014/main" id="{1E2C262C-DFD6-3EEE-495A-8667575F73AA}"/>
+              </a:ext>
+            </a:extLst>
+          </p:cNvPr>
+          <p:cNvSpPr/>
+          <p:nvPr/>
+        </p:nvSpPr>
+        <p:spPr>
+          <a:xfrm>
+            <a:off x="3678077" y="2742494"/>
+            <a:ext cx="288032" cy="288032"/>
+          </a:xfrm>
+          <a:prstGeom prst="ellipse">
+            <a:avLst/>
+          </a:prstGeom>
+          <a:solidFill>
+            <a:schemeClr val="accent5">
+              <a:lumMod val="75000"/>
+            </a:schemeClr>
+          </a:solidFill>
+          <a:ln>
+            <a:noFill/>
+          </a:ln>
+        </p:spPr>
+        <p:style>
+          <a:lnRef idx="2">
+            <a:schemeClr val="accent1">
+              <a:shade val="50000"/>
+            </a:schemeClr>
+          </a:lnRef>
+          <a:fillRef idx="1">
+            <a:schemeClr val="accent1"/>
+          </a:fillRef>
+          <a:effectRef idx="0">
+            <a:schemeClr val="accent1"/>
+          </a:effectRef>
+          <a:fontRef idx="minor">
+            <a:schemeClr val="lt1"/>
+          </a:fontRef>
+        </p:style>
+        <p:txBody>
+          <a:bodyPr rtlCol="0" anchor="ctr"/>
+          <a:lstStyle/>
+          <a:p>
+            <a:pPr algn="ctr"/>
+            <a:r>
+              <a:rPr lang="en-NL" dirty="0"/>
+              <a:t>2</a:t>
+            </a:r>
+          </a:p>
+        </p:txBody>
+      </p:sp>
+      <p:cxnSp>
+        <p:nvCxnSpPr>
+          <p:cNvPr id="10" name="Straight Arrow Connector 9">
+            <a:extLst>
+              <a:ext uri="{FF2B5EF4-FFF2-40B4-BE49-F238E27FC236}">
+                <a16:creationId xmlns:a16="http://schemas.microsoft.com/office/drawing/2014/main" id="{30D589E6-BB44-E8CE-DB77-DC81AC35E481}"/>
+              </a:ext>
+            </a:extLst>
+          </p:cNvPr>
+          <p:cNvCxnSpPr>
+            <a:stCxn id="5" idx="5"/>
+            <a:endCxn id="6" idx="1"/>
+          </p:cNvCxnSpPr>
+          <p:nvPr/>
+        </p:nvCxnSpPr>
+        <p:spPr>
+          <a:xfrm>
+            <a:off x="4283968" y="2306700"/>
+            <a:ext cx="228378" cy="477975"/>
+          </a:xfrm>
+          <a:prstGeom prst="straightConnector1">
+            <a:avLst/>
+          </a:prstGeom>
+          <a:ln w="12700">
+            <a:solidFill>
+              <a:schemeClr val="tx1"/>
+            </a:solidFill>
+            <a:tailEnd type="triangle"/>
+          </a:ln>
+        </p:spPr>
+        <p:style>
+          <a:lnRef idx="1">
+            <a:schemeClr val="accent1"/>
+          </a:lnRef>
+          <a:fillRef idx="0">
+            <a:schemeClr val="accent1"/>
+          </a:fillRef>
+          <a:effectRef idx="0">
+            <a:schemeClr val="accent1"/>
+          </a:effectRef>
+          <a:fontRef idx="minor">
+            <a:schemeClr val="tx1"/>
+          </a:fontRef>
+        </p:style>
+      </p:cxnSp>
+      <p:cxnSp>
+        <p:nvCxnSpPr>
+          <p:cNvPr id="11" name="Straight Arrow Connector 10">
+            <a:extLst>
+              <a:ext uri="{FF2B5EF4-FFF2-40B4-BE49-F238E27FC236}">
+                <a16:creationId xmlns:a16="http://schemas.microsoft.com/office/drawing/2014/main" id="{99846F4D-E00A-D9A6-C4DF-F8B4B673CECC}"/>
+              </a:ext>
+            </a:extLst>
+          </p:cNvPr>
+          <p:cNvCxnSpPr>
+            <a:cxnSpLocks/>
+            <a:stCxn id="6" idx="2"/>
+            <a:endCxn id="8" idx="6"/>
+          </p:cNvCxnSpPr>
+          <p:nvPr/>
+        </p:nvCxnSpPr>
+        <p:spPr>
+          <a:xfrm flipH="1">
+            <a:off x="3966109" y="2886510"/>
+            <a:ext cx="504056" cy="0"/>
+          </a:xfrm>
+          <a:prstGeom prst="straightConnector1">
+            <a:avLst/>
+          </a:prstGeom>
+          <a:ln w="12700">
+            <a:solidFill>
+              <a:schemeClr val="tx1"/>
+            </a:solidFill>
+            <a:tailEnd type="triangle"/>
+          </a:ln>
+        </p:spPr>
+        <p:style>
+          <a:lnRef idx="1">
+            <a:schemeClr val="accent1"/>
+          </a:lnRef>
+          <a:fillRef idx="0">
+            <a:schemeClr val="accent1"/>
+          </a:fillRef>
+          <a:effectRef idx="0">
+            <a:schemeClr val="accent1"/>
+          </a:effectRef>
+          <a:fontRef idx="minor">
+            <a:schemeClr val="tx1"/>
+          </a:fontRef>
+        </p:style>
+      </p:cxnSp>
+      <p:cxnSp>
+        <p:nvCxnSpPr>
+          <p:cNvPr id="17" name="Straight Arrow Connector 16">
+            <a:extLst>
+              <a:ext uri="{FF2B5EF4-FFF2-40B4-BE49-F238E27FC236}">
+                <a16:creationId xmlns:a16="http://schemas.microsoft.com/office/drawing/2014/main" id="{A004FFF4-B8E6-D133-9E59-20B2D6BBBBF4}"/>
+              </a:ext>
+            </a:extLst>
+          </p:cNvPr>
+          <p:cNvCxnSpPr>
+            <a:cxnSpLocks/>
+            <a:stCxn id="8" idx="7"/>
+            <a:endCxn id="5" idx="3"/>
+          </p:cNvCxnSpPr>
+          <p:nvPr/>
+        </p:nvCxnSpPr>
+        <p:spPr>
+          <a:xfrm flipV="1">
+            <a:off x="3923928" y="2306700"/>
+            <a:ext cx="156370" cy="477975"/>
+          </a:xfrm>
+          <a:prstGeom prst="straightConnector1">
+            <a:avLst/>
+          </a:prstGeom>
+          <a:ln w="12700">
+            <a:solidFill>
+              <a:schemeClr val="tx1"/>
+            </a:solidFill>
+            <a:tailEnd type="triangle"/>
+          </a:ln>
+        </p:spPr>
+        <p:style>
+          <a:lnRef idx="1">
+            <a:schemeClr val="accent1"/>
+          </a:lnRef>
+          <a:fillRef idx="0">
+            <a:schemeClr val="accent1"/>
+          </a:fillRef>
+          <a:effectRef idx="0">
+            <a:schemeClr val="accent1"/>
+          </a:effectRef>
+          <a:fontRef idx="minor">
+            <a:schemeClr val="tx1"/>
+          </a:fontRef>
+        </p:style>
+      </p:cxnSp>
+      <p:sp>
+        <p:nvSpPr>
+          <p:cNvPr id="20" name="TextBox 19">
+            <a:extLst>
+              <a:ext uri="{FF2B5EF4-FFF2-40B4-BE49-F238E27FC236}">
+                <a16:creationId xmlns:a16="http://schemas.microsoft.com/office/drawing/2014/main" id="{4ABD07C2-B89F-5D77-EF03-EE8E6FC21C1A}"/>
+              </a:ext>
+            </a:extLst>
+          </p:cNvPr>
+          <p:cNvSpPr txBox="1"/>
+          <p:nvPr/>
+        </p:nvSpPr>
+        <p:spPr>
+          <a:xfrm>
+            <a:off x="590872" y="3295408"/>
+            <a:ext cx="8229600" cy="2246769"/>
+          </a:xfrm>
+          <a:prstGeom prst="rect">
+            <a:avLst/>
+          </a:prstGeom>
+          <a:noFill/>
+        </p:spPr>
+        <p:txBody>
+          <a:bodyPr wrap="square" rtlCol="0">
+            <a:spAutoFit/>
+          </a:bodyPr>
+          <a:lstStyle/>
+          <a:p>
+            <a:pPr marL="342900" indent="-342900">
+              <a:buFont typeface="Arial" panose="020B0604020202020204" pitchFamily="34" charset="0"/>
+              <a:buChar char="•"/>
+            </a:pPr>
+            <a:r>
+              <a:rPr lang="en-NL" sz="2000" dirty="0"/>
+              <a:t>A circuit does not pass the same edge twice. </a:t>
+            </a:r>
+          </a:p>
+          <a:p>
+            <a:pPr marL="342900" indent="-342900">
+              <a:buFont typeface="Arial" panose="020B0604020202020204" pitchFamily="34" charset="0"/>
+              <a:buChar char="•"/>
+            </a:pPr>
+            <a:r>
+              <a:rPr lang="en-NL" sz="2000" dirty="0"/>
+              <a:t>A simple path does not pass the same node twice, except the start and end node.</a:t>
+            </a:r>
+          </a:p>
+          <a:p>
+            <a:pPr marL="342900" indent="-342900">
+              <a:buFont typeface="Arial" panose="020B0604020202020204" pitchFamily="34" charset="0"/>
+              <a:buChar char="•"/>
+            </a:pPr>
+            <a:endParaRPr lang="en-NL" sz="2000" dirty="0"/>
+          </a:p>
+          <a:p>
+            <a:pPr marL="342900" indent="-342900">
+              <a:buFont typeface="Arial" panose="020B0604020202020204" pitchFamily="34" charset="0"/>
+              <a:buChar char="•"/>
+            </a:pPr>
+            <a:r>
+              <a:rPr lang="en-NL" sz="2000" dirty="0"/>
+              <a:t>[0,1,2,0] and [0,3,0] are circuits. They are also (cyclic) simple paths.</a:t>
+            </a:r>
+          </a:p>
+          <a:p>
+            <a:pPr marL="342900" indent="-342900">
+              <a:buFont typeface="Arial" panose="020B0604020202020204" pitchFamily="34" charset="0"/>
+              <a:buChar char="•"/>
+            </a:pPr>
+            <a:endParaRPr lang="en-NL" sz="2000" dirty="0"/>
+          </a:p>
+          <a:p>
+            <a:pPr marL="342900" indent="-342900">
+              <a:buFont typeface="Arial" panose="020B0604020202020204" pitchFamily="34" charset="0"/>
+              <a:buChar char="•"/>
+            </a:pPr>
+            <a:r>
+              <a:rPr lang="en-NL" sz="2000" dirty="0"/>
+              <a:t>[0,3,0,1,2,0] is also a circuit, </a:t>
+            </a:r>
+            <a:r>
+              <a:rPr lang="en-NL" sz="2000" b="1" dirty="0"/>
+              <a:t>but</a:t>
+            </a:r>
+            <a:r>
+              <a:rPr lang="en-NL" sz="2000" dirty="0"/>
+              <a:t> not a simple path.</a:t>
+            </a:r>
+          </a:p>
+        </p:txBody>
+      </p:sp>
+      <p:sp>
+        <p:nvSpPr>
+          <p:cNvPr id="12" name="Oval 11">
+            <a:extLst>
+              <a:ext uri="{FF2B5EF4-FFF2-40B4-BE49-F238E27FC236}">
+                <a16:creationId xmlns:a16="http://schemas.microsoft.com/office/drawing/2014/main" id="{2BB907DC-3F1C-9E50-1E63-31E76AB09251}"/>
+              </a:ext>
+            </a:extLst>
+          </p:cNvPr>
+          <p:cNvSpPr/>
+          <p:nvPr/>
+        </p:nvSpPr>
+        <p:spPr>
+          <a:xfrm>
+            <a:off x="5076056" y="2060849"/>
+            <a:ext cx="288032" cy="288032"/>
+          </a:xfrm>
+          <a:prstGeom prst="ellipse">
+            <a:avLst/>
+          </a:prstGeom>
+          <a:solidFill>
+            <a:schemeClr val="accent5">
+              <a:lumMod val="75000"/>
+            </a:schemeClr>
+          </a:solidFill>
+          <a:ln>
+            <a:noFill/>
+          </a:ln>
+        </p:spPr>
+        <p:style>
+          <a:lnRef idx="2">
+            <a:schemeClr val="accent1">
+              <a:shade val="50000"/>
+            </a:schemeClr>
+          </a:lnRef>
+          <a:fillRef idx="1">
+            <a:schemeClr val="accent1"/>
+          </a:fillRef>
+          <a:effectRef idx="0">
+            <a:schemeClr val="accent1"/>
+          </a:effectRef>
+          <a:fontRef idx="minor">
+            <a:schemeClr val="lt1"/>
+          </a:fontRef>
+        </p:style>
+        <p:txBody>
+          <a:bodyPr rtlCol="0" anchor="ctr"/>
+          <a:lstStyle/>
+          <a:p>
+            <a:pPr algn="ctr"/>
+            <a:r>
+              <a:rPr lang="en-NL" dirty="0"/>
+              <a:t>3</a:t>
+            </a:r>
+          </a:p>
+        </p:txBody>
+      </p:sp>
+      <p:cxnSp>
+        <p:nvCxnSpPr>
+          <p:cNvPr id="13" name="Straight Arrow Connector 12">
+            <a:extLst>
+              <a:ext uri="{FF2B5EF4-FFF2-40B4-BE49-F238E27FC236}">
+                <a16:creationId xmlns:a16="http://schemas.microsoft.com/office/drawing/2014/main" id="{7C4D0A38-02EC-E580-69D5-9E5C50E9E8EA}"/>
+              </a:ext>
+            </a:extLst>
+          </p:cNvPr>
+          <p:cNvCxnSpPr>
+            <a:cxnSpLocks/>
+            <a:stCxn id="5" idx="6"/>
+            <a:endCxn id="12" idx="2"/>
+          </p:cNvCxnSpPr>
+          <p:nvPr/>
+        </p:nvCxnSpPr>
+        <p:spPr>
+          <a:xfrm>
+            <a:off x="4326149" y="2204865"/>
+            <a:ext cx="749907" cy="0"/>
+          </a:xfrm>
+          <a:prstGeom prst="straightConnector1">
+            <a:avLst/>
+          </a:prstGeom>
+          <a:ln w="12700">
+            <a:solidFill>
+              <a:schemeClr val="tx1"/>
+            </a:solidFill>
+            <a:tailEnd type="triangle"/>
+          </a:ln>
+        </p:spPr>
+        <p:style>
+          <a:lnRef idx="1">
+            <a:schemeClr val="accent1"/>
+          </a:lnRef>
+          <a:fillRef idx="0">
+            <a:schemeClr val="accent1"/>
+          </a:fillRef>
+          <a:effectRef idx="0">
+            <a:schemeClr val="accent1"/>
+          </a:effectRef>
+          <a:fontRef idx="minor">
+            <a:schemeClr val="tx1"/>
+          </a:fontRef>
+        </p:style>
+      </p:cxnSp>
+      <p:cxnSp>
+        <p:nvCxnSpPr>
+          <p:cNvPr id="19" name="Curved Connector 18">
+            <a:extLst>
+              <a:ext uri="{FF2B5EF4-FFF2-40B4-BE49-F238E27FC236}">
+                <a16:creationId xmlns:a16="http://schemas.microsoft.com/office/drawing/2014/main" id="{EBA28F27-8466-64BA-B58F-54B4E1F3EEF5}"/>
+              </a:ext>
+            </a:extLst>
+          </p:cNvPr>
+          <p:cNvCxnSpPr>
+            <a:stCxn id="12" idx="0"/>
+            <a:endCxn id="5" idx="7"/>
+          </p:cNvCxnSpPr>
+          <p:nvPr/>
+        </p:nvCxnSpPr>
+        <p:spPr>
+          <a:xfrm rot="16200000" flipH="1" flipV="1">
+            <a:off x="4730929" y="1613887"/>
+            <a:ext cx="42181" cy="936104"/>
+          </a:xfrm>
+          <a:prstGeom prst="curvedConnector3">
+            <a:avLst>
+              <a:gd name="adj1" fmla="val -541950"/>
+            </a:avLst>
+          </a:prstGeom>
+          <a:ln>
+            <a:solidFill>
+              <a:schemeClr val="tx1"/>
+            </a:solidFill>
+            <a:tailEnd type="triangle"/>
+          </a:ln>
+        </p:spPr>
+        <p:style>
+          <a:lnRef idx="1">
+            <a:schemeClr val="accent1"/>
+          </a:lnRef>
+          <a:fillRef idx="0">
+            <a:schemeClr val="accent1"/>
+          </a:fillRef>
+          <a:effectRef idx="0">
+            <a:schemeClr val="accent1"/>
+          </a:effectRef>
+          <a:fontRef idx="minor">
+            <a:schemeClr val="tx1"/>
+          </a:fontRef>
+        </p:style>
+      </p:cxnSp>
+    </p:spTree>
+    <p:extLst>
+      <p:ext uri="{BB962C8B-B14F-4D97-AF65-F5344CB8AC3E}">
+        <p14:creationId xmlns:p14="http://schemas.microsoft.com/office/powerpoint/2010/main" val="4178613977"/>
+      </p:ext>
+    </p:extLst>
+  </p:cSld>
+  <p:clrMapOvr>
+    <a:masterClrMapping/>
+  </p:clrMapOvr>
+</p:sld>
+</file>
+
+<file path=ppt/slides/slide26.xml><?xml version="1.0" encoding="utf-8"?>
+<p:sld xmlns:a="http://schemas.openxmlformats.org/drawingml/2006/main" xmlns:r="http://schemas.openxmlformats.org/officeDocument/2006/relationships" xmlns:p="http://schemas.openxmlformats.org/presentationml/2006/main">
+  <p:cSld>
+    <p:spTree>
+      <p:nvGrpSpPr>
+        <p:cNvPr id="1" name=""/>
+        <p:cNvGrpSpPr/>
+        <p:nvPr/>
+      </p:nvGrpSpPr>
+      <p:grpSpPr>
+        <a:xfrm>
+          <a:off x="0" y="0"/>
+          <a:ext cx="0" cy="0"/>
+          <a:chOff x="0" y="0"/>
+          <a:chExt cx="0" cy="0"/>
+        </a:xfrm>
+      </p:grpSpPr>
+      <p:sp>
+        <p:nvSpPr>
+          <p:cNvPr id="2" name="Title 1">
+            <a:extLst>
+              <a:ext uri="{FF2B5EF4-FFF2-40B4-BE49-F238E27FC236}">
+                <a16:creationId xmlns:a16="http://schemas.microsoft.com/office/drawing/2014/main" id="{604F2C54-0A09-BA26-FF22-F9D7948274F8}"/>
+              </a:ext>
+            </a:extLst>
+          </p:cNvPr>
+          <p:cNvSpPr>
+            <a:spLocks noGrp="1"/>
+          </p:cNvSpPr>
+          <p:nvPr>
+            <p:ph type="title"/>
+          </p:nvPr>
+        </p:nvSpPr>
+        <p:spPr/>
+        <p:txBody>
+          <a:bodyPr/>
+          <a:lstStyle/>
+          <a:p>
+            <a:r>
+              <a:rPr lang="en-NL" sz="4000" dirty="0"/>
+              <a:t>Counting Linearly Independent Circuits</a:t>
+            </a:r>
+          </a:p>
+        </p:txBody>
+      </p:sp>
+      <p:sp>
+        <p:nvSpPr>
+          <p:cNvPr id="4" name="Slide Number Placeholder 3">
+            <a:extLst>
+              <a:ext uri="{FF2B5EF4-FFF2-40B4-BE49-F238E27FC236}">
+                <a16:creationId xmlns:a16="http://schemas.microsoft.com/office/drawing/2014/main" id="{4FDCF551-13AB-DE8B-F0D1-354738323B44}"/>
+              </a:ext>
+            </a:extLst>
+          </p:cNvPr>
+          <p:cNvSpPr>
+            <a:spLocks noGrp="1"/>
+          </p:cNvSpPr>
+          <p:nvPr>
+            <p:ph type="sldNum" sz="quarter" idx="12"/>
+          </p:nvPr>
+        </p:nvSpPr>
+        <p:spPr/>
+        <p:txBody>
+          <a:bodyPr/>
+          <a:lstStyle/>
+          <a:p>
+            <a:pPr>
+              <a:defRPr/>
+            </a:pPr>
+            <a:fld id="{F7C0A3F7-46F3-44CF-95B7-0304031AA6EA}" type="slidenum">
+              <a:rPr lang="en-US" smtClean="0"/>
+              <a:pPr>
+                <a:defRPr/>
+              </a:pPr>
+              <a:t>26</a:t>
             </a:fld>
             <a:endParaRPr lang="en-US"/>
           </a:p>
@@ -17895,19 +19919,20 @@
             </a:extLst>
           </p:cNvPr>
           <p:cNvCxnSpPr>
+            <a:cxnSpLocks/>
             <a:stCxn id="24" idx="6"/>
-            <a:endCxn id="3" idx="6"/>
+            <a:endCxn id="7" idx="6"/>
           </p:cNvCxnSpPr>
           <p:nvPr/>
         </p:nvCxnSpPr>
         <p:spPr>
-          <a:xfrm flipH="1" flipV="1">
-            <a:off x="7198688" y="2121588"/>
-            <a:ext cx="432048" cy="1266317"/>
+          <a:xfrm flipV="1">
+            <a:off x="7630736" y="2803233"/>
+            <a:ext cx="12700" cy="584672"/>
           </a:xfrm>
           <a:prstGeom prst="curvedConnector3">
             <a:avLst>
-              <a:gd name="adj1" fmla="val -52911"/>
+              <a:gd name="adj1" fmla="val 1800000"/>
             </a:avLst>
           </a:prstGeom>
           <a:ln w="12700">
@@ -17949,7 +19974,7 @@
         <p:spPr>
           <a:xfrm>
             <a:off x="3059832" y="3879728"/>
-            <a:ext cx="5626968" cy="1938992"/>
+            <a:ext cx="5626968" cy="2246769"/>
           </a:xfrm>
           <a:prstGeom prst="rect">
             <a:avLst/>
@@ -17995,7 +20020,7 @@
               <a:rPr lang="en-GB" sz="2000" dirty="0">
                 <a:sym typeface="Wingdings" pitchFamily="2" charset="2"/>
               </a:rPr>
-              <a:t>In the above examples: </a:t>
+              <a:t>In the above examples: we add one more cycle</a:t>
             </a:r>
           </a:p>
           <a:p>
@@ -18004,22 +20029,16 @@
               <a:buChar char="•"/>
             </a:pPr>
             <a:r>
+              <a:rPr lang="en-GB" sz="2000" b="1" dirty="0">
+                <a:sym typeface="Wingdings" pitchFamily="2" charset="2"/>
+              </a:rPr>
+              <a:t>max</a:t>
+            </a:r>
+            <a:r>
               <a:rPr lang="en-GB" sz="2000" dirty="0">
                 <a:sym typeface="Wingdings" pitchFamily="2" charset="2"/>
               </a:rPr>
-              <a:t>we add one more cycle</a:t>
-            </a:r>
-          </a:p>
-          <a:p>
-            <a:pPr marL="285750" indent="-285750">
-              <a:buFont typeface="Arial" panose="020B0604020202020204" pitchFamily="34" charset="0"/>
-              <a:buChar char="•"/>
-            </a:pPr>
-            <a:r>
-              <a:rPr lang="en-GB" sz="2000" dirty="0">
-                <a:sym typeface="Wingdings" pitchFamily="2" charset="2"/>
-              </a:rPr>
-              <a:t># linearly independent circuits is now 2</a:t>
+              <a:t> number of linearly independent circuits is now 2</a:t>
             </a:r>
             <a:endParaRPr lang="en-NL" sz="2000" dirty="0"/>
           </a:p>
@@ -18754,7 +20773,7 @@
 </p:sld>
 </file>
 
-<file path=ppt/slides/slide25.xml><?xml version="1.0" encoding="utf-8"?>
+<file path=ppt/slides/slide27.xml><?xml version="1.0" encoding="utf-8"?>
 <p:sld xmlns:a="http://schemas.openxmlformats.org/drawingml/2006/main" xmlns:r="http://schemas.openxmlformats.org/officeDocument/2006/relationships" xmlns:p="http://schemas.openxmlformats.org/presentationml/2006/main">
   <p:cSld>
     <p:spTree>
@@ -18828,7 +20847,7 @@
               <a:pPr>
                 <a:defRPr/>
               </a:pPr>
-              <a:t>25</a:t>
+              <a:t>27</a:t>
             </a:fld>
             <a:endParaRPr lang="en-US"/>
           </a:p>
@@ -20678,8 +22697,8 @@
         </p:nvSpPr>
         <p:spPr>
           <a:xfrm>
-            <a:off x="2392686" y="4923220"/>
-            <a:ext cx="2035298" cy="461665"/>
+            <a:off x="2020031" y="4911451"/>
+            <a:ext cx="3704097" cy="1015663"/>
           </a:xfrm>
           <a:prstGeom prst="rect">
             <a:avLst/>
@@ -20692,9 +22711,23 @@
           </a:bodyPr>
           <a:lstStyle/>
           <a:p>
+            <a:pPr marL="171450" indent="-171450">
+              <a:buFont typeface="Arial" panose="020B0604020202020204" pitchFamily="34" charset="0"/>
+              <a:buChar char="•"/>
+            </a:pPr>
             <a:r>
               <a:rPr lang="en-US" sz="1200" dirty="0"/>
               <a:t>Add one fake edge to make it strongly connected</a:t>
+            </a:r>
+          </a:p>
+          <a:p>
+            <a:pPr marL="171450" indent="-171450">
+              <a:buFont typeface="Arial" panose="020B0604020202020204" pitchFamily="34" charset="0"/>
+              <a:buChar char="•"/>
+            </a:pPr>
+            <a:r>
+              <a:rPr lang="en-US" sz="1200" dirty="0"/>
+              <a:t>This also allows non-cyclic logics to be represented as circuits. E.g. the non-cyclic path [1,2,4,6,7] in the original program is represented as a circuit [1,2,4,6,7,1] in the modified CFG. </a:t>
             </a:r>
             <a:endParaRPr lang="en-NL" sz="1200" dirty="0"/>
           </a:p>
@@ -20899,7 +22932,7 @@
 </p:sld>
 </file>
 
-<file path=ppt/slides/slide26.xml><?xml version="1.0" encoding="utf-8"?>
+<file path=ppt/slides/slide28.xml><?xml version="1.0" encoding="utf-8"?>
 <p:sld xmlns:a="http://schemas.openxmlformats.org/drawingml/2006/main" xmlns:r="http://schemas.openxmlformats.org/officeDocument/2006/relationships" xmlns:p="http://schemas.openxmlformats.org/presentationml/2006/main">
   <p:cSld>
     <p:spTree>
@@ -20973,7 +23006,7 @@
               <a:pPr>
                 <a:defRPr/>
               </a:pPr>
-              <a:t>26</a:t>
+              <a:t>28</a:t>
             </a:fld>
             <a:endParaRPr lang="en-US"/>
           </a:p>
@@ -21914,8 +23947,8 @@
         </p:nvSpPr>
         <p:spPr>
           <a:xfrm>
-            <a:off x="2580810" y="1840740"/>
-            <a:ext cx="5371456" cy="3139321"/>
+            <a:off x="2627784" y="1721246"/>
+            <a:ext cx="5878252" cy="4247317"/>
           </a:xfrm>
           <a:prstGeom prst="rect">
             <a:avLst/>
@@ -21929,9 +23962,25 @@
           <a:lstStyle/>
           <a:p>
             <a:r>
+              <a:rPr lang="en-GB" b="1" dirty="0"/>
+              <a:t>Premise</a:t>
+            </a:r>
+            <a:r>
               <a:rPr lang="en-GB" dirty="0"/>
-              <a:t>Aim to cover at least all independent “circuits” in your program: </a:t>
-            </a:r>
+              <a:t>: the circuits are the main source of complexity in your program.</a:t>
+            </a:r>
+          </a:p>
+          <a:p>
+            <a:endParaRPr lang="en-GB" dirty="0"/>
+          </a:p>
+          <a:p>
+            <a:r>
+              <a:rPr lang="en-GB" dirty="0"/>
+              <a:t>So: aim to cover at least all independent “circuits” in your program: </a:t>
+            </a:r>
+          </a:p>
+          <a:p>
+            <a:endParaRPr lang="en-GB" dirty="0"/>
           </a:p>
           <a:p>
             <a:pPr marL="285750" indent="-285750">
@@ -22010,6 +24059,64 @@
               <a:t>McCabe number is not the same as #paths in the program. The later can be exponential or unbounded. #McCabe TR grows much slower. </a:t>
             </a:r>
             <a:endParaRPr lang="en-NL" dirty="0"/>
+          </a:p>
+        </p:txBody>
+      </p:sp>
+      <p:sp>
+        <p:nvSpPr>
+          <p:cNvPr id="5" name="Rounded Rectangle 4">
+            <a:extLst>
+              <a:ext uri="{FF2B5EF4-FFF2-40B4-BE49-F238E27FC236}">
+                <a16:creationId xmlns:a16="http://schemas.microsoft.com/office/drawing/2014/main" id="{179CBEC1-AC62-AC78-B194-201A1BF2BCEE}"/>
+              </a:ext>
+            </a:extLst>
+          </p:cNvPr>
+          <p:cNvSpPr/>
+          <p:nvPr/>
+        </p:nvSpPr>
+        <p:spPr>
+          <a:xfrm>
+            <a:off x="2487878" y="1542315"/>
+            <a:ext cx="6109720" cy="1667208"/>
+          </a:xfrm>
+          <a:prstGeom prst="roundRect">
+            <a:avLst>
+              <a:gd name="adj" fmla="val 25954"/>
+            </a:avLst>
+          </a:prstGeom>
+          <a:solidFill>
+            <a:srgbClr val="FFC000">
+              <a:alpha val="25000"/>
+            </a:srgbClr>
+          </a:solidFill>
+          <a:ln>
+            <a:solidFill>
+              <a:srgbClr val="FFC000"/>
+            </a:solidFill>
+          </a:ln>
+        </p:spPr>
+        <p:style>
+          <a:lnRef idx="2">
+            <a:schemeClr val="accent1">
+              <a:shade val="50000"/>
+            </a:schemeClr>
+          </a:lnRef>
+          <a:fillRef idx="1">
+            <a:schemeClr val="accent1"/>
+          </a:fillRef>
+          <a:effectRef idx="0">
+            <a:schemeClr val="accent1"/>
+          </a:effectRef>
+          <a:fontRef idx="minor">
+            <a:schemeClr val="lt1"/>
+          </a:fontRef>
+        </p:style>
+        <p:txBody>
+          <a:bodyPr rtlCol="0" anchor="ctr"/>
+          <a:lstStyle/>
+          <a:p>
+            <a:pPr algn="ctr"/>
+            <a:endParaRPr lang="en-US"/>
           </a:p>
         </p:txBody>
       </p:sp>
@@ -22026,7 +24133,7 @@
 </p:sld>
 </file>
 
-<file path=ppt/slides/slide27.xml><?xml version="1.0" encoding="utf-8"?>
+<file path=ppt/slides/slide29.xml><?xml version="1.0" encoding="utf-8"?>
 <p:sld xmlns:a="http://schemas.openxmlformats.org/drawingml/2006/main" xmlns:r="http://schemas.openxmlformats.org/officeDocument/2006/relationships" xmlns:p="http://schemas.openxmlformats.org/presentationml/2006/main">
   <p:cSld>
     <p:spTree>
@@ -22100,7 +24207,7 @@
               <a:pPr>
                 <a:defRPr/>
               </a:pPr>
-              <a:t>27</a:t>
+              <a:t>29</a:t>
             </a:fld>
             <a:endParaRPr lang="en-US"/>
           </a:p>
@@ -22665,7 +24772,7 @@
         <p:spPr>
           <a:xfrm>
             <a:off x="2915816" y="1916832"/>
-            <a:ext cx="4448654" cy="923330"/>
+            <a:ext cx="4237057" cy="1200329"/>
           </a:xfrm>
           <a:prstGeom prst="rect">
             <a:avLst/>
@@ -22686,13 +24793,19 @@
           <a:p>
             <a:r>
               <a:rPr lang="en-NL" dirty="0"/>
-              <a:t>#test cases needed to cover all edges = 2</a:t>
+              <a:t>#tests needed to cover all edges = 2</a:t>
             </a:r>
           </a:p>
           <a:p>
             <a:r>
               <a:rPr lang="en-NL" dirty="0"/>
-              <a:t>#test cases needed to cover McCabe = 3</a:t>
+              <a:t>#tests needed to cover McCabe = 3</a:t>
+            </a:r>
+          </a:p>
+          <a:p>
+            <a:r>
+              <a:rPr lang="en-NL" dirty="0"/>
+              <a:t>#tests needed to cover all paths = 4 </a:t>
             </a:r>
           </a:p>
         </p:txBody>
@@ -23662,8 +25775,8 @@
             <a:avLst/>
           </a:prstGeom>
           <a:solidFill>
-            <a:schemeClr val="accent5">
-              <a:lumMod val="75000"/>
+            <a:schemeClr val="accent1">
+              <a:lumMod val="50000"/>
             </a:schemeClr>
           </a:solidFill>
           <a:ln>
@@ -23824,9 +25937,7 @@
             <a:avLst/>
           </a:prstGeom>
           <a:solidFill>
-            <a:schemeClr val="accent5">
-              <a:lumMod val="75000"/>
-            </a:schemeClr>
+            <a:srgbClr val="0A8741"/>
           </a:solidFill>
           <a:ln>
             <a:noFill/>
@@ -24348,7 +26459,7 @@
         <p:spPr>
           <a:xfrm>
             <a:off x="2915816" y="4477674"/>
-            <a:ext cx="4448654" cy="923330"/>
+            <a:ext cx="4237057" cy="1200329"/>
           </a:xfrm>
           <a:prstGeom prst="rect">
             <a:avLst/>
@@ -24369,13 +26480,89 @@
           <a:p>
             <a:r>
               <a:rPr lang="en-NL" dirty="0"/>
-              <a:t>#test cases needed to cover all edges = 2</a:t>
+              <a:t>#tests needed to cover all edges = 2</a:t>
             </a:r>
           </a:p>
           <a:p>
             <a:r>
               <a:rPr lang="en-NL" dirty="0"/>
-              <a:t>#test cases needed to cover McCabe = 5</a:t>
+              <a:t>#tests needed to cover McCabe = 5</a:t>
+            </a:r>
+          </a:p>
+          <a:p>
+            <a:r>
+              <a:rPr lang="en-NL" dirty="0"/>
+              <a:t>#tests needed to cover all paths = 16</a:t>
+            </a:r>
+          </a:p>
+        </p:txBody>
+      </p:sp>
+      <p:sp>
+        <p:nvSpPr>
+          <p:cNvPr id="3" name="TextBox 2">
+            <a:extLst>
+              <a:ext uri="{FF2B5EF4-FFF2-40B4-BE49-F238E27FC236}">
+                <a16:creationId xmlns:a16="http://schemas.microsoft.com/office/drawing/2014/main" id="{253F93EB-2B56-38E1-7521-2FE7FB7D3F61}"/>
+              </a:ext>
+            </a:extLst>
+          </p:cNvPr>
+          <p:cNvSpPr txBox="1"/>
+          <p:nvPr/>
+        </p:nvSpPr>
+        <p:spPr>
+          <a:xfrm>
+            <a:off x="288352" y="2354471"/>
+            <a:ext cx="1159292" cy="369332"/>
+          </a:xfrm>
+          <a:prstGeom prst="rect">
+            <a:avLst/>
+          </a:prstGeom>
+          <a:noFill/>
+        </p:spPr>
+        <p:txBody>
+          <a:bodyPr wrap="none" rtlCol="0">
+            <a:spAutoFit/>
+          </a:bodyPr>
+          <a:lstStyle/>
+          <a:p>
+            <a:r>
+              <a:rPr lang="en-NL" dirty="0"/>
+              <a:t>N=7, E=8</a:t>
+            </a:r>
+          </a:p>
+        </p:txBody>
+      </p:sp>
+      <p:sp>
+        <p:nvSpPr>
+          <p:cNvPr id="5" name="TextBox 4">
+            <a:extLst>
+              <a:ext uri="{FF2B5EF4-FFF2-40B4-BE49-F238E27FC236}">
+                <a16:creationId xmlns:a16="http://schemas.microsoft.com/office/drawing/2014/main" id="{3A9B096A-F76A-F56B-A447-646D9296A569}"/>
+              </a:ext>
+            </a:extLst>
+          </p:cNvPr>
+          <p:cNvSpPr txBox="1"/>
+          <p:nvPr/>
+        </p:nvSpPr>
+        <p:spPr>
+          <a:xfrm>
+            <a:off x="267879" y="4744162"/>
+            <a:ext cx="1415772" cy="369332"/>
+          </a:xfrm>
+          <a:prstGeom prst="rect">
+            <a:avLst/>
+          </a:prstGeom>
+          <a:noFill/>
+        </p:spPr>
+        <p:txBody>
+          <a:bodyPr wrap="none" rtlCol="0">
+            <a:spAutoFit/>
+          </a:bodyPr>
+          <a:lstStyle/>
+          <a:p>
+            <a:r>
+              <a:rPr lang="en-NL" dirty="0"/>
+              <a:t>N=13, E=16</a:t>
             </a:r>
           </a:p>
         </p:txBody>
@@ -24393,7 +26580,7 @@
 </p:sld>
 </file>
 
-<file path=ppt/slides/slide28.xml><?xml version="1.0" encoding="utf-8"?>
+<file path=ppt/slides/slide3.xml><?xml version="1.0" encoding="utf-8"?>
 <p:sld xmlns:a="http://schemas.openxmlformats.org/drawingml/2006/main" xmlns:r="http://schemas.openxmlformats.org/officeDocument/2006/relationships" xmlns:p="http://schemas.openxmlformats.org/presentationml/2006/main">
   <p:cSld>
     <p:spTree>
@@ -24412,6 +26599,139 @@
       </p:grpSpPr>
       <p:sp>
         <p:nvSpPr>
+          <p:cNvPr id="2" name="Title 1">
+            <a:extLst>
+              <a:ext uri="{FF2B5EF4-FFF2-40B4-BE49-F238E27FC236}">
+                <a16:creationId xmlns:a16="http://schemas.microsoft.com/office/drawing/2014/main" id="{C88053B0-3D12-604E-82DF-093E790F97E5}"/>
+              </a:ext>
+            </a:extLst>
+          </p:cNvPr>
+          <p:cNvSpPr>
+            <a:spLocks noGrp="1"/>
+          </p:cNvSpPr>
+          <p:nvPr>
+            <p:ph type="title"/>
+          </p:nvPr>
+        </p:nvSpPr>
+        <p:spPr/>
+        <p:txBody>
+          <a:bodyPr/>
+          <a:lstStyle/>
+          <a:p>
+            <a:r>
+              <a:rPr lang="en-US" dirty="0"/>
+              <a:t>Are we good now?</a:t>
+            </a:r>
+          </a:p>
+        </p:txBody>
+      </p:sp>
+      <p:sp>
+        <p:nvSpPr>
+          <p:cNvPr id="3" name="Content Placeholder 2">
+            <a:extLst>
+              <a:ext uri="{FF2B5EF4-FFF2-40B4-BE49-F238E27FC236}">
+                <a16:creationId xmlns:a16="http://schemas.microsoft.com/office/drawing/2014/main" id="{BD8379AA-AB91-0B42-9FBD-18D6032A29FC}"/>
+              </a:ext>
+            </a:extLst>
+          </p:cNvPr>
+          <p:cNvSpPr>
+            <a:spLocks noGrp="1"/>
+          </p:cNvSpPr>
+          <p:nvPr>
+            <p:ph idx="1"/>
+          </p:nvPr>
+        </p:nvSpPr>
+        <p:spPr/>
+        <p:txBody>
+          <a:bodyPr/>
+          <a:lstStyle/>
+          <a:p>
+            <a:r>
+              <a:rPr lang="en-US" dirty="0"/>
+              <a:t>So now you know how to write tests (at least, unit tests).</a:t>
+            </a:r>
+          </a:p>
+          <a:p>
+            <a:r>
+              <a:rPr lang="en-US" dirty="0"/>
+              <a:t>Next, you came up with a bunch of tests.</a:t>
+            </a:r>
+          </a:p>
+          <a:p>
+            <a:r>
+              <a:rPr lang="en-US" dirty="0"/>
+              <a:t>Question: are these tests “enough” ? </a:t>
+            </a:r>
+          </a:p>
+        </p:txBody>
+      </p:sp>
+      <p:sp>
+        <p:nvSpPr>
+          <p:cNvPr id="4" name="Slide Number Placeholder 3">
+            <a:extLst>
+              <a:ext uri="{FF2B5EF4-FFF2-40B4-BE49-F238E27FC236}">
+                <a16:creationId xmlns:a16="http://schemas.microsoft.com/office/drawing/2014/main" id="{17DBA1E2-F5B2-B242-90C2-9CAF3F921FCB}"/>
+              </a:ext>
+            </a:extLst>
+          </p:cNvPr>
+          <p:cNvSpPr>
+            <a:spLocks noGrp="1"/>
+          </p:cNvSpPr>
+          <p:nvPr>
+            <p:ph type="sldNum" sz="quarter" idx="12"/>
+          </p:nvPr>
+        </p:nvSpPr>
+        <p:spPr/>
+        <p:txBody>
+          <a:bodyPr/>
+          <a:lstStyle/>
+          <a:p>
+            <a:pPr>
+              <a:defRPr/>
+            </a:pPr>
+            <a:fld id="{F7C0A3F7-46F3-44CF-95B7-0304031AA6EA}" type="slidenum">
+              <a:rPr lang="en-US" smtClean="0"/>
+              <a:pPr>
+                <a:defRPr/>
+              </a:pPr>
+              <a:t>3</a:t>
+            </a:fld>
+            <a:endParaRPr lang="en-US"/>
+          </a:p>
+        </p:txBody>
+      </p:sp>
+    </p:spTree>
+    <p:extLst>
+      <p:ext uri="{BB962C8B-B14F-4D97-AF65-F5344CB8AC3E}">
+        <p14:creationId xmlns:p14="http://schemas.microsoft.com/office/powerpoint/2010/main" val="1997095669"/>
+      </p:ext>
+    </p:extLst>
+  </p:cSld>
+  <p:clrMapOvr>
+    <a:masterClrMapping/>
+  </p:clrMapOvr>
+</p:sld>
+</file>
+
+<file path=ppt/slides/slide30.xml><?xml version="1.0" encoding="utf-8"?>
+<p:sld xmlns:a="http://schemas.openxmlformats.org/drawingml/2006/main" xmlns:r="http://schemas.openxmlformats.org/officeDocument/2006/relationships" xmlns:p="http://schemas.openxmlformats.org/presentationml/2006/main">
+  <p:cSld>
+    <p:spTree>
+      <p:nvGrpSpPr>
+        <p:cNvPr id="1" name=""/>
+        <p:cNvGrpSpPr/>
+        <p:nvPr/>
+      </p:nvGrpSpPr>
+      <p:grpSpPr>
+        <a:xfrm>
+          <a:off x="0" y="0"/>
+          <a:ext cx="0" cy="0"/>
+          <a:chOff x="0" y="0"/>
+          <a:chExt cx="0" cy="0"/>
+        </a:xfrm>
+      </p:grpSpPr>
+      <p:sp>
+        <p:nvSpPr>
           <p:cNvPr id="17" name="Rounded Rectangle 16">
             <a:extLst>
               <a:ext uri="{FF2B5EF4-FFF2-40B4-BE49-F238E27FC236}">
@@ -24586,7 +26906,7 @@
               <a:pPr>
                 <a:defRPr/>
               </a:pPr>
-              <a:t>28</a:t>
+              <a:t>30</a:t>
             </a:fld>
             <a:endParaRPr lang="en-US"/>
           </a:p>
@@ -25245,7 +27565,7 @@
 </p:sld>
 </file>
 
-<file path=ppt/slides/slide29.xml><?xml version="1.0" encoding="utf-8"?>
+<file path=ppt/slides/slide31.xml><?xml version="1.0" encoding="utf-8"?>
 <p:sld xmlns:a="http://schemas.openxmlformats.org/drawingml/2006/main" xmlns:r="http://schemas.openxmlformats.org/officeDocument/2006/relationships" xmlns:p="http://schemas.openxmlformats.org/presentationml/2006/main">
   <p:cSld>
     <p:spTree>
@@ -25307,7 +27627,7 @@
               <a:pPr>
                 <a:defRPr/>
               </a:pPr>
-              <a:t>29</a:t>
+              <a:t>31</a:t>
             </a:fld>
             <a:endParaRPr lang="en-US"/>
           </a:p>
@@ -26156,7 +28476,7 @@
 </p:sld>
 </file>
 
-<file path=ppt/slides/slide3.xml><?xml version="1.0" encoding="utf-8"?>
+<file path=ppt/slides/slide32.xml><?xml version="1.0" encoding="utf-8"?>
 <p:sld xmlns:a="http://schemas.openxmlformats.org/drawingml/2006/main" xmlns:r="http://schemas.openxmlformats.org/officeDocument/2006/relationships" xmlns:p="http://schemas.openxmlformats.org/presentationml/2006/main">
   <p:cSld>
     <p:spTree>
@@ -26175,139 +28495,6 @@
       </p:grpSpPr>
       <p:sp>
         <p:nvSpPr>
-          <p:cNvPr id="2" name="Title 1">
-            <a:extLst>
-              <a:ext uri="{FF2B5EF4-FFF2-40B4-BE49-F238E27FC236}">
-                <a16:creationId xmlns:a16="http://schemas.microsoft.com/office/drawing/2014/main" id="{C88053B0-3D12-604E-82DF-093E790F97E5}"/>
-              </a:ext>
-            </a:extLst>
-          </p:cNvPr>
-          <p:cNvSpPr>
-            <a:spLocks noGrp="1"/>
-          </p:cNvSpPr>
-          <p:nvPr>
-            <p:ph type="title"/>
-          </p:nvPr>
-        </p:nvSpPr>
-        <p:spPr/>
-        <p:txBody>
-          <a:bodyPr/>
-          <a:lstStyle/>
-          <a:p>
-            <a:r>
-              <a:rPr lang="en-US" dirty="0"/>
-              <a:t>Are we good now?</a:t>
-            </a:r>
-          </a:p>
-        </p:txBody>
-      </p:sp>
-      <p:sp>
-        <p:nvSpPr>
-          <p:cNvPr id="3" name="Content Placeholder 2">
-            <a:extLst>
-              <a:ext uri="{FF2B5EF4-FFF2-40B4-BE49-F238E27FC236}">
-                <a16:creationId xmlns:a16="http://schemas.microsoft.com/office/drawing/2014/main" id="{BD8379AA-AB91-0B42-9FBD-18D6032A29FC}"/>
-              </a:ext>
-            </a:extLst>
-          </p:cNvPr>
-          <p:cNvSpPr>
-            <a:spLocks noGrp="1"/>
-          </p:cNvSpPr>
-          <p:nvPr>
-            <p:ph idx="1"/>
-          </p:nvPr>
-        </p:nvSpPr>
-        <p:spPr/>
-        <p:txBody>
-          <a:bodyPr/>
-          <a:lstStyle/>
-          <a:p>
-            <a:r>
-              <a:rPr lang="en-US" dirty="0"/>
-              <a:t>So now you know how to write tests (at least, unit tests).</a:t>
-            </a:r>
-          </a:p>
-          <a:p>
-            <a:r>
-              <a:rPr lang="en-US" dirty="0"/>
-              <a:t>Next, you came up with a bunch of tests.</a:t>
-            </a:r>
-          </a:p>
-          <a:p>
-            <a:r>
-              <a:rPr lang="en-US" dirty="0"/>
-              <a:t>Question: are these tests “enough” ? </a:t>
-            </a:r>
-          </a:p>
-        </p:txBody>
-      </p:sp>
-      <p:sp>
-        <p:nvSpPr>
-          <p:cNvPr id="4" name="Slide Number Placeholder 3">
-            <a:extLst>
-              <a:ext uri="{FF2B5EF4-FFF2-40B4-BE49-F238E27FC236}">
-                <a16:creationId xmlns:a16="http://schemas.microsoft.com/office/drawing/2014/main" id="{17DBA1E2-F5B2-B242-90C2-9CAF3F921FCB}"/>
-              </a:ext>
-            </a:extLst>
-          </p:cNvPr>
-          <p:cNvSpPr>
-            <a:spLocks noGrp="1"/>
-          </p:cNvSpPr>
-          <p:nvPr>
-            <p:ph type="sldNum" sz="quarter" idx="12"/>
-          </p:nvPr>
-        </p:nvSpPr>
-        <p:spPr/>
-        <p:txBody>
-          <a:bodyPr/>
-          <a:lstStyle/>
-          <a:p>
-            <a:pPr>
-              <a:defRPr/>
-            </a:pPr>
-            <a:fld id="{F7C0A3F7-46F3-44CF-95B7-0304031AA6EA}" type="slidenum">
-              <a:rPr lang="en-US" smtClean="0"/>
-              <a:pPr>
-                <a:defRPr/>
-              </a:pPr>
-              <a:t>3</a:t>
-            </a:fld>
-            <a:endParaRPr lang="en-US"/>
-          </a:p>
-        </p:txBody>
-      </p:sp>
-    </p:spTree>
-    <p:extLst>
-      <p:ext uri="{BB962C8B-B14F-4D97-AF65-F5344CB8AC3E}">
-        <p14:creationId xmlns:p14="http://schemas.microsoft.com/office/powerpoint/2010/main" val="1997095669"/>
-      </p:ext>
-    </p:extLst>
-  </p:cSld>
-  <p:clrMapOvr>
-    <a:masterClrMapping/>
-  </p:clrMapOvr>
-</p:sld>
-</file>
-
-<file path=ppt/slides/slide30.xml><?xml version="1.0" encoding="utf-8"?>
-<p:sld xmlns:a="http://schemas.openxmlformats.org/drawingml/2006/main" xmlns:r="http://schemas.openxmlformats.org/officeDocument/2006/relationships" xmlns:p="http://schemas.openxmlformats.org/presentationml/2006/main">
-  <p:cSld>
-    <p:spTree>
-      <p:nvGrpSpPr>
-        <p:cNvPr id="1" name=""/>
-        <p:cNvGrpSpPr/>
-        <p:nvPr/>
-      </p:nvGrpSpPr>
-      <p:grpSpPr>
-        <a:xfrm>
-          <a:off x="0" y="0"/>
-          <a:ext cx="0" cy="0"/>
-          <a:chOff x="0" y="0"/>
-          <a:chExt cx="0" cy="0"/>
-        </a:xfrm>
-      </p:grpSpPr>
-      <p:sp>
-        <p:nvSpPr>
           <p:cNvPr id="18434" name="Title 1"/>
           <p:cNvSpPr>
             <a:spLocks noGrp="1"/>
@@ -26351,7 +28538,7 @@
               <a:pPr>
                 <a:defRPr/>
               </a:pPr>
-              <a:t>30</a:t>
+              <a:t>32</a:t>
             </a:fld>
             <a:endParaRPr lang="en-US"/>
           </a:p>
@@ -26847,7 +29034,7 @@
 </p:sld>
 </file>
 
-<file path=ppt/slides/slide31.xml><?xml version="1.0" encoding="utf-8"?>
+<file path=ppt/slides/slide33.xml><?xml version="1.0" encoding="utf-8"?>
 <p:sld xmlns:a="http://schemas.openxmlformats.org/drawingml/2006/main" xmlns:r="http://schemas.openxmlformats.org/officeDocument/2006/relationships" xmlns:p="http://schemas.openxmlformats.org/presentationml/2006/main">
   <p:cSld>
     <p:spTree>
@@ -26990,7 +29177,7 @@
               <a:pPr>
                 <a:defRPr/>
               </a:pPr>
-              <a:t>31</a:t>
+              <a:t>33</a:t>
             </a:fld>
             <a:endParaRPr lang="en-US" dirty="0"/>
           </a:p>
@@ -28118,7 +30305,7 @@
 </p:sld>
 </file>
 
-<file path=ppt/slides/slide32.xml><?xml version="1.0" encoding="utf-8"?>
+<file path=ppt/slides/slide34.xml><?xml version="1.0" encoding="utf-8"?>
 <p:sld xmlns:a="http://schemas.openxmlformats.org/drawingml/2006/main" xmlns:r="http://schemas.openxmlformats.org/officeDocument/2006/relationships" xmlns:p="http://schemas.openxmlformats.org/presentationml/2006/main">
   <p:cSld>
     <p:spTree>
@@ -28333,7 +30520,7 @@
               <a:pPr>
                 <a:defRPr/>
               </a:pPr>
-              <a:t>32</a:t>
+              <a:t>34</a:t>
             </a:fld>
             <a:endParaRPr lang="en-US"/>
           </a:p>
@@ -28347,7 +30534,7 @@
 </p:sld>
 </file>
 
-<file path=ppt/slides/slide33.xml><?xml version="1.0" encoding="utf-8"?>
+<file path=ppt/slides/slide35.xml><?xml version="1.0" encoding="utf-8"?>
 <p:sld xmlns:a="http://schemas.openxmlformats.org/drawingml/2006/main" xmlns:r="http://schemas.openxmlformats.org/officeDocument/2006/relationships" xmlns:p="http://schemas.openxmlformats.org/presentationml/2006/main">
   <p:cSld>
     <p:spTree>
@@ -28562,7 +30749,7 @@
               <a:pPr>
                 <a:defRPr/>
               </a:pPr>
-              <a:t>33</a:t>
+              <a:t>35</a:t>
             </a:fld>
             <a:endParaRPr lang="en-US" dirty="0"/>
           </a:p>
@@ -30322,7 +32509,7 @@
 </p:sld>
 </file>
 
-<file path=ppt/slides/slide34.xml><?xml version="1.0" encoding="utf-8"?>
+<file path=ppt/slides/slide36.xml><?xml version="1.0" encoding="utf-8"?>
 <p:sld xmlns:a="http://schemas.openxmlformats.org/drawingml/2006/main" xmlns:r="http://schemas.openxmlformats.org/officeDocument/2006/relationships" xmlns:p="http://schemas.openxmlformats.org/presentationml/2006/main">
   <p:cSld>
     <p:spTree>
@@ -30486,7 +32673,7 @@
               <a:pPr>
                 <a:defRPr/>
               </a:pPr>
-              <a:t>34</a:t>
+              <a:t>36</a:t>
             </a:fld>
             <a:endParaRPr lang="en-US"/>
           </a:p>
@@ -32803,7 +34990,7 @@
 </p:sld>
 </file>
 
-<file path=ppt/slides/slide35.xml><?xml version="1.0" encoding="utf-8"?>
+<file path=ppt/slides/slide37.xml><?xml version="1.0" encoding="utf-8"?>
 <p:sld xmlns:a="http://schemas.openxmlformats.org/drawingml/2006/main" xmlns:r="http://schemas.openxmlformats.org/officeDocument/2006/relationships" xmlns:p="http://schemas.openxmlformats.org/presentationml/2006/main">
   <p:cSld>
     <p:spTree>
@@ -32879,15 +35066,7 @@
           <a:p>
             <a:r>
               <a:rPr lang="en-US" sz="2800" dirty="0"/>
-              <a:t>For example, we cannot test a Kelvin thermometer below 0</a:t>
-            </a:r>
-            <a:r>
-              <a:rPr lang="en-US" sz="2800" baseline="30000" dirty="0"/>
-              <a:t>o</a:t>
-            </a:r>
-            <a:r>
-              <a:rPr lang="en-US" sz="2800" dirty="0"/>
-              <a:t>.</a:t>
+              <a:t>For example, we cannot test a Kelvin thermometer below 0K.</a:t>
             </a:r>
           </a:p>
         </p:txBody>
@@ -32915,7 +35094,7 @@
               <a:pPr>
                 <a:defRPr/>
               </a:pPr>
-              <a:t>35</a:t>
+              <a:t>37</a:t>
             </a:fld>
             <a:endParaRPr lang="en-US"/>
           </a:p>
@@ -32929,7 +35108,7 @@
 </p:sld>
 </file>
 
-<file path=ppt/slides/slide36.xml><?xml version="1.0" encoding="utf-8"?>
+<file path=ppt/slides/slide38.xml><?xml version="1.0" encoding="utf-8"?>
 <p:sld xmlns:a="http://schemas.openxmlformats.org/drawingml/2006/main" xmlns:r="http://schemas.openxmlformats.org/officeDocument/2006/relationships" xmlns:p="http://schemas.openxmlformats.org/presentationml/2006/main">
   <p:cSld>
     <p:spTree>
@@ -33173,7 +35352,7 @@
               <a:pPr>
                 <a:defRPr/>
               </a:pPr>
-              <a:t>36</a:t>
+              <a:t>38</a:t>
             </a:fld>
             <a:endParaRPr lang="en-US"/>
           </a:p>
@@ -34202,7 +36381,7 @@
 </p:sld>
 </file>
 
-<file path=ppt/slides/slide37.xml><?xml version="1.0" encoding="utf-8"?>
+<file path=ppt/slides/slide39.xml><?xml version="1.0" encoding="utf-8"?>
 <p:sld xmlns:a="http://schemas.openxmlformats.org/drawingml/2006/main" xmlns:r="http://schemas.openxmlformats.org/officeDocument/2006/relationships" xmlns:p="http://schemas.openxmlformats.org/presentationml/2006/main">
   <p:cSld>
     <p:spTree>
@@ -34306,7 +36485,7 @@
               <a:pPr>
                 <a:defRPr/>
               </a:pPr>
-              <a:t>37</a:t>
+              <a:t>39</a:t>
             </a:fld>
             <a:endParaRPr lang="en-US"/>
           </a:p>
@@ -34320,7 +36499,271 @@
 </p:sld>
 </file>
 
-<file path=ppt/slides/slide38.xml><?xml version="1.0" encoding="utf-8"?>
+<file path=ppt/slides/slide4.xml><?xml version="1.0" encoding="utf-8"?>
+<p:sld xmlns:a="http://schemas.openxmlformats.org/drawingml/2006/main" xmlns:r="http://schemas.openxmlformats.org/officeDocument/2006/relationships" xmlns:p="http://schemas.openxmlformats.org/presentationml/2006/main">
+  <p:cSld>
+    <p:spTree>
+      <p:nvGrpSpPr>
+        <p:cNvPr id="1" name=""/>
+        <p:cNvGrpSpPr/>
+        <p:nvPr/>
+      </p:nvGrpSpPr>
+      <p:grpSpPr>
+        <a:xfrm>
+          <a:off x="0" y="0"/>
+          <a:ext cx="0" cy="0"/>
+          <a:chOff x="0" y="0"/>
+          <a:chExt cx="0" cy="0"/>
+        </a:xfrm>
+      </p:grpSpPr>
+      <p:sp>
+        <p:nvSpPr>
+          <p:cNvPr id="5" name="Rounded Rectangle 4">
+            <a:extLst>
+              <a:ext uri="{FF2B5EF4-FFF2-40B4-BE49-F238E27FC236}">
+                <a16:creationId xmlns:a16="http://schemas.microsoft.com/office/drawing/2014/main" id="{E78BCB04-9F51-3542-B9B4-A6F08AA714F9}"/>
+              </a:ext>
+            </a:extLst>
+          </p:cNvPr>
+          <p:cNvSpPr/>
+          <p:nvPr/>
+        </p:nvSpPr>
+        <p:spPr>
+          <a:xfrm>
+            <a:off x="457200" y="3284984"/>
+            <a:ext cx="8229600" cy="1800200"/>
+          </a:xfrm>
+          <a:prstGeom prst="roundRect">
+            <a:avLst>
+              <a:gd name="adj" fmla="val 21428"/>
+            </a:avLst>
+          </a:prstGeom>
+          <a:solidFill>
+            <a:srgbClr val="FFC000">
+              <a:alpha val="25000"/>
+            </a:srgbClr>
+          </a:solidFill>
+          <a:ln>
+            <a:solidFill>
+              <a:srgbClr val="FFC000"/>
+            </a:solidFill>
+          </a:ln>
+        </p:spPr>
+        <p:style>
+          <a:lnRef idx="2">
+            <a:schemeClr val="accent1">
+              <a:shade val="50000"/>
+            </a:schemeClr>
+          </a:lnRef>
+          <a:fillRef idx="1">
+            <a:schemeClr val="accent1"/>
+          </a:fillRef>
+          <a:effectRef idx="0">
+            <a:schemeClr val="accent1"/>
+          </a:effectRef>
+          <a:fontRef idx="minor">
+            <a:schemeClr val="lt1"/>
+          </a:fontRef>
+        </p:style>
+        <p:txBody>
+          <a:bodyPr rtlCol="0" anchor="ctr"/>
+          <a:lstStyle/>
+          <a:p>
+            <a:pPr algn="ctr"/>
+            <a:endParaRPr lang="en-US"/>
+          </a:p>
+        </p:txBody>
+      </p:sp>
+      <p:sp>
+        <p:nvSpPr>
+          <p:cNvPr id="2" name="Title 1">
+            <a:extLst>
+              <a:ext uri="{FF2B5EF4-FFF2-40B4-BE49-F238E27FC236}">
+                <a16:creationId xmlns:a16="http://schemas.microsoft.com/office/drawing/2014/main" id="{E3B54063-5E6C-8F4B-B651-3C458C34F1BB}"/>
+              </a:ext>
+            </a:extLst>
+          </p:cNvPr>
+          <p:cNvSpPr>
+            <a:spLocks noGrp="1"/>
+          </p:cNvSpPr>
+          <p:nvPr>
+            <p:ph type="title"/>
+          </p:nvPr>
+        </p:nvSpPr>
+        <p:spPr/>
+        <p:txBody>
+          <a:bodyPr/>
+          <a:lstStyle/>
+          <a:p>
+            <a:r>
+              <a:rPr lang="en-US" dirty="0"/>
+              <a:t>Test Coverage</a:t>
+            </a:r>
+          </a:p>
+        </p:txBody>
+      </p:sp>
+      <p:sp>
+        <p:nvSpPr>
+          <p:cNvPr id="3" name="Content Placeholder 2">
+            <a:extLst>
+              <a:ext uri="{FF2B5EF4-FFF2-40B4-BE49-F238E27FC236}">
+                <a16:creationId xmlns:a16="http://schemas.microsoft.com/office/drawing/2014/main" id="{37199BA3-FF79-A342-A24C-6A92231E83B1}"/>
+              </a:ext>
+            </a:extLst>
+          </p:cNvPr>
+          <p:cNvSpPr>
+            <a:spLocks noGrp="1"/>
+          </p:cNvSpPr>
+          <p:nvPr>
+            <p:ph idx="1"/>
+          </p:nvPr>
+        </p:nvSpPr>
+        <p:spPr>
+          <a:xfrm>
+            <a:off x="457200" y="1600200"/>
+            <a:ext cx="8229600" cy="4525963"/>
+          </a:xfrm>
+        </p:spPr>
+        <p:txBody>
+          <a:bodyPr/>
+          <a:lstStyle/>
+          <a:p>
+            <a:pPr marL="0" indent="0">
+              <a:buNone/>
+            </a:pPr>
+            <a:r>
+              <a:rPr lang="en-US" sz="2800" dirty="0"/>
+              <a:t>Doing more tests improves the completeness of our testing, but at some point we have to stop (e.g. we run out of money). Let’s try to provide a measure:</a:t>
+            </a:r>
+          </a:p>
+          <a:p>
+            <a:pPr marL="0" indent="0">
+              <a:buNone/>
+            </a:pPr>
+            <a:r>
+              <a:rPr lang="en-US" sz="2800" dirty="0"/>
+              <a:t> </a:t>
+            </a:r>
+          </a:p>
+          <a:p>
+            <a:pPr marL="0" indent="0" algn="ctr">
+              <a:buNone/>
+            </a:pPr>
+            <a:r>
+              <a:rPr lang="en-US" sz="2800" dirty="0"/>
+              <a:t>Test coverage: a </a:t>
+            </a:r>
+            <a:r>
+              <a:rPr lang="en-US" sz="2800" i="1" dirty="0">
+                <a:solidFill>
+                  <a:schemeClr val="accent1">
+                    <a:lumMod val="50000"/>
+                  </a:schemeClr>
+                </a:solidFill>
+              </a:rPr>
+              <a:t>measure</a:t>
+            </a:r>
+            <a:r>
+              <a:rPr lang="en-US" sz="2800" dirty="0"/>
+              <a:t> to compare the relative completeness of our testing (e.g. to say that a “test set” T</a:t>
+            </a:r>
+            <a:r>
+              <a:rPr lang="en-US" sz="2800" baseline="-25000" dirty="0"/>
+              <a:t>1</a:t>
+            </a:r>
+            <a:r>
+              <a:rPr lang="en-US" sz="2800" dirty="0"/>
+              <a:t> is relatively more complete than another set T</a:t>
+            </a:r>
+            <a:r>
+              <a:rPr lang="en-US" sz="2800" baseline="-25000" dirty="0"/>
+              <a:t>2</a:t>
+            </a:r>
+            <a:r>
+              <a:rPr lang="en-US" sz="2800" dirty="0"/>
+              <a:t>).</a:t>
+            </a:r>
+          </a:p>
+          <a:p>
+            <a:pPr marL="0" indent="0" algn="ctr">
+              <a:buNone/>
+            </a:pPr>
+            <a:endParaRPr lang="en-US" sz="2800" dirty="0"/>
+          </a:p>
+          <a:p>
+            <a:pPr marL="0" indent="0" algn="ctr">
+              <a:buNone/>
+            </a:pPr>
+            <a:r>
+              <a:rPr lang="en-US" sz="2800" dirty="0"/>
+              <a:t>As a measure, it is </a:t>
+            </a:r>
+            <a:r>
+              <a:rPr lang="en-US" sz="2800" i="1" dirty="0">
+                <a:solidFill>
+                  <a:schemeClr val="accent1">
+                    <a:lumMod val="50000"/>
+                  </a:schemeClr>
+                </a:solidFill>
+              </a:rPr>
+              <a:t>quantitative</a:t>
+            </a:r>
+            <a:r>
+              <a:rPr lang="en-US" sz="2800" dirty="0"/>
+              <a:t>.</a:t>
+            </a:r>
+          </a:p>
+        </p:txBody>
+      </p:sp>
+      <p:sp>
+        <p:nvSpPr>
+          <p:cNvPr id="4" name="Slide Number Placeholder 3">
+            <a:extLst>
+              <a:ext uri="{FF2B5EF4-FFF2-40B4-BE49-F238E27FC236}">
+                <a16:creationId xmlns:a16="http://schemas.microsoft.com/office/drawing/2014/main" id="{302F4EF3-F15D-5842-8078-825DFE1A3AAC}"/>
+              </a:ext>
+            </a:extLst>
+          </p:cNvPr>
+          <p:cNvSpPr>
+            <a:spLocks noGrp="1"/>
+          </p:cNvSpPr>
+          <p:nvPr>
+            <p:ph type="sldNum" sz="quarter" idx="12"/>
+          </p:nvPr>
+        </p:nvSpPr>
+        <p:spPr/>
+        <p:txBody>
+          <a:bodyPr/>
+          <a:lstStyle/>
+          <a:p>
+            <a:pPr>
+              <a:defRPr/>
+            </a:pPr>
+            <a:fld id="{F7C0A3F7-46F3-44CF-95B7-0304031AA6EA}" type="slidenum">
+              <a:rPr lang="en-US" smtClean="0"/>
+              <a:pPr>
+                <a:defRPr/>
+              </a:pPr>
+              <a:t>4</a:t>
+            </a:fld>
+            <a:endParaRPr lang="en-US"/>
+          </a:p>
+        </p:txBody>
+      </p:sp>
+    </p:spTree>
+    <p:extLst>
+      <p:ext uri="{BB962C8B-B14F-4D97-AF65-F5344CB8AC3E}">
+        <p14:creationId xmlns:p14="http://schemas.microsoft.com/office/powerpoint/2010/main" val="34989778"/>
+      </p:ext>
+    </p:extLst>
+  </p:cSld>
+  <p:clrMapOvr>
+    <a:masterClrMapping/>
+  </p:clrMapOvr>
+</p:sld>
+</file>
+
+<file path=ppt/slides/slide40.xml><?xml version="1.0" encoding="utf-8"?>
 <p:sld xmlns:a="http://schemas.openxmlformats.org/drawingml/2006/main" xmlns:r="http://schemas.openxmlformats.org/officeDocument/2006/relationships" xmlns:p="http://schemas.openxmlformats.org/presentationml/2006/main">
   <p:cSld>
     <p:spTree>
@@ -34601,7 +37044,7 @@
               <a:pPr>
                 <a:defRPr/>
               </a:pPr>
-              <a:t>38</a:t>
+              <a:t>40</a:t>
             </a:fld>
             <a:endParaRPr lang="en-US"/>
           </a:p>
@@ -35470,7 +37913,7 @@
 </p:sld>
 </file>
 
-<file path=ppt/slides/slide39.xml><?xml version="1.0" encoding="utf-8"?>
+<file path=ppt/slides/slide41.xml><?xml version="1.0" encoding="utf-8"?>
 <p:sld xmlns:a="http://schemas.openxmlformats.org/drawingml/2006/main" xmlns:r="http://schemas.openxmlformats.org/officeDocument/2006/relationships" xmlns:p="http://schemas.openxmlformats.org/presentationml/2006/main">
   <p:cSld>
     <p:spTree>
@@ -35859,7 +38302,7 @@
               <a:pPr>
                 <a:defRPr/>
               </a:pPr>
-              <a:t>39</a:t>
+              <a:t>41</a:t>
             </a:fld>
             <a:endParaRPr lang="en-US" dirty="0"/>
           </a:p>
@@ -36921,7 +39364,7 @@
 </p:sld>
 </file>
 
-<file path=ppt/slides/slide4.xml><?xml version="1.0" encoding="utf-8"?>
+<file path=ppt/slides/slide42.xml><?xml version="1.0" encoding="utf-8"?>
 <p:sld xmlns:a="http://schemas.openxmlformats.org/drawingml/2006/main" xmlns:r="http://schemas.openxmlformats.org/officeDocument/2006/relationships" xmlns:p="http://schemas.openxmlformats.org/presentationml/2006/main">
   <p:cSld>
     <p:spTree>
@@ -36940,270 +39383,6 @@
       </p:grpSpPr>
       <p:sp>
         <p:nvSpPr>
-          <p:cNvPr id="5" name="Rounded Rectangle 4">
-            <a:extLst>
-              <a:ext uri="{FF2B5EF4-FFF2-40B4-BE49-F238E27FC236}">
-                <a16:creationId xmlns:a16="http://schemas.microsoft.com/office/drawing/2014/main" id="{E78BCB04-9F51-3542-B9B4-A6F08AA714F9}"/>
-              </a:ext>
-            </a:extLst>
-          </p:cNvPr>
-          <p:cNvSpPr/>
-          <p:nvPr/>
-        </p:nvSpPr>
-        <p:spPr>
-          <a:xfrm>
-            <a:off x="457200" y="3284984"/>
-            <a:ext cx="8229600" cy="1800200"/>
-          </a:xfrm>
-          <a:prstGeom prst="roundRect">
-            <a:avLst>
-              <a:gd name="adj" fmla="val 21428"/>
-            </a:avLst>
-          </a:prstGeom>
-          <a:solidFill>
-            <a:srgbClr val="FFC000">
-              <a:alpha val="25000"/>
-            </a:srgbClr>
-          </a:solidFill>
-          <a:ln>
-            <a:solidFill>
-              <a:srgbClr val="FFC000"/>
-            </a:solidFill>
-          </a:ln>
-        </p:spPr>
-        <p:style>
-          <a:lnRef idx="2">
-            <a:schemeClr val="accent1">
-              <a:shade val="50000"/>
-            </a:schemeClr>
-          </a:lnRef>
-          <a:fillRef idx="1">
-            <a:schemeClr val="accent1"/>
-          </a:fillRef>
-          <a:effectRef idx="0">
-            <a:schemeClr val="accent1"/>
-          </a:effectRef>
-          <a:fontRef idx="minor">
-            <a:schemeClr val="lt1"/>
-          </a:fontRef>
-        </p:style>
-        <p:txBody>
-          <a:bodyPr rtlCol="0" anchor="ctr"/>
-          <a:lstStyle/>
-          <a:p>
-            <a:pPr algn="ctr"/>
-            <a:endParaRPr lang="en-US"/>
-          </a:p>
-        </p:txBody>
-      </p:sp>
-      <p:sp>
-        <p:nvSpPr>
-          <p:cNvPr id="2" name="Title 1">
-            <a:extLst>
-              <a:ext uri="{FF2B5EF4-FFF2-40B4-BE49-F238E27FC236}">
-                <a16:creationId xmlns:a16="http://schemas.microsoft.com/office/drawing/2014/main" id="{E3B54063-5E6C-8F4B-B651-3C458C34F1BB}"/>
-              </a:ext>
-            </a:extLst>
-          </p:cNvPr>
-          <p:cNvSpPr>
-            <a:spLocks noGrp="1"/>
-          </p:cNvSpPr>
-          <p:nvPr>
-            <p:ph type="title"/>
-          </p:nvPr>
-        </p:nvSpPr>
-        <p:spPr/>
-        <p:txBody>
-          <a:bodyPr/>
-          <a:lstStyle/>
-          <a:p>
-            <a:r>
-              <a:rPr lang="en-US" dirty="0"/>
-              <a:t>Test Coverage</a:t>
-            </a:r>
-          </a:p>
-        </p:txBody>
-      </p:sp>
-      <p:sp>
-        <p:nvSpPr>
-          <p:cNvPr id="3" name="Content Placeholder 2">
-            <a:extLst>
-              <a:ext uri="{FF2B5EF4-FFF2-40B4-BE49-F238E27FC236}">
-                <a16:creationId xmlns:a16="http://schemas.microsoft.com/office/drawing/2014/main" id="{37199BA3-FF79-A342-A24C-6A92231E83B1}"/>
-              </a:ext>
-            </a:extLst>
-          </p:cNvPr>
-          <p:cNvSpPr>
-            <a:spLocks noGrp="1"/>
-          </p:cNvSpPr>
-          <p:nvPr>
-            <p:ph idx="1"/>
-          </p:nvPr>
-        </p:nvSpPr>
-        <p:spPr>
-          <a:xfrm>
-            <a:off x="457200" y="1600200"/>
-            <a:ext cx="8229600" cy="4525963"/>
-          </a:xfrm>
-        </p:spPr>
-        <p:txBody>
-          <a:bodyPr/>
-          <a:lstStyle/>
-          <a:p>
-            <a:pPr marL="0" indent="0">
-              <a:buNone/>
-            </a:pPr>
-            <a:r>
-              <a:rPr lang="en-US" sz="2800" dirty="0"/>
-              <a:t>Doing more tests improves the completeness of our testing, but at some point we have to stop (e.g. we run out of money). Let’s try to provide a measure:</a:t>
-            </a:r>
-          </a:p>
-          <a:p>
-            <a:pPr marL="0" indent="0">
-              <a:buNone/>
-            </a:pPr>
-            <a:r>
-              <a:rPr lang="en-US" sz="2800" dirty="0"/>
-              <a:t> </a:t>
-            </a:r>
-          </a:p>
-          <a:p>
-            <a:pPr marL="0" indent="0" algn="ctr">
-              <a:buNone/>
-            </a:pPr>
-            <a:r>
-              <a:rPr lang="en-US" sz="2800" dirty="0"/>
-              <a:t>Test coverage: a </a:t>
-            </a:r>
-            <a:r>
-              <a:rPr lang="en-US" sz="2800" i="1" dirty="0">
-                <a:solidFill>
-                  <a:schemeClr val="accent1">
-                    <a:lumMod val="50000"/>
-                  </a:schemeClr>
-                </a:solidFill>
-              </a:rPr>
-              <a:t>measure</a:t>
-            </a:r>
-            <a:r>
-              <a:rPr lang="en-US" sz="2800" dirty="0"/>
-              <a:t> to compare the relative completeness of our testing (e.g. to say that a “test set” T</a:t>
-            </a:r>
-            <a:r>
-              <a:rPr lang="en-US" sz="2800" baseline="-25000" dirty="0"/>
-              <a:t>1</a:t>
-            </a:r>
-            <a:r>
-              <a:rPr lang="en-US" sz="2800" dirty="0"/>
-              <a:t> is relatively more complete than another set T</a:t>
-            </a:r>
-            <a:r>
-              <a:rPr lang="en-US" sz="2800" baseline="-25000" dirty="0"/>
-              <a:t>2</a:t>
-            </a:r>
-            <a:r>
-              <a:rPr lang="en-US" sz="2800" dirty="0"/>
-              <a:t>).</a:t>
-            </a:r>
-          </a:p>
-          <a:p>
-            <a:pPr marL="0" indent="0" algn="ctr">
-              <a:buNone/>
-            </a:pPr>
-            <a:endParaRPr lang="en-US" sz="2800" dirty="0"/>
-          </a:p>
-          <a:p>
-            <a:pPr marL="0" indent="0" algn="ctr">
-              <a:buNone/>
-            </a:pPr>
-            <a:r>
-              <a:rPr lang="en-US" sz="2800" dirty="0"/>
-              <a:t>As a measure, it is </a:t>
-            </a:r>
-            <a:r>
-              <a:rPr lang="en-US" sz="2800" i="1" dirty="0">
-                <a:solidFill>
-                  <a:schemeClr val="accent1">
-                    <a:lumMod val="50000"/>
-                  </a:schemeClr>
-                </a:solidFill>
-              </a:rPr>
-              <a:t>quantitative</a:t>
-            </a:r>
-            <a:r>
-              <a:rPr lang="en-US" sz="2800" dirty="0"/>
-              <a:t>.</a:t>
-            </a:r>
-          </a:p>
-        </p:txBody>
-      </p:sp>
-      <p:sp>
-        <p:nvSpPr>
-          <p:cNvPr id="4" name="Slide Number Placeholder 3">
-            <a:extLst>
-              <a:ext uri="{FF2B5EF4-FFF2-40B4-BE49-F238E27FC236}">
-                <a16:creationId xmlns:a16="http://schemas.microsoft.com/office/drawing/2014/main" id="{302F4EF3-F15D-5842-8078-825DFE1A3AAC}"/>
-              </a:ext>
-            </a:extLst>
-          </p:cNvPr>
-          <p:cNvSpPr>
-            <a:spLocks noGrp="1"/>
-          </p:cNvSpPr>
-          <p:nvPr>
-            <p:ph type="sldNum" sz="quarter" idx="12"/>
-          </p:nvPr>
-        </p:nvSpPr>
-        <p:spPr/>
-        <p:txBody>
-          <a:bodyPr/>
-          <a:lstStyle/>
-          <a:p>
-            <a:pPr>
-              <a:defRPr/>
-            </a:pPr>
-            <a:fld id="{F7C0A3F7-46F3-44CF-95B7-0304031AA6EA}" type="slidenum">
-              <a:rPr lang="en-US" smtClean="0"/>
-              <a:pPr>
-                <a:defRPr/>
-              </a:pPr>
-              <a:t>4</a:t>
-            </a:fld>
-            <a:endParaRPr lang="en-US"/>
-          </a:p>
-        </p:txBody>
-      </p:sp>
-    </p:spTree>
-    <p:extLst>
-      <p:ext uri="{BB962C8B-B14F-4D97-AF65-F5344CB8AC3E}">
-        <p14:creationId xmlns:p14="http://schemas.microsoft.com/office/powerpoint/2010/main" val="34989778"/>
-      </p:ext>
-    </p:extLst>
-  </p:cSld>
-  <p:clrMapOvr>
-    <a:masterClrMapping/>
-  </p:clrMapOvr>
-</p:sld>
-</file>
-
-<file path=ppt/slides/slide40.xml><?xml version="1.0" encoding="utf-8"?>
-<p:sld xmlns:a="http://schemas.openxmlformats.org/drawingml/2006/main" xmlns:r="http://schemas.openxmlformats.org/officeDocument/2006/relationships" xmlns:p="http://schemas.openxmlformats.org/presentationml/2006/main">
-  <p:cSld>
-    <p:spTree>
-      <p:nvGrpSpPr>
-        <p:cNvPr id="1" name=""/>
-        <p:cNvGrpSpPr/>
-        <p:nvPr/>
-      </p:nvGrpSpPr>
-      <p:grpSpPr>
-        <a:xfrm>
-          <a:off x="0" y="0"/>
-          <a:ext cx="0" cy="0"/>
-          <a:chOff x="0" y="0"/>
-          <a:chExt cx="0" cy="0"/>
-        </a:xfrm>
-      </p:grpSpPr>
-      <p:sp>
-        <p:nvSpPr>
           <p:cNvPr id="30" name="Rectangle 29"/>
           <p:cNvSpPr/>
           <p:nvPr/>
@@ -37597,7 +39776,7 @@
               <a:pPr>
                 <a:defRPr/>
               </a:pPr>
-              <a:t>40</a:t>
+              <a:t>42</a:t>
             </a:fld>
             <a:endParaRPr lang="en-US"/>
           </a:p>
@@ -38946,7 +41125,7 @@
 </p:sld>
 </file>
 
-<file path=ppt/slides/slide41.xml><?xml version="1.0" encoding="utf-8"?>
+<file path=ppt/slides/slide43.xml><?xml version="1.0" encoding="utf-8"?>
 <p:sld xmlns:a="http://schemas.openxmlformats.org/drawingml/2006/main" xmlns:r="http://schemas.openxmlformats.org/officeDocument/2006/relationships" xmlns:p="http://schemas.openxmlformats.org/presentationml/2006/main">
   <p:cSld>
     <p:spTree>
@@ -39158,7 +41337,7 @@
               <a:pPr>
                 <a:defRPr/>
               </a:pPr>
-              <a:t>41</a:t>
+              <a:t>43</a:t>
             </a:fld>
             <a:endParaRPr lang="en-US"/>
           </a:p>
@@ -39837,7 +42016,7 @@
 </p:sld>
 </file>
 
-<file path=ppt/slides/slide42.xml><?xml version="1.0" encoding="utf-8"?>
+<file path=ppt/slides/slide44.xml><?xml version="1.0" encoding="utf-8"?>
 <p:sld xmlns:a="http://schemas.openxmlformats.org/drawingml/2006/main" xmlns:r="http://schemas.openxmlformats.org/officeDocument/2006/relationships" xmlns:p="http://schemas.openxmlformats.org/presentationml/2006/main">
   <p:cSld>
     <p:spTree>
@@ -39943,7 +42122,7 @@
               <a:pPr>
                 <a:defRPr/>
               </a:pPr>
-              <a:t>42</a:t>
+              <a:t>44</a:t>
             </a:fld>
             <a:endParaRPr lang="en-US"/>
           </a:p>
@@ -40211,7 +42390,7 @@
               <a:rPr lang="en-US" sz="1400" i="1" dirty="0">
                 <a:latin typeface="+mn-lt"/>
               </a:rPr>
-              <a:t>You don’t know ahead which “add” will be called; it depends on the run-time type of c. E.g. it may refuse to add certain type of students.  Graph-based coverage is not strong enough to express this aspect.</a:t>
+              <a:t>You don’t know ahead which “add” will be called; it depends on the run-time type of c. E.g. it may refuse to add certain type of students.  Graph-based coverage alone is not strong enough to express this aspect.</a:t>
             </a:r>
           </a:p>
         </p:txBody>
@@ -40446,7 +42625,7 @@
 </p:sld>
 </file>
 
-<file path=ppt/slides/slide43.xml><?xml version="1.0" encoding="utf-8"?>
+<file path=ppt/slides/slide45.xml><?xml version="1.0" encoding="utf-8"?>
 <p:sld xmlns:a="http://schemas.openxmlformats.org/drawingml/2006/main" xmlns:r="http://schemas.openxmlformats.org/officeDocument/2006/relationships" xmlns:p="http://schemas.openxmlformats.org/presentationml/2006/main">
   <p:cSld>
     <p:spTree>
@@ -40477,14 +42656,14 @@
         </p:nvSpPr>
         <p:spPr>
           <a:xfrm>
-            <a:off x="878688" y="3802377"/>
-            <a:ext cx="1681963" cy="835571"/>
+            <a:off x="938557" y="4214338"/>
+            <a:ext cx="1473203" cy="409557"/>
           </a:xfrm>
           <a:prstGeom prst="rect">
             <a:avLst/>
           </a:prstGeom>
           <a:solidFill>
-            <a:schemeClr val="accent6">
+            <a:schemeClr val="accent1">
               <a:lumMod val="20000"/>
               <a:lumOff val="80000"/>
             </a:schemeClr>
@@ -40532,8 +42711,8 @@
         </p:nvSpPr>
         <p:spPr>
           <a:xfrm>
-            <a:off x="1252882" y="3797972"/>
-            <a:ext cx="870845" cy="493106"/>
+            <a:off x="932212" y="3834199"/>
+            <a:ext cx="1479548" cy="374557"/>
           </a:xfrm>
           <a:prstGeom prst="rect">
             <a:avLst/>
@@ -40730,9 +42909,94 @@
               <a:pPr>
                 <a:defRPr/>
               </a:pPr>
-              <a:t>43</a:t>
+              <a:t>45</a:t>
             </a:fld>
             <a:endParaRPr lang="en-US"/>
+          </a:p>
+        </p:txBody>
+      </p:sp>
+      <p:sp>
+        <p:nvSpPr>
+          <p:cNvPr id="7" name="Rectangle 6"/>
+          <p:cNvSpPr/>
+          <p:nvPr/>
+        </p:nvSpPr>
+        <p:spPr>
+          <a:xfrm>
+            <a:off x="4538146" y="3259518"/>
+            <a:ext cx="864096" cy="432048"/>
+          </a:xfrm>
+          <a:prstGeom prst="rect">
+            <a:avLst/>
+          </a:prstGeom>
+          <a:solidFill>
+            <a:srgbClr val="FFC000"/>
+          </a:solidFill>
+          <a:ln>
+            <a:noFill/>
+          </a:ln>
+        </p:spPr>
+        <p:style>
+          <a:lnRef idx="2">
+            <a:schemeClr val="accent1">
+              <a:shade val="50000"/>
+            </a:schemeClr>
+          </a:lnRef>
+          <a:fillRef idx="1">
+            <a:schemeClr val="accent1"/>
+          </a:fillRef>
+          <a:effectRef idx="0">
+            <a:schemeClr val="accent1"/>
+          </a:effectRef>
+          <a:fontRef idx="minor">
+            <a:schemeClr val="lt1"/>
+          </a:fontRef>
+        </p:style>
+        <p:txBody>
+          <a:bodyPr rtlCol="0" anchor="ctr"/>
+          <a:lstStyle/>
+          <a:p>
+            <a:pPr algn="ctr"/>
+            <a:r>
+              <a:rPr lang="en-US" sz="1400" b="1" dirty="0">
+                <a:solidFill>
+                  <a:schemeClr val="accent6">
+                    <a:lumMod val="60000"/>
+                    <a:lumOff val="40000"/>
+                  </a:schemeClr>
+                </a:solidFill>
+              </a:rPr>
+              <a:t>0</a:t>
+            </a:r>
+            <a:br>
+              <a:rPr lang="en-US" sz="1400" dirty="0">
+                <a:solidFill>
+                  <a:schemeClr val="tx1"/>
+                </a:solidFill>
+              </a:rPr>
+            </a:br>
+            <a:r>
+              <a:rPr lang="en-US" sz="1400" dirty="0">
+                <a:solidFill>
+                  <a:schemeClr val="tx1"/>
+                </a:solidFill>
+              </a:rPr>
+              <a:t>x</a:t>
+            </a:r>
+            <a:r>
+              <a:rPr lang="en-US" sz="1400" dirty="0">
+                <a:solidFill>
+                  <a:schemeClr val="tx1"/>
+                </a:solidFill>
+                <a:sym typeface="Symbol"/>
+              </a:rPr>
+              <a:t>0</a:t>
+            </a:r>
+            <a:endParaRPr lang="en-US" sz="1400" dirty="0">
+              <a:solidFill>
+                <a:schemeClr val="tx1"/>
+              </a:solidFill>
+            </a:endParaRPr>
           </a:p>
         </p:txBody>
       </p:sp>
@@ -40770,7 +43034,7 @@
               <a:rPr lang="en-US" sz="2400" dirty="0">
                 <a:latin typeface="+mn-lt"/>
               </a:rPr>
-              <a:t>f(x) {</a:t>
+              <a:t>f(x) { </a:t>
             </a:r>
             <a:br>
               <a:rPr lang="en-US" sz="2400" dirty="0">
@@ -40935,91 +43199,6 @@
                 <a:srgbClr val="C0C0C0"/>
               </a:highlight>
               <a:latin typeface="+mn-lt"/>
-            </a:endParaRPr>
-          </a:p>
-        </p:txBody>
-      </p:sp>
-      <p:sp>
-        <p:nvSpPr>
-          <p:cNvPr id="7" name="Rectangle 6"/>
-          <p:cNvSpPr/>
-          <p:nvPr/>
-        </p:nvSpPr>
-        <p:spPr>
-          <a:xfrm>
-            <a:off x="4538146" y="3259518"/>
-            <a:ext cx="864096" cy="432048"/>
-          </a:xfrm>
-          <a:prstGeom prst="rect">
-            <a:avLst/>
-          </a:prstGeom>
-          <a:solidFill>
-            <a:srgbClr val="FFC000"/>
-          </a:solidFill>
-          <a:ln>
-            <a:noFill/>
-          </a:ln>
-        </p:spPr>
-        <p:style>
-          <a:lnRef idx="2">
-            <a:schemeClr val="accent1">
-              <a:shade val="50000"/>
-            </a:schemeClr>
-          </a:lnRef>
-          <a:fillRef idx="1">
-            <a:schemeClr val="accent1"/>
-          </a:fillRef>
-          <a:effectRef idx="0">
-            <a:schemeClr val="accent1"/>
-          </a:effectRef>
-          <a:fontRef idx="minor">
-            <a:schemeClr val="lt1"/>
-          </a:fontRef>
-        </p:style>
-        <p:txBody>
-          <a:bodyPr rtlCol="0" anchor="ctr"/>
-          <a:lstStyle/>
-          <a:p>
-            <a:pPr algn="ctr"/>
-            <a:r>
-              <a:rPr lang="en-US" sz="1400" b="1" dirty="0">
-                <a:solidFill>
-                  <a:schemeClr val="accent6">
-                    <a:lumMod val="60000"/>
-                    <a:lumOff val="40000"/>
-                  </a:schemeClr>
-                </a:solidFill>
-              </a:rPr>
-              <a:t>0</a:t>
-            </a:r>
-            <a:br>
-              <a:rPr lang="en-US" sz="1400" dirty="0">
-                <a:solidFill>
-                  <a:schemeClr val="tx1"/>
-                </a:solidFill>
-              </a:rPr>
-            </a:br>
-            <a:r>
-              <a:rPr lang="en-US" sz="1400" dirty="0">
-                <a:solidFill>
-                  <a:schemeClr val="tx1"/>
-                </a:solidFill>
-              </a:rPr>
-              <a:t>x</a:t>
-            </a:r>
-            <a:r>
-              <a:rPr lang="en-US" sz="1400" dirty="0">
-                <a:solidFill>
-                  <a:schemeClr val="tx1"/>
-                </a:solidFill>
-                <a:sym typeface="Symbol"/>
-              </a:rPr>
-              <a:t>0</a:t>
-            </a:r>
-            <a:endParaRPr lang="en-US" sz="1400" dirty="0">
-              <a:solidFill>
-                <a:schemeClr val="tx1"/>
-              </a:solidFill>
             </a:endParaRPr>
           </a:p>
         </p:txBody>
@@ -41254,13 +43433,16 @@
       <p:cxnSp>
         <p:nvCxnSpPr>
           <p:cNvPr id="19" name="Straight Arrow Connector 18"/>
-          <p:cNvCxnSpPr/>
+          <p:cNvCxnSpPr>
+            <a:cxnSpLocks/>
+            <a:endCxn id="18" idx="0"/>
+          </p:cNvCxnSpPr>
           <p:nvPr/>
         </p:nvCxnSpPr>
         <p:spPr>
           <a:xfrm flipH="1">
-            <a:off x="4955156" y="2986002"/>
-            <a:ext cx="3398" cy="273516"/>
+            <a:off x="4970194" y="2465421"/>
+            <a:ext cx="15037" cy="344515"/>
           </a:xfrm>
           <a:prstGeom prst="straightConnector1">
             <a:avLst/>
@@ -41293,14 +43475,14 @@
           <p:cNvCxnSpPr>
             <a:cxnSpLocks/>
             <a:stCxn id="9" idx="1"/>
-            <a:endCxn id="7" idx="1"/>
+            <a:endCxn id="18" idx="1"/>
           </p:cNvCxnSpPr>
           <p:nvPr/>
         </p:nvCxnSpPr>
         <p:spPr>
           <a:xfrm rot="10800000" flipH="1">
-            <a:off x="4416346" y="3475542"/>
-            <a:ext cx="121800" cy="818312"/>
+            <a:off x="4416346" y="2949342"/>
+            <a:ext cx="121800" cy="1344512"/>
           </a:xfrm>
           <a:prstGeom prst="curvedConnector3">
             <a:avLst>
@@ -41339,7 +43521,7 @@
         </p:nvSpPr>
         <p:spPr>
           <a:xfrm>
-            <a:off x="6839675" y="3956816"/>
+            <a:off x="5621293" y="3935705"/>
             <a:ext cx="1107696" cy="688190"/>
           </a:xfrm>
           <a:prstGeom prst="rect">
@@ -41347,8 +43529,8 @@
           </a:prstGeom>
           <a:solidFill>
             <a:schemeClr val="accent5">
-              <a:lumMod val="20000"/>
-              <a:lumOff val="80000"/>
+              <a:lumMod val="40000"/>
+              <a:lumOff val="60000"/>
             </a:schemeClr>
           </a:solidFill>
           <a:ln>
@@ -41385,7 +43567,7 @@
                   </a:schemeClr>
                 </a:solidFill>
               </a:rPr>
-              <a:t>4</a:t>
+              <a:t>3</a:t>
             </a:r>
           </a:p>
           <a:p>
@@ -41406,29 +43588,11 @@
               </a:rPr>
               <a:t>retval</a:t>
             </a:r>
-            <a:br>
-              <a:rPr lang="en-US" sz="1400" b="1" dirty="0">
-                <a:solidFill>
-                  <a:schemeClr val="tx1"/>
-                </a:solidFill>
-              </a:rPr>
-            </a:br>
-            <a:r>
-              <a:rPr lang="en-US" sz="1400" b="1" dirty="0">
-                <a:solidFill>
-                  <a:schemeClr val="tx1"/>
-                </a:solidFill>
-              </a:rPr>
-              <a:t>return </a:t>
-            </a:r>
-            <a:r>
-              <a:rPr lang="en-US" sz="1400" dirty="0">
-                <a:solidFill>
-                  <a:schemeClr val="tx1"/>
-                </a:solidFill>
-              </a:rPr>
-              <a:t>r+1</a:t>
-            </a:r>
+            <a:endParaRPr lang="en-US" sz="1400" dirty="0">
+              <a:solidFill>
+                <a:schemeClr val="tx1"/>
+              </a:solidFill>
+            </a:endParaRPr>
           </a:p>
         </p:txBody>
       </p:sp>
@@ -41437,14 +43601,14 @@
           <p:cNvPr id="34" name="Straight Arrow Connector 33"/>
           <p:cNvCxnSpPr>
             <a:cxnSpLocks/>
-            <a:stCxn id="8" idx="0"/>
+            <a:endCxn id="35" idx="1"/>
           </p:cNvCxnSpPr>
           <p:nvPr/>
         </p:nvCxnSpPr>
         <p:spPr>
           <a:xfrm flipV="1">
-            <a:off x="6176865" y="2901184"/>
-            <a:ext cx="0" cy="354201"/>
+            <a:off x="6728989" y="2979041"/>
+            <a:ext cx="298033" cy="305182"/>
           </a:xfrm>
           <a:prstGeom prst="straightConnector1">
             <a:avLst/>
@@ -41477,14 +43641,13 @@
           <p:cNvCxnSpPr>
             <a:cxnSpLocks/>
             <a:stCxn id="35" idx="2"/>
-            <a:endCxn id="33" idx="0"/>
           </p:cNvCxnSpPr>
           <p:nvPr/>
         </p:nvCxnSpPr>
         <p:spPr>
-          <a:xfrm>
-            <a:off x="7379735" y="3687433"/>
-            <a:ext cx="13788" cy="269383"/>
+          <a:xfrm flipH="1">
+            <a:off x="6697955" y="3144261"/>
+            <a:ext cx="761115" cy="835300"/>
           </a:xfrm>
           <a:prstGeom prst="straightConnector1">
             <a:avLst/>
@@ -41516,19 +43679,19 @@
           <p:cNvPr id="38" name="Curved Connector 37"/>
           <p:cNvCxnSpPr>
             <a:cxnSpLocks/>
-            <a:stCxn id="33" idx="3"/>
+            <a:stCxn id="70" idx="3"/>
             <a:endCxn id="35" idx="3"/>
           </p:cNvCxnSpPr>
           <p:nvPr/>
         </p:nvCxnSpPr>
         <p:spPr>
-          <a:xfrm flipH="1" flipV="1">
-            <a:off x="7811783" y="3471409"/>
-            <a:ext cx="135588" cy="829502"/>
+          <a:xfrm flipV="1">
+            <a:off x="6728989" y="2979041"/>
+            <a:ext cx="1162129" cy="2167850"/>
           </a:xfrm>
           <a:prstGeom prst="curvedConnector3">
             <a:avLst>
-              <a:gd name="adj1" fmla="val -168599"/>
+              <a:gd name="adj1" fmla="val 119671"/>
             </a:avLst>
           </a:prstGeom>
           <a:ln w="28575">
@@ -41563,7 +43726,7 @@
         </p:nvSpPr>
         <p:spPr>
           <a:xfrm>
-            <a:off x="4854052" y="4853174"/>
+            <a:off x="4664427" y="5639587"/>
             <a:ext cx="2645626" cy="461665"/>
           </a:xfrm>
           <a:prstGeom prst="rect">
@@ -41601,8 +43764,8 @@
         </p:nvSpPr>
         <p:spPr>
           <a:xfrm>
-            <a:off x="6947687" y="3255385"/>
-            <a:ext cx="864096" cy="432048"/>
+            <a:off x="7027022" y="2813820"/>
+            <a:ext cx="864096" cy="330441"/>
           </a:xfrm>
           <a:prstGeom prst="rect">
             <a:avLst/>
@@ -41635,20 +43798,6 @@
         <p:txBody>
           <a:bodyPr rtlCol="0" anchor="ctr"/>
           <a:lstStyle/>
-          <a:p>
-            <a:pPr algn="ctr"/>
-            <a:r>
-              <a:rPr lang="en-US" sz="1400" b="1" dirty="0">
-                <a:solidFill>
-                  <a:schemeClr val="accent6">
-                    <a:lumMod val="60000"/>
-                    <a:lumOff val="40000"/>
-                  </a:schemeClr>
-                </a:solidFill>
-              </a:rPr>
-              <a:t>3</a:t>
-            </a:r>
-          </a:p>
           <a:p>
             <a:pPr algn="ctr"/>
             <a:r>
@@ -41714,8 +43863,8 @@
         </p:nvCxnSpPr>
         <p:spPr>
           <a:xfrm flipV="1">
-            <a:off x="7379735" y="2901184"/>
-            <a:ext cx="13788" cy="354201"/>
+            <a:off x="7459070" y="2375799"/>
+            <a:ext cx="0" cy="438021"/>
           </a:xfrm>
           <a:prstGeom prst="straightConnector1">
             <a:avLst/>
@@ -41754,14 +43903,14 @@
           <p:cNvCxnSpPr>
             <a:cxnSpLocks/>
             <a:stCxn id="8" idx="2"/>
-            <a:endCxn id="33" idx="1"/>
+            <a:endCxn id="33" idx="0"/>
           </p:cNvCxnSpPr>
           <p:nvPr/>
         </p:nvCxnSpPr>
         <p:spPr>
-          <a:xfrm>
-            <a:off x="6176865" y="3687433"/>
-            <a:ext cx="662810" cy="613478"/>
+          <a:xfrm flipH="1">
+            <a:off x="6175141" y="3687433"/>
+            <a:ext cx="1724" cy="248272"/>
           </a:xfrm>
           <a:prstGeom prst="straightConnector1">
             <a:avLst/>
@@ -41788,6 +43937,361 @@
           </a:fontRef>
         </p:style>
       </p:cxnSp>
+      <p:sp>
+        <p:nvSpPr>
+          <p:cNvPr id="15" name="TextBox 14">
+            <a:extLst>
+              <a:ext uri="{FF2B5EF4-FFF2-40B4-BE49-F238E27FC236}">
+                <a16:creationId xmlns:a16="http://schemas.microsoft.com/office/drawing/2014/main" id="{7704C5EA-F0AB-5E94-2540-2A8D2972A883}"/>
+              </a:ext>
+            </a:extLst>
+          </p:cNvPr>
+          <p:cNvSpPr txBox="1"/>
+          <p:nvPr/>
+        </p:nvSpPr>
+        <p:spPr>
+          <a:xfrm>
+            <a:off x="1252882" y="2774929"/>
+            <a:ext cx="955786" cy="369332"/>
+          </a:xfrm>
+          <a:prstGeom prst="rect">
+            <a:avLst/>
+          </a:prstGeom>
+          <a:noFill/>
+        </p:spPr>
+        <p:txBody>
+          <a:bodyPr wrap="square">
+            <a:spAutoFit/>
+          </a:bodyPr>
+          <a:lstStyle/>
+          <a:p>
+            <a:r>
+              <a:rPr lang="en-US" dirty="0">
+                <a:highlight>
+                  <a:srgbClr val="C0C0C0"/>
+                </a:highlight>
+                <a:latin typeface="+mn-lt"/>
+                <a:sym typeface="Symbol"/>
+              </a:rPr>
+              <a:t>&lt;start&gt;</a:t>
+            </a:r>
+            <a:endParaRPr lang="en-NL" dirty="0"/>
+          </a:p>
+        </p:txBody>
+      </p:sp>
+      <p:sp>
+        <p:nvSpPr>
+          <p:cNvPr id="18" name="Rectangle 17">
+            <a:extLst>
+              <a:ext uri="{FF2B5EF4-FFF2-40B4-BE49-F238E27FC236}">
+                <a16:creationId xmlns:a16="http://schemas.microsoft.com/office/drawing/2014/main" id="{386F0D27-C674-C256-E640-3173A662F7A5}"/>
+              </a:ext>
+            </a:extLst>
+          </p:cNvPr>
+          <p:cNvSpPr/>
+          <p:nvPr/>
+        </p:nvSpPr>
+        <p:spPr>
+          <a:xfrm>
+            <a:off x="4538146" y="2809936"/>
+            <a:ext cx="864096" cy="278812"/>
+          </a:xfrm>
+          <a:prstGeom prst="rect">
+            <a:avLst/>
+          </a:prstGeom>
+          <a:solidFill>
+            <a:schemeClr val="bg2">
+              <a:lumMod val="75000"/>
+            </a:schemeClr>
+          </a:solidFill>
+          <a:ln>
+            <a:noFill/>
+          </a:ln>
+        </p:spPr>
+        <p:style>
+          <a:lnRef idx="2">
+            <a:schemeClr val="accent1">
+              <a:shade val="50000"/>
+            </a:schemeClr>
+          </a:lnRef>
+          <a:fillRef idx="1">
+            <a:schemeClr val="accent1"/>
+          </a:fillRef>
+          <a:effectRef idx="0">
+            <a:schemeClr val="accent1"/>
+          </a:effectRef>
+          <a:fontRef idx="minor">
+            <a:schemeClr val="lt1"/>
+          </a:fontRef>
+        </p:style>
+        <p:txBody>
+          <a:bodyPr rtlCol="0" anchor="ctr"/>
+          <a:lstStyle/>
+          <a:p>
+            <a:pPr algn="ctr"/>
+            <a:r>
+              <a:rPr lang="en-US" sz="1400" dirty="0">
+                <a:solidFill>
+                  <a:schemeClr val="tx1"/>
+                </a:solidFill>
+              </a:rPr>
+              <a:t>&lt;start&gt;</a:t>
+            </a:r>
+          </a:p>
+        </p:txBody>
+      </p:sp>
+      <p:cxnSp>
+        <p:nvCxnSpPr>
+          <p:cNvPr id="20" name="Straight Arrow Connector 19">
+            <a:extLst>
+              <a:ext uri="{FF2B5EF4-FFF2-40B4-BE49-F238E27FC236}">
+                <a16:creationId xmlns:a16="http://schemas.microsoft.com/office/drawing/2014/main" id="{74B36860-EE01-2806-B852-FA0F5BA9881C}"/>
+              </a:ext>
+            </a:extLst>
+          </p:cNvPr>
+          <p:cNvCxnSpPr>
+            <a:cxnSpLocks/>
+            <a:stCxn id="18" idx="2"/>
+            <a:endCxn id="7" idx="0"/>
+          </p:cNvCxnSpPr>
+          <p:nvPr/>
+        </p:nvCxnSpPr>
+        <p:spPr>
+          <a:xfrm>
+            <a:off x="4970194" y="3088748"/>
+            <a:ext cx="0" cy="170770"/>
+          </a:xfrm>
+          <a:prstGeom prst="straightConnector1">
+            <a:avLst/>
+          </a:prstGeom>
+          <a:ln>
+            <a:solidFill>
+              <a:schemeClr val="tx1"/>
+            </a:solidFill>
+            <a:tailEnd type="triangle"/>
+          </a:ln>
+        </p:spPr>
+        <p:style>
+          <a:lnRef idx="1">
+            <a:schemeClr val="accent1"/>
+          </a:lnRef>
+          <a:fillRef idx="0">
+            <a:schemeClr val="accent1"/>
+          </a:fillRef>
+          <a:effectRef idx="0">
+            <a:schemeClr val="accent1"/>
+          </a:effectRef>
+          <a:fontRef idx="minor">
+            <a:schemeClr val="tx1"/>
+          </a:fontRef>
+        </p:style>
+      </p:cxnSp>
+      <p:sp>
+        <p:nvSpPr>
+          <p:cNvPr id="70" name="Rectangle 69">
+            <a:extLst>
+              <a:ext uri="{FF2B5EF4-FFF2-40B4-BE49-F238E27FC236}">
+                <a16:creationId xmlns:a16="http://schemas.microsoft.com/office/drawing/2014/main" id="{BC74FCB2-8F78-0CE5-AEA8-23879C06D7B2}"/>
+              </a:ext>
+            </a:extLst>
+          </p:cNvPr>
+          <p:cNvSpPr/>
+          <p:nvPr/>
+        </p:nvSpPr>
+        <p:spPr>
+          <a:xfrm>
+            <a:off x="5621293" y="4866086"/>
+            <a:ext cx="1107696" cy="561610"/>
+          </a:xfrm>
+          <a:prstGeom prst="rect">
+            <a:avLst/>
+          </a:prstGeom>
+          <a:solidFill>
+            <a:schemeClr val="accent1">
+              <a:lumMod val="20000"/>
+              <a:lumOff val="80000"/>
+            </a:schemeClr>
+          </a:solidFill>
+          <a:ln>
+            <a:noFill/>
+          </a:ln>
+        </p:spPr>
+        <p:style>
+          <a:lnRef idx="2">
+            <a:schemeClr val="accent1">
+              <a:shade val="50000"/>
+            </a:schemeClr>
+          </a:lnRef>
+          <a:fillRef idx="1">
+            <a:schemeClr val="accent1"/>
+          </a:fillRef>
+          <a:effectRef idx="0">
+            <a:schemeClr val="accent1"/>
+          </a:effectRef>
+          <a:fontRef idx="minor">
+            <a:schemeClr val="lt1"/>
+          </a:fontRef>
+        </p:style>
+        <p:txBody>
+          <a:bodyPr rtlCol="0" anchor="ctr"/>
+          <a:lstStyle/>
+          <a:p>
+            <a:pPr algn="ctr"/>
+            <a:r>
+              <a:rPr lang="en-US" sz="1400" b="1" dirty="0">
+                <a:solidFill>
+                  <a:schemeClr val="accent6">
+                    <a:lumMod val="60000"/>
+                    <a:lumOff val="40000"/>
+                  </a:schemeClr>
+                </a:solidFill>
+              </a:rPr>
+              <a:t>4</a:t>
+            </a:r>
+            <a:br>
+              <a:rPr lang="en-US" sz="1400" b="1" dirty="0">
+                <a:solidFill>
+                  <a:schemeClr val="tx1"/>
+                </a:solidFill>
+              </a:rPr>
+            </a:br>
+            <a:r>
+              <a:rPr lang="en-US" sz="1400" b="1" dirty="0">
+                <a:solidFill>
+                  <a:schemeClr val="tx1"/>
+                </a:solidFill>
+              </a:rPr>
+              <a:t>return </a:t>
+            </a:r>
+            <a:r>
+              <a:rPr lang="en-US" sz="1400" dirty="0">
+                <a:solidFill>
+                  <a:schemeClr val="tx1"/>
+                </a:solidFill>
+              </a:rPr>
+              <a:t>r+1</a:t>
+            </a:r>
+          </a:p>
+        </p:txBody>
+      </p:sp>
+      <p:cxnSp>
+        <p:nvCxnSpPr>
+          <p:cNvPr id="72" name="Straight Arrow Connector 71">
+            <a:extLst>
+              <a:ext uri="{FF2B5EF4-FFF2-40B4-BE49-F238E27FC236}">
+                <a16:creationId xmlns:a16="http://schemas.microsoft.com/office/drawing/2014/main" id="{1B7312E0-2A59-D36F-7815-7CE4531831F6}"/>
+              </a:ext>
+            </a:extLst>
+          </p:cNvPr>
+          <p:cNvCxnSpPr>
+            <a:cxnSpLocks/>
+            <a:stCxn id="33" idx="2"/>
+            <a:endCxn id="70" idx="0"/>
+          </p:cNvCxnSpPr>
+          <p:nvPr/>
+        </p:nvCxnSpPr>
+        <p:spPr>
+          <a:xfrm>
+            <a:off x="6175141" y="4623895"/>
+            <a:ext cx="0" cy="242191"/>
+          </a:xfrm>
+          <a:prstGeom prst="straightConnector1">
+            <a:avLst/>
+          </a:prstGeom>
+          <a:ln>
+            <a:solidFill>
+              <a:schemeClr val="tx1"/>
+            </a:solidFill>
+            <a:tailEnd type="triangle"/>
+          </a:ln>
+        </p:spPr>
+        <p:style>
+          <a:lnRef idx="1">
+            <a:schemeClr val="accent1"/>
+          </a:lnRef>
+          <a:fillRef idx="0">
+            <a:schemeClr val="accent1"/>
+          </a:fillRef>
+          <a:effectRef idx="0">
+            <a:schemeClr val="accent1"/>
+          </a:effectRef>
+          <a:fontRef idx="minor">
+            <a:schemeClr val="tx1"/>
+          </a:fontRef>
+        </p:style>
+      </p:cxnSp>
+      <p:sp>
+        <p:nvSpPr>
+          <p:cNvPr id="77" name="TextBox 76">
+            <a:extLst>
+              <a:ext uri="{FF2B5EF4-FFF2-40B4-BE49-F238E27FC236}">
+                <a16:creationId xmlns:a16="http://schemas.microsoft.com/office/drawing/2014/main" id="{547C399A-9362-F400-549F-FA780A198956}"/>
+              </a:ext>
+            </a:extLst>
+          </p:cNvPr>
+          <p:cNvSpPr txBox="1"/>
+          <p:nvPr/>
+        </p:nvSpPr>
+        <p:spPr>
+          <a:xfrm>
+            <a:off x="4431382" y="4614185"/>
+            <a:ext cx="1107697" cy="261610"/>
+          </a:xfrm>
+          <a:prstGeom prst="rect">
+            <a:avLst/>
+          </a:prstGeom>
+          <a:noFill/>
+        </p:spPr>
+        <p:txBody>
+          <a:bodyPr wrap="square" rtlCol="0">
+            <a:spAutoFit/>
+          </a:bodyPr>
+          <a:lstStyle/>
+          <a:p>
+            <a:pPr algn="ctr"/>
+            <a:r>
+              <a:rPr lang="en-NL" sz="1050" dirty="0"/>
+              <a:t>call site</a:t>
+            </a:r>
+          </a:p>
+        </p:txBody>
+      </p:sp>
+      <p:sp>
+        <p:nvSpPr>
+          <p:cNvPr id="78" name="TextBox 77">
+            <a:extLst>
+              <a:ext uri="{FF2B5EF4-FFF2-40B4-BE49-F238E27FC236}">
+                <a16:creationId xmlns:a16="http://schemas.microsoft.com/office/drawing/2014/main" id="{00922088-9DDA-09FB-F34B-5724FCCF8188}"/>
+              </a:ext>
+            </a:extLst>
+          </p:cNvPr>
+          <p:cNvSpPr txBox="1"/>
+          <p:nvPr/>
+        </p:nvSpPr>
+        <p:spPr>
+          <a:xfrm>
+            <a:off x="6444208" y="4246882"/>
+            <a:ext cx="1107697" cy="261610"/>
+          </a:xfrm>
+          <a:prstGeom prst="rect">
+            <a:avLst/>
+          </a:prstGeom>
+          <a:noFill/>
+        </p:spPr>
+        <p:txBody>
+          <a:bodyPr wrap="square" rtlCol="0">
+            <a:spAutoFit/>
+          </a:bodyPr>
+          <a:lstStyle/>
+          <a:p>
+            <a:pPr algn="ctr"/>
+            <a:r>
+              <a:rPr lang="en-NL" sz="1050" dirty="0"/>
+              <a:t>call site</a:t>
+            </a:r>
+          </a:p>
+        </p:txBody>
+      </p:sp>
     </p:spTree>
     <p:extLst>
       <p:ext uri="{BB962C8B-B14F-4D97-AF65-F5344CB8AC3E}">
@@ -41801,7 +44305,7 @@
 </p:sld>
 </file>
 
-<file path=ppt/slides/slide44.xml><?xml version="1.0" encoding="utf-8"?>
+<file path=ppt/slides/slide46.xml><?xml version="1.0" encoding="utf-8"?>
 <p:sld xmlns:a="http://schemas.openxmlformats.org/drawingml/2006/main" xmlns:r="http://schemas.openxmlformats.org/officeDocument/2006/relationships" xmlns:p="http://schemas.openxmlformats.org/presentationml/2006/main">
   <p:cSld>
     <p:spTree>
@@ -41863,7 +44367,7 @@
               <a:pPr>
                 <a:defRPr/>
               </a:pPr>
-              <a:t>44</a:t>
+              <a:t>46</a:t>
             </a:fld>
             <a:endParaRPr lang="en-US"/>
           </a:p>
@@ -43983,7 +46487,7 @@
             <a:pPr eaLnBrk="1" hangingPunct="1"/>
             <a:r>
               <a:rPr lang="en-US" sz="2400" dirty="0"/>
-              <a:t>Abstractly, a program is a set of branches and branching points. An execution flows through these branches, to form a path through the program.</a:t>
+              <a:t>Abstractly, a program is a set of nodes and edges connecting the nodes. An execution flows through the edges, to form a path through the program.</a:t>
             </a:r>
           </a:p>
           <a:p>

--- a/slides/gbt.pptx
+++ b/slides/gbt.pptx
@@ -326,7 +326,7 @@
               <a:pPr>
                 <a:defRPr/>
               </a:pPr>
-              <a:t>16-04-2026</a:t>
+              <a:t>20-04-2026</a:t>
             </a:fld>
             <a:endParaRPr lang="en-US"/>
           </a:p>
@@ -776,40 +776,20 @@
           <a:lstStyle/>
           <a:p>
             <a:r>
-              <a:rPr lang="en-US" dirty="0"/>
-              <a:t>Prime</a:t>
-            </a:r>
-            <a:r>
-              <a:rPr lang="en-US" baseline="0" dirty="0"/>
-              <a:t> paths:</a:t>
-            </a:r>
-            <a:br>
-              <a:rPr lang="en-US" baseline="0" dirty="0"/>
-            </a:br>
-            <a:endParaRPr lang="en-US" baseline="0" dirty="0"/>
-          </a:p>
-          <a:p>
-            <a:r>
-              <a:rPr lang="en-US" baseline="0" dirty="0"/>
-              <a:t>Starting from:</a:t>
-            </a:r>
-          </a:p>
-          <a:p>
-            <a:r>
-              <a:rPr lang="en-US" baseline="0" dirty="0"/>
-              <a:t>0:  [01,0]  [0,1,2]   </a:t>
-            </a:r>
-          </a:p>
-          <a:p>
-            <a:r>
-              <a:rPr lang="en-US" baseline="0" dirty="0"/>
-              <a:t>1:  [1,0,1]    .... This may seem to be overkill; but the rationale is as follows: assignment in 1 may affect subsequent iteration, therefore we insist on testing 101.</a:t>
-            </a:r>
-          </a:p>
-          <a:p>
-            <a:r>
-              <a:rPr lang="en-US" baseline="0" dirty="0"/>
-              <a:t>2: none</a:t>
+              <a:rPr lang="en-NL" dirty="0"/>
+              <a:t>10 nodes in this graph, 12 edges</a:t>
+            </a:r>
+          </a:p>
+          <a:p>
+            <a:r>
+              <a:rPr lang="en-NL" dirty="0"/>
+              <a:t>14 edge-paits in this graph</a:t>
+            </a:r>
+          </a:p>
+          <a:p>
+            <a:r>
+              <a:rPr lang="en-NL" dirty="0"/>
+              <a:t>8 paths</a:t>
             </a:r>
           </a:p>
         </p:txBody>
@@ -821,7 +801,7 @@
             <a:spLocks noGrp="1"/>
           </p:cNvSpPr>
           <p:nvPr>
-            <p:ph type="sldNum" sz="quarter" idx="10"/>
+            <p:ph type="sldNum" sz="quarter" idx="5"/>
           </p:nvPr>
         </p:nvSpPr>
         <p:spPr/>
@@ -837,7 +817,7 @@
               <a:pPr>
                 <a:defRPr/>
               </a:pPr>
-              <a:t>20</a:t>
+              <a:t>19</a:t>
             </a:fld>
             <a:endParaRPr lang="en-US"/>
           </a:p>
@@ -846,7 +826,7 @@
     </p:spTree>
     <p:extLst>
       <p:ext uri="{BB962C8B-B14F-4D97-AF65-F5344CB8AC3E}">
-        <p14:creationId xmlns:p14="http://schemas.microsoft.com/office/powerpoint/2010/main" val="764958124"/>
+        <p14:creationId xmlns:p14="http://schemas.microsoft.com/office/powerpoint/2010/main" val="4179551330"/>
       </p:ext>
     </p:extLst>
   </p:cSld>
@@ -922,25 +902,19 @@
           <a:p>
             <a:r>
               <a:rPr lang="en-US" baseline="0" dirty="0"/>
-              <a:t>0:  [0,,1,0]  [0,1,3]</a:t>
+              <a:t>0:  [01,0]  [0,1,2]   </a:t>
             </a:r>
           </a:p>
           <a:p>
             <a:r>
               <a:rPr lang="en-US" baseline="0" dirty="0"/>
-              <a:t>1:  [1,0,1]  [1,0,2,3]</a:t>
+              <a:t>1:  [1,0,1]    .... This may seem to be overkill; but the rationale is as follows: assignment in 1 may affect subsequent iteration, therefore we insist on testing 101.</a:t>
             </a:r>
           </a:p>
           <a:p>
             <a:r>
               <a:rPr lang="en-US" baseline="0" dirty="0"/>
               <a:t>2: none</a:t>
-            </a:r>
-          </a:p>
-          <a:p>
-            <a:r>
-              <a:rPr lang="en-US" baseline="0" dirty="0"/>
-              <a:t>3:  none</a:t>
             </a:r>
           </a:p>
         </p:txBody>
@@ -968,7 +942,7 @@
               <a:pPr>
                 <a:defRPr/>
               </a:pPr>
-              <a:t>21</a:t>
+              <a:t>20</a:t>
             </a:fld>
             <a:endParaRPr lang="en-US"/>
           </a:p>
@@ -977,7 +951,7 @@
     </p:spTree>
     <p:extLst>
       <p:ext uri="{BB962C8B-B14F-4D97-AF65-F5344CB8AC3E}">
-        <p14:creationId xmlns:p14="http://schemas.microsoft.com/office/powerpoint/2010/main" val="1132626587"/>
+        <p14:creationId xmlns:p14="http://schemas.microsoft.com/office/powerpoint/2010/main" val="764958124"/>
       </p:ext>
     </p:extLst>
   </p:cSld>
@@ -1006,29 +980,19 @@
       </p:grpSpPr>
       <p:sp>
         <p:nvSpPr>
-          <p:cNvPr id="45058" name="Slide Image Placeholder 1"/>
+          <p:cNvPr id="2" name="Slide Image Placeholder 1"/>
           <p:cNvSpPr>
-            <a:spLocks noGrp="1" noRot="1" noChangeAspect="1" noTextEdit="1"/>
+            <a:spLocks noGrp="1" noRot="1" noChangeAspect="1"/>
           </p:cNvSpPr>
           <p:nvPr>
             <p:ph type="sldImg"/>
           </p:nvPr>
         </p:nvSpPr>
-        <p:spPr bwMode="auto">
-          <a:noFill/>
-          <a:ln>
-            <a:solidFill>
-              <a:srgbClr val="000000"/>
-            </a:solidFill>
-            <a:miter lim="800000"/>
-            <a:headEnd/>
-            <a:tailEnd/>
-          </a:ln>
-        </p:spPr>
-      </p:sp>
-      <p:sp>
-        <p:nvSpPr>
-          <p:cNvPr id="45059" name="Notes Placeholder 2"/>
+        <p:spPr/>
+      </p:sp>
+      <p:sp>
+        <p:nvSpPr>
+          <p:cNvPr id="3" name="Notes Placeholder 2"/>
           <p:cNvSpPr>
             <a:spLocks noGrp="1"/>
           </p:cNvSpPr>
@@ -1036,78 +1000,89 @@
             <p:ph type="body" idx="1"/>
           </p:nvPr>
         </p:nvSpPr>
-        <p:spPr bwMode="auto">
-          <a:noFill/>
-        </p:spPr>
-        <p:txBody>
-          <a:bodyPr wrap="square" numCol="1" anchor="t" anchorCtr="0" compatLnSpc="1">
-            <a:prstTxWarp prst="textNoShape">
-              <a:avLst/>
-            </a:prstTxWarp>
-          </a:bodyPr>
+        <p:spPr/>
+        <p:txBody>
+          <a:bodyPr/>
           <a:lstStyle/>
           <a:p>
             <a:r>
               <a:rPr lang="en-US" dirty="0"/>
-              <a:t>Perhaps a bit surprisingly, a single test can tour the above TR, namely  01012.</a:t>
-            </a:r>
-          </a:p>
-          <a:p>
-            <a:endParaRPr lang="en-US" dirty="0"/>
-          </a:p>
-          <a:p>
-            <a:r>
-              <a:rPr lang="en-US" dirty="0"/>
-              <a:t>Note that PPC is not the same as, nor implies that you must cover each loop  by doing no iteration and at least one iteration, as shown by the above single test-case.</a:t>
-            </a:r>
-          </a:p>
-        </p:txBody>
-      </p:sp>
-      <p:sp>
-        <p:nvSpPr>
-          <p:cNvPr id="45060" name="Slide Number Placeholder 3"/>
+              <a:t>Prime</a:t>
+            </a:r>
+            <a:r>
+              <a:rPr lang="en-US" baseline="0" dirty="0"/>
+              <a:t> paths:</a:t>
+            </a:r>
+            <a:br>
+              <a:rPr lang="en-US" baseline="0" dirty="0"/>
+            </a:br>
+            <a:endParaRPr lang="en-US" baseline="0" dirty="0"/>
+          </a:p>
+          <a:p>
+            <a:r>
+              <a:rPr lang="en-US" baseline="0" dirty="0"/>
+              <a:t>Starting from:</a:t>
+            </a:r>
+          </a:p>
+          <a:p>
+            <a:r>
+              <a:rPr lang="en-US" baseline="0" dirty="0"/>
+              <a:t>0:  [0,,1,0]  [0,1,3]</a:t>
+            </a:r>
+          </a:p>
+          <a:p>
+            <a:r>
+              <a:rPr lang="en-US" baseline="0" dirty="0"/>
+              <a:t>1:  [1,0,1]  [1,0,2,3]</a:t>
+            </a:r>
+          </a:p>
+          <a:p>
+            <a:r>
+              <a:rPr lang="en-US" baseline="0" dirty="0"/>
+              <a:t>2: none</a:t>
+            </a:r>
+          </a:p>
+          <a:p>
+            <a:r>
+              <a:rPr lang="en-US" baseline="0" dirty="0"/>
+              <a:t>3:  none</a:t>
+            </a:r>
+          </a:p>
+        </p:txBody>
+      </p:sp>
+      <p:sp>
+        <p:nvSpPr>
+          <p:cNvPr id="4" name="Slide Number Placeholder 3"/>
           <p:cNvSpPr>
             <a:spLocks noGrp="1"/>
           </p:cNvSpPr>
           <p:nvPr>
-            <p:ph type="sldNum" sz="quarter" idx="5"/>
+            <p:ph type="sldNum" sz="quarter" idx="10"/>
           </p:nvPr>
         </p:nvSpPr>
-        <p:spPr bwMode="auto">
-          <a:noFill/>
-          <a:ln>
-            <a:miter lim="800000"/>
-            <a:headEnd/>
-            <a:tailEnd/>
-          </a:ln>
-        </p:spPr>
-        <p:txBody>
-          <a:bodyPr wrap="square" numCol="1" anchorCtr="0" compatLnSpc="1">
-            <a:prstTxWarp prst="textNoShape">
-              <a:avLst/>
-            </a:prstTxWarp>
-          </a:bodyPr>
+        <p:spPr/>
+        <p:txBody>
+          <a:bodyPr/>
           <a:lstStyle/>
           <a:p>
-            <a:fld id="{E3B461F1-450E-495C-9012-1239B066433C}" type="slidenum">
-              <a:rPr lang="en-US" smtClean="0">
-                <a:latin typeface="Arial" charset="0"/>
-                <a:cs typeface="Arial" charset="0"/>
-              </a:rPr>
-              <a:pPr/>
-              <a:t>22</a:t>
+            <a:pPr>
+              <a:defRPr/>
+            </a:pPr>
+            <a:fld id="{5B90836E-2851-478D-B8E0-4CBCFBE2CBFD}" type="slidenum">
+              <a:rPr lang="en-US" smtClean="0"/>
+              <a:pPr>
+                <a:defRPr/>
+              </a:pPr>
+              <a:t>21</a:t>
             </a:fld>
-            <a:endParaRPr lang="en-US">
-              <a:latin typeface="Arial" charset="0"/>
-              <a:cs typeface="Arial" charset="0"/>
-            </a:endParaRPr>
+            <a:endParaRPr lang="en-US"/>
           </a:p>
         </p:txBody>
       </p:sp>
     </p:spTree>
     <p:extLst>
       <p:ext uri="{BB962C8B-B14F-4D97-AF65-F5344CB8AC3E}">
-        <p14:creationId xmlns:p14="http://schemas.microsoft.com/office/powerpoint/2010/main" val="1866558959"/>
+        <p14:creationId xmlns:p14="http://schemas.microsoft.com/office/powerpoint/2010/main" val="1132626587"/>
       </p:ext>
     </p:extLst>
   </p:cSld>
@@ -1136,7 +1111,7 @@
       </p:grpSpPr>
       <p:sp>
         <p:nvSpPr>
-          <p:cNvPr id="47106" name="Slide Image Placeholder 1"/>
+          <p:cNvPr id="45058" name="Slide Image Placeholder 1"/>
           <p:cNvSpPr>
             <a:spLocks noGrp="1" noRot="1" noChangeAspect="1" noTextEdit="1"/>
           </p:cNvSpPr>
@@ -1158,7 +1133,7 @@
       </p:sp>
       <p:sp>
         <p:nvSpPr>
-          <p:cNvPr id="3" name="Notes Placeholder 2"/>
+          <p:cNvPr id="45059" name="Notes Placeholder 2"/>
           <p:cNvSpPr>
             <a:spLocks noGrp="1"/>
           </p:cNvSpPr>
@@ -1166,57 +1141,36 @@
             <p:ph type="body" idx="1"/>
           </p:nvPr>
         </p:nvSpPr>
-        <p:spPr/>
-        <p:txBody>
-          <a:bodyPr/>
+        <p:spPr bwMode="auto">
+          <a:noFill/>
+        </p:spPr>
+        <p:txBody>
+          <a:bodyPr wrap="square" numCol="1" anchor="t" anchorCtr="0" compatLnSpc="1">
+            <a:prstTxWarp prst="textNoShape">
+              <a:avLst/>
+            </a:prstTxWarp>
+          </a:bodyPr>
           <a:lstStyle/>
           <a:p>
-            <a:pPr>
-              <a:defRPr/>
-            </a:pPr>
             <a:r>
               <a:rPr lang="en-US" dirty="0"/>
-              <a:t>A simple path s cannot be extended at the end-side to s++[v]  if one of these happen:</a:t>
-            </a:r>
-          </a:p>
-          <a:p>
-            <a:pPr marL="228600" indent="-228600">
-              <a:buFontTx/>
-              <a:buAutoNum type="arabicParenBoth"/>
-              <a:defRPr/>
-            </a:pPr>
+              <a:t>Perhaps a bit surprisingly, a single test can tour the above TR, namely  01012.</a:t>
+            </a:r>
+          </a:p>
+          <a:p>
+            <a:endParaRPr lang="en-US" dirty="0"/>
+          </a:p>
+          <a:p>
             <a:r>
               <a:rPr lang="en-US" dirty="0"/>
-              <a:t>the last node of s is already a terminal node</a:t>
-            </a:r>
-          </a:p>
-          <a:p>
-            <a:pPr marL="228600" indent="-228600">
-              <a:buFontTx/>
-              <a:buAutoNum type="arabicParenBoth"/>
-              <a:defRPr/>
-            </a:pPr>
-            <a:r>
-              <a:rPr lang="en-US" dirty="0"/>
-              <a:t>s++[v] is not a simple path because it cycles into the middle of s</a:t>
-            </a:r>
-          </a:p>
-          <a:p>
-            <a:pPr marL="228600" indent="-228600">
-              <a:buFontTx/>
-              <a:buAutoNum type="arabicParenBoth"/>
-              <a:defRPr/>
-            </a:pPr>
-            <a:r>
-              <a:rPr lang="en-US" dirty="0"/>
-              <a:t>s is already a cycle</a:t>
-            </a:r>
-          </a:p>
-        </p:txBody>
-      </p:sp>
-      <p:sp>
-        <p:nvSpPr>
-          <p:cNvPr id="47108" name="Slide Number Placeholder 3"/>
+              <a:t>Note that PPC is not the same as, nor implies that you must cover each loop  by doing no iteration and at least one iteration, as shown by the above single test-case.</a:t>
+            </a:r>
+          </a:p>
+        </p:txBody>
+      </p:sp>
+      <p:sp>
+        <p:nvSpPr>
+          <p:cNvPr id="45060" name="Slide Number Placeholder 3"/>
           <p:cNvSpPr>
             <a:spLocks noGrp="1"/>
           </p:cNvSpPr>
@@ -1240,13 +1194,13 @@
           </a:bodyPr>
           <a:lstStyle/>
           <a:p>
-            <a:fld id="{5FA92A6E-13EA-4910-BE0D-B15803590F62}" type="slidenum">
+            <a:fld id="{E3B461F1-450E-495C-9012-1239B066433C}" type="slidenum">
               <a:rPr lang="en-US" smtClean="0">
                 <a:latin typeface="Arial" charset="0"/>
                 <a:cs typeface="Arial" charset="0"/>
               </a:rPr>
               <a:pPr/>
-              <a:t>23</a:t>
+              <a:t>22</a:t>
             </a:fld>
             <a:endParaRPr lang="en-US">
               <a:latin typeface="Arial" charset="0"/>
@@ -1258,7 +1212,7 @@
     </p:spTree>
     <p:extLst>
       <p:ext uri="{BB962C8B-B14F-4D97-AF65-F5344CB8AC3E}">
-        <p14:creationId xmlns:p14="http://schemas.microsoft.com/office/powerpoint/2010/main" val="2138567598"/>
+        <p14:creationId xmlns:p14="http://schemas.microsoft.com/office/powerpoint/2010/main" val="1866558959"/>
       </p:ext>
     </p:extLst>
   </p:cSld>
@@ -1287,7 +1241,7 @@
       </p:grpSpPr>
       <p:sp>
         <p:nvSpPr>
-          <p:cNvPr id="46082" name="Slide Image Placeholder 1"/>
+          <p:cNvPr id="47106" name="Slide Image Placeholder 1"/>
           <p:cNvSpPr>
             <a:spLocks noGrp="1" noRot="1" noChangeAspect="1" noTextEdit="1"/>
           </p:cNvSpPr>
@@ -1309,7 +1263,7 @@
       </p:sp>
       <p:sp>
         <p:nvSpPr>
-          <p:cNvPr id="46083" name="Notes Placeholder 2"/>
+          <p:cNvPr id="3" name="Notes Placeholder 2"/>
           <p:cNvSpPr>
             <a:spLocks noGrp="1"/>
           </p:cNvSpPr>
@@ -1317,39 +1271,57 @@
             <p:ph type="body" idx="1"/>
           </p:nvPr>
         </p:nvSpPr>
-        <p:spPr bwMode="auto">
-          <a:noFill/>
-        </p:spPr>
-        <p:txBody>
-          <a:bodyPr wrap="square" numCol="1" anchor="t" anchorCtr="0" compatLnSpc="1">
-            <a:prstTxWarp prst="textNoShape">
-              <a:avLst/>
-            </a:prstTxWarp>
-          </a:bodyPr>
+        <p:spPr/>
+        <p:txBody>
+          <a:bodyPr/>
           <a:lstStyle/>
           <a:p>
-            <a:r>
-              <a:rPr lang="en-US"/>
-              <a:t>The length of any simple path is bounded by N, where N is the number of nodes in G. </a:t>
-            </a:r>
+            <a:pPr>
+              <a:defRPr/>
+            </a:pPr>
             <a:r>
               <a:rPr lang="en-US" dirty="0"/>
-              <a:t>Since a prime path is also a simple </a:t>
-            </a:r>
-            <a:r>
-              <a:rPr lang="en-US" dirty="0" err="1"/>
-              <a:t>parth</a:t>
-            </a:r>
+              <a:t>A simple path s cannot be extended at the end-side to s++[v]  if one of these happen:</a:t>
+            </a:r>
+          </a:p>
+          <a:p>
+            <a:pPr marL="228600" indent="-228600">
+              <a:buFontTx/>
+              <a:buAutoNum type="arabicParenBoth"/>
+              <a:defRPr/>
+            </a:pPr>
             <a:r>
               <a:rPr lang="en-US" dirty="0"/>
-              <a:t>, it follows that the number of prime paths is finite, so they can be systematically computed.</a:t>
-            </a:r>
-          </a:p>
-        </p:txBody>
-      </p:sp>
-      <p:sp>
-        <p:nvSpPr>
-          <p:cNvPr id="46084" name="Slide Number Placeholder 3"/>
+              <a:t>the last node of s is already a terminal node</a:t>
+            </a:r>
+          </a:p>
+          <a:p>
+            <a:pPr marL="228600" indent="-228600">
+              <a:buFontTx/>
+              <a:buAutoNum type="arabicParenBoth"/>
+              <a:defRPr/>
+            </a:pPr>
+            <a:r>
+              <a:rPr lang="en-US" dirty="0"/>
+              <a:t>s++[v] is not a simple path because it cycles into the middle of s</a:t>
+            </a:r>
+          </a:p>
+          <a:p>
+            <a:pPr marL="228600" indent="-228600">
+              <a:buFontTx/>
+              <a:buAutoNum type="arabicParenBoth"/>
+              <a:defRPr/>
+            </a:pPr>
+            <a:r>
+              <a:rPr lang="en-US" dirty="0"/>
+              <a:t>s is already a cycle</a:t>
+            </a:r>
+          </a:p>
+        </p:txBody>
+      </p:sp>
+      <p:sp>
+        <p:nvSpPr>
+          <p:cNvPr id="47108" name="Slide Number Placeholder 3"/>
           <p:cNvSpPr>
             <a:spLocks noGrp="1"/>
           </p:cNvSpPr>
@@ -1373,13 +1345,13 @@
           </a:bodyPr>
           <a:lstStyle/>
           <a:p>
-            <a:fld id="{D00ACAE5-8472-42D2-ABC4-ED6745FF8213}" type="slidenum">
+            <a:fld id="{5FA92A6E-13EA-4910-BE0D-B15803590F62}" type="slidenum">
               <a:rPr lang="en-US" smtClean="0">
                 <a:latin typeface="Arial" charset="0"/>
                 <a:cs typeface="Arial" charset="0"/>
               </a:rPr>
               <a:pPr/>
-              <a:t>24</a:t>
+              <a:t>23</a:t>
             </a:fld>
             <a:endParaRPr lang="en-US">
               <a:latin typeface="Arial" charset="0"/>
@@ -1391,7 +1363,7 @@
     </p:spTree>
     <p:extLst>
       <p:ext uri="{BB962C8B-B14F-4D97-AF65-F5344CB8AC3E}">
-        <p14:creationId xmlns:p14="http://schemas.microsoft.com/office/powerpoint/2010/main" val="815308537"/>
+        <p14:creationId xmlns:p14="http://schemas.microsoft.com/office/powerpoint/2010/main" val="2138567598"/>
       </p:ext>
     </p:extLst>
   </p:cSld>
@@ -1420,7 +1392,7 @@
       </p:grpSpPr>
       <p:sp>
         <p:nvSpPr>
-          <p:cNvPr id="47106" name="Slide Image Placeholder 1"/>
+          <p:cNvPr id="46082" name="Slide Image Placeholder 1"/>
           <p:cNvSpPr>
             <a:spLocks noGrp="1" noRot="1" noChangeAspect="1" noTextEdit="1"/>
           </p:cNvSpPr>
@@ -1442,7 +1414,7 @@
       </p:sp>
       <p:sp>
         <p:nvSpPr>
-          <p:cNvPr id="3" name="Notes Placeholder 2"/>
+          <p:cNvPr id="46083" name="Notes Placeholder 2"/>
           <p:cNvSpPr>
             <a:spLocks noGrp="1"/>
           </p:cNvSpPr>
@@ -1450,57 +1422,39 @@
             <p:ph type="body" idx="1"/>
           </p:nvPr>
         </p:nvSpPr>
-        <p:spPr/>
-        <p:txBody>
-          <a:bodyPr/>
+        <p:spPr bwMode="auto">
+          <a:noFill/>
+        </p:spPr>
+        <p:txBody>
+          <a:bodyPr wrap="square" numCol="1" anchor="t" anchorCtr="0" compatLnSpc="1">
+            <a:prstTxWarp prst="textNoShape">
+              <a:avLst/>
+            </a:prstTxWarp>
+          </a:bodyPr>
           <a:lstStyle/>
           <a:p>
-            <a:pPr>
-              <a:defRPr/>
-            </a:pPr>
+            <a:r>
+              <a:rPr lang="en-US"/>
+              <a:t>The length of any simple path is bounded by N, where N is the number of nodes in G. </a:t>
+            </a:r>
             <a:r>
               <a:rPr lang="en-US" dirty="0"/>
-              <a:t>A simple path s cannot be extended at the end-side to s++[v]  if one of these happen:</a:t>
-            </a:r>
-          </a:p>
-          <a:p>
-            <a:pPr marL="228600" indent="-228600">
-              <a:buFontTx/>
-              <a:buAutoNum type="arabicParenBoth"/>
-              <a:defRPr/>
-            </a:pPr>
+              <a:t>Since a prime path is also a simple </a:t>
+            </a:r>
+            <a:r>
+              <a:rPr lang="en-US" dirty="0" err="1"/>
+              <a:t>parth</a:t>
+            </a:r>
             <a:r>
               <a:rPr lang="en-US" dirty="0"/>
-              <a:t>the last node of s is already a terminal node</a:t>
-            </a:r>
-          </a:p>
-          <a:p>
-            <a:pPr marL="228600" indent="-228600">
-              <a:buFontTx/>
-              <a:buAutoNum type="arabicParenBoth"/>
-              <a:defRPr/>
-            </a:pPr>
-            <a:r>
-              <a:rPr lang="en-US" dirty="0"/>
-              <a:t>s++[v] is not a simple path because it cycles into the middle of s</a:t>
-            </a:r>
-          </a:p>
-          <a:p>
-            <a:pPr marL="228600" indent="-228600">
-              <a:buFontTx/>
-              <a:buAutoNum type="arabicParenBoth"/>
-              <a:defRPr/>
-            </a:pPr>
-            <a:r>
-              <a:rPr lang="en-US" dirty="0"/>
-              <a:t>s is already a cycle</a:t>
-            </a:r>
-          </a:p>
-        </p:txBody>
-      </p:sp>
-      <p:sp>
-        <p:nvSpPr>
-          <p:cNvPr id="47108" name="Slide Number Placeholder 3"/>
+              <a:t>, it follows that the number of prime paths is finite, so they can be systematically computed.</a:t>
+            </a:r>
+          </a:p>
+        </p:txBody>
+      </p:sp>
+      <p:sp>
+        <p:nvSpPr>
+          <p:cNvPr id="46084" name="Slide Number Placeholder 3"/>
           <p:cNvSpPr>
             <a:spLocks noGrp="1"/>
           </p:cNvSpPr>
@@ -1524,13 +1478,13 @@
           </a:bodyPr>
           <a:lstStyle/>
           <a:p>
-            <a:fld id="{5FA92A6E-13EA-4910-BE0D-B15803590F62}" type="slidenum">
+            <a:fld id="{D00ACAE5-8472-42D2-ABC4-ED6745FF8213}" type="slidenum">
               <a:rPr lang="en-US" smtClean="0">
                 <a:latin typeface="Arial" charset="0"/>
                 <a:cs typeface="Arial" charset="0"/>
               </a:rPr>
               <a:pPr/>
-              <a:t>25</a:t>
+              <a:t>24</a:t>
             </a:fld>
             <a:endParaRPr lang="en-US">
               <a:latin typeface="Arial" charset="0"/>
@@ -1542,7 +1496,7 @@
     </p:spTree>
     <p:extLst>
       <p:ext uri="{BB962C8B-B14F-4D97-AF65-F5344CB8AC3E}">
-        <p14:creationId xmlns:p14="http://schemas.microsoft.com/office/powerpoint/2010/main" val="1944913499"/>
+        <p14:creationId xmlns:p14="http://schemas.microsoft.com/office/powerpoint/2010/main" val="815308537"/>
       </p:ext>
     </p:extLst>
   </p:cSld>
@@ -1571,15 +1525,25 @@
       </p:grpSpPr>
       <p:sp>
         <p:nvSpPr>
-          <p:cNvPr id="2" name="Slide Image Placeholder 1"/>
+          <p:cNvPr id="47106" name="Slide Image Placeholder 1"/>
           <p:cNvSpPr>
-            <a:spLocks noGrp="1" noRot="1" noChangeAspect="1"/>
+            <a:spLocks noGrp="1" noRot="1" noChangeAspect="1" noTextEdit="1"/>
           </p:cNvSpPr>
           <p:nvPr>
             <p:ph type="sldImg"/>
           </p:nvPr>
         </p:nvSpPr>
-        <p:spPr/>
+        <p:spPr bwMode="auto">
+          <a:noFill/>
+          <a:ln>
+            <a:solidFill>
+              <a:srgbClr val="000000"/>
+            </a:solidFill>
+            <a:miter lim="800000"/>
+            <a:headEnd/>
+            <a:tailEnd/>
+          </a:ln>
+        </p:spPr>
       </p:sp>
       <p:sp>
         <p:nvSpPr>
@@ -1596,13 +1560,52 @@
           <a:bodyPr/>
           <a:lstStyle/>
           <a:p>
-            <a:endParaRPr lang="en-US" dirty="0"/>
-          </a:p>
-        </p:txBody>
-      </p:sp>
-      <p:sp>
-        <p:nvSpPr>
-          <p:cNvPr id="4" name="Slide Number Placeholder 3"/>
+            <a:pPr>
+              <a:defRPr/>
+            </a:pPr>
+            <a:r>
+              <a:rPr lang="en-US" dirty="0"/>
+              <a:t>A simple path s cannot be extended at the end-side to s++[v]  if one of these happen:</a:t>
+            </a:r>
+          </a:p>
+          <a:p>
+            <a:pPr marL="228600" indent="-228600">
+              <a:buFontTx/>
+              <a:buAutoNum type="arabicParenBoth"/>
+              <a:defRPr/>
+            </a:pPr>
+            <a:r>
+              <a:rPr lang="en-US" dirty="0"/>
+              <a:t>the last node of s is already a terminal node</a:t>
+            </a:r>
+          </a:p>
+          <a:p>
+            <a:pPr marL="228600" indent="-228600">
+              <a:buFontTx/>
+              <a:buAutoNum type="arabicParenBoth"/>
+              <a:defRPr/>
+            </a:pPr>
+            <a:r>
+              <a:rPr lang="en-US" dirty="0"/>
+              <a:t>s++[v] is not a simple path because it cycles into the middle of s</a:t>
+            </a:r>
+          </a:p>
+          <a:p>
+            <a:pPr marL="228600" indent="-228600">
+              <a:buFontTx/>
+              <a:buAutoNum type="arabicParenBoth"/>
+              <a:defRPr/>
+            </a:pPr>
+            <a:r>
+              <a:rPr lang="en-US" dirty="0"/>
+              <a:t>s is already a cycle</a:t>
+            </a:r>
+          </a:p>
+        </p:txBody>
+      </p:sp>
+      <p:sp>
+        <p:nvSpPr>
+          <p:cNvPr id="47108" name="Slide Number Placeholder 3"/>
           <p:cNvSpPr>
             <a:spLocks noGrp="1"/>
           </p:cNvSpPr>
@@ -1610,29 +1613,41 @@
             <p:ph type="sldNum" sz="quarter" idx="5"/>
           </p:nvPr>
         </p:nvSpPr>
-        <p:spPr/>
-        <p:txBody>
-          <a:bodyPr/>
+        <p:spPr bwMode="auto">
+          <a:noFill/>
+          <a:ln>
+            <a:miter lim="800000"/>
+            <a:headEnd/>
+            <a:tailEnd/>
+          </a:ln>
+        </p:spPr>
+        <p:txBody>
+          <a:bodyPr wrap="square" numCol="1" anchorCtr="0" compatLnSpc="1">
+            <a:prstTxWarp prst="textNoShape">
+              <a:avLst/>
+            </a:prstTxWarp>
+          </a:bodyPr>
           <a:lstStyle/>
           <a:p>
-            <a:pPr>
-              <a:defRPr/>
-            </a:pPr>
-            <a:fld id="{5B90836E-2851-478D-B8E0-4CBCFBE2CBFD}" type="slidenum">
-              <a:rPr lang="en-US" smtClean="0"/>
-              <a:pPr>
-                <a:defRPr/>
-              </a:pPr>
-              <a:t>26</a:t>
+            <a:fld id="{5FA92A6E-13EA-4910-BE0D-B15803590F62}" type="slidenum">
+              <a:rPr lang="en-US" smtClean="0">
+                <a:latin typeface="Arial" charset="0"/>
+                <a:cs typeface="Arial" charset="0"/>
+              </a:rPr>
+              <a:pPr/>
+              <a:t>25</a:t>
             </a:fld>
-            <a:endParaRPr lang="en-US"/>
+            <a:endParaRPr lang="en-US">
+              <a:latin typeface="Arial" charset="0"/>
+              <a:cs typeface="Arial" charset="0"/>
+            </a:endParaRPr>
           </a:p>
         </p:txBody>
       </p:sp>
     </p:spTree>
     <p:extLst>
       <p:ext uri="{BB962C8B-B14F-4D97-AF65-F5344CB8AC3E}">
-        <p14:creationId xmlns:p14="http://schemas.microsoft.com/office/powerpoint/2010/main" val="128857185"/>
+        <p14:creationId xmlns:p14="http://schemas.microsoft.com/office/powerpoint/2010/main" val="1944913499"/>
       </p:ext>
     </p:extLst>
   </p:cSld>
@@ -1686,7 +1701,7 @@
           <a:bodyPr/>
           <a:lstStyle/>
           <a:p>
-            <a:endParaRPr lang="en-US" baseline="0" dirty="0"/>
+            <a:endParaRPr lang="en-US" dirty="0"/>
           </a:p>
         </p:txBody>
       </p:sp>
@@ -1697,7 +1712,7 @@
             <a:spLocks noGrp="1"/>
           </p:cNvSpPr>
           <p:nvPr>
-            <p:ph type="sldNum" sz="quarter" idx="10"/>
+            <p:ph type="sldNum" sz="quarter" idx="5"/>
           </p:nvPr>
         </p:nvSpPr>
         <p:spPr/>
@@ -1713,7 +1728,7 @@
               <a:pPr>
                 <a:defRPr/>
               </a:pPr>
-              <a:t>27</a:t>
+              <a:t>26</a:t>
             </a:fld>
             <a:endParaRPr lang="en-US"/>
           </a:p>
@@ -1722,7 +1737,7 @@
     </p:spTree>
     <p:extLst>
       <p:ext uri="{BB962C8B-B14F-4D97-AF65-F5344CB8AC3E}">
-        <p14:creationId xmlns:p14="http://schemas.microsoft.com/office/powerpoint/2010/main" val="1376233305"/>
+        <p14:creationId xmlns:p14="http://schemas.microsoft.com/office/powerpoint/2010/main" val="128857185"/>
       </p:ext>
     </p:extLst>
   </p:cSld>
@@ -1803,7 +1818,7 @@
               <a:pPr>
                 <a:defRPr/>
               </a:pPr>
-              <a:t>28</a:t>
+              <a:t>27</a:t>
             </a:fld>
             <a:endParaRPr lang="en-US"/>
           </a:p>
@@ -1812,7 +1827,7 @@
     </p:spTree>
     <p:extLst>
       <p:ext uri="{BB962C8B-B14F-4D97-AF65-F5344CB8AC3E}">
-        <p14:creationId xmlns:p14="http://schemas.microsoft.com/office/powerpoint/2010/main" val="4052333821"/>
+        <p14:creationId xmlns:p14="http://schemas.microsoft.com/office/powerpoint/2010/main" val="1376233305"/>
       </p:ext>
     </p:extLst>
   </p:cSld>
@@ -1866,10 +1881,7 @@
           <a:bodyPr/>
           <a:lstStyle/>
           <a:p>
-            <a:r>
-              <a:rPr lang="en-NL" dirty="0"/>
-              <a:t>Note that circuit is not exactly the same as circular simple path.</a:t>
-            </a:r>
+            <a:endParaRPr lang="en-US" baseline="0" dirty="0"/>
           </a:p>
         </p:txBody>
       </p:sp>
@@ -1880,7 +1892,7 @@
             <a:spLocks noGrp="1"/>
           </p:cNvSpPr>
           <p:nvPr>
-            <p:ph type="sldNum" sz="quarter" idx="5"/>
+            <p:ph type="sldNum" sz="quarter" idx="10"/>
           </p:nvPr>
         </p:nvSpPr>
         <p:spPr/>
@@ -1896,7 +1908,7 @@
               <a:pPr>
                 <a:defRPr/>
               </a:pPr>
-              <a:t>30</a:t>
+              <a:t>28</a:t>
             </a:fld>
             <a:endParaRPr lang="en-US"/>
           </a:p>
@@ -1905,7 +1917,7 @@
     </p:spTree>
     <p:extLst>
       <p:ext uri="{BB962C8B-B14F-4D97-AF65-F5344CB8AC3E}">
-        <p14:creationId xmlns:p14="http://schemas.microsoft.com/office/powerpoint/2010/main" val="2112172245"/>
+        <p14:creationId xmlns:p14="http://schemas.microsoft.com/office/powerpoint/2010/main" val="4052333821"/>
       </p:ext>
     </p:extLst>
   </p:cSld>
@@ -2136,7 +2148,7 @@
               <a:pPr>
                 <a:defRPr/>
               </a:pPr>
-              <a:t>31</a:t>
+              <a:t>30</a:t>
             </a:fld>
             <a:endParaRPr lang="en-US"/>
           </a:p>
@@ -2145,7 +2157,7 @@
     </p:spTree>
     <p:extLst>
       <p:ext uri="{BB962C8B-B14F-4D97-AF65-F5344CB8AC3E}">
-        <p14:creationId xmlns:p14="http://schemas.microsoft.com/office/powerpoint/2010/main" val="2314860988"/>
+        <p14:creationId xmlns:p14="http://schemas.microsoft.com/office/powerpoint/2010/main" val="2112172245"/>
       </p:ext>
     </p:extLst>
   </p:cSld>
@@ -2229,7 +2241,7 @@
               <a:pPr>
                 <a:defRPr/>
               </a:pPr>
-              <a:t>32</a:t>
+              <a:t>31</a:t>
             </a:fld>
             <a:endParaRPr lang="en-US"/>
           </a:p>
@@ -2238,7 +2250,7 @@
     </p:spTree>
     <p:extLst>
       <p:ext uri="{BB962C8B-B14F-4D97-AF65-F5344CB8AC3E}">
-        <p14:creationId xmlns:p14="http://schemas.microsoft.com/office/powerpoint/2010/main" val="1711930730"/>
+        <p14:creationId xmlns:p14="http://schemas.microsoft.com/office/powerpoint/2010/main" val="2314860988"/>
       </p:ext>
     </p:extLst>
   </p:cSld>
@@ -2292,7 +2304,10 @@
           <a:bodyPr/>
           <a:lstStyle/>
           <a:p>
-            <a:endParaRPr lang="en-NL" dirty="0"/>
+            <a:r>
+              <a:rPr lang="en-NL" dirty="0"/>
+              <a:t>Note that circuit is not exactly the same as circular simple path.</a:t>
+            </a:r>
           </a:p>
         </p:txBody>
       </p:sp>
@@ -2319,7 +2334,7 @@
               <a:pPr>
                 <a:defRPr/>
               </a:pPr>
-              <a:t>33</a:t>
+              <a:t>32</a:t>
             </a:fld>
             <a:endParaRPr lang="en-US"/>
           </a:p>
@@ -2328,7 +2343,7 @@
     </p:spTree>
     <p:extLst>
       <p:ext uri="{BB962C8B-B14F-4D97-AF65-F5344CB8AC3E}">
-        <p14:creationId xmlns:p14="http://schemas.microsoft.com/office/powerpoint/2010/main" val="4057068099"/>
+        <p14:creationId xmlns:p14="http://schemas.microsoft.com/office/powerpoint/2010/main" val="1711930730"/>
       </p:ext>
     </p:extLst>
   </p:cSld>
@@ -2382,10 +2397,7 @@
           <a:bodyPr/>
           <a:lstStyle/>
           <a:p>
-            <a:r>
-              <a:rPr lang="en-NL" dirty="0"/>
-              <a:t>In orig CFG N = 8, E = 9   McCabe = E-N+2 = 3</a:t>
-            </a:r>
+            <a:endParaRPr lang="en-NL" dirty="0"/>
           </a:p>
         </p:txBody>
       </p:sp>
@@ -2412,7 +2424,7 @@
               <a:pPr>
                 <a:defRPr/>
               </a:pPr>
-              <a:t>34</a:t>
+              <a:t>33</a:t>
             </a:fld>
             <a:endParaRPr lang="en-US"/>
           </a:p>
@@ -2421,7 +2433,7 @@
     </p:spTree>
     <p:extLst>
       <p:ext uri="{BB962C8B-B14F-4D97-AF65-F5344CB8AC3E}">
-        <p14:creationId xmlns:p14="http://schemas.microsoft.com/office/powerpoint/2010/main" val="3943465698"/>
+        <p14:creationId xmlns:p14="http://schemas.microsoft.com/office/powerpoint/2010/main" val="4057068099"/>
       </p:ext>
     </p:extLst>
   </p:cSld>
@@ -2475,7 +2487,10 @@
           <a:bodyPr/>
           <a:lstStyle/>
           <a:p>
-            <a:endParaRPr lang="en-NL" dirty="0"/>
+            <a:r>
+              <a:rPr lang="en-NL" dirty="0"/>
+              <a:t>In orig CFG N = 8, E = 9   McCabe = E-N+2 = 3</a:t>
+            </a:r>
           </a:p>
         </p:txBody>
       </p:sp>
@@ -2502,7 +2517,7 @@
               <a:pPr>
                 <a:defRPr/>
               </a:pPr>
-              <a:t>35</a:t>
+              <a:t>34</a:t>
             </a:fld>
             <a:endParaRPr lang="en-US"/>
           </a:p>
@@ -2511,7 +2526,7 @@
     </p:spTree>
     <p:extLst>
       <p:ext uri="{BB962C8B-B14F-4D97-AF65-F5344CB8AC3E}">
-        <p14:creationId xmlns:p14="http://schemas.microsoft.com/office/powerpoint/2010/main" val="118667253"/>
+        <p14:creationId xmlns:p14="http://schemas.microsoft.com/office/powerpoint/2010/main" val="3943465698"/>
       </p:ext>
     </p:extLst>
   </p:cSld>
@@ -2592,7 +2607,7 @@
               <a:pPr>
                 <a:defRPr/>
               </a:pPr>
-              <a:t>36</a:t>
+              <a:t>35</a:t>
             </a:fld>
             <a:endParaRPr lang="en-US"/>
           </a:p>
@@ -2601,7 +2616,7 @@
     </p:spTree>
     <p:extLst>
       <p:ext uri="{BB962C8B-B14F-4D97-AF65-F5344CB8AC3E}">
-        <p14:creationId xmlns:p14="http://schemas.microsoft.com/office/powerpoint/2010/main" val="3509558000"/>
+        <p14:creationId xmlns:p14="http://schemas.microsoft.com/office/powerpoint/2010/main" val="118667253"/>
       </p:ext>
     </p:extLst>
   </p:cSld>
@@ -2682,7 +2697,7 @@
               <a:pPr>
                 <a:defRPr/>
               </a:pPr>
-              <a:t>37</a:t>
+              <a:t>36</a:t>
             </a:fld>
             <a:endParaRPr lang="en-US"/>
           </a:p>
@@ -2691,7 +2706,7 @@
     </p:spTree>
     <p:extLst>
       <p:ext uri="{BB962C8B-B14F-4D97-AF65-F5344CB8AC3E}">
-        <p14:creationId xmlns:p14="http://schemas.microsoft.com/office/powerpoint/2010/main" val="4188118705"/>
+        <p14:creationId xmlns:p14="http://schemas.microsoft.com/office/powerpoint/2010/main" val="3509558000"/>
       </p:ext>
     </p:extLst>
   </p:cSld>
@@ -2720,29 +2735,19 @@
       </p:grpSpPr>
       <p:sp>
         <p:nvSpPr>
-          <p:cNvPr id="48130" name="Slide Image Placeholder 1"/>
+          <p:cNvPr id="2" name="Slide Image Placeholder 1"/>
           <p:cNvSpPr>
-            <a:spLocks noGrp="1" noRot="1" noChangeAspect="1" noTextEdit="1"/>
+            <a:spLocks noGrp="1" noRot="1" noChangeAspect="1"/>
           </p:cNvSpPr>
           <p:nvPr>
             <p:ph type="sldImg"/>
           </p:nvPr>
         </p:nvSpPr>
-        <p:spPr bwMode="auto">
-          <a:noFill/>
-          <a:ln>
-            <a:solidFill>
-              <a:srgbClr val="000000"/>
-            </a:solidFill>
-            <a:miter lim="800000"/>
-            <a:headEnd/>
-            <a:tailEnd/>
-          </a:ln>
-        </p:spPr>
-      </p:sp>
-      <p:sp>
-        <p:nvSpPr>
-          <p:cNvPr id="48131" name="Notes Placeholder 2"/>
+        <p:spPr/>
+      </p:sp>
+      <p:sp>
+        <p:nvSpPr>
+          <p:cNvPr id="3" name="Notes Placeholder 2"/>
           <p:cNvSpPr>
             <a:spLocks noGrp="1"/>
           </p:cNvSpPr>
@@ -2750,55 +2755,18 @@
             <p:ph type="body" idx="1"/>
           </p:nvPr>
         </p:nvSpPr>
-        <p:spPr bwMode="auto">
-          <a:noFill/>
-        </p:spPr>
-        <p:txBody>
-          <a:bodyPr wrap="square" numCol="1" anchor="t" anchorCtr="0" compatLnSpc="1">
-            <a:prstTxWarp prst="textNoShape">
-              <a:avLst/>
-            </a:prstTxWarp>
-          </a:bodyPr>
+        <p:spPr/>
+        <p:txBody>
+          <a:bodyPr/>
           <a:lstStyle/>
           <a:p>
-            <a:r>
-              <a:rPr lang="en-US"/>
-              <a:t>First line may throw file-not-exists exception</a:t>
-            </a:r>
-          </a:p>
-          <a:p>
-            <a:r>
-              <a:rPr lang="en-US"/>
-              <a:t>2</a:t>
-            </a:r>
-            <a:r>
-              <a:rPr lang="en-US" baseline="30000"/>
-              <a:t>nd</a:t>
-            </a:r>
-            <a:r>
-              <a:rPr lang="en-US"/>
-              <a:t> line may throw an exception if the file does not contain an int</a:t>
-            </a:r>
-          </a:p>
-          <a:p>
-            <a:r>
-              <a:rPr lang="en-US"/>
-              <a:t>3</a:t>
-            </a:r>
-            <a:r>
-              <a:rPr lang="en-US" baseline="30000"/>
-              <a:t>rd</a:t>
-            </a:r>
-            <a:r>
-              <a:rPr lang="en-US"/>
-              <a:t> line throws an exception if x is 0</a:t>
-            </a:r>
-          </a:p>
-        </p:txBody>
-      </p:sp>
-      <p:sp>
-        <p:nvSpPr>
-          <p:cNvPr id="48132" name="Slide Number Placeholder 3"/>
+            <a:endParaRPr lang="en-NL" dirty="0"/>
+          </a:p>
+        </p:txBody>
+      </p:sp>
+      <p:sp>
+        <p:nvSpPr>
+          <p:cNvPr id="4" name="Slide Number Placeholder 3"/>
           <p:cNvSpPr>
             <a:spLocks noGrp="1"/>
           </p:cNvSpPr>
@@ -2806,41 +2774,29 @@
             <p:ph type="sldNum" sz="quarter" idx="5"/>
           </p:nvPr>
         </p:nvSpPr>
-        <p:spPr bwMode="auto">
-          <a:noFill/>
-          <a:ln>
-            <a:miter lim="800000"/>
-            <a:headEnd/>
-            <a:tailEnd/>
-          </a:ln>
-        </p:spPr>
-        <p:txBody>
-          <a:bodyPr wrap="square" numCol="1" anchorCtr="0" compatLnSpc="1">
-            <a:prstTxWarp prst="textNoShape">
-              <a:avLst/>
-            </a:prstTxWarp>
-          </a:bodyPr>
+        <p:spPr/>
+        <p:txBody>
+          <a:bodyPr/>
           <a:lstStyle/>
           <a:p>
-            <a:fld id="{A0865316-948F-4C3D-B72C-098DB267E9E4}" type="slidenum">
-              <a:rPr lang="en-US" smtClean="0">
-                <a:latin typeface="Arial" charset="0"/>
-                <a:cs typeface="Arial" charset="0"/>
-              </a:rPr>
-              <a:pPr/>
-              <a:t>44</a:t>
+            <a:pPr>
+              <a:defRPr/>
+            </a:pPr>
+            <a:fld id="{5B90836E-2851-478D-B8E0-4CBCFBE2CBFD}" type="slidenum">
+              <a:rPr lang="en-US" smtClean="0"/>
+              <a:pPr>
+                <a:defRPr/>
+              </a:pPr>
+              <a:t>37</a:t>
             </a:fld>
-            <a:endParaRPr lang="en-US">
-              <a:latin typeface="Arial" charset="0"/>
-              <a:cs typeface="Arial" charset="0"/>
-            </a:endParaRPr>
+            <a:endParaRPr lang="en-US"/>
           </a:p>
         </p:txBody>
       </p:sp>
     </p:spTree>
     <p:extLst>
       <p:ext uri="{BB962C8B-B14F-4D97-AF65-F5344CB8AC3E}">
-        <p14:creationId xmlns:p14="http://schemas.microsoft.com/office/powerpoint/2010/main" val="1312586706"/>
+        <p14:creationId xmlns:p14="http://schemas.microsoft.com/office/powerpoint/2010/main" val="4188118705"/>
       </p:ext>
     </p:extLst>
   </p:cSld>
@@ -2869,19 +2825,29 @@
       </p:grpSpPr>
       <p:sp>
         <p:nvSpPr>
-          <p:cNvPr id="2" name="Slide Image Placeholder 1"/>
+          <p:cNvPr id="48130" name="Slide Image Placeholder 1"/>
           <p:cNvSpPr>
-            <a:spLocks noGrp="1" noRot="1" noChangeAspect="1"/>
+            <a:spLocks noGrp="1" noRot="1" noChangeAspect="1" noTextEdit="1"/>
           </p:cNvSpPr>
           <p:nvPr>
             <p:ph type="sldImg"/>
           </p:nvPr>
         </p:nvSpPr>
-        <p:spPr/>
-      </p:sp>
-      <p:sp>
-        <p:nvSpPr>
-          <p:cNvPr id="3" name="Notes Placeholder 2"/>
+        <p:spPr bwMode="auto">
+          <a:noFill/>
+          <a:ln>
+            <a:solidFill>
+              <a:srgbClr val="000000"/>
+            </a:solidFill>
+            <a:miter lim="800000"/>
+            <a:headEnd/>
+            <a:tailEnd/>
+          </a:ln>
+        </p:spPr>
+      </p:sp>
+      <p:sp>
+        <p:nvSpPr>
+          <p:cNvPr id="48131" name="Notes Placeholder 2"/>
           <p:cNvSpPr>
             <a:spLocks noGrp="1"/>
           </p:cNvSpPr>
@@ -2889,48 +2855,97 @@
             <p:ph type="body" idx="1"/>
           </p:nvPr>
         </p:nvSpPr>
-        <p:spPr/>
-        <p:txBody>
-          <a:bodyPr/>
+        <p:spPr bwMode="auto">
+          <a:noFill/>
+        </p:spPr>
+        <p:txBody>
+          <a:bodyPr wrap="square" numCol="1" anchor="t" anchorCtr="0" compatLnSpc="1">
+            <a:prstTxWarp prst="textNoShape">
+              <a:avLst/>
+            </a:prstTxWarp>
+          </a:bodyPr>
           <a:lstStyle/>
           <a:p>
-            <a:endParaRPr lang="en-US" dirty="0"/>
-          </a:p>
-        </p:txBody>
-      </p:sp>
-      <p:sp>
-        <p:nvSpPr>
-          <p:cNvPr id="4" name="Slide Number Placeholder 3"/>
+            <a:r>
+              <a:rPr lang="en-US"/>
+              <a:t>First line may throw file-not-exists exception</a:t>
+            </a:r>
+          </a:p>
+          <a:p>
+            <a:r>
+              <a:rPr lang="en-US"/>
+              <a:t>2</a:t>
+            </a:r>
+            <a:r>
+              <a:rPr lang="en-US" baseline="30000"/>
+              <a:t>nd</a:t>
+            </a:r>
+            <a:r>
+              <a:rPr lang="en-US"/>
+              <a:t> line may throw an exception if the file does not contain an int</a:t>
+            </a:r>
+          </a:p>
+          <a:p>
+            <a:r>
+              <a:rPr lang="en-US"/>
+              <a:t>3</a:t>
+            </a:r>
+            <a:r>
+              <a:rPr lang="en-US" baseline="30000"/>
+              <a:t>rd</a:t>
+            </a:r>
+            <a:r>
+              <a:rPr lang="en-US"/>
+              <a:t> line throws an exception if x is 0</a:t>
+            </a:r>
+          </a:p>
+        </p:txBody>
+      </p:sp>
+      <p:sp>
+        <p:nvSpPr>
+          <p:cNvPr id="48132" name="Slide Number Placeholder 3"/>
           <p:cNvSpPr>
             <a:spLocks noGrp="1"/>
           </p:cNvSpPr>
           <p:nvPr>
-            <p:ph type="sldNum" sz="quarter" idx="10"/>
+            <p:ph type="sldNum" sz="quarter" idx="5"/>
           </p:nvPr>
         </p:nvSpPr>
-        <p:spPr/>
-        <p:txBody>
-          <a:bodyPr/>
+        <p:spPr bwMode="auto">
+          <a:noFill/>
+          <a:ln>
+            <a:miter lim="800000"/>
+            <a:headEnd/>
+            <a:tailEnd/>
+          </a:ln>
+        </p:spPr>
+        <p:txBody>
+          <a:bodyPr wrap="square" numCol="1" anchorCtr="0" compatLnSpc="1">
+            <a:prstTxWarp prst="textNoShape">
+              <a:avLst/>
+            </a:prstTxWarp>
+          </a:bodyPr>
           <a:lstStyle/>
           <a:p>
-            <a:pPr>
-              <a:defRPr/>
-            </a:pPr>
-            <a:fld id="{5B90836E-2851-478D-B8E0-4CBCFBE2CBFD}" type="slidenum">
-              <a:rPr lang="en-US" smtClean="0"/>
-              <a:pPr>
-                <a:defRPr/>
-              </a:pPr>
-              <a:t>45</a:t>
+            <a:fld id="{A0865316-948F-4C3D-B72C-098DB267E9E4}" type="slidenum">
+              <a:rPr lang="en-US" smtClean="0">
+                <a:latin typeface="Arial" charset="0"/>
+                <a:cs typeface="Arial" charset="0"/>
+              </a:rPr>
+              <a:pPr/>
+              <a:t>44</a:t>
             </a:fld>
-            <a:endParaRPr lang="en-US"/>
+            <a:endParaRPr lang="en-US">
+              <a:latin typeface="Arial" charset="0"/>
+              <a:cs typeface="Arial" charset="0"/>
+            </a:endParaRPr>
           </a:p>
         </p:txBody>
       </p:sp>
     </p:spTree>
     <p:extLst>
       <p:ext uri="{BB962C8B-B14F-4D97-AF65-F5344CB8AC3E}">
-        <p14:creationId xmlns:p14="http://schemas.microsoft.com/office/powerpoint/2010/main" val="2029439400"/>
+        <p14:creationId xmlns:p14="http://schemas.microsoft.com/office/powerpoint/2010/main" val="1312586706"/>
       </p:ext>
     </p:extLst>
   </p:cSld>
@@ -2984,10 +2999,7 @@
           <a:bodyPr/>
           <a:lstStyle/>
           <a:p>
-            <a:r>
-              <a:rPr lang="en-US" dirty="0"/>
-              <a:t>This is getting complicated. You need a stack to keep track where to return.</a:t>
-            </a:r>
+            <a:endParaRPr lang="en-US" dirty="0"/>
           </a:p>
         </p:txBody>
       </p:sp>
@@ -2998,7 +3010,7 @@
             <a:spLocks noGrp="1"/>
           </p:cNvSpPr>
           <p:nvPr>
-            <p:ph type="sldNum" sz="quarter" idx="5"/>
+            <p:ph type="sldNum" sz="quarter" idx="10"/>
           </p:nvPr>
         </p:nvSpPr>
         <p:spPr/>
@@ -3014,7 +3026,7 @@
               <a:pPr>
                 <a:defRPr/>
               </a:pPr>
-              <a:t>47</a:t>
+              <a:t>45</a:t>
             </a:fld>
             <a:endParaRPr lang="en-US"/>
           </a:p>
@@ -3023,7 +3035,7 @@
     </p:spTree>
     <p:extLst>
       <p:ext uri="{BB962C8B-B14F-4D97-AF65-F5344CB8AC3E}">
-        <p14:creationId xmlns:p14="http://schemas.microsoft.com/office/powerpoint/2010/main" val="2299900500"/>
+        <p14:creationId xmlns:p14="http://schemas.microsoft.com/office/powerpoint/2010/main" val="2029439400"/>
       </p:ext>
     </p:extLst>
   </p:cSld>
@@ -3114,6 +3126,99 @@
     <p:extLst>
       <p:ext uri="{BB962C8B-B14F-4D97-AF65-F5344CB8AC3E}">
         <p14:creationId xmlns:p14="http://schemas.microsoft.com/office/powerpoint/2010/main" val="105408377"/>
+      </p:ext>
+    </p:extLst>
+  </p:cSld>
+  <p:clrMapOvr>
+    <a:masterClrMapping/>
+  </p:clrMapOvr>
+</p:notes>
+</file>
+
+<file path=ppt/notesSlides/notesSlide30.xml><?xml version="1.0" encoding="utf-8"?>
+<p:notes xmlns:a="http://schemas.openxmlformats.org/drawingml/2006/main" xmlns:r="http://schemas.openxmlformats.org/officeDocument/2006/relationships" xmlns:p="http://schemas.openxmlformats.org/presentationml/2006/main">
+  <p:cSld>
+    <p:spTree>
+      <p:nvGrpSpPr>
+        <p:cNvPr id="1" name=""/>
+        <p:cNvGrpSpPr/>
+        <p:nvPr/>
+      </p:nvGrpSpPr>
+      <p:grpSpPr>
+        <a:xfrm>
+          <a:off x="0" y="0"/>
+          <a:ext cx="0" cy="0"/>
+          <a:chOff x="0" y="0"/>
+          <a:chExt cx="0" cy="0"/>
+        </a:xfrm>
+      </p:grpSpPr>
+      <p:sp>
+        <p:nvSpPr>
+          <p:cNvPr id="2" name="Slide Image Placeholder 1"/>
+          <p:cNvSpPr>
+            <a:spLocks noGrp="1" noRot="1" noChangeAspect="1"/>
+          </p:cNvSpPr>
+          <p:nvPr>
+            <p:ph type="sldImg"/>
+          </p:nvPr>
+        </p:nvSpPr>
+        <p:spPr/>
+      </p:sp>
+      <p:sp>
+        <p:nvSpPr>
+          <p:cNvPr id="3" name="Notes Placeholder 2"/>
+          <p:cNvSpPr>
+            <a:spLocks noGrp="1"/>
+          </p:cNvSpPr>
+          <p:nvPr>
+            <p:ph type="body" idx="1"/>
+          </p:nvPr>
+        </p:nvSpPr>
+        <p:spPr/>
+        <p:txBody>
+          <a:bodyPr/>
+          <a:lstStyle/>
+          <a:p>
+            <a:r>
+              <a:rPr lang="en-US" dirty="0"/>
+              <a:t>This is getting complicated. You need a stack to keep track where to return.</a:t>
+            </a:r>
+          </a:p>
+        </p:txBody>
+      </p:sp>
+      <p:sp>
+        <p:nvSpPr>
+          <p:cNvPr id="4" name="Slide Number Placeholder 3"/>
+          <p:cNvSpPr>
+            <a:spLocks noGrp="1"/>
+          </p:cNvSpPr>
+          <p:nvPr>
+            <p:ph type="sldNum" sz="quarter" idx="5"/>
+          </p:nvPr>
+        </p:nvSpPr>
+        <p:spPr/>
+        <p:txBody>
+          <a:bodyPr/>
+          <a:lstStyle/>
+          <a:p>
+            <a:pPr>
+              <a:defRPr/>
+            </a:pPr>
+            <a:fld id="{5B90836E-2851-478D-B8E0-4CBCFBE2CBFD}" type="slidenum">
+              <a:rPr lang="en-US" smtClean="0"/>
+              <a:pPr>
+                <a:defRPr/>
+              </a:pPr>
+              <a:t>47</a:t>
+            </a:fld>
+            <a:endParaRPr lang="en-US"/>
+          </a:p>
+        </p:txBody>
+      </p:sp>
+    </p:spTree>
+    <p:extLst>
+      <p:ext uri="{BB962C8B-B14F-4D97-AF65-F5344CB8AC3E}">
+        <p14:creationId xmlns:p14="http://schemas.microsoft.com/office/powerpoint/2010/main" val="2299900500"/>
       </p:ext>
     </p:extLst>
   </p:cSld>
@@ -3975,7 +4080,7 @@
               <a:pPr>
                 <a:defRPr/>
               </a:pPr>
-              <a:t>16-04-2026</a:t>
+              <a:t>20-04-2026</a:t>
             </a:fld>
             <a:endParaRPr lang="en-US"/>
           </a:p>
@@ -4165,7 +4270,7 @@
               <a:pPr>
                 <a:defRPr/>
               </a:pPr>
-              <a:t>16-04-2026</a:t>
+              <a:t>20-04-2026</a:t>
             </a:fld>
             <a:endParaRPr lang="en-US"/>
           </a:p>
@@ -4365,7 +4470,7 @@
               <a:pPr>
                 <a:defRPr/>
               </a:pPr>
-              <a:t>16-04-2026</a:t>
+              <a:t>20-04-2026</a:t>
             </a:fld>
             <a:endParaRPr lang="en-US"/>
           </a:p>
@@ -4561,7 +4666,7 @@
               <a:pPr>
                 <a:defRPr/>
               </a:pPr>
-              <a:t>16-04-2026</a:t>
+              <a:t>20-04-2026</a:t>
             </a:fld>
             <a:endParaRPr lang="en-US"/>
           </a:p>
@@ -4828,7 +4933,7 @@
               <a:pPr>
                 <a:defRPr/>
               </a:pPr>
-              <a:t>16-04-2026</a:t>
+              <a:t>20-04-2026</a:t>
             </a:fld>
             <a:endParaRPr lang="en-US"/>
           </a:p>
@@ -5135,7 +5240,7 @@
               <a:pPr>
                 <a:defRPr/>
               </a:pPr>
-              <a:t>16-04-2026</a:t>
+              <a:t>20-04-2026</a:t>
             </a:fld>
             <a:endParaRPr lang="en-US"/>
           </a:p>
@@ -5576,7 +5681,7 @@
               <a:pPr>
                 <a:defRPr/>
               </a:pPr>
-              <a:t>16-04-2026</a:t>
+              <a:t>20-04-2026</a:t>
             </a:fld>
             <a:endParaRPr lang="en-US"/>
           </a:p>
@@ -5721,7 +5826,7 @@
               <a:pPr>
                 <a:defRPr/>
               </a:pPr>
-              <a:t>16-04-2026</a:t>
+              <a:t>20-04-2026</a:t>
             </a:fld>
             <a:endParaRPr lang="en-US"/>
           </a:p>
@@ -5838,7 +5943,7 @@
               <a:pPr>
                 <a:defRPr/>
               </a:pPr>
-              <a:t>16-04-2026</a:t>
+              <a:t>20-04-2026</a:t>
             </a:fld>
             <a:endParaRPr lang="en-US"/>
           </a:p>
@@ -6135,7 +6240,7 @@
               <a:pPr>
                 <a:defRPr/>
               </a:pPr>
-              <a:t>16-04-2026</a:t>
+              <a:t>20-04-2026</a:t>
             </a:fld>
             <a:endParaRPr lang="en-US"/>
           </a:p>
@@ -6415,7 +6520,7 @@
               <a:pPr>
                 <a:defRPr/>
               </a:pPr>
-              <a:t>16-04-2026</a:t>
+              <a:t>20-04-2026</a:t>
             </a:fld>
             <a:endParaRPr lang="en-US"/>
           </a:p>
@@ -6671,7 +6776,7 @@
               <a:pPr>
                 <a:defRPr/>
               </a:pPr>
-              <a:t>16-04-2026</a:t>
+              <a:t>20-04-2026</a:t>
             </a:fld>
             <a:endParaRPr lang="en-US"/>
           </a:p>
@@ -10230,7 +10335,12 @@
             <p:ph type="title"/>
           </p:nvPr>
         </p:nvSpPr>
-        <p:spPr/>
+        <p:spPr>
+          <a:xfrm>
+            <a:off x="457200" y="274638"/>
+            <a:ext cx="8229600" cy="706074"/>
+          </a:xfrm>
+        </p:spPr>
         <p:txBody>
           <a:bodyPr/>
           <a:lstStyle/>
@@ -10255,8 +10365,8 @@
         </p:nvSpPr>
         <p:spPr>
           <a:xfrm>
-            <a:off x="457200" y="1600200"/>
-            <a:ext cx="8229600" cy="4900613"/>
+            <a:off x="457200" y="1124744"/>
+            <a:ext cx="8229600" cy="5376069"/>
           </a:xfrm>
         </p:spPr>
         <p:txBody>
@@ -10265,47 +10375,47 @@
           <a:p>
             <a:pPr eaLnBrk="1" hangingPunct="1"/>
             <a:r>
-              <a:rPr lang="en-US" sz="2800" dirty="0"/>
+              <a:rPr lang="en-US" sz="2400" dirty="0"/>
               <a:t>Consider these examples:</a:t>
             </a:r>
             <a:br>
-              <a:rPr lang="en-US" sz="2800" dirty="0"/>
+              <a:rPr lang="en-US" sz="2400" dirty="0"/>
             </a:br>
-            <a:endParaRPr lang="en-US" sz="2800" dirty="0"/>
+            <a:endParaRPr lang="en-US" sz="2400" dirty="0"/>
           </a:p>
           <a:p>
             <a:pPr eaLnBrk="1" hangingPunct="1"/>
-            <a:endParaRPr lang="en-US" sz="2800" dirty="0"/>
+            <a:endParaRPr lang="en-US" sz="2400" dirty="0"/>
           </a:p>
           <a:p>
             <a:pPr eaLnBrk="1" hangingPunct="1"/>
-            <a:endParaRPr lang="en-US" sz="2800" dirty="0"/>
+            <a:endParaRPr lang="en-US" sz="2400" dirty="0"/>
           </a:p>
           <a:p>
             <a:pPr eaLnBrk="1" hangingPunct="1"/>
-            <a:endParaRPr lang="en-US" sz="2800" dirty="0"/>
+            <a:endParaRPr lang="en-US" sz="2400" dirty="0"/>
           </a:p>
           <a:p>
             <a:pPr eaLnBrk="1" hangingPunct="1"/>
-            <a:endParaRPr lang="en-US" sz="2800" dirty="0"/>
+            <a:endParaRPr lang="en-US" sz="2400" dirty="0"/>
           </a:p>
           <a:p>
             <a:pPr eaLnBrk="1" hangingPunct="1"/>
             <a:r>
-              <a:rPr lang="en-US" sz="2800" dirty="0"/>
+              <a:rPr lang="en-US" sz="2400" dirty="0"/>
               <a:t>What do we have to cover in C2.1, C2.2, and C2.3?</a:t>
             </a:r>
           </a:p>
           <a:p>
             <a:pPr eaLnBrk="1" hangingPunct="1"/>
             <a:r>
-              <a:rPr lang="en-US" sz="2800" dirty="0"/>
+              <a:rPr lang="en-US" sz="2400" dirty="0"/>
               <a:t>What would be the minimal test set for each?</a:t>
             </a:r>
           </a:p>
           <a:p>
             <a:pPr eaLnBrk="1" hangingPunct="1"/>
-            <a:endParaRPr lang="en-US" sz="2800" dirty="0"/>
+            <a:endParaRPr lang="en-US" sz="2400" dirty="0"/>
           </a:p>
         </p:txBody>
       </p:sp>
@@ -10348,7 +10458,7 @@
         </p:nvGrpSpPr>
         <p:grpSpPr bwMode="auto">
           <a:xfrm>
-            <a:off x="6239568" y="3190956"/>
+            <a:off x="1043608" y="2443177"/>
             <a:ext cx="555625" cy="469900"/>
             <a:chOff x="4288" y="1746"/>
             <a:chExt cx="350" cy="296"/>
@@ -10439,7 +10549,7 @@
         </p:nvGrpSpPr>
         <p:grpSpPr bwMode="auto">
           <a:xfrm>
-            <a:off x="7073005" y="2703593"/>
+            <a:off x="1877045" y="1955814"/>
             <a:ext cx="603250" cy="1441450"/>
             <a:chOff x="1346" y="2965"/>
             <a:chExt cx="380" cy="908"/>
@@ -10636,7 +10746,7 @@
         </p:nvSpPr>
         <p:spPr bwMode="auto">
           <a:xfrm flipV="1">
-            <a:off x="6787255" y="3063956"/>
+            <a:off x="1591295" y="2316177"/>
             <a:ext cx="396875" cy="265113"/>
           </a:xfrm>
           <a:prstGeom prst="line">
@@ -10670,7 +10780,7 @@
         </p:nvSpPr>
         <p:spPr bwMode="auto">
           <a:xfrm>
-            <a:off x="6755505" y="3578306"/>
+            <a:off x="1559545" y="2830527"/>
             <a:ext cx="346075" cy="249238"/>
           </a:xfrm>
           <a:prstGeom prst="line">
@@ -10704,7 +10814,7 @@
         </p:nvSpPr>
         <p:spPr bwMode="auto">
           <a:xfrm>
-            <a:off x="7374630" y="3176668"/>
+            <a:off x="2178670" y="2428889"/>
             <a:ext cx="0" cy="498475"/>
           </a:xfrm>
           <a:prstGeom prst="line">
@@ -10738,7 +10848,7 @@
         </p:nvSpPr>
         <p:spPr bwMode="auto">
           <a:xfrm>
-            <a:off x="7374630" y="2395618"/>
+            <a:off x="2178670" y="1647839"/>
             <a:ext cx="0" cy="295275"/>
           </a:xfrm>
           <a:prstGeom prst="line">
@@ -10772,7 +10882,7 @@
         </p:nvGrpSpPr>
         <p:grpSpPr bwMode="auto">
           <a:xfrm>
-            <a:off x="1232146" y="2740106"/>
+            <a:off x="3492130" y="1961801"/>
             <a:ext cx="4346575" cy="1443037"/>
             <a:chOff x="503" y="2966"/>
             <a:chExt cx="2738" cy="909"/>
@@ -11751,6 +11861,295 @@
           </p:txBody>
         </p:sp>
       </p:grpSp>
+      <p:graphicFrame>
+        <p:nvGraphicFramePr>
+          <p:cNvPr id="3" name="Table 4">
+            <a:extLst>
+              <a:ext uri="{FF2B5EF4-FFF2-40B4-BE49-F238E27FC236}">
+                <a16:creationId xmlns:a16="http://schemas.microsoft.com/office/drawing/2014/main" id="{2E681F42-7B90-796C-CCDF-4542C782A3F7}"/>
+              </a:ext>
+            </a:extLst>
+          </p:cNvPr>
+          <p:cNvGraphicFramePr>
+            <a:graphicFrameLocks noGrp="1"/>
+          </p:cNvGraphicFramePr>
+          <p:nvPr>
+            <p:extLst>
+              <p:ext uri="{D42A27DB-BD31-4B8C-83A1-F6EECF244321}">
+                <p14:modId xmlns:p14="http://schemas.microsoft.com/office/powerpoint/2010/main" val="3368804315"/>
+              </p:ext>
+            </p:extLst>
+          </p:nvPr>
+        </p:nvGraphicFramePr>
+        <p:xfrm>
+          <a:off x="4139953" y="4830763"/>
+          <a:ext cx="3816424" cy="1524000"/>
+        </p:xfrm>
+        <a:graphic>
+          <a:graphicData uri="http://schemas.openxmlformats.org/drawingml/2006/table">
+            <a:tbl>
+              <a:tblPr firstRow="1" bandRow="1">
+                <a:tableStyleId>{5C22544A-7EE6-4342-B048-85BDC9FD1C3A}</a:tableStyleId>
+              </a:tblPr>
+              <a:tblGrid>
+                <a:gridCol w="1137149">
+                  <a:extLst>
+                    <a:ext uri="{9D8B030D-6E8A-4147-A177-3AD203B41FA5}">
+                      <a16:colId xmlns:a16="http://schemas.microsoft.com/office/drawing/2014/main" val="698913581"/>
+                    </a:ext>
+                  </a:extLst>
+                </a:gridCol>
+                <a:gridCol w="2679275">
+                  <a:extLst>
+                    <a:ext uri="{9D8B030D-6E8A-4147-A177-3AD203B41FA5}">
+                      <a16:colId xmlns:a16="http://schemas.microsoft.com/office/drawing/2014/main" val="1016153449"/>
+                    </a:ext>
+                  </a:extLst>
+                </a:gridCol>
+              </a:tblGrid>
+              <a:tr h="255062">
+                <a:tc>
+                  <a:txBody>
+                    <a:bodyPr/>
+                    <a:lstStyle/>
+                    <a:p>
+                      <a:endParaRPr lang="en-NL" sz="1400" b="0" dirty="0"/>
+                    </a:p>
+                  </a:txBody>
+                  <a:tcPr>
+                    <a:noFill/>
+                  </a:tcPr>
+                </a:tc>
+                <a:tc>
+                  <a:txBody>
+                    <a:bodyPr/>
+                    <a:lstStyle/>
+                    <a:p>
+                      <a:r>
+                        <a:rPr lang="en-NL" sz="1400" b="0" dirty="0">
+                          <a:solidFill>
+                            <a:schemeClr val="tx1"/>
+                          </a:solidFill>
+                        </a:rPr>
+                        <a:t>#tests needed to cover the targets</a:t>
+                      </a:r>
+                    </a:p>
+                  </a:txBody>
+                  <a:tcPr>
+                    <a:solidFill>
+                      <a:schemeClr val="accent5">
+                        <a:lumMod val="40000"/>
+                        <a:lumOff val="60000"/>
+                      </a:schemeClr>
+                    </a:solidFill>
+                  </a:tcPr>
+                </a:tc>
+                <a:extLst>
+                  <a:ext uri="{0D108BD9-81ED-4DB2-BD59-A6C34878D82A}">
+                    <a16:rowId xmlns:a16="http://schemas.microsoft.com/office/drawing/2014/main" val="1943707847"/>
+                  </a:ext>
+                </a:extLst>
+              </a:tr>
+              <a:tr h="255062">
+                <a:tc>
+                  <a:txBody>
+                    <a:bodyPr/>
+                    <a:lstStyle/>
+                    <a:p>
+                      <a:pPr algn="ctr"/>
+                      <a:r>
+                        <a:rPr lang="en-NL" sz="1400" dirty="0"/>
+                        <a:t>7 nodes</a:t>
+                      </a:r>
+                    </a:p>
+                  </a:txBody>
+                  <a:tcPr>
+                    <a:solidFill>
+                      <a:schemeClr val="accent5">
+                        <a:lumMod val="20000"/>
+                        <a:lumOff val="80000"/>
+                      </a:schemeClr>
+                    </a:solidFill>
+                  </a:tcPr>
+                </a:tc>
+                <a:tc>
+                  <a:txBody>
+                    <a:bodyPr/>
+                    <a:lstStyle/>
+                    <a:p>
+                      <a:pPr algn="ctr"/>
+                      <a:r>
+                        <a:rPr lang="en-NL" sz="1400" dirty="0"/>
+                        <a:t> at least 2</a:t>
+                      </a:r>
+                    </a:p>
+                  </a:txBody>
+                  <a:tcPr>
+                    <a:solidFill>
+                      <a:schemeClr val="accent5">
+                        <a:lumMod val="20000"/>
+                        <a:lumOff val="80000"/>
+                      </a:schemeClr>
+                    </a:solidFill>
+                  </a:tcPr>
+                </a:tc>
+                <a:extLst>
+                  <a:ext uri="{0D108BD9-81ED-4DB2-BD59-A6C34878D82A}">
+                    <a16:rowId xmlns:a16="http://schemas.microsoft.com/office/drawing/2014/main" val="13986716"/>
+                  </a:ext>
+                </a:extLst>
+              </a:tr>
+              <a:tr h="255062">
+                <a:tc>
+                  <a:txBody>
+                    <a:bodyPr/>
+                    <a:lstStyle/>
+                    <a:p>
+                      <a:pPr algn="ctr"/>
+                      <a:r>
+                        <a:rPr lang="en-NL" sz="1400" dirty="0"/>
+                        <a:t>8 edges</a:t>
+                      </a:r>
+                    </a:p>
+                  </a:txBody>
+                  <a:tcPr>
+                    <a:solidFill>
+                      <a:schemeClr val="accent5">
+                        <a:lumMod val="20000"/>
+                        <a:lumOff val="80000"/>
+                      </a:schemeClr>
+                    </a:solidFill>
+                  </a:tcPr>
+                </a:tc>
+                <a:tc>
+                  <a:txBody>
+                    <a:bodyPr/>
+                    <a:lstStyle/>
+                    <a:p>
+                      <a:pPr algn="ctr"/>
+                      <a:r>
+                        <a:rPr lang="en-NL" sz="1400" dirty="0"/>
+                        <a:t>at least 2</a:t>
+                      </a:r>
+                    </a:p>
+                  </a:txBody>
+                  <a:tcPr>
+                    <a:solidFill>
+                      <a:schemeClr val="accent5">
+                        <a:lumMod val="20000"/>
+                        <a:lumOff val="80000"/>
+                      </a:schemeClr>
+                    </a:solidFill>
+                  </a:tcPr>
+                </a:tc>
+                <a:extLst>
+                  <a:ext uri="{0D108BD9-81ED-4DB2-BD59-A6C34878D82A}">
+                    <a16:rowId xmlns:a16="http://schemas.microsoft.com/office/drawing/2014/main" val="2079812348"/>
+                  </a:ext>
+                </a:extLst>
+              </a:tr>
+              <a:tr h="255062">
+                <a:tc>
+                  <a:txBody>
+                    <a:bodyPr/>
+                    <a:lstStyle/>
+                    <a:p>
+                      <a:pPr algn="ctr"/>
+                      <a:r>
+                        <a:rPr lang="en-NL" sz="1400" dirty="0"/>
+                        <a:t>6 edge-pairs</a:t>
+                      </a:r>
+                    </a:p>
+                  </a:txBody>
+                  <a:tcPr>
+                    <a:solidFill>
+                      <a:schemeClr val="accent5">
+                        <a:lumMod val="20000"/>
+                        <a:lumOff val="80000"/>
+                      </a:schemeClr>
+                    </a:solidFill>
+                  </a:tcPr>
+                </a:tc>
+                <a:tc>
+                  <a:txBody>
+                    <a:bodyPr/>
+                    <a:lstStyle/>
+                    <a:p>
+                      <a:pPr algn="ctr"/>
+                      <a:r>
+                        <a:rPr lang="en-NL" sz="1400" dirty="0"/>
+                        <a:t>4</a:t>
+                      </a:r>
+                    </a:p>
+                  </a:txBody>
+                  <a:tcPr>
+                    <a:solidFill>
+                      <a:schemeClr val="accent5">
+                        <a:lumMod val="20000"/>
+                        <a:lumOff val="80000"/>
+                      </a:schemeClr>
+                    </a:solidFill>
+                  </a:tcPr>
+                </a:tc>
+                <a:extLst>
+                  <a:ext uri="{0D108BD9-81ED-4DB2-BD59-A6C34878D82A}">
+                    <a16:rowId xmlns:a16="http://schemas.microsoft.com/office/drawing/2014/main" val="4261009437"/>
+                  </a:ext>
+                </a:extLst>
+              </a:tr>
+              <a:tr h="255062">
+                <a:tc>
+                  <a:txBody>
+                    <a:bodyPr/>
+                    <a:lstStyle/>
+                    <a:p>
+                      <a:pPr algn="ctr"/>
+                      <a:r>
+                        <a:rPr lang="en-NL" sz="1400" dirty="0"/>
+                        <a:t>4 paths</a:t>
+                      </a:r>
+                    </a:p>
+                  </a:txBody>
+                  <a:tcPr>
+                    <a:solidFill>
+                      <a:schemeClr val="accent5">
+                        <a:lumMod val="20000"/>
+                        <a:lumOff val="80000"/>
+                      </a:schemeClr>
+                    </a:solidFill>
+                  </a:tcPr>
+                </a:tc>
+                <a:tc>
+                  <a:txBody>
+                    <a:bodyPr/>
+                    <a:lstStyle/>
+                    <a:p>
+                      <a:pPr algn="ctr"/>
+                      <a:r>
+                        <a:rPr lang="en-NL" sz="1400" dirty="0"/>
+                        <a:t>4</a:t>
+                      </a:r>
+                    </a:p>
+                  </a:txBody>
+                  <a:tcPr>
+                    <a:solidFill>
+                      <a:schemeClr val="accent5">
+                        <a:lumMod val="20000"/>
+                        <a:lumOff val="80000"/>
+                      </a:schemeClr>
+                    </a:solidFill>
+                  </a:tcPr>
+                </a:tc>
+                <a:extLst>
+                  <a:ext uri="{0D108BD9-81ED-4DB2-BD59-A6C34878D82A}">
+                    <a16:rowId xmlns:a16="http://schemas.microsoft.com/office/drawing/2014/main" val="432641923"/>
+                  </a:ext>
+                </a:extLst>
+              </a:tr>
+            </a:tbl>
+          </a:graphicData>
+        </a:graphic>
+      </p:graphicFrame>
     </p:spTree>
     <p:extLst>
       <p:ext uri="{BB962C8B-B14F-4D97-AF65-F5344CB8AC3E}">
@@ -11761,6 +12160,81 @@
   <p:clrMapOvr>
     <a:masterClrMapping/>
   </p:clrMapOvr>
+  <p:timing>
+    <p:tnLst>
+      <p:par>
+        <p:cTn id="1" dur="indefinite" restart="never" nodeType="tmRoot">
+          <p:childTnLst>
+            <p:seq concurrent="1" nextAc="seek">
+              <p:cTn id="2" dur="indefinite" nodeType="mainSeq">
+                <p:childTnLst>
+                  <p:par>
+                    <p:cTn id="3" fill="hold">
+                      <p:stCondLst>
+                        <p:cond delay="indefinite"/>
+                      </p:stCondLst>
+                      <p:childTnLst>
+                        <p:par>
+                          <p:cTn id="4" fill="hold">
+                            <p:stCondLst>
+                              <p:cond delay="0"/>
+                            </p:stCondLst>
+                            <p:childTnLst>
+                              <p:par>
+                                <p:cTn id="5" presetID="1" presetClass="entr" presetSubtype="0" fill="hold" nodeType="clickEffect">
+                                  <p:stCondLst>
+                                    <p:cond delay="0"/>
+                                  </p:stCondLst>
+                                  <p:childTnLst>
+                                    <p:set>
+                                      <p:cBhvr>
+                                        <p:cTn id="6" dur="1" fill="hold">
+                                          <p:stCondLst>
+                                            <p:cond delay="0"/>
+                                          </p:stCondLst>
+                                        </p:cTn>
+                                        <p:tgtEl>
+                                          <p:spTgt spid="3"/>
+                                        </p:tgtEl>
+                                        <p:attrNameLst>
+                                          <p:attrName>style.visibility</p:attrName>
+                                        </p:attrNameLst>
+                                      </p:cBhvr>
+                                      <p:to>
+                                        <p:strVal val="visible"/>
+                                      </p:to>
+                                    </p:set>
+                                  </p:childTnLst>
+                                </p:cTn>
+                              </p:par>
+                            </p:childTnLst>
+                          </p:cTn>
+                        </p:par>
+                      </p:childTnLst>
+                    </p:cTn>
+                  </p:par>
+                </p:childTnLst>
+              </p:cTn>
+              <p:prevCondLst>
+                <p:cond evt="onPrev" delay="0">
+                  <p:tgtEl>
+                    <p:sldTgt/>
+                  </p:tgtEl>
+                </p:cond>
+              </p:prevCondLst>
+              <p:nextCondLst>
+                <p:cond evt="onNext" delay="0">
+                  <p:tgtEl>
+                    <p:sldTgt/>
+                  </p:tgtEl>
+                </p:cond>
+              </p:nextCondLst>
+            </p:seq>
+          </p:childTnLst>
+        </p:cTn>
+      </p:par>
+    </p:tnLst>
+  </p:timing>
 </p:sld>
 </file>
 
@@ -12032,7 +12506,12 @@
             <p:ph type="title"/>
           </p:nvPr>
         </p:nvSpPr>
-        <p:spPr/>
+        <p:spPr>
+          <a:xfrm>
+            <a:off x="457200" y="274638"/>
+            <a:ext cx="8229600" cy="855658"/>
+          </a:xfrm>
+        </p:spPr>
         <p:txBody>
           <a:bodyPr/>
           <a:lstStyle/>
@@ -12062,7 +12541,7 @@
         </p:nvSpPr>
         <p:spPr>
           <a:xfrm>
-            <a:off x="457200" y="4037310"/>
+            <a:off x="527224" y="3713459"/>
             <a:ext cx="8229600" cy="2463503"/>
           </a:xfrm>
         </p:spPr>
@@ -12073,14 +12552,14 @@
             <a:pPr eaLnBrk="1" hangingPunct="1"/>
             <a:r>
               <a:rPr lang="en-US" sz="2800" dirty="0"/>
-              <a:t>C2.2 subsumes 2.1 (but not the other way around).</a:t>
+              <a:t>C2.2 subsumes 2.1 (but not the other way around, demonstrated by P1).</a:t>
             </a:r>
           </a:p>
           <a:p>
             <a:pPr eaLnBrk="1" hangingPunct="1"/>
             <a:r>
               <a:rPr lang="en-US" sz="2800" dirty="0"/>
-              <a:t>C2.3 subsumes C2.2 (but not the other way around).</a:t>
+              <a:t>C2.3 subsumes C2.2 (but not the other way around, demonstrated by P2).</a:t>
             </a:r>
           </a:p>
         </p:txBody>
@@ -12114,9 +12593,50 @@
           </a:p>
         </p:txBody>
       </p:sp>
+      <p:sp>
+        <p:nvSpPr>
+          <p:cNvPr id="2" name="TextBox 1">
+            <a:extLst>
+              <a:ext uri="{FF2B5EF4-FFF2-40B4-BE49-F238E27FC236}">
+                <a16:creationId xmlns:a16="http://schemas.microsoft.com/office/drawing/2014/main" id="{A6C9B43A-8FC1-B8CD-3640-50F9BE3170E9}"/>
+              </a:ext>
+            </a:extLst>
+          </p:cNvPr>
+          <p:cNvSpPr txBox="1"/>
+          <p:nvPr/>
+        </p:nvSpPr>
+        <p:spPr>
+          <a:xfrm>
+            <a:off x="771583" y="1643356"/>
+            <a:ext cx="530915" cy="369332"/>
+          </a:xfrm>
+          <a:prstGeom prst="rect">
+            <a:avLst/>
+          </a:prstGeom>
+          <a:noFill/>
+        </p:spPr>
+        <p:txBody>
+          <a:bodyPr wrap="none" rtlCol="0">
+            <a:spAutoFit/>
+          </a:bodyPr>
+          <a:lstStyle/>
+          <a:p>
+            <a:r>
+              <a:rPr lang="en-NL" dirty="0"/>
+              <a:t>P1:</a:t>
+            </a:r>
+          </a:p>
+        </p:txBody>
+      </p:sp>
       <p:grpSp>
         <p:nvGrpSpPr>
-          <p:cNvPr id="15399" name="Group 11"/>
+          <p:cNvPr id="3" name="Group 11">
+            <a:extLst>
+              <a:ext uri="{FF2B5EF4-FFF2-40B4-BE49-F238E27FC236}">
+                <a16:creationId xmlns:a16="http://schemas.microsoft.com/office/drawing/2014/main" id="{23451FE6-B6BA-0992-70D0-FCA1FB504B63}"/>
+              </a:ext>
+            </a:extLst>
+          </p:cNvPr>
           <p:cNvGrpSpPr>
             <a:grpSpLocks/>
           </p:cNvGrpSpPr>
@@ -12124,7 +12644,7 @@
         </p:nvGrpSpPr>
         <p:grpSpPr bwMode="auto">
           <a:xfrm>
-            <a:off x="6239568" y="2640162"/>
+            <a:off x="1074267" y="2383262"/>
             <a:ext cx="555625" cy="469900"/>
             <a:chOff x="4288" y="1746"/>
             <a:chExt cx="350" cy="296"/>
@@ -12132,7 +12652,13 @@
         </p:grpSpPr>
         <p:sp>
           <p:nvSpPr>
-            <p:cNvPr id="15411" name="Oval 12"/>
+            <p:cNvPr id="5" name="Oval 12">
+              <a:extLst>
+                <a:ext uri="{FF2B5EF4-FFF2-40B4-BE49-F238E27FC236}">
+                  <a16:creationId xmlns:a16="http://schemas.microsoft.com/office/drawing/2014/main" id="{F9B6CE6A-8FC1-C1CD-A379-63FB0D68EE81}"/>
+                </a:ext>
+              </a:extLst>
+            </p:cNvPr>
             <p:cNvSpPr>
               <a:spLocks noChangeArrowheads="1"/>
             </p:cNvSpPr>
@@ -12168,7 +12694,13 @@
         </p:sp>
         <p:sp>
           <p:nvSpPr>
-            <p:cNvPr id="15412" name="Text Box 13"/>
+            <p:cNvPr id="6" name="Text Box 13">
+              <a:extLst>
+                <a:ext uri="{FF2B5EF4-FFF2-40B4-BE49-F238E27FC236}">
+                  <a16:creationId xmlns:a16="http://schemas.microsoft.com/office/drawing/2014/main" id="{3E069ED5-F59C-3E34-6AFD-42798EC1BADE}"/>
+                </a:ext>
+              </a:extLst>
+            </p:cNvPr>
             <p:cNvSpPr txBox="1">
               <a:spLocks noChangeArrowheads="1"/>
             </p:cNvSpPr>
@@ -12207,7 +12739,13 @@
       </p:grpSp>
       <p:grpSp>
         <p:nvGrpSpPr>
-          <p:cNvPr id="15400" name="Group 14"/>
+          <p:cNvPr id="7" name="Group 14">
+            <a:extLst>
+              <a:ext uri="{FF2B5EF4-FFF2-40B4-BE49-F238E27FC236}">
+                <a16:creationId xmlns:a16="http://schemas.microsoft.com/office/drawing/2014/main" id="{17F6B39C-C132-63F2-546D-4E1E0AFFB2E2}"/>
+              </a:ext>
+            </a:extLst>
+          </p:cNvPr>
           <p:cNvGrpSpPr>
             <a:grpSpLocks/>
           </p:cNvGrpSpPr>
@@ -12215,7 +12753,7 @@
         </p:nvGrpSpPr>
         <p:grpSpPr bwMode="auto">
           <a:xfrm>
-            <a:off x="7073005" y="2152799"/>
+            <a:off x="1907704" y="1895899"/>
             <a:ext cx="603250" cy="1441450"/>
             <a:chOff x="1346" y="2965"/>
             <a:chExt cx="380" cy="908"/>
@@ -12223,7 +12761,13 @@
         </p:grpSpPr>
         <p:grpSp>
           <p:nvGrpSpPr>
-            <p:cNvPr id="15405" name="Group 15"/>
+            <p:cNvPr id="8" name="Group 15">
+              <a:extLst>
+                <a:ext uri="{FF2B5EF4-FFF2-40B4-BE49-F238E27FC236}">
+                  <a16:creationId xmlns:a16="http://schemas.microsoft.com/office/drawing/2014/main" id="{7A6C04CB-7BF0-33DD-B254-553C25CF3A94}"/>
+                </a:ext>
+              </a:extLst>
+            </p:cNvPr>
             <p:cNvGrpSpPr>
               <a:grpSpLocks/>
             </p:cNvGrpSpPr>
@@ -12239,7 +12783,13 @@
           </p:grpSpPr>
           <p:sp>
             <p:nvSpPr>
-              <p:cNvPr id="15409" name="Oval 16"/>
+              <p:cNvPr id="12" name="Oval 16">
+                <a:extLst>
+                  <a:ext uri="{FF2B5EF4-FFF2-40B4-BE49-F238E27FC236}">
+                    <a16:creationId xmlns:a16="http://schemas.microsoft.com/office/drawing/2014/main" id="{9130E0C3-1A90-9624-50E7-391622FAE7D3}"/>
+                  </a:ext>
+                </a:extLst>
+              </p:cNvPr>
               <p:cNvSpPr>
                 <a:spLocks noChangeArrowheads="1"/>
               </p:cNvSpPr>
@@ -12275,7 +12825,13 @@
           </p:sp>
           <p:sp>
             <p:nvSpPr>
-              <p:cNvPr id="15410" name="Text Box 17"/>
+              <p:cNvPr id="13" name="Text Box 17">
+                <a:extLst>
+                  <a:ext uri="{FF2B5EF4-FFF2-40B4-BE49-F238E27FC236}">
+                    <a16:creationId xmlns:a16="http://schemas.microsoft.com/office/drawing/2014/main" id="{EDB29F37-7012-4D20-AAAD-6097554AB718}"/>
+                  </a:ext>
+                </a:extLst>
+              </p:cNvPr>
               <p:cNvSpPr txBox="1">
                 <a:spLocks noChangeArrowheads="1"/>
               </p:cNvSpPr>
@@ -12313,7 +12869,13 @@
         </p:grpSp>
         <p:grpSp>
           <p:nvGrpSpPr>
-            <p:cNvPr id="15406" name="Group 18"/>
+            <p:cNvPr id="9" name="Group 18">
+              <a:extLst>
+                <a:ext uri="{FF2B5EF4-FFF2-40B4-BE49-F238E27FC236}">
+                  <a16:creationId xmlns:a16="http://schemas.microsoft.com/office/drawing/2014/main" id="{BDD3ADB8-8471-0A77-76CC-B670C9991D59}"/>
+                </a:ext>
+              </a:extLst>
+            </p:cNvPr>
             <p:cNvGrpSpPr>
               <a:grpSpLocks/>
             </p:cNvGrpSpPr>
@@ -12329,7 +12891,13 @@
           </p:grpSpPr>
           <p:sp>
             <p:nvSpPr>
-              <p:cNvPr id="15407" name="Oval 19"/>
+              <p:cNvPr id="10" name="Oval 19">
+                <a:extLst>
+                  <a:ext uri="{FF2B5EF4-FFF2-40B4-BE49-F238E27FC236}">
+                    <a16:creationId xmlns:a16="http://schemas.microsoft.com/office/drawing/2014/main" id="{6BEA2467-EC85-099C-8E63-797E05CE81F8}"/>
+                  </a:ext>
+                </a:extLst>
+              </p:cNvPr>
               <p:cNvSpPr>
                 <a:spLocks noChangeArrowheads="1"/>
               </p:cNvSpPr>
@@ -12365,7 +12933,13 @@
           </p:sp>
           <p:sp>
             <p:nvSpPr>
-              <p:cNvPr id="15408" name="Text Box 20"/>
+              <p:cNvPr id="11" name="Text Box 20">
+                <a:extLst>
+                  <a:ext uri="{FF2B5EF4-FFF2-40B4-BE49-F238E27FC236}">
+                    <a16:creationId xmlns:a16="http://schemas.microsoft.com/office/drawing/2014/main" id="{5542E1DE-FC4D-AE23-03FF-3AD24EFD6BD0}"/>
+                  </a:ext>
+                </a:extLst>
+              </p:cNvPr>
               <p:cNvSpPr txBox="1">
                 <a:spLocks noChangeArrowheads="1"/>
               </p:cNvSpPr>
@@ -12404,7 +12978,13 @@
       </p:grpSp>
       <p:sp>
         <p:nvSpPr>
-          <p:cNvPr id="15401" name="Line 24"/>
+          <p:cNvPr id="14" name="Line 24">
+            <a:extLst>
+              <a:ext uri="{FF2B5EF4-FFF2-40B4-BE49-F238E27FC236}">
+                <a16:creationId xmlns:a16="http://schemas.microsoft.com/office/drawing/2014/main" id="{7E0CA605-13D0-9AE1-1EAA-0859D3D071A3}"/>
+              </a:ext>
+            </a:extLst>
+          </p:cNvPr>
           <p:cNvSpPr>
             <a:spLocks noChangeShapeType="1"/>
           </p:cNvSpPr>
@@ -12412,7 +12992,7 @@
         </p:nvSpPr>
         <p:spPr bwMode="auto">
           <a:xfrm flipV="1">
-            <a:off x="6787255" y="2513162"/>
+            <a:off x="1621954" y="2256262"/>
             <a:ext cx="396875" cy="265113"/>
           </a:xfrm>
           <a:prstGeom prst="line">
@@ -12438,7 +13018,13 @@
       </p:sp>
       <p:sp>
         <p:nvSpPr>
-          <p:cNvPr id="15402" name="Line 39"/>
+          <p:cNvPr id="15" name="Line 39">
+            <a:extLst>
+              <a:ext uri="{FF2B5EF4-FFF2-40B4-BE49-F238E27FC236}">
+                <a16:creationId xmlns:a16="http://schemas.microsoft.com/office/drawing/2014/main" id="{BBC5CCE5-376E-DE5D-4334-A874F52BBBF3}"/>
+              </a:ext>
+            </a:extLst>
+          </p:cNvPr>
           <p:cNvSpPr>
             <a:spLocks noChangeShapeType="1"/>
           </p:cNvSpPr>
@@ -12446,7 +13032,7 @@
         </p:nvSpPr>
         <p:spPr bwMode="auto">
           <a:xfrm>
-            <a:off x="6755505" y="3027512"/>
+            <a:off x="1590204" y="2770612"/>
             <a:ext cx="346075" cy="249238"/>
           </a:xfrm>
           <a:prstGeom prst="line">
@@ -12472,7 +13058,13 @@
       </p:sp>
       <p:sp>
         <p:nvSpPr>
-          <p:cNvPr id="15403" name="Line 44"/>
+          <p:cNvPr id="16" name="Line 44">
+            <a:extLst>
+              <a:ext uri="{FF2B5EF4-FFF2-40B4-BE49-F238E27FC236}">
+                <a16:creationId xmlns:a16="http://schemas.microsoft.com/office/drawing/2014/main" id="{5F121F34-D925-27C1-5551-33CED60769AA}"/>
+              </a:ext>
+            </a:extLst>
+          </p:cNvPr>
           <p:cNvSpPr>
             <a:spLocks noChangeShapeType="1"/>
           </p:cNvSpPr>
@@ -12480,7 +13072,7 @@
         </p:nvSpPr>
         <p:spPr bwMode="auto">
           <a:xfrm>
-            <a:off x="7374630" y="2625874"/>
+            <a:off x="2209329" y="2368974"/>
             <a:ext cx="0" cy="498475"/>
           </a:xfrm>
           <a:prstGeom prst="line">
@@ -12506,7 +13098,13 @@
       </p:sp>
       <p:sp>
         <p:nvSpPr>
-          <p:cNvPr id="15404" name="Line 45"/>
+          <p:cNvPr id="17" name="Line 45">
+            <a:extLst>
+              <a:ext uri="{FF2B5EF4-FFF2-40B4-BE49-F238E27FC236}">
+                <a16:creationId xmlns:a16="http://schemas.microsoft.com/office/drawing/2014/main" id="{EAEC145B-1B0B-2898-77DD-217E40A2252C}"/>
+              </a:ext>
+            </a:extLst>
+          </p:cNvPr>
           <p:cNvSpPr>
             <a:spLocks noChangeShapeType="1"/>
           </p:cNvSpPr>
@@ -12514,7 +13112,7 @@
         </p:nvSpPr>
         <p:spPr bwMode="auto">
           <a:xfrm>
-            <a:off x="7374630" y="1844824"/>
+            <a:off x="2209329" y="1587924"/>
             <a:ext cx="0" cy="295275"/>
           </a:xfrm>
           <a:prstGeom prst="line">
@@ -12540,7 +13138,13 @@
       </p:sp>
       <p:grpSp>
         <p:nvGrpSpPr>
-          <p:cNvPr id="15366" name="Group 41"/>
+          <p:cNvPr id="18" name="Group 41">
+            <a:extLst>
+              <a:ext uri="{FF2B5EF4-FFF2-40B4-BE49-F238E27FC236}">
+                <a16:creationId xmlns:a16="http://schemas.microsoft.com/office/drawing/2014/main" id="{6048E141-C622-EF2E-2AA0-DB78B5D3AAAE}"/>
+              </a:ext>
+            </a:extLst>
+          </p:cNvPr>
           <p:cNvGrpSpPr>
             <a:grpSpLocks/>
           </p:cNvGrpSpPr>
@@ -12548,7 +13152,7 @@
         </p:nvGrpSpPr>
         <p:grpSpPr bwMode="auto">
           <a:xfrm>
-            <a:off x="1232146" y="2189312"/>
+            <a:off x="3522789" y="1901886"/>
             <a:ext cx="4346575" cy="1443037"/>
             <a:chOff x="503" y="2966"/>
             <a:chExt cx="2738" cy="909"/>
@@ -12556,7 +13160,13 @@
         </p:grpSpPr>
         <p:grpSp>
           <p:nvGrpSpPr>
-            <p:cNvPr id="15367" name="Group 18"/>
+            <p:cNvPr id="19" name="Group 18">
+              <a:extLst>
+                <a:ext uri="{FF2B5EF4-FFF2-40B4-BE49-F238E27FC236}">
+                  <a16:creationId xmlns:a16="http://schemas.microsoft.com/office/drawing/2014/main" id="{475F5871-774F-859D-E5D3-ED74053922D1}"/>
+                </a:ext>
+              </a:extLst>
+            </p:cNvPr>
             <p:cNvGrpSpPr>
               <a:grpSpLocks/>
             </p:cNvGrpSpPr>
@@ -12572,7 +13182,13 @@
           </p:grpSpPr>
           <p:sp>
             <p:nvSpPr>
-              <p:cNvPr id="15397" name="Oval 5"/>
+              <p:cNvPr id="49" name="Oval 5">
+                <a:extLst>
+                  <a:ext uri="{FF2B5EF4-FFF2-40B4-BE49-F238E27FC236}">
+                    <a16:creationId xmlns:a16="http://schemas.microsoft.com/office/drawing/2014/main" id="{4D6ABC9C-98E4-3FA9-2797-2E43D206C120}"/>
+                  </a:ext>
+                </a:extLst>
+              </p:cNvPr>
               <p:cNvSpPr>
                 <a:spLocks noChangeArrowheads="1"/>
               </p:cNvSpPr>
@@ -12608,7 +13224,13 @@
           </p:sp>
           <p:sp>
             <p:nvSpPr>
-              <p:cNvPr id="15398" name="Text Box 6"/>
+              <p:cNvPr id="50" name="Text Box 6">
+                <a:extLst>
+                  <a:ext uri="{FF2B5EF4-FFF2-40B4-BE49-F238E27FC236}">
+                    <a16:creationId xmlns:a16="http://schemas.microsoft.com/office/drawing/2014/main" id="{AEEB35AC-EAD8-0DEA-06D0-9AB8098B63A0}"/>
+                  </a:ext>
+                </a:extLst>
+              </p:cNvPr>
               <p:cNvSpPr txBox="1">
                 <a:spLocks noChangeArrowheads="1"/>
               </p:cNvSpPr>
@@ -12647,7 +13269,13 @@
         </p:grpSp>
         <p:grpSp>
           <p:nvGrpSpPr>
-            <p:cNvPr id="15368" name="Group 31"/>
+            <p:cNvPr id="20" name="Group 31">
+              <a:extLst>
+                <a:ext uri="{FF2B5EF4-FFF2-40B4-BE49-F238E27FC236}">
+                  <a16:creationId xmlns:a16="http://schemas.microsoft.com/office/drawing/2014/main" id="{A7410543-8877-7588-D9C9-48A947793F01}"/>
+                </a:ext>
+              </a:extLst>
+            </p:cNvPr>
             <p:cNvGrpSpPr>
               <a:grpSpLocks/>
             </p:cNvGrpSpPr>
@@ -12663,7 +13291,13 @@
           </p:grpSpPr>
           <p:grpSp>
             <p:nvGrpSpPr>
-              <p:cNvPr id="15391" name="Group 19"/>
+              <p:cNvPr id="43" name="Group 19">
+                <a:extLst>
+                  <a:ext uri="{FF2B5EF4-FFF2-40B4-BE49-F238E27FC236}">
+                    <a16:creationId xmlns:a16="http://schemas.microsoft.com/office/drawing/2014/main" id="{C866ED54-EEBD-7A1E-599D-67DB0D34D1DF}"/>
+                  </a:ext>
+                </a:extLst>
+              </p:cNvPr>
               <p:cNvGrpSpPr>
                 <a:grpSpLocks/>
               </p:cNvGrpSpPr>
@@ -12679,7 +13313,13 @@
             </p:grpSpPr>
             <p:sp>
               <p:nvSpPr>
-                <p:cNvPr id="15395" name="Oval 7"/>
+                <p:cNvPr id="47" name="Oval 7">
+                  <a:extLst>
+                    <a:ext uri="{FF2B5EF4-FFF2-40B4-BE49-F238E27FC236}">
+                      <a16:creationId xmlns:a16="http://schemas.microsoft.com/office/drawing/2014/main" id="{A60A0B32-F345-F3A2-62AB-E0F866E7A311}"/>
+                    </a:ext>
+                  </a:extLst>
+                </p:cNvPr>
                 <p:cNvSpPr>
                   <a:spLocks noChangeArrowheads="1"/>
                 </p:cNvSpPr>
@@ -12715,7 +13355,13 @@
             </p:sp>
             <p:sp>
               <p:nvSpPr>
-                <p:cNvPr id="15396" name="Text Box 8"/>
+                <p:cNvPr id="48" name="Text Box 8">
+                  <a:extLst>
+                    <a:ext uri="{FF2B5EF4-FFF2-40B4-BE49-F238E27FC236}">
+                      <a16:creationId xmlns:a16="http://schemas.microsoft.com/office/drawing/2014/main" id="{54FE9F50-A5B5-055C-0F5E-047372F9B775}"/>
+                    </a:ext>
+                  </a:extLst>
+                </p:cNvPr>
                 <p:cNvSpPr txBox="1">
                   <a:spLocks noChangeArrowheads="1"/>
                 </p:cNvSpPr>
@@ -12753,7 +13399,13 @@
           </p:grpSp>
           <p:grpSp>
             <p:nvGrpSpPr>
-              <p:cNvPr id="15392" name="Group 20"/>
+              <p:cNvPr id="44" name="Group 20">
+                <a:extLst>
+                  <a:ext uri="{FF2B5EF4-FFF2-40B4-BE49-F238E27FC236}">
+                    <a16:creationId xmlns:a16="http://schemas.microsoft.com/office/drawing/2014/main" id="{00CB3FA8-9BA8-4478-1C32-6AEDFD4D9FB0}"/>
+                  </a:ext>
+                </a:extLst>
+              </p:cNvPr>
               <p:cNvGrpSpPr>
                 <a:grpSpLocks/>
               </p:cNvGrpSpPr>
@@ -12769,7 +13421,13 @@
             </p:grpSpPr>
             <p:sp>
               <p:nvSpPr>
-                <p:cNvPr id="15393" name="Oval 9"/>
+                <p:cNvPr id="45" name="Oval 9">
+                  <a:extLst>
+                    <a:ext uri="{FF2B5EF4-FFF2-40B4-BE49-F238E27FC236}">
+                      <a16:creationId xmlns:a16="http://schemas.microsoft.com/office/drawing/2014/main" id="{4520F5F7-38DC-078D-E931-BBB8D5F6B4DD}"/>
+                    </a:ext>
+                  </a:extLst>
+                </p:cNvPr>
                 <p:cNvSpPr>
                   <a:spLocks noChangeArrowheads="1"/>
                 </p:cNvSpPr>
@@ -12805,7 +13463,13 @@
             </p:sp>
             <p:sp>
               <p:nvSpPr>
-                <p:cNvPr id="15394" name="Text Box 10"/>
+                <p:cNvPr id="46" name="Text Box 10">
+                  <a:extLst>
+                    <a:ext uri="{FF2B5EF4-FFF2-40B4-BE49-F238E27FC236}">
+                      <a16:creationId xmlns:a16="http://schemas.microsoft.com/office/drawing/2014/main" id="{818631F8-A4E3-BC25-78D8-1F772040A354}"/>
+                    </a:ext>
+                  </a:extLst>
+                </p:cNvPr>
                 <p:cNvSpPr txBox="1">
                   <a:spLocks noChangeArrowheads="1"/>
                 </p:cNvSpPr>
@@ -12844,7 +13508,13 @@
         </p:grpSp>
         <p:grpSp>
           <p:nvGrpSpPr>
-            <p:cNvPr id="15369" name="Group 21"/>
+            <p:cNvPr id="21" name="Group 21">
+              <a:extLst>
+                <a:ext uri="{FF2B5EF4-FFF2-40B4-BE49-F238E27FC236}">
+                  <a16:creationId xmlns:a16="http://schemas.microsoft.com/office/drawing/2014/main" id="{6E5AC42C-1891-5EE5-187A-D747C0305ED7}"/>
+                </a:ext>
+              </a:extLst>
+            </p:cNvPr>
             <p:cNvGrpSpPr>
               <a:grpSpLocks/>
             </p:cNvGrpSpPr>
@@ -12860,7 +13530,13 @@
           </p:grpSpPr>
           <p:sp>
             <p:nvSpPr>
-              <p:cNvPr id="15389" name="Oval 11"/>
+              <p:cNvPr id="41" name="Oval 11">
+                <a:extLst>
+                  <a:ext uri="{FF2B5EF4-FFF2-40B4-BE49-F238E27FC236}">
+                    <a16:creationId xmlns:a16="http://schemas.microsoft.com/office/drawing/2014/main" id="{8BB620C0-D1DA-0A5D-AAFB-6312D0491D3E}"/>
+                  </a:ext>
+                </a:extLst>
+              </p:cNvPr>
               <p:cNvSpPr>
                 <a:spLocks noChangeArrowheads="1"/>
               </p:cNvSpPr>
@@ -12896,7 +13572,13 @@
           </p:sp>
           <p:sp>
             <p:nvSpPr>
-              <p:cNvPr id="15390" name="Text Box 12"/>
+              <p:cNvPr id="42" name="Text Box 12">
+                <a:extLst>
+                  <a:ext uri="{FF2B5EF4-FFF2-40B4-BE49-F238E27FC236}">
+                    <a16:creationId xmlns:a16="http://schemas.microsoft.com/office/drawing/2014/main" id="{E0E51CAA-9AC6-0EF3-566E-36AA171D5C81}"/>
+                  </a:ext>
+                </a:extLst>
+              </p:cNvPr>
               <p:cNvSpPr txBox="1">
                 <a:spLocks noChangeArrowheads="1"/>
               </p:cNvSpPr>
@@ -12934,7 +13616,13 @@
         </p:grpSp>
         <p:sp>
           <p:nvSpPr>
-            <p:cNvPr id="15370" name="Line 13"/>
+            <p:cNvPr id="22" name="Line 13">
+              <a:extLst>
+                <a:ext uri="{FF2B5EF4-FFF2-40B4-BE49-F238E27FC236}">
+                  <a16:creationId xmlns:a16="http://schemas.microsoft.com/office/drawing/2014/main" id="{9994958B-5CD0-AD1E-F3EC-5F46BB3E4F4F}"/>
+                </a:ext>
+              </a:extLst>
+            </p:cNvPr>
             <p:cNvSpPr>
               <a:spLocks noChangeShapeType="1"/>
             </p:cNvSpPr>
@@ -12968,7 +13656,13 @@
         </p:sp>
         <p:sp>
           <p:nvSpPr>
-            <p:cNvPr id="15371" name="Line 17"/>
+            <p:cNvPr id="23" name="Line 17">
+              <a:extLst>
+                <a:ext uri="{FF2B5EF4-FFF2-40B4-BE49-F238E27FC236}">
+                  <a16:creationId xmlns:a16="http://schemas.microsoft.com/office/drawing/2014/main" id="{2E636C4C-A102-45B6-FCF7-9A613ACF92A2}"/>
+                </a:ext>
+              </a:extLst>
+            </p:cNvPr>
             <p:cNvSpPr>
               <a:spLocks noChangeShapeType="1"/>
             </p:cNvSpPr>
@@ -13002,7 +13696,13 @@
         </p:sp>
         <p:grpSp>
           <p:nvGrpSpPr>
-            <p:cNvPr id="15372" name="Group 22"/>
+            <p:cNvPr id="24" name="Group 22">
+              <a:extLst>
+                <a:ext uri="{FF2B5EF4-FFF2-40B4-BE49-F238E27FC236}">
+                  <a16:creationId xmlns:a16="http://schemas.microsoft.com/office/drawing/2014/main" id="{F8F2CA15-48A7-E753-7E89-414D794C2BD3}"/>
+                </a:ext>
+              </a:extLst>
+            </p:cNvPr>
             <p:cNvGrpSpPr>
               <a:grpSpLocks/>
             </p:cNvGrpSpPr>
@@ -13018,7 +13718,13 @@
           </p:grpSpPr>
           <p:sp>
             <p:nvSpPr>
-              <p:cNvPr id="15387" name="Oval 23"/>
+              <p:cNvPr id="39" name="Oval 23">
+                <a:extLst>
+                  <a:ext uri="{FF2B5EF4-FFF2-40B4-BE49-F238E27FC236}">
+                    <a16:creationId xmlns:a16="http://schemas.microsoft.com/office/drawing/2014/main" id="{0C66C0DA-035F-97E0-E866-AA88C429FB25}"/>
+                  </a:ext>
+                </a:extLst>
+              </p:cNvPr>
               <p:cNvSpPr>
                 <a:spLocks noChangeArrowheads="1"/>
               </p:cNvSpPr>
@@ -13054,7 +13760,13 @@
           </p:sp>
           <p:sp>
             <p:nvSpPr>
-              <p:cNvPr id="15388" name="Text Box 24"/>
+              <p:cNvPr id="40" name="Text Box 24">
+                <a:extLst>
+                  <a:ext uri="{FF2B5EF4-FFF2-40B4-BE49-F238E27FC236}">
+                    <a16:creationId xmlns:a16="http://schemas.microsoft.com/office/drawing/2014/main" id="{9CBA6E00-E00E-8771-CD02-1C3113196A0D}"/>
+                  </a:ext>
+                </a:extLst>
+              </p:cNvPr>
               <p:cNvSpPr txBox="1">
                 <a:spLocks noChangeArrowheads="1"/>
               </p:cNvSpPr>
@@ -13093,7 +13805,13 @@
         </p:grpSp>
         <p:grpSp>
           <p:nvGrpSpPr>
-            <p:cNvPr id="15373" name="Group 32"/>
+            <p:cNvPr id="25" name="Group 32">
+              <a:extLst>
+                <a:ext uri="{FF2B5EF4-FFF2-40B4-BE49-F238E27FC236}">
+                  <a16:creationId xmlns:a16="http://schemas.microsoft.com/office/drawing/2014/main" id="{AE5E0DD6-F47F-BE74-2BE8-184838924C7D}"/>
+                </a:ext>
+              </a:extLst>
+            </p:cNvPr>
             <p:cNvGrpSpPr>
               <a:grpSpLocks/>
             </p:cNvGrpSpPr>
@@ -13109,7 +13827,13 @@
           </p:grpSpPr>
           <p:grpSp>
             <p:nvGrpSpPr>
-              <p:cNvPr id="15381" name="Group 25"/>
+              <p:cNvPr id="33" name="Group 25">
+                <a:extLst>
+                  <a:ext uri="{FF2B5EF4-FFF2-40B4-BE49-F238E27FC236}">
+                    <a16:creationId xmlns:a16="http://schemas.microsoft.com/office/drawing/2014/main" id="{DA671E3A-80B8-75BB-1837-309B6A3CEE09}"/>
+                  </a:ext>
+                </a:extLst>
+              </p:cNvPr>
               <p:cNvGrpSpPr>
                 <a:grpSpLocks/>
               </p:cNvGrpSpPr>
@@ -13125,7 +13849,13 @@
             </p:grpSpPr>
             <p:sp>
               <p:nvSpPr>
-                <p:cNvPr id="15385" name="Oval 26"/>
+                <p:cNvPr id="37" name="Oval 26">
+                  <a:extLst>
+                    <a:ext uri="{FF2B5EF4-FFF2-40B4-BE49-F238E27FC236}">
+                      <a16:creationId xmlns:a16="http://schemas.microsoft.com/office/drawing/2014/main" id="{79E1C951-CEC2-B575-8654-0B1AEEA4E610}"/>
+                    </a:ext>
+                  </a:extLst>
+                </p:cNvPr>
                 <p:cNvSpPr>
                   <a:spLocks noChangeArrowheads="1"/>
                 </p:cNvSpPr>
@@ -13161,7 +13891,13 @@
             </p:sp>
             <p:sp>
               <p:nvSpPr>
-                <p:cNvPr id="15386" name="Text Box 27"/>
+                <p:cNvPr id="38" name="Text Box 27">
+                  <a:extLst>
+                    <a:ext uri="{FF2B5EF4-FFF2-40B4-BE49-F238E27FC236}">
+                      <a16:creationId xmlns:a16="http://schemas.microsoft.com/office/drawing/2014/main" id="{708BB82B-C4E7-AFD1-5BA4-C049AB547136}"/>
+                    </a:ext>
+                  </a:extLst>
+                </p:cNvPr>
                 <p:cNvSpPr txBox="1">
                   <a:spLocks noChangeArrowheads="1"/>
                 </p:cNvSpPr>
@@ -13199,7 +13935,13 @@
           </p:grpSp>
           <p:grpSp>
             <p:nvGrpSpPr>
-              <p:cNvPr id="15382" name="Group 28"/>
+              <p:cNvPr id="34" name="Group 28">
+                <a:extLst>
+                  <a:ext uri="{FF2B5EF4-FFF2-40B4-BE49-F238E27FC236}">
+                    <a16:creationId xmlns:a16="http://schemas.microsoft.com/office/drawing/2014/main" id="{493CE36C-AB40-F5FC-3DEB-50C6B41A1226}"/>
+                  </a:ext>
+                </a:extLst>
+              </p:cNvPr>
               <p:cNvGrpSpPr>
                 <a:grpSpLocks/>
               </p:cNvGrpSpPr>
@@ -13215,7 +13957,13 @@
             </p:grpSpPr>
             <p:sp>
               <p:nvSpPr>
-                <p:cNvPr id="15383" name="Oval 29"/>
+                <p:cNvPr id="35" name="Oval 29">
+                  <a:extLst>
+                    <a:ext uri="{FF2B5EF4-FFF2-40B4-BE49-F238E27FC236}">
+                      <a16:creationId xmlns:a16="http://schemas.microsoft.com/office/drawing/2014/main" id="{9D69D4B5-4BE8-908D-7F1B-EF3B8BBA4936}"/>
+                    </a:ext>
+                  </a:extLst>
+                </p:cNvPr>
                 <p:cNvSpPr>
                   <a:spLocks noChangeArrowheads="1"/>
                 </p:cNvSpPr>
@@ -13251,7 +13999,13 @@
             </p:sp>
             <p:sp>
               <p:nvSpPr>
-                <p:cNvPr id="15384" name="Text Box 30"/>
+                <p:cNvPr id="36" name="Text Box 30">
+                  <a:extLst>
+                    <a:ext uri="{FF2B5EF4-FFF2-40B4-BE49-F238E27FC236}">
+                      <a16:creationId xmlns:a16="http://schemas.microsoft.com/office/drawing/2014/main" id="{2F3D5314-255F-7CAB-42A2-61FC73765CF9}"/>
+                    </a:ext>
+                  </a:extLst>
+                </p:cNvPr>
                 <p:cNvSpPr txBox="1">
                   <a:spLocks noChangeArrowheads="1"/>
                 </p:cNvSpPr>
@@ -13290,7 +14044,13 @@
         </p:grpSp>
         <p:sp>
           <p:nvSpPr>
-            <p:cNvPr id="15374" name="Line 33"/>
+            <p:cNvPr id="26" name="Line 33">
+              <a:extLst>
+                <a:ext uri="{FF2B5EF4-FFF2-40B4-BE49-F238E27FC236}">
+                  <a16:creationId xmlns:a16="http://schemas.microsoft.com/office/drawing/2014/main" id="{038EBFB3-E6FB-EB3C-1117-F7B86EFBCD84}"/>
+                </a:ext>
+              </a:extLst>
+            </p:cNvPr>
             <p:cNvSpPr>
               <a:spLocks noChangeShapeType="1"/>
             </p:cNvSpPr>
@@ -13324,7 +14084,13 @@
         </p:sp>
         <p:sp>
           <p:nvSpPr>
-            <p:cNvPr id="15375" name="Line 34"/>
+            <p:cNvPr id="27" name="Line 34">
+              <a:extLst>
+                <a:ext uri="{FF2B5EF4-FFF2-40B4-BE49-F238E27FC236}">
+                  <a16:creationId xmlns:a16="http://schemas.microsoft.com/office/drawing/2014/main" id="{CF1B06F2-318C-785A-75CA-097C91C5FA6A}"/>
+                </a:ext>
+              </a:extLst>
+            </p:cNvPr>
             <p:cNvSpPr>
               <a:spLocks noChangeShapeType="1"/>
             </p:cNvSpPr>
@@ -13358,7 +14124,13 @@
         </p:sp>
         <p:sp>
           <p:nvSpPr>
-            <p:cNvPr id="15376" name="Line 35"/>
+            <p:cNvPr id="28" name="Line 35">
+              <a:extLst>
+                <a:ext uri="{FF2B5EF4-FFF2-40B4-BE49-F238E27FC236}">
+                  <a16:creationId xmlns:a16="http://schemas.microsoft.com/office/drawing/2014/main" id="{5F1B81E2-3B5B-77BB-4E56-E17727729349}"/>
+                </a:ext>
+              </a:extLst>
+            </p:cNvPr>
             <p:cNvSpPr>
               <a:spLocks noChangeShapeType="1"/>
             </p:cNvSpPr>
@@ -13392,7 +14164,13 @@
         </p:sp>
         <p:sp>
           <p:nvSpPr>
-            <p:cNvPr id="15377" name="Line 36"/>
+            <p:cNvPr id="29" name="Line 36">
+              <a:extLst>
+                <a:ext uri="{FF2B5EF4-FFF2-40B4-BE49-F238E27FC236}">
+                  <a16:creationId xmlns:a16="http://schemas.microsoft.com/office/drawing/2014/main" id="{FF683421-7CCB-4111-C720-63DC8603627F}"/>
+                </a:ext>
+              </a:extLst>
+            </p:cNvPr>
             <p:cNvSpPr>
               <a:spLocks noChangeShapeType="1"/>
             </p:cNvSpPr>
@@ -13426,7 +14204,13 @@
         </p:sp>
         <p:sp>
           <p:nvSpPr>
-            <p:cNvPr id="15378" name="Line 37"/>
+            <p:cNvPr id="30" name="Line 37">
+              <a:extLst>
+                <a:ext uri="{FF2B5EF4-FFF2-40B4-BE49-F238E27FC236}">
+                  <a16:creationId xmlns:a16="http://schemas.microsoft.com/office/drawing/2014/main" id="{46A5F4F4-DE43-5D96-05FD-5CFC8C73C037}"/>
+                </a:ext>
+              </a:extLst>
+            </p:cNvPr>
             <p:cNvSpPr>
               <a:spLocks noChangeShapeType="1"/>
             </p:cNvSpPr>
@@ -13460,7 +14244,13 @@
         </p:sp>
         <p:sp>
           <p:nvSpPr>
-            <p:cNvPr id="15379" name="Line 38"/>
+            <p:cNvPr id="31" name="Line 38">
+              <a:extLst>
+                <a:ext uri="{FF2B5EF4-FFF2-40B4-BE49-F238E27FC236}">
+                  <a16:creationId xmlns:a16="http://schemas.microsoft.com/office/drawing/2014/main" id="{B90F23FD-E4D1-374C-9B3C-1039DB18436D}"/>
+                </a:ext>
+              </a:extLst>
+            </p:cNvPr>
             <p:cNvSpPr>
               <a:spLocks noChangeShapeType="1"/>
             </p:cNvSpPr>
@@ -13494,7 +14284,13 @@
         </p:sp>
         <p:sp>
           <p:nvSpPr>
-            <p:cNvPr id="15380" name="Line 39"/>
+            <p:cNvPr id="32" name="Line 39">
+              <a:extLst>
+                <a:ext uri="{FF2B5EF4-FFF2-40B4-BE49-F238E27FC236}">
+                  <a16:creationId xmlns:a16="http://schemas.microsoft.com/office/drawing/2014/main" id="{5336BDF5-945D-16D4-F0E3-3FD7B6C688AF}"/>
+                </a:ext>
+              </a:extLst>
+            </p:cNvPr>
             <p:cNvSpPr>
               <a:spLocks noChangeShapeType="1"/>
             </p:cNvSpPr>
@@ -13527,6 +14323,41 @@
           </p:txBody>
         </p:sp>
       </p:grpSp>
+      <p:sp>
+        <p:nvSpPr>
+          <p:cNvPr id="51" name="TextBox 50">
+            <a:extLst>
+              <a:ext uri="{FF2B5EF4-FFF2-40B4-BE49-F238E27FC236}">
+                <a16:creationId xmlns:a16="http://schemas.microsoft.com/office/drawing/2014/main" id="{B6703716-8C10-3195-0CD9-0AC5C94D6537}"/>
+              </a:ext>
+            </a:extLst>
+          </p:cNvPr>
+          <p:cNvSpPr txBox="1"/>
+          <p:nvPr/>
+        </p:nvSpPr>
+        <p:spPr>
+          <a:xfrm>
+            <a:off x="3282134" y="1735561"/>
+            <a:ext cx="530915" cy="369332"/>
+          </a:xfrm>
+          <a:prstGeom prst="rect">
+            <a:avLst/>
+          </a:prstGeom>
+          <a:noFill/>
+        </p:spPr>
+        <p:txBody>
+          <a:bodyPr wrap="none" rtlCol="0">
+            <a:spAutoFit/>
+          </a:bodyPr>
+          <a:lstStyle/>
+          <a:p>
+            <a:r>
+              <a:rPr lang="en-NL" dirty="0"/>
+              <a:t>P2:</a:t>
+            </a:r>
+          </a:p>
+        </p:txBody>
+      </p:sp>
     </p:spTree>
   </p:cSld>
   <p:clrMapOvr>
@@ -13843,13 +14674,18 @@
             <p:ph type="title"/>
           </p:nvPr>
         </p:nvSpPr>
-        <p:spPr/>
+        <p:spPr>
+          <a:xfrm>
+            <a:off x="457200" y="274638"/>
+            <a:ext cx="8229600" cy="800116"/>
+          </a:xfrm>
+        </p:spPr>
         <p:txBody>
           <a:bodyPr/>
           <a:lstStyle/>
           <a:p>
             <a:r>
-              <a:rPr lang="en-US" sz="4000" dirty="0"/>
+              <a:rPr lang="en-US" sz="3600" dirty="0"/>
               <a:t>What if we insists on covering ALL paths?</a:t>
             </a:r>
           </a:p>
@@ -13894,7 +14730,7 @@
         </p:nvGrpSpPr>
         <p:grpSpPr bwMode="auto">
           <a:xfrm>
-            <a:off x="1331640" y="2239109"/>
+            <a:off x="1331640" y="1829653"/>
             <a:ext cx="6081713" cy="1455738"/>
             <a:chOff x="642910" y="1701798"/>
             <a:chExt cx="6081745" cy="1455727"/>
@@ -15287,8 +16123,8 @@
         </p:nvSpPr>
         <p:spPr>
           <a:xfrm>
-            <a:off x="611560" y="4359146"/>
-            <a:ext cx="7920880" cy="1569660"/>
+            <a:off x="323097" y="3892267"/>
+            <a:ext cx="4662383" cy="2246769"/>
           </a:xfrm>
           <a:prstGeom prst="rect">
             <a:avLst/>
@@ -15307,19 +16143,19 @@
               <a:defRPr/>
             </a:pPr>
             <a:r>
-              <a:rPr lang="en-US" sz="2400" dirty="0">
+              <a:rPr lang="en-US" sz="2000" dirty="0">
                 <a:latin typeface="+mn-lt"/>
               </a:rPr>
               <a:t>Path coverage (to cover all paths in the CFG) in the </a:t>
             </a:r>
             <a:r>
-              <a:rPr lang="en-US" sz="2400" b="1" dirty="0">
+              <a:rPr lang="en-US" sz="2000" b="1" dirty="0">
                 <a:latin typeface="+mn-lt"/>
               </a:rPr>
               <a:t>strongest</a:t>
             </a:r>
             <a:r>
-              <a:rPr lang="en-US" sz="2400" dirty="0">
+              <a:rPr lang="en-US" sz="2000" dirty="0">
                 <a:latin typeface="+mn-lt"/>
               </a:rPr>
               <a:t> graph-based coverage. On the other hand, it is also challenging: #paths in a CFG may explode.  </a:t>
@@ -15332,7 +16168,7 @@
               <a:defRPr/>
             </a:pPr>
             <a:r>
-              <a:rPr lang="en-US" sz="2400" dirty="0">
+              <a:rPr lang="en-US" sz="2000" dirty="0">
                 <a:latin typeface="+mn-lt"/>
               </a:rPr>
               <a:t>If the CFG contains a cycle, #paths becomes unbounded.</a:t>
@@ -15340,6 +16176,295 @@
           </a:p>
         </p:txBody>
       </p:sp>
+      <p:graphicFrame>
+        <p:nvGraphicFramePr>
+          <p:cNvPr id="2" name="Table 4">
+            <a:extLst>
+              <a:ext uri="{FF2B5EF4-FFF2-40B4-BE49-F238E27FC236}">
+                <a16:creationId xmlns:a16="http://schemas.microsoft.com/office/drawing/2014/main" id="{3DB5387B-EC97-4119-E801-63CEB8C71132}"/>
+              </a:ext>
+            </a:extLst>
+          </p:cNvPr>
+          <p:cNvGraphicFramePr>
+            <a:graphicFrameLocks noGrp="1"/>
+          </p:cNvGraphicFramePr>
+          <p:nvPr>
+            <p:extLst>
+              <p:ext uri="{D42A27DB-BD31-4B8C-83A1-F6EECF244321}">
+                <p14:modId xmlns:p14="http://schemas.microsoft.com/office/powerpoint/2010/main" val="2516736859"/>
+              </p:ext>
+            </p:extLst>
+          </p:nvPr>
+        </p:nvGraphicFramePr>
+        <p:xfrm>
+          <a:off x="5521502" y="4040291"/>
+          <a:ext cx="3121361" cy="1950720"/>
+        </p:xfrm>
+        <a:graphic>
+          <a:graphicData uri="http://schemas.openxmlformats.org/drawingml/2006/table">
+            <a:tbl>
+              <a:tblPr firstRow="1" bandRow="1">
+                <a:tableStyleId>{5C22544A-7EE6-4342-B048-85BDC9FD1C3A}</a:tableStyleId>
+              </a:tblPr>
+              <a:tblGrid>
+                <a:gridCol w="930046">
+                  <a:extLst>
+                    <a:ext uri="{9D8B030D-6E8A-4147-A177-3AD203B41FA5}">
+                      <a16:colId xmlns:a16="http://schemas.microsoft.com/office/drawing/2014/main" val="698913581"/>
+                    </a:ext>
+                  </a:extLst>
+                </a:gridCol>
+                <a:gridCol w="2191315">
+                  <a:extLst>
+                    <a:ext uri="{9D8B030D-6E8A-4147-A177-3AD203B41FA5}">
+                      <a16:colId xmlns:a16="http://schemas.microsoft.com/office/drawing/2014/main" val="1016153449"/>
+                    </a:ext>
+                  </a:extLst>
+                </a:gridCol>
+              </a:tblGrid>
+              <a:tr h="255062">
+                <a:tc>
+                  <a:txBody>
+                    <a:bodyPr/>
+                    <a:lstStyle/>
+                    <a:p>
+                      <a:endParaRPr lang="en-NL" sz="1400" b="0" dirty="0"/>
+                    </a:p>
+                  </a:txBody>
+                  <a:tcPr>
+                    <a:noFill/>
+                  </a:tcPr>
+                </a:tc>
+                <a:tc>
+                  <a:txBody>
+                    <a:bodyPr/>
+                    <a:lstStyle/>
+                    <a:p>
+                      <a:r>
+                        <a:rPr lang="en-NL" sz="1400" b="0" dirty="0">
+                          <a:solidFill>
+                            <a:schemeClr val="tx1"/>
+                          </a:solidFill>
+                        </a:rPr>
+                        <a:t>#tests needed to cover the targets</a:t>
+                      </a:r>
+                    </a:p>
+                  </a:txBody>
+                  <a:tcPr>
+                    <a:solidFill>
+                      <a:schemeClr val="accent5">
+                        <a:lumMod val="40000"/>
+                        <a:lumOff val="60000"/>
+                      </a:schemeClr>
+                    </a:solidFill>
+                  </a:tcPr>
+                </a:tc>
+                <a:extLst>
+                  <a:ext uri="{0D108BD9-81ED-4DB2-BD59-A6C34878D82A}">
+                    <a16:rowId xmlns:a16="http://schemas.microsoft.com/office/drawing/2014/main" val="1943707847"/>
+                  </a:ext>
+                </a:extLst>
+              </a:tr>
+              <a:tr h="255062">
+                <a:tc>
+                  <a:txBody>
+                    <a:bodyPr/>
+                    <a:lstStyle/>
+                    <a:p>
+                      <a:pPr algn="ctr"/>
+                      <a:r>
+                        <a:rPr lang="en-NL" sz="1400" dirty="0"/>
+                        <a:t>10 nodes</a:t>
+                      </a:r>
+                    </a:p>
+                  </a:txBody>
+                  <a:tcPr>
+                    <a:solidFill>
+                      <a:schemeClr val="accent5">
+                        <a:lumMod val="20000"/>
+                        <a:lumOff val="80000"/>
+                      </a:schemeClr>
+                    </a:solidFill>
+                  </a:tcPr>
+                </a:tc>
+                <a:tc>
+                  <a:txBody>
+                    <a:bodyPr/>
+                    <a:lstStyle/>
+                    <a:p>
+                      <a:pPr algn="ctr"/>
+                      <a:r>
+                        <a:rPr lang="en-NL" sz="1400" dirty="0"/>
+                        <a:t> at least 2</a:t>
+                      </a:r>
+                    </a:p>
+                  </a:txBody>
+                  <a:tcPr>
+                    <a:solidFill>
+                      <a:schemeClr val="accent5">
+                        <a:lumMod val="20000"/>
+                        <a:lumOff val="80000"/>
+                      </a:schemeClr>
+                    </a:solidFill>
+                  </a:tcPr>
+                </a:tc>
+                <a:extLst>
+                  <a:ext uri="{0D108BD9-81ED-4DB2-BD59-A6C34878D82A}">
+                    <a16:rowId xmlns:a16="http://schemas.microsoft.com/office/drawing/2014/main" val="13986716"/>
+                  </a:ext>
+                </a:extLst>
+              </a:tr>
+              <a:tr h="255062">
+                <a:tc>
+                  <a:txBody>
+                    <a:bodyPr/>
+                    <a:lstStyle/>
+                    <a:p>
+                      <a:pPr algn="ctr"/>
+                      <a:r>
+                        <a:rPr lang="en-NL" sz="1400" dirty="0"/>
+                        <a:t>12 edges</a:t>
+                      </a:r>
+                    </a:p>
+                  </a:txBody>
+                  <a:tcPr>
+                    <a:solidFill>
+                      <a:schemeClr val="accent5">
+                        <a:lumMod val="20000"/>
+                        <a:lumOff val="80000"/>
+                      </a:schemeClr>
+                    </a:solidFill>
+                  </a:tcPr>
+                </a:tc>
+                <a:tc>
+                  <a:txBody>
+                    <a:bodyPr/>
+                    <a:lstStyle/>
+                    <a:p>
+                      <a:pPr algn="ctr"/>
+                      <a:r>
+                        <a:rPr lang="en-NL" sz="1400" dirty="0"/>
+                        <a:t>at least 2</a:t>
+                      </a:r>
+                    </a:p>
+                  </a:txBody>
+                  <a:tcPr>
+                    <a:solidFill>
+                      <a:schemeClr val="accent5">
+                        <a:lumMod val="20000"/>
+                        <a:lumOff val="80000"/>
+                      </a:schemeClr>
+                    </a:solidFill>
+                  </a:tcPr>
+                </a:tc>
+                <a:extLst>
+                  <a:ext uri="{0D108BD9-81ED-4DB2-BD59-A6C34878D82A}">
+                    <a16:rowId xmlns:a16="http://schemas.microsoft.com/office/drawing/2014/main" val="2079812348"/>
+                  </a:ext>
+                </a:extLst>
+              </a:tr>
+              <a:tr h="255062">
+                <a:tc>
+                  <a:txBody>
+                    <a:bodyPr/>
+                    <a:lstStyle/>
+                    <a:p>
+                      <a:pPr algn="ctr"/>
+                      <a:r>
+                        <a:rPr lang="en-NL" sz="1400" dirty="0"/>
+                        <a:t>14 edge-pairs</a:t>
+                      </a:r>
+                    </a:p>
+                  </a:txBody>
+                  <a:tcPr>
+                    <a:solidFill>
+                      <a:schemeClr val="accent5">
+                        <a:lumMod val="20000"/>
+                        <a:lumOff val="80000"/>
+                      </a:schemeClr>
+                    </a:solidFill>
+                  </a:tcPr>
+                </a:tc>
+                <a:tc>
+                  <a:txBody>
+                    <a:bodyPr/>
+                    <a:lstStyle/>
+                    <a:p>
+                      <a:pPr algn="ctr"/>
+                      <a:r>
+                        <a:rPr lang="en-NL" sz="1400" dirty="0"/>
+                        <a:t>at least 4</a:t>
+                      </a:r>
+                    </a:p>
+                  </a:txBody>
+                  <a:tcPr>
+                    <a:solidFill>
+                      <a:schemeClr val="accent5">
+                        <a:lumMod val="20000"/>
+                        <a:lumOff val="80000"/>
+                      </a:schemeClr>
+                    </a:solidFill>
+                  </a:tcPr>
+                </a:tc>
+                <a:extLst>
+                  <a:ext uri="{0D108BD9-81ED-4DB2-BD59-A6C34878D82A}">
+                    <a16:rowId xmlns:a16="http://schemas.microsoft.com/office/drawing/2014/main" val="4261009437"/>
+                  </a:ext>
+                </a:extLst>
+              </a:tr>
+              <a:tr h="255062">
+                <a:tc>
+                  <a:txBody>
+                    <a:bodyPr/>
+                    <a:lstStyle/>
+                    <a:p>
+                      <a:pPr algn="ctr"/>
+                      <a:r>
+                        <a:rPr lang="en-NL" sz="1400" dirty="0"/>
+                        <a:t>8 paths</a:t>
+                      </a:r>
+                    </a:p>
+                  </a:txBody>
+                  <a:tcPr>
+                    <a:solidFill>
+                      <a:schemeClr val="accent5">
+                        <a:lumMod val="20000"/>
+                        <a:lumOff val="80000"/>
+                      </a:schemeClr>
+                    </a:solidFill>
+                  </a:tcPr>
+                </a:tc>
+                <a:tc>
+                  <a:txBody>
+                    <a:bodyPr/>
+                    <a:lstStyle/>
+                    <a:p>
+                      <a:pPr algn="ctr"/>
+                      <a:r>
+                        <a:rPr lang="en-NL" sz="1400" dirty="0"/>
+                        <a:t>8</a:t>
+                      </a:r>
+                    </a:p>
+                  </a:txBody>
+                  <a:tcPr>
+                    <a:solidFill>
+                      <a:schemeClr val="accent5">
+                        <a:lumMod val="20000"/>
+                        <a:lumOff val="80000"/>
+                      </a:schemeClr>
+                    </a:solidFill>
+                  </a:tcPr>
+                </a:tc>
+                <a:extLst>
+                  <a:ext uri="{0D108BD9-81ED-4DB2-BD59-A6C34878D82A}">
+                    <a16:rowId xmlns:a16="http://schemas.microsoft.com/office/drawing/2014/main" val="432641923"/>
+                  </a:ext>
+                </a:extLst>
+              </a:tr>
+            </a:tbl>
+          </a:graphicData>
+        </a:graphic>
+      </p:graphicFrame>
     </p:spTree>
   </p:cSld>
   <p:clrMapOvr>
@@ -15380,6 +16505,51 @@
                                         </p:cTn>
                                         <p:tgtEl>
                                           <p:spTgt spid="61"/>
+                                        </p:tgtEl>
+                                        <p:attrNameLst>
+                                          <p:attrName>style.visibility</p:attrName>
+                                        </p:attrNameLst>
+                                      </p:cBhvr>
+                                      <p:to>
+                                        <p:strVal val="visible"/>
+                                      </p:to>
+                                    </p:set>
+                                  </p:childTnLst>
+                                </p:cTn>
+                              </p:par>
+                            </p:childTnLst>
+                          </p:cTn>
+                        </p:par>
+                      </p:childTnLst>
+                    </p:cTn>
+                  </p:par>
+                  <p:par>
+                    <p:cTn id="7" fill="hold">
+                      <p:stCondLst>
+                        <p:cond delay="indefinite"/>
+                      </p:stCondLst>
+                      <p:childTnLst>
+                        <p:par>
+                          <p:cTn id="8" fill="hold">
+                            <p:stCondLst>
+                              <p:cond delay="0"/>
+                            </p:stCondLst>
+                            <p:childTnLst>
+                              <p:par>
+                                <p:cTn id="9" presetID="1" presetClass="entr" presetSubtype="0" fill="hold" nodeType="clickEffect">
+                                  <p:stCondLst>
+                                    <p:cond delay="0"/>
+                                  </p:stCondLst>
+                                  <p:childTnLst>
+                                    <p:set>
+                                      <p:cBhvr>
+                                        <p:cTn id="10" dur="1" fill="hold">
+                                          <p:stCondLst>
+                                            <p:cond delay="0"/>
+                                          </p:stCondLst>
+                                        </p:cTn>
+                                        <p:tgtEl>
+                                          <p:spTgt spid="2"/>
                                         </p:tgtEl>
                                         <p:attrNameLst>
                                           <p:attrName>style.visibility</p:attrName>

--- a/slides/gbt.pptx
+++ b/slides/gbt.pptx
@@ -5,7 +5,7 @@
     <p:sldMasterId id="2147483708" r:id="rId1"/>
   </p:sldMasterIdLst>
   <p:notesMasterIdLst>
-    <p:notesMasterId r:id="rId49"/>
+    <p:notesMasterId r:id="rId48"/>
   </p:notesMasterIdLst>
   <p:sldIdLst>
     <p:sldId id="256" r:id="rId2"/>
@@ -54,7 +54,6 @@
     <p:sldId id="290" r:id="rId45"/>
     <p:sldId id="292" r:id="rId46"/>
     <p:sldId id="327" r:id="rId47"/>
-    <p:sldId id="334" r:id="rId48"/>
   </p:sldIdLst>
   <p:sldSz cx="9144000" cy="6858000" type="screen4x3"/>
   <p:notesSz cx="6858000" cy="9144000"/>
@@ -3126,99 +3125,6 @@
     <p:extLst>
       <p:ext uri="{BB962C8B-B14F-4D97-AF65-F5344CB8AC3E}">
         <p14:creationId xmlns:p14="http://schemas.microsoft.com/office/powerpoint/2010/main" val="105408377"/>
-      </p:ext>
-    </p:extLst>
-  </p:cSld>
-  <p:clrMapOvr>
-    <a:masterClrMapping/>
-  </p:clrMapOvr>
-</p:notes>
-</file>
-
-<file path=ppt/notesSlides/notesSlide30.xml><?xml version="1.0" encoding="utf-8"?>
-<p:notes xmlns:a="http://schemas.openxmlformats.org/drawingml/2006/main" xmlns:r="http://schemas.openxmlformats.org/officeDocument/2006/relationships" xmlns:p="http://schemas.openxmlformats.org/presentationml/2006/main">
-  <p:cSld>
-    <p:spTree>
-      <p:nvGrpSpPr>
-        <p:cNvPr id="1" name=""/>
-        <p:cNvGrpSpPr/>
-        <p:nvPr/>
-      </p:nvGrpSpPr>
-      <p:grpSpPr>
-        <a:xfrm>
-          <a:off x="0" y="0"/>
-          <a:ext cx="0" cy="0"/>
-          <a:chOff x="0" y="0"/>
-          <a:chExt cx="0" cy="0"/>
-        </a:xfrm>
-      </p:grpSpPr>
-      <p:sp>
-        <p:nvSpPr>
-          <p:cNvPr id="2" name="Slide Image Placeholder 1"/>
-          <p:cNvSpPr>
-            <a:spLocks noGrp="1" noRot="1" noChangeAspect="1"/>
-          </p:cNvSpPr>
-          <p:nvPr>
-            <p:ph type="sldImg"/>
-          </p:nvPr>
-        </p:nvSpPr>
-        <p:spPr/>
-      </p:sp>
-      <p:sp>
-        <p:nvSpPr>
-          <p:cNvPr id="3" name="Notes Placeholder 2"/>
-          <p:cNvSpPr>
-            <a:spLocks noGrp="1"/>
-          </p:cNvSpPr>
-          <p:nvPr>
-            <p:ph type="body" idx="1"/>
-          </p:nvPr>
-        </p:nvSpPr>
-        <p:spPr/>
-        <p:txBody>
-          <a:bodyPr/>
-          <a:lstStyle/>
-          <a:p>
-            <a:r>
-              <a:rPr lang="en-US" dirty="0"/>
-              <a:t>This is getting complicated. You need a stack to keep track where to return.</a:t>
-            </a:r>
-          </a:p>
-        </p:txBody>
-      </p:sp>
-      <p:sp>
-        <p:nvSpPr>
-          <p:cNvPr id="4" name="Slide Number Placeholder 3"/>
-          <p:cNvSpPr>
-            <a:spLocks noGrp="1"/>
-          </p:cNvSpPr>
-          <p:nvPr>
-            <p:ph type="sldNum" sz="quarter" idx="5"/>
-          </p:nvPr>
-        </p:nvSpPr>
-        <p:spPr/>
-        <p:txBody>
-          <a:bodyPr/>
-          <a:lstStyle/>
-          <a:p>
-            <a:pPr>
-              <a:defRPr/>
-            </a:pPr>
-            <a:fld id="{5B90836E-2851-478D-B8E0-4CBCFBE2CBFD}" type="slidenum">
-              <a:rPr lang="en-US" smtClean="0"/>
-              <a:pPr>
-                <a:defRPr/>
-              </a:pPr>
-              <a:t>47</a:t>
-            </a:fld>
-            <a:endParaRPr lang="en-US"/>
-          </a:p>
-        </p:txBody>
-      </p:sp>
-    </p:spTree>
-    <p:extLst>
-      <p:ext uri="{BB962C8B-B14F-4D97-AF65-F5344CB8AC3E}">
-        <p14:creationId xmlns:p14="http://schemas.microsoft.com/office/powerpoint/2010/main" val="2299900500"/>
       </p:ext>
     </p:extLst>
   </p:cSld>
@@ -10541,7 +10447,7 @@
       </p:grpSp>
       <p:grpSp>
         <p:nvGrpSpPr>
-          <p:cNvPr id="15400" name="Group 14"/>
+          <p:cNvPr id="15405" name="Group 15"/>
           <p:cNvGrpSpPr>
             <a:grpSpLocks/>
           </p:cNvGrpSpPr>
@@ -10549,7 +10455,422 @@
         </p:nvGrpSpPr>
         <p:grpSpPr bwMode="auto">
           <a:xfrm>
-            <a:off x="1877045" y="1955814"/>
+            <a:off x="1877045" y="2927364"/>
+            <a:ext cx="555625" cy="469900"/>
+            <a:chOff x="4738" y="2684"/>
+            <a:chExt cx="350" cy="296"/>
+          </a:xfrm>
+        </p:grpSpPr>
+        <p:sp>
+          <p:nvSpPr>
+            <p:cNvPr id="15409" name="Oval 16"/>
+            <p:cNvSpPr>
+              <a:spLocks noChangeArrowheads="1"/>
+            </p:cNvSpPr>
+            <p:nvPr/>
+          </p:nvSpPr>
+          <p:spPr bwMode="auto">
+            <a:xfrm>
+              <a:off x="4738" y="2684"/>
+              <a:ext cx="350" cy="296"/>
+            </a:xfrm>
+            <a:prstGeom prst="ellipse">
+              <a:avLst/>
+            </a:prstGeom>
+            <a:solidFill>
+              <a:srgbClr val="0066FF"/>
+            </a:solidFill>
+            <a:ln w="19050">
+              <a:solidFill>
+                <a:schemeClr val="tx1"/>
+              </a:solidFill>
+              <a:round/>
+              <a:headEnd type="none" w="sm" len="sm"/>
+              <a:tailEnd type="none" w="sm" len="sm"/>
+            </a:ln>
+          </p:spPr>
+          <p:txBody>
+            <a:bodyPr wrap="none" anchor="ctr"/>
+            <a:lstStyle/>
+            <a:p>
+              <a:endParaRPr lang="nl-NL">
+                <a:solidFill>
+                  <a:schemeClr val="bg1"/>
+                </a:solidFill>
+              </a:endParaRPr>
+            </a:p>
+          </p:txBody>
+        </p:sp>
+        <p:sp>
+          <p:nvSpPr>
+            <p:cNvPr id="15410" name="Text Box 17"/>
+            <p:cNvSpPr txBox="1">
+              <a:spLocks noChangeArrowheads="1"/>
+            </p:cNvSpPr>
+            <p:nvPr/>
+          </p:nvSpPr>
+          <p:spPr bwMode="auto">
+            <a:xfrm>
+              <a:off x="4815" y="2707"/>
+              <a:ext cx="197" cy="233"/>
+            </a:xfrm>
+            <a:prstGeom prst="rect">
+              <a:avLst/>
+            </a:prstGeom>
+            <a:noFill/>
+            <a:ln w="12700">
+              <a:noFill/>
+              <a:miter lim="800000"/>
+              <a:headEnd type="none" w="sm" len="sm"/>
+              <a:tailEnd type="none" w="sm" len="sm"/>
+            </a:ln>
+          </p:spPr>
+          <p:txBody>
+            <a:bodyPr wrap="none">
+              <a:spAutoFit/>
+            </a:bodyPr>
+            <a:lstStyle/>
+            <a:p>
+              <a:r>
+                <a:rPr lang="en-US">
+                  <a:solidFill>
+                    <a:schemeClr val="bg1"/>
+                  </a:solidFill>
+                </a:rPr>
+                <a:t>2</a:t>
+              </a:r>
+            </a:p>
+          </p:txBody>
+        </p:sp>
+      </p:grpSp>
+      <p:grpSp>
+        <p:nvGrpSpPr>
+          <p:cNvPr id="15406" name="Group 18"/>
+          <p:cNvGrpSpPr>
+            <a:grpSpLocks/>
+          </p:cNvGrpSpPr>
+          <p:nvPr/>
+        </p:nvGrpSpPr>
+        <p:grpSpPr bwMode="auto">
+          <a:xfrm>
+            <a:off x="1924670" y="1955814"/>
+            <a:ext cx="555625" cy="469900"/>
+            <a:chOff x="3838" y="2684"/>
+            <a:chExt cx="350" cy="296"/>
+          </a:xfrm>
+        </p:grpSpPr>
+        <p:sp>
+          <p:nvSpPr>
+            <p:cNvPr id="15407" name="Oval 19"/>
+            <p:cNvSpPr>
+              <a:spLocks noChangeArrowheads="1"/>
+            </p:cNvSpPr>
+            <p:nvPr/>
+          </p:nvSpPr>
+          <p:spPr bwMode="auto">
+            <a:xfrm>
+              <a:off x="3838" y="2684"/>
+              <a:ext cx="350" cy="296"/>
+            </a:xfrm>
+            <a:prstGeom prst="ellipse">
+              <a:avLst/>
+            </a:prstGeom>
+            <a:solidFill>
+              <a:srgbClr val="0066FF"/>
+            </a:solidFill>
+            <a:ln w="19050">
+              <a:solidFill>
+                <a:schemeClr val="tx1"/>
+              </a:solidFill>
+              <a:round/>
+              <a:headEnd type="none" w="sm" len="sm"/>
+              <a:tailEnd type="none" w="sm" len="sm"/>
+            </a:ln>
+          </p:spPr>
+          <p:txBody>
+            <a:bodyPr wrap="none" anchor="ctr"/>
+            <a:lstStyle/>
+            <a:p>
+              <a:endParaRPr lang="nl-NL"/>
+            </a:p>
+          </p:txBody>
+        </p:sp>
+        <p:sp>
+          <p:nvSpPr>
+            <p:cNvPr id="15408" name="Text Box 20"/>
+            <p:cNvSpPr txBox="1">
+              <a:spLocks noChangeArrowheads="1"/>
+            </p:cNvSpPr>
+            <p:nvPr/>
+          </p:nvSpPr>
+          <p:spPr bwMode="auto">
+            <a:xfrm>
+              <a:off x="3915" y="2707"/>
+              <a:ext cx="196" cy="250"/>
+            </a:xfrm>
+            <a:prstGeom prst="rect">
+              <a:avLst/>
+            </a:prstGeom>
+            <a:noFill/>
+            <a:ln w="12700">
+              <a:noFill/>
+              <a:miter lim="800000"/>
+              <a:headEnd type="none" w="sm" len="sm"/>
+              <a:tailEnd type="none" w="sm" len="sm"/>
+            </a:ln>
+          </p:spPr>
+          <p:txBody>
+            <a:bodyPr wrap="none">
+              <a:spAutoFit/>
+            </a:bodyPr>
+            <a:lstStyle/>
+            <a:p>
+              <a:r>
+                <a:rPr lang="en-US"/>
+                <a:t>0</a:t>
+              </a:r>
+            </a:p>
+          </p:txBody>
+        </p:sp>
+      </p:grpSp>
+      <p:sp>
+        <p:nvSpPr>
+          <p:cNvPr id="15401" name="Line 24"/>
+          <p:cNvSpPr>
+            <a:spLocks noChangeShapeType="1"/>
+          </p:cNvSpPr>
+          <p:nvPr/>
+        </p:nvSpPr>
+        <p:spPr bwMode="auto">
+          <a:xfrm flipV="1">
+            <a:off x="1591295" y="2316177"/>
+            <a:ext cx="396875" cy="265113"/>
+          </a:xfrm>
+          <a:prstGeom prst="line">
+            <a:avLst/>
+          </a:prstGeom>
+          <a:noFill/>
+          <a:ln w="19050">
+            <a:solidFill>
+              <a:schemeClr val="tx1"/>
+            </a:solidFill>
+            <a:round/>
+            <a:headEnd type="arrow" w="med" len="med"/>
+            <a:tailEnd/>
+          </a:ln>
+        </p:spPr>
+        <p:txBody>
+          <a:bodyPr/>
+          <a:lstStyle/>
+          <a:p>
+            <a:endParaRPr lang="en-US"/>
+          </a:p>
+        </p:txBody>
+      </p:sp>
+      <p:sp>
+        <p:nvSpPr>
+          <p:cNvPr id="15402" name="Line 39"/>
+          <p:cNvSpPr>
+            <a:spLocks noChangeShapeType="1"/>
+          </p:cNvSpPr>
+          <p:nvPr/>
+        </p:nvSpPr>
+        <p:spPr bwMode="auto">
+          <a:xfrm>
+            <a:off x="1559545" y="2830527"/>
+            <a:ext cx="346075" cy="249238"/>
+          </a:xfrm>
+          <a:prstGeom prst="line">
+            <a:avLst/>
+          </a:prstGeom>
+          <a:noFill/>
+          <a:ln w="19050">
+            <a:solidFill>
+              <a:schemeClr val="tx1"/>
+            </a:solidFill>
+            <a:round/>
+            <a:headEnd type="none" w="sm" len="sm"/>
+            <a:tailEnd type="arrow" w="med" len="med"/>
+          </a:ln>
+        </p:spPr>
+        <p:txBody>
+          <a:bodyPr/>
+          <a:lstStyle/>
+          <a:p>
+            <a:endParaRPr lang="en-US"/>
+          </a:p>
+        </p:txBody>
+      </p:sp>
+      <p:sp>
+        <p:nvSpPr>
+          <p:cNvPr id="15403" name="Line 44"/>
+          <p:cNvSpPr>
+            <a:spLocks noChangeShapeType="1"/>
+          </p:cNvSpPr>
+          <p:nvPr/>
+        </p:nvSpPr>
+        <p:spPr bwMode="auto">
+          <a:xfrm>
+            <a:off x="2178670" y="2428889"/>
+            <a:ext cx="0" cy="498475"/>
+          </a:xfrm>
+          <a:prstGeom prst="line">
+            <a:avLst/>
+          </a:prstGeom>
+          <a:noFill/>
+          <a:ln w="19050">
+            <a:solidFill>
+              <a:schemeClr val="tx1"/>
+            </a:solidFill>
+            <a:round/>
+            <a:headEnd type="none" w="sm" len="sm"/>
+            <a:tailEnd type="arrow" w="med" len="med"/>
+          </a:ln>
+        </p:spPr>
+        <p:txBody>
+          <a:bodyPr/>
+          <a:lstStyle/>
+          <a:p>
+            <a:endParaRPr lang="en-US"/>
+          </a:p>
+        </p:txBody>
+      </p:sp>
+      <p:sp>
+        <p:nvSpPr>
+          <p:cNvPr id="15404" name="Line 45"/>
+          <p:cNvSpPr>
+            <a:spLocks noChangeShapeType="1"/>
+          </p:cNvSpPr>
+          <p:nvPr/>
+        </p:nvSpPr>
+        <p:spPr bwMode="auto">
+          <a:xfrm>
+            <a:off x="2178670" y="1647839"/>
+            <a:ext cx="0" cy="295275"/>
+          </a:xfrm>
+          <a:prstGeom prst="line">
+            <a:avLst/>
+          </a:prstGeom>
+          <a:noFill/>
+          <a:ln w="19050">
+            <a:solidFill>
+              <a:schemeClr val="tx1"/>
+            </a:solidFill>
+            <a:round/>
+            <a:headEnd type="none" w="sm" len="sm"/>
+            <a:tailEnd type="arrow" w="med" len="med"/>
+          </a:ln>
+        </p:spPr>
+        <p:txBody>
+          <a:bodyPr/>
+          <a:lstStyle/>
+          <a:p>
+            <a:endParaRPr lang="en-US"/>
+          </a:p>
+        </p:txBody>
+      </p:sp>
+      <p:grpSp>
+        <p:nvGrpSpPr>
+          <p:cNvPr id="15367" name="Group 18"/>
+          <p:cNvGrpSpPr>
+            <a:grpSpLocks/>
+          </p:cNvGrpSpPr>
+          <p:nvPr/>
+        </p:nvGrpSpPr>
+        <p:grpSpPr bwMode="auto">
+          <a:xfrm>
+            <a:off x="3852493" y="2449163"/>
+            <a:ext cx="555625" cy="469900"/>
+            <a:chOff x="4288" y="1746"/>
+            <a:chExt cx="350" cy="296"/>
+          </a:xfrm>
+        </p:grpSpPr>
+        <p:sp>
+          <p:nvSpPr>
+            <p:cNvPr id="15397" name="Oval 5"/>
+            <p:cNvSpPr>
+              <a:spLocks noChangeArrowheads="1"/>
+            </p:cNvSpPr>
+            <p:nvPr/>
+          </p:nvSpPr>
+          <p:spPr bwMode="auto">
+            <a:xfrm>
+              <a:off x="4288" y="1746"/>
+              <a:ext cx="350" cy="296"/>
+            </a:xfrm>
+            <a:prstGeom prst="ellipse">
+              <a:avLst/>
+            </a:prstGeom>
+            <a:solidFill>
+              <a:srgbClr val="0066FF"/>
+            </a:solidFill>
+            <a:ln w="19050">
+              <a:solidFill>
+                <a:schemeClr val="tx1"/>
+              </a:solidFill>
+              <a:round/>
+              <a:headEnd type="none" w="sm" len="sm"/>
+              <a:tailEnd type="none" w="sm" len="sm"/>
+            </a:ln>
+          </p:spPr>
+          <p:txBody>
+            <a:bodyPr wrap="none" anchor="ctr"/>
+            <a:lstStyle/>
+            <a:p>
+              <a:endParaRPr lang="nl-NL"/>
+            </a:p>
+          </p:txBody>
+        </p:sp>
+        <p:sp>
+          <p:nvSpPr>
+            <p:cNvPr id="15398" name="Text Box 6"/>
+            <p:cNvSpPr txBox="1">
+              <a:spLocks noChangeArrowheads="1"/>
+            </p:cNvSpPr>
+            <p:nvPr/>
+          </p:nvSpPr>
+          <p:spPr bwMode="auto">
+            <a:xfrm>
+              <a:off x="4365" y="1769"/>
+              <a:ext cx="196" cy="250"/>
+            </a:xfrm>
+            <a:prstGeom prst="rect">
+              <a:avLst/>
+            </a:prstGeom>
+            <a:noFill/>
+            <a:ln w="12700">
+              <a:noFill/>
+              <a:miter lim="800000"/>
+              <a:headEnd type="none" w="sm" len="sm"/>
+              <a:tailEnd type="none" w="sm" len="sm"/>
+            </a:ln>
+          </p:spPr>
+          <p:txBody>
+            <a:bodyPr wrap="none">
+              <a:spAutoFit/>
+            </a:bodyPr>
+            <a:lstStyle/>
+            <a:p>
+              <a:pPr algn="r"/>
+              <a:r>
+                <a:rPr lang="en-US"/>
+                <a:t>0</a:t>
+              </a:r>
+            </a:p>
+          </p:txBody>
+        </p:sp>
+      </p:grpSp>
+      <p:grpSp>
+        <p:nvGrpSpPr>
+          <p:cNvPr id="15368" name="Group 31"/>
+          <p:cNvGrpSpPr>
+            <a:grpSpLocks/>
+          </p:cNvGrpSpPr>
+          <p:nvPr/>
+        </p:nvGrpSpPr>
+        <p:grpSpPr bwMode="auto">
+          <a:xfrm>
+            <a:off x="4685930" y="1961801"/>
             <a:ext cx="603250" cy="1441450"/>
             <a:chOff x="1346" y="2965"/>
             <a:chExt cx="380" cy="908"/>
@@ -10557,7 +10878,7 @@
         </p:grpSpPr>
         <p:grpSp>
           <p:nvGrpSpPr>
-            <p:cNvPr id="15405" name="Group 15"/>
+            <p:cNvPr id="15391" name="Group 19"/>
             <p:cNvGrpSpPr>
               <a:grpSpLocks/>
             </p:cNvGrpSpPr>
@@ -10573,7 +10894,7 @@
           </p:grpSpPr>
           <p:sp>
             <p:nvSpPr>
-              <p:cNvPr id="15409" name="Oval 16"/>
+              <p:cNvPr id="15395" name="Oval 7"/>
               <p:cNvSpPr>
                 <a:spLocks noChangeArrowheads="1"/>
               </p:cNvSpPr>
@@ -10609,7 +10930,7 @@
           </p:sp>
           <p:sp>
             <p:nvSpPr>
-              <p:cNvPr id="15410" name="Text Box 17"/>
+              <p:cNvPr id="15396" name="Text Box 8"/>
               <p:cNvSpPr txBox="1">
                 <a:spLocks noChangeArrowheads="1"/>
               </p:cNvSpPr>
@@ -10647,7 +10968,7 @@
         </p:grpSp>
         <p:grpSp>
           <p:nvGrpSpPr>
-            <p:cNvPr id="15406" name="Group 18"/>
+            <p:cNvPr id="15392" name="Group 20"/>
             <p:cNvGrpSpPr>
               <a:grpSpLocks/>
             </p:cNvGrpSpPr>
@@ -10663,7 +10984,7 @@
           </p:grpSpPr>
           <p:sp>
             <p:nvSpPr>
-              <p:cNvPr id="15407" name="Oval 19"/>
+              <p:cNvPr id="15393" name="Oval 9"/>
               <p:cNvSpPr>
                 <a:spLocks noChangeArrowheads="1"/>
               </p:cNvSpPr>
@@ -10699,7 +11020,7 @@
           </p:sp>
           <p:sp>
             <p:nvSpPr>
-              <p:cNvPr id="15408" name="Text Box 20"/>
+              <p:cNvPr id="15394" name="Text Box 10"/>
               <p:cNvSpPr txBox="1">
                 <a:spLocks noChangeArrowheads="1"/>
               </p:cNvSpPr>
@@ -10729,16 +11050,114 @@
               <a:p>
                 <a:r>
                   <a:rPr lang="en-US"/>
-                  <a:t>0</a:t>
+                  <a:t>1</a:t>
                 </a:r>
               </a:p>
             </p:txBody>
           </p:sp>
         </p:grpSp>
       </p:grpSp>
-      <p:sp>
-        <p:nvSpPr>
-          <p:cNvPr id="15401" name="Line 24"/>
+      <p:grpSp>
+        <p:nvGrpSpPr>
+          <p:cNvPr id="15369" name="Group 21"/>
+          <p:cNvGrpSpPr>
+            <a:grpSpLocks/>
+          </p:cNvGrpSpPr>
+          <p:nvPr/>
+        </p:nvGrpSpPr>
+        <p:grpSpPr bwMode="auto">
+          <a:xfrm>
+            <a:off x="7283080" y="2449163"/>
+            <a:ext cx="555625" cy="469900"/>
+            <a:chOff x="4288" y="3622"/>
+            <a:chExt cx="350" cy="296"/>
+          </a:xfrm>
+        </p:grpSpPr>
+        <p:sp>
+          <p:nvSpPr>
+            <p:cNvPr id="15389" name="Oval 11"/>
+            <p:cNvSpPr>
+              <a:spLocks noChangeArrowheads="1"/>
+            </p:cNvSpPr>
+            <p:nvPr/>
+          </p:nvSpPr>
+          <p:spPr bwMode="auto">
+            <a:xfrm>
+              <a:off x="4288" y="3622"/>
+              <a:ext cx="350" cy="296"/>
+            </a:xfrm>
+            <a:prstGeom prst="ellipse">
+              <a:avLst/>
+            </a:prstGeom>
+            <a:solidFill>
+              <a:srgbClr val="0066FF"/>
+            </a:solidFill>
+            <a:ln w="38100">
+              <a:solidFill>
+                <a:schemeClr val="tx1"/>
+              </a:solidFill>
+              <a:round/>
+              <a:headEnd type="none" w="sm" len="sm"/>
+              <a:tailEnd type="none" w="sm" len="sm"/>
+            </a:ln>
+          </p:spPr>
+          <p:txBody>
+            <a:bodyPr wrap="none" anchor="ctr"/>
+            <a:lstStyle/>
+            <a:p>
+              <a:endParaRPr lang="nl-NL">
+                <a:solidFill>
+                  <a:schemeClr val="bg1"/>
+                </a:solidFill>
+              </a:endParaRPr>
+            </a:p>
+          </p:txBody>
+        </p:sp>
+        <p:sp>
+          <p:nvSpPr>
+            <p:cNvPr id="15390" name="Text Box 12"/>
+            <p:cNvSpPr txBox="1">
+              <a:spLocks noChangeArrowheads="1"/>
+            </p:cNvSpPr>
+            <p:nvPr/>
+          </p:nvSpPr>
+          <p:spPr bwMode="auto">
+            <a:xfrm>
+              <a:off x="4365" y="3645"/>
+              <a:ext cx="197" cy="233"/>
+            </a:xfrm>
+            <a:prstGeom prst="rect">
+              <a:avLst/>
+            </a:prstGeom>
+            <a:noFill/>
+            <a:ln w="12700">
+              <a:noFill/>
+              <a:miter lim="800000"/>
+              <a:headEnd type="none" w="sm" len="sm"/>
+              <a:tailEnd type="none" w="sm" len="sm"/>
+            </a:ln>
+          </p:spPr>
+          <p:txBody>
+            <a:bodyPr wrap="none">
+              <a:spAutoFit/>
+            </a:bodyPr>
+            <a:lstStyle/>
+            <a:p>
+              <a:r>
+                <a:rPr lang="en-US" dirty="0">
+                  <a:solidFill>
+                    <a:schemeClr val="bg1"/>
+                  </a:solidFill>
+                </a:rPr>
+                <a:t>6</a:t>
+              </a:r>
+            </a:p>
+          </p:txBody>
+        </p:sp>
+      </p:grpSp>
+      <p:sp>
+        <p:nvSpPr>
+          <p:cNvPr id="15370" name="Line 13"/>
           <p:cNvSpPr>
             <a:spLocks noChangeShapeType="1"/>
           </p:cNvSpPr>
@@ -10746,42 +11165,8 @@
         </p:nvSpPr>
         <p:spPr bwMode="auto">
           <a:xfrm flipV="1">
-            <a:off x="1591295" y="2316177"/>
-            <a:ext cx="396875" cy="265113"/>
-          </a:xfrm>
-          <a:prstGeom prst="line">
-            <a:avLst/>
-          </a:prstGeom>
-          <a:noFill/>
-          <a:ln w="19050">
-            <a:solidFill>
-              <a:schemeClr val="tx1"/>
-            </a:solidFill>
-            <a:round/>
-            <a:headEnd type="arrow" w="med" len="med"/>
-            <a:tailEnd/>
-          </a:ln>
-        </p:spPr>
-        <p:txBody>
-          <a:bodyPr/>
-          <a:lstStyle/>
-          <a:p>
-            <a:endParaRPr lang="en-US"/>
-          </a:p>
-        </p:txBody>
-      </p:sp>
-      <p:sp>
-        <p:nvSpPr>
-          <p:cNvPr id="15402" name="Line 39"/>
-          <p:cNvSpPr>
-            <a:spLocks noChangeShapeType="1"/>
-          </p:cNvSpPr>
-          <p:nvPr/>
-        </p:nvSpPr>
-        <p:spPr bwMode="auto">
-          <a:xfrm>
-            <a:off x="1559545" y="2830527"/>
-            <a:ext cx="346075" cy="249238"/>
+            <a:off x="4400180" y="2322163"/>
+            <a:ext cx="396875" cy="265112"/>
           </a:xfrm>
           <a:prstGeom prst="line">
             <a:avLst/>
@@ -10806,7 +11191,7 @@
       </p:sp>
       <p:sp>
         <p:nvSpPr>
-          <p:cNvPr id="15403" name="Line 44"/>
+          <p:cNvPr id="15371" name="Line 17"/>
           <p:cNvSpPr>
             <a:spLocks noChangeShapeType="1"/>
           </p:cNvSpPr>
@@ -10814,8 +11199,8 @@
         </p:nvSpPr>
         <p:spPr bwMode="auto">
           <a:xfrm>
-            <a:off x="2178670" y="2428889"/>
-            <a:ext cx="0" cy="498475"/>
+            <a:off x="3492130" y="2684113"/>
+            <a:ext cx="354013" cy="0"/>
           </a:xfrm>
           <a:prstGeom prst="line">
             <a:avLst/>
@@ -10838,43 +11223,9 @@
           </a:p>
         </p:txBody>
       </p:sp>
-      <p:sp>
-        <p:nvSpPr>
-          <p:cNvPr id="15404" name="Line 45"/>
-          <p:cNvSpPr>
-            <a:spLocks noChangeShapeType="1"/>
-          </p:cNvSpPr>
-          <p:nvPr/>
-        </p:nvSpPr>
-        <p:spPr bwMode="auto">
-          <a:xfrm>
-            <a:off x="2178670" y="1647839"/>
-            <a:ext cx="0" cy="295275"/>
-          </a:xfrm>
-          <a:prstGeom prst="line">
-            <a:avLst/>
-          </a:prstGeom>
-          <a:noFill/>
-          <a:ln w="19050">
-            <a:solidFill>
-              <a:schemeClr val="tx1"/>
-            </a:solidFill>
-            <a:round/>
-            <a:headEnd type="none" w="sm" len="sm"/>
-            <a:tailEnd type="arrow" w="med" len="med"/>
-          </a:ln>
-        </p:spPr>
-        <p:txBody>
-          <a:bodyPr/>
-          <a:lstStyle/>
-          <a:p>
-            <a:endParaRPr lang="en-US"/>
-          </a:p>
-        </p:txBody>
-      </p:sp>
       <p:grpSp>
         <p:nvGrpSpPr>
-          <p:cNvPr id="15366" name="Group 41"/>
+          <p:cNvPr id="15372" name="Group 22"/>
           <p:cNvGrpSpPr>
             <a:grpSpLocks/>
           </p:cNvGrpSpPr>
@@ -10882,15 +11233,106 @@
         </p:nvGrpSpPr>
         <p:grpSpPr bwMode="auto">
           <a:xfrm>
-            <a:off x="3492130" y="1961801"/>
-            <a:ext cx="4346575" cy="1443037"/>
-            <a:chOff x="503" y="2966"/>
-            <a:chExt cx="2738" cy="909"/>
+            <a:off x="5566993" y="2449163"/>
+            <a:ext cx="555625" cy="469900"/>
+            <a:chOff x="4288" y="1746"/>
+            <a:chExt cx="350" cy="296"/>
+          </a:xfrm>
+        </p:grpSpPr>
+        <p:sp>
+          <p:nvSpPr>
+            <p:cNvPr id="15387" name="Oval 23"/>
+            <p:cNvSpPr>
+              <a:spLocks noChangeArrowheads="1"/>
+            </p:cNvSpPr>
+            <p:nvPr/>
+          </p:nvSpPr>
+          <p:spPr bwMode="auto">
+            <a:xfrm>
+              <a:off x="4288" y="1746"/>
+              <a:ext cx="350" cy="296"/>
+            </a:xfrm>
+            <a:prstGeom prst="ellipse">
+              <a:avLst/>
+            </a:prstGeom>
+            <a:solidFill>
+              <a:srgbClr val="0066FF"/>
+            </a:solidFill>
+            <a:ln w="19050">
+              <a:solidFill>
+                <a:schemeClr val="tx1"/>
+              </a:solidFill>
+              <a:round/>
+              <a:headEnd type="none" w="sm" len="sm"/>
+              <a:tailEnd type="none" w="sm" len="sm"/>
+            </a:ln>
+          </p:spPr>
+          <p:txBody>
+            <a:bodyPr wrap="none" anchor="ctr"/>
+            <a:lstStyle/>
+            <a:p>
+              <a:endParaRPr lang="nl-NL"/>
+            </a:p>
+          </p:txBody>
+        </p:sp>
+        <p:sp>
+          <p:nvSpPr>
+            <p:cNvPr id="15388" name="Text Box 24"/>
+            <p:cNvSpPr txBox="1">
+              <a:spLocks noChangeArrowheads="1"/>
+            </p:cNvSpPr>
+            <p:nvPr/>
+          </p:nvSpPr>
+          <p:spPr bwMode="auto">
+            <a:xfrm>
+              <a:off x="4365" y="1769"/>
+              <a:ext cx="196" cy="250"/>
+            </a:xfrm>
+            <a:prstGeom prst="rect">
+              <a:avLst/>
+            </a:prstGeom>
+            <a:noFill/>
+            <a:ln w="12700">
+              <a:noFill/>
+              <a:miter lim="800000"/>
+              <a:headEnd type="none" w="sm" len="sm"/>
+              <a:tailEnd type="none" w="sm" len="sm"/>
+            </a:ln>
+          </p:spPr>
+          <p:txBody>
+            <a:bodyPr wrap="none">
+              <a:spAutoFit/>
+            </a:bodyPr>
+            <a:lstStyle/>
+            <a:p>
+              <a:pPr algn="r"/>
+              <a:r>
+                <a:rPr lang="en-US"/>
+                <a:t>3</a:t>
+              </a:r>
+            </a:p>
+          </p:txBody>
+        </p:sp>
+      </p:grpSp>
+      <p:grpSp>
+        <p:nvGrpSpPr>
+          <p:cNvPr id="15373" name="Group 32"/>
+          <p:cNvGrpSpPr>
+            <a:grpSpLocks/>
+          </p:cNvGrpSpPr>
+          <p:nvPr/>
+        </p:nvGrpSpPr>
+        <p:grpSpPr bwMode="auto">
+          <a:xfrm>
+            <a:off x="6400430" y="1963388"/>
+            <a:ext cx="603250" cy="1441450"/>
+            <a:chOff x="2450" y="2968"/>
+            <a:chExt cx="380" cy="908"/>
           </a:xfrm>
         </p:grpSpPr>
         <p:grpSp>
           <p:nvGrpSpPr>
-            <p:cNvPr id="15367" name="Group 18"/>
+            <p:cNvPr id="15381" name="Group 25"/>
             <p:cNvGrpSpPr>
               <a:grpSpLocks/>
             </p:cNvGrpSpPr>
@@ -10898,15 +11340,15 @@
           </p:nvGrpSpPr>
           <p:grpSpPr bwMode="auto">
             <a:xfrm>
-              <a:off x="730" y="3273"/>
+              <a:off x="2450" y="3580"/>
               <a:ext cx="350" cy="296"/>
-              <a:chOff x="4288" y="1746"/>
+              <a:chOff x="4738" y="2684"/>
               <a:chExt cx="350" cy="296"/>
             </a:xfrm>
           </p:grpSpPr>
           <p:sp>
             <p:nvSpPr>
-              <p:cNvPr id="15397" name="Oval 5"/>
+              <p:cNvPr id="15385" name="Oval 26"/>
               <p:cNvSpPr>
                 <a:spLocks noChangeArrowheads="1"/>
               </p:cNvSpPr>
@@ -10914,7 +11356,7 @@
             </p:nvSpPr>
             <p:spPr bwMode="auto">
               <a:xfrm>
-                <a:off x="4288" y="1746"/>
+                <a:off x="4738" y="2684"/>
                 <a:ext cx="350" cy="296"/>
               </a:xfrm>
               <a:prstGeom prst="ellipse">
@@ -10942,7 +11384,7 @@
           </p:sp>
           <p:sp>
             <p:nvSpPr>
-              <p:cNvPr id="15398" name="Text Box 6"/>
+              <p:cNvPr id="15386" name="Text Box 27"/>
               <p:cNvSpPr txBox="1">
                 <a:spLocks noChangeArrowheads="1"/>
               </p:cNvSpPr>
@@ -10950,295 +11392,7 @@
             </p:nvSpPr>
             <p:spPr bwMode="auto">
               <a:xfrm>
-                <a:off x="4365" y="1769"/>
-                <a:ext cx="196" cy="250"/>
-              </a:xfrm>
-              <a:prstGeom prst="rect">
-                <a:avLst/>
-              </a:prstGeom>
-              <a:noFill/>
-              <a:ln w="12700">
-                <a:noFill/>
-                <a:miter lim="800000"/>
-                <a:headEnd type="none" w="sm" len="sm"/>
-                <a:tailEnd type="none" w="sm" len="sm"/>
-              </a:ln>
-            </p:spPr>
-            <p:txBody>
-              <a:bodyPr wrap="none">
-                <a:spAutoFit/>
-              </a:bodyPr>
-              <a:lstStyle/>
-              <a:p>
-                <a:pPr algn="r"/>
-                <a:r>
-                  <a:rPr lang="en-US"/>
-                  <a:t>0</a:t>
-                </a:r>
-              </a:p>
-            </p:txBody>
-          </p:sp>
-        </p:grpSp>
-        <p:grpSp>
-          <p:nvGrpSpPr>
-            <p:cNvPr id="15368" name="Group 31"/>
-            <p:cNvGrpSpPr>
-              <a:grpSpLocks/>
-            </p:cNvGrpSpPr>
-            <p:nvPr/>
-          </p:nvGrpSpPr>
-          <p:grpSpPr bwMode="auto">
-            <a:xfrm>
-              <a:off x="1255" y="2966"/>
-              <a:ext cx="380" cy="908"/>
-              <a:chOff x="1346" y="2965"/>
-              <a:chExt cx="380" cy="908"/>
-            </a:xfrm>
-          </p:grpSpPr>
-          <p:grpSp>
-            <p:nvGrpSpPr>
-              <p:cNvPr id="15391" name="Group 19"/>
-              <p:cNvGrpSpPr>
-                <a:grpSpLocks/>
-              </p:cNvGrpSpPr>
-              <p:nvPr/>
-            </p:nvGrpSpPr>
-            <p:grpSpPr bwMode="auto">
-              <a:xfrm>
-                <a:off x="1346" y="3577"/>
-                <a:ext cx="350" cy="296"/>
-                <a:chOff x="4738" y="2684"/>
-                <a:chExt cx="350" cy="296"/>
-              </a:xfrm>
-            </p:grpSpPr>
-            <p:sp>
-              <p:nvSpPr>
-                <p:cNvPr id="15395" name="Oval 7"/>
-                <p:cNvSpPr>
-                  <a:spLocks noChangeArrowheads="1"/>
-                </p:cNvSpPr>
-                <p:nvPr/>
-              </p:nvSpPr>
-              <p:spPr bwMode="auto">
-                <a:xfrm>
-                  <a:off x="4738" y="2684"/>
-                  <a:ext cx="350" cy="296"/>
-                </a:xfrm>
-                <a:prstGeom prst="ellipse">
-                  <a:avLst/>
-                </a:prstGeom>
-                <a:solidFill>
-                  <a:srgbClr val="0066FF"/>
-                </a:solidFill>
-                <a:ln w="19050">
-                  <a:solidFill>
-                    <a:schemeClr val="tx1"/>
-                  </a:solidFill>
-                  <a:round/>
-                  <a:headEnd type="none" w="sm" len="sm"/>
-                  <a:tailEnd type="none" w="sm" len="sm"/>
-                </a:ln>
-              </p:spPr>
-              <p:txBody>
-                <a:bodyPr wrap="none" anchor="ctr"/>
-                <a:lstStyle/>
-                <a:p>
-                  <a:endParaRPr lang="nl-NL"/>
-                </a:p>
-              </p:txBody>
-            </p:sp>
-            <p:sp>
-              <p:nvSpPr>
-                <p:cNvPr id="15396" name="Text Box 8"/>
-                <p:cNvSpPr txBox="1">
-                  <a:spLocks noChangeArrowheads="1"/>
-                </p:cNvSpPr>
-                <p:nvPr/>
-              </p:nvSpPr>
-              <p:spPr bwMode="auto">
-                <a:xfrm>
-                  <a:off x="4815" y="2707"/>
-                  <a:ext cx="196" cy="250"/>
-                </a:xfrm>
-                <a:prstGeom prst="rect">
-                  <a:avLst/>
-                </a:prstGeom>
-                <a:noFill/>
-                <a:ln w="12700">
-                  <a:noFill/>
-                  <a:miter lim="800000"/>
-                  <a:headEnd type="none" w="sm" len="sm"/>
-                  <a:tailEnd type="none" w="sm" len="sm"/>
-                </a:ln>
-              </p:spPr>
-              <p:txBody>
-                <a:bodyPr wrap="none">
-                  <a:spAutoFit/>
-                </a:bodyPr>
-                <a:lstStyle/>
-                <a:p>
-                  <a:r>
-                    <a:rPr lang="en-US"/>
-                    <a:t>2</a:t>
-                  </a:r>
-                </a:p>
-              </p:txBody>
-            </p:sp>
-          </p:grpSp>
-          <p:grpSp>
-            <p:nvGrpSpPr>
-              <p:cNvPr id="15392" name="Group 20"/>
-              <p:cNvGrpSpPr>
-                <a:grpSpLocks/>
-              </p:cNvGrpSpPr>
-              <p:nvPr/>
-            </p:nvGrpSpPr>
-            <p:grpSpPr bwMode="auto">
-              <a:xfrm>
-                <a:off x="1376" y="2965"/>
-                <a:ext cx="350" cy="296"/>
-                <a:chOff x="3838" y="2684"/>
-                <a:chExt cx="350" cy="296"/>
-              </a:xfrm>
-            </p:grpSpPr>
-            <p:sp>
-              <p:nvSpPr>
-                <p:cNvPr id="15393" name="Oval 9"/>
-                <p:cNvSpPr>
-                  <a:spLocks noChangeArrowheads="1"/>
-                </p:cNvSpPr>
-                <p:nvPr/>
-              </p:nvSpPr>
-              <p:spPr bwMode="auto">
-                <a:xfrm>
-                  <a:off x="3838" y="2684"/>
-                  <a:ext cx="350" cy="296"/>
-                </a:xfrm>
-                <a:prstGeom prst="ellipse">
-                  <a:avLst/>
-                </a:prstGeom>
-                <a:solidFill>
-                  <a:srgbClr val="0066FF"/>
-                </a:solidFill>
-                <a:ln w="19050">
-                  <a:solidFill>
-                    <a:schemeClr val="tx1"/>
-                  </a:solidFill>
-                  <a:round/>
-                  <a:headEnd type="none" w="sm" len="sm"/>
-                  <a:tailEnd type="none" w="sm" len="sm"/>
-                </a:ln>
-              </p:spPr>
-              <p:txBody>
-                <a:bodyPr wrap="none" anchor="ctr"/>
-                <a:lstStyle/>
-                <a:p>
-                  <a:endParaRPr lang="nl-NL"/>
-                </a:p>
-              </p:txBody>
-            </p:sp>
-            <p:sp>
-              <p:nvSpPr>
-                <p:cNvPr id="15394" name="Text Box 10"/>
-                <p:cNvSpPr txBox="1">
-                  <a:spLocks noChangeArrowheads="1"/>
-                </p:cNvSpPr>
-                <p:nvPr/>
-              </p:nvSpPr>
-              <p:spPr bwMode="auto">
-                <a:xfrm>
-                  <a:off x="3915" y="2707"/>
-                  <a:ext cx="196" cy="250"/>
-                </a:xfrm>
-                <a:prstGeom prst="rect">
-                  <a:avLst/>
-                </a:prstGeom>
-                <a:noFill/>
-                <a:ln w="12700">
-                  <a:noFill/>
-                  <a:miter lim="800000"/>
-                  <a:headEnd type="none" w="sm" len="sm"/>
-                  <a:tailEnd type="none" w="sm" len="sm"/>
-                </a:ln>
-              </p:spPr>
-              <p:txBody>
-                <a:bodyPr wrap="none">
-                  <a:spAutoFit/>
-                </a:bodyPr>
-                <a:lstStyle/>
-                <a:p>
-                  <a:r>
-                    <a:rPr lang="en-US"/>
-                    <a:t>1</a:t>
-                  </a:r>
-                </a:p>
-              </p:txBody>
-            </p:sp>
-          </p:grpSp>
-        </p:grpSp>
-        <p:grpSp>
-          <p:nvGrpSpPr>
-            <p:cNvPr id="15369" name="Group 21"/>
-            <p:cNvGrpSpPr>
-              <a:grpSpLocks/>
-            </p:cNvGrpSpPr>
-            <p:nvPr/>
-          </p:nvGrpSpPr>
-          <p:grpSpPr bwMode="auto">
-            <a:xfrm>
-              <a:off x="2891" y="3273"/>
-              <a:ext cx="350" cy="296"/>
-              <a:chOff x="4288" y="3622"/>
-              <a:chExt cx="350" cy="296"/>
-            </a:xfrm>
-          </p:grpSpPr>
-          <p:sp>
-            <p:nvSpPr>
-              <p:cNvPr id="15389" name="Oval 11"/>
-              <p:cNvSpPr>
-                <a:spLocks noChangeArrowheads="1"/>
-              </p:cNvSpPr>
-              <p:nvPr/>
-            </p:nvSpPr>
-            <p:spPr bwMode="auto">
-              <a:xfrm>
-                <a:off x="4288" y="3622"/>
-                <a:ext cx="350" cy="296"/>
-              </a:xfrm>
-              <a:prstGeom prst="ellipse">
-                <a:avLst/>
-              </a:prstGeom>
-              <a:solidFill>
-                <a:srgbClr val="0066FF"/>
-              </a:solidFill>
-              <a:ln w="38100">
-                <a:solidFill>
-                  <a:schemeClr val="tx1"/>
-                </a:solidFill>
-                <a:round/>
-                <a:headEnd type="none" w="sm" len="sm"/>
-                <a:tailEnd type="none" w="sm" len="sm"/>
-              </a:ln>
-            </p:spPr>
-            <p:txBody>
-              <a:bodyPr wrap="none" anchor="ctr"/>
-              <a:lstStyle/>
-              <a:p>
-                <a:endParaRPr lang="nl-NL"/>
-              </a:p>
-            </p:txBody>
-          </p:sp>
-          <p:sp>
-            <p:nvSpPr>
-              <p:cNvPr id="15390" name="Text Box 12"/>
-              <p:cNvSpPr txBox="1">
-                <a:spLocks noChangeArrowheads="1"/>
-              </p:cNvSpPr>
-              <p:nvPr/>
-            </p:nvSpPr>
-            <p:spPr bwMode="auto">
-              <a:xfrm>
-                <a:off x="4365" y="3645"/>
+                <a:off x="4815" y="2707"/>
                 <a:ext cx="196" cy="250"/>
               </a:xfrm>
               <a:prstGeom prst="rect">
@@ -11260,83 +11414,15 @@
               <a:p>
                 <a:r>
                   <a:rPr lang="en-US"/>
-                  <a:t>6</a:t>
+                  <a:t>5</a:t>
                 </a:r>
               </a:p>
             </p:txBody>
           </p:sp>
         </p:grpSp>
-        <p:sp>
-          <p:nvSpPr>
-            <p:cNvPr id="15370" name="Line 13"/>
-            <p:cNvSpPr>
-              <a:spLocks noChangeShapeType="1"/>
-            </p:cNvSpPr>
-            <p:nvPr/>
-          </p:nvSpPr>
-          <p:spPr bwMode="auto">
-            <a:xfrm flipV="1">
-              <a:off x="1075" y="3193"/>
-              <a:ext cx="250" cy="167"/>
-            </a:xfrm>
-            <a:prstGeom prst="line">
-              <a:avLst/>
-            </a:prstGeom>
-            <a:noFill/>
-            <a:ln w="19050">
-              <a:solidFill>
-                <a:schemeClr val="tx1"/>
-              </a:solidFill>
-              <a:round/>
-              <a:headEnd type="none" w="sm" len="sm"/>
-              <a:tailEnd type="arrow" w="med" len="med"/>
-            </a:ln>
-          </p:spPr>
-          <p:txBody>
-            <a:bodyPr/>
-            <a:lstStyle/>
-            <a:p>
-              <a:endParaRPr lang="en-US"/>
-            </a:p>
-          </p:txBody>
-        </p:sp>
-        <p:sp>
-          <p:nvSpPr>
-            <p:cNvPr id="15371" name="Line 17"/>
-            <p:cNvSpPr>
-              <a:spLocks noChangeShapeType="1"/>
-            </p:cNvSpPr>
-            <p:nvPr/>
-          </p:nvSpPr>
-          <p:spPr bwMode="auto">
-            <a:xfrm>
-              <a:off x="503" y="3421"/>
-              <a:ext cx="223" cy="0"/>
-            </a:xfrm>
-            <a:prstGeom prst="line">
-              <a:avLst/>
-            </a:prstGeom>
-            <a:noFill/>
-            <a:ln w="19050">
-              <a:solidFill>
-                <a:schemeClr val="tx1"/>
-              </a:solidFill>
-              <a:round/>
-              <a:headEnd type="none" w="sm" len="sm"/>
-              <a:tailEnd type="arrow" w="med" len="med"/>
-            </a:ln>
-          </p:spPr>
-          <p:txBody>
-            <a:bodyPr/>
-            <a:lstStyle/>
-            <a:p>
-              <a:endParaRPr lang="en-US"/>
-            </a:p>
-          </p:txBody>
-        </p:sp>
         <p:grpSp>
           <p:nvGrpSpPr>
-            <p:cNvPr id="15372" name="Group 22"/>
+            <p:cNvPr id="15382" name="Group 28"/>
             <p:cNvGrpSpPr>
               <a:grpSpLocks/>
             </p:cNvGrpSpPr>
@@ -11344,15 +11430,15 @@
           </p:nvGrpSpPr>
           <p:grpSpPr bwMode="auto">
             <a:xfrm>
-              <a:off x="1810" y="3273"/>
+              <a:off x="2480" y="2968"/>
               <a:ext cx="350" cy="296"/>
-              <a:chOff x="4288" y="1746"/>
+              <a:chOff x="3838" y="2684"/>
               <a:chExt cx="350" cy="296"/>
             </a:xfrm>
           </p:grpSpPr>
           <p:sp>
             <p:nvSpPr>
-              <p:cNvPr id="15387" name="Oval 23"/>
+              <p:cNvPr id="15383" name="Oval 29"/>
               <p:cNvSpPr>
                 <a:spLocks noChangeArrowheads="1"/>
               </p:cNvSpPr>
@@ -11360,7 +11446,7 @@
             </p:nvSpPr>
             <p:spPr bwMode="auto">
               <a:xfrm>
-                <a:off x="4288" y="1746"/>
+                <a:off x="3838" y="2684"/>
                 <a:ext cx="350" cy="296"/>
               </a:xfrm>
               <a:prstGeom prst="ellipse">
@@ -11388,7 +11474,7 @@
           </p:sp>
           <p:sp>
             <p:nvSpPr>
-              <p:cNvPr id="15388" name="Text Box 24"/>
+              <p:cNvPr id="15384" name="Text Box 30"/>
               <p:cNvSpPr txBox="1">
                 <a:spLocks noChangeArrowheads="1"/>
               </p:cNvSpPr>
@@ -11396,7 +11482,7 @@
             </p:nvSpPr>
             <p:spPr bwMode="auto">
               <a:xfrm>
-                <a:off x="4365" y="1769"/>
+                <a:off x="3915" y="2707"/>
                 <a:ext cx="196" cy="250"/>
               </a:xfrm>
               <a:prstGeom prst="rect">
@@ -11416,451 +11502,253 @@
               </a:bodyPr>
               <a:lstStyle/>
               <a:p>
-                <a:pPr algn="r"/>
                 <a:r>
                   <a:rPr lang="en-US"/>
-                  <a:t>3</a:t>
+                  <a:t>4</a:t>
                 </a:r>
               </a:p>
             </p:txBody>
           </p:sp>
         </p:grpSp>
-        <p:grpSp>
-          <p:nvGrpSpPr>
-            <p:cNvPr id="15373" name="Group 32"/>
-            <p:cNvGrpSpPr>
-              <a:grpSpLocks/>
-            </p:cNvGrpSpPr>
-            <p:nvPr/>
-          </p:nvGrpSpPr>
-          <p:grpSpPr bwMode="auto">
-            <a:xfrm>
-              <a:off x="2335" y="2967"/>
-              <a:ext cx="380" cy="908"/>
-              <a:chOff x="2450" y="2968"/>
-              <a:chExt cx="380" cy="908"/>
-            </a:xfrm>
-          </p:grpSpPr>
-          <p:grpSp>
-            <p:nvGrpSpPr>
-              <p:cNvPr id="15381" name="Group 25"/>
-              <p:cNvGrpSpPr>
-                <a:grpSpLocks/>
-              </p:cNvGrpSpPr>
-              <p:nvPr/>
-            </p:nvGrpSpPr>
-            <p:grpSpPr bwMode="auto">
-              <a:xfrm>
-                <a:off x="2450" y="3580"/>
-                <a:ext cx="350" cy="296"/>
-                <a:chOff x="4738" y="2684"/>
-                <a:chExt cx="350" cy="296"/>
-              </a:xfrm>
-            </p:grpSpPr>
-            <p:sp>
-              <p:nvSpPr>
-                <p:cNvPr id="15385" name="Oval 26"/>
-                <p:cNvSpPr>
-                  <a:spLocks noChangeArrowheads="1"/>
-                </p:cNvSpPr>
-                <p:nvPr/>
-              </p:nvSpPr>
-              <p:spPr bwMode="auto">
-                <a:xfrm>
-                  <a:off x="4738" y="2684"/>
-                  <a:ext cx="350" cy="296"/>
-                </a:xfrm>
-                <a:prstGeom prst="ellipse">
-                  <a:avLst/>
-                </a:prstGeom>
-                <a:solidFill>
-                  <a:srgbClr val="0066FF"/>
-                </a:solidFill>
-                <a:ln w="19050">
-                  <a:solidFill>
-                    <a:schemeClr val="tx1"/>
-                  </a:solidFill>
-                  <a:round/>
-                  <a:headEnd type="none" w="sm" len="sm"/>
-                  <a:tailEnd type="none" w="sm" len="sm"/>
-                </a:ln>
-              </p:spPr>
-              <p:txBody>
-                <a:bodyPr wrap="none" anchor="ctr"/>
-                <a:lstStyle/>
-                <a:p>
-                  <a:endParaRPr lang="nl-NL"/>
-                </a:p>
-              </p:txBody>
-            </p:sp>
-            <p:sp>
-              <p:nvSpPr>
-                <p:cNvPr id="15386" name="Text Box 27"/>
-                <p:cNvSpPr txBox="1">
-                  <a:spLocks noChangeArrowheads="1"/>
-                </p:cNvSpPr>
-                <p:nvPr/>
-              </p:nvSpPr>
-              <p:spPr bwMode="auto">
-                <a:xfrm>
-                  <a:off x="4815" y="2707"/>
-                  <a:ext cx="196" cy="250"/>
-                </a:xfrm>
-                <a:prstGeom prst="rect">
-                  <a:avLst/>
-                </a:prstGeom>
-                <a:noFill/>
-                <a:ln w="12700">
-                  <a:noFill/>
-                  <a:miter lim="800000"/>
-                  <a:headEnd type="none" w="sm" len="sm"/>
-                  <a:tailEnd type="none" w="sm" len="sm"/>
-                </a:ln>
-              </p:spPr>
-              <p:txBody>
-                <a:bodyPr wrap="none">
-                  <a:spAutoFit/>
-                </a:bodyPr>
-                <a:lstStyle/>
-                <a:p>
-                  <a:r>
-                    <a:rPr lang="en-US"/>
-                    <a:t>5</a:t>
-                  </a:r>
-                </a:p>
-              </p:txBody>
-            </p:sp>
-          </p:grpSp>
-          <p:grpSp>
-            <p:nvGrpSpPr>
-              <p:cNvPr id="15382" name="Group 28"/>
-              <p:cNvGrpSpPr>
-                <a:grpSpLocks/>
-              </p:cNvGrpSpPr>
-              <p:nvPr/>
-            </p:nvGrpSpPr>
-            <p:grpSpPr bwMode="auto">
-              <a:xfrm>
-                <a:off x="2480" y="2968"/>
-                <a:ext cx="350" cy="296"/>
-                <a:chOff x="3838" y="2684"/>
-                <a:chExt cx="350" cy="296"/>
-              </a:xfrm>
-            </p:grpSpPr>
-            <p:sp>
-              <p:nvSpPr>
-                <p:cNvPr id="15383" name="Oval 29"/>
-                <p:cNvSpPr>
-                  <a:spLocks noChangeArrowheads="1"/>
-                </p:cNvSpPr>
-                <p:nvPr/>
-              </p:nvSpPr>
-              <p:spPr bwMode="auto">
-                <a:xfrm>
-                  <a:off x="3838" y="2684"/>
-                  <a:ext cx="350" cy="296"/>
-                </a:xfrm>
-                <a:prstGeom prst="ellipse">
-                  <a:avLst/>
-                </a:prstGeom>
-                <a:solidFill>
-                  <a:srgbClr val="0066FF"/>
-                </a:solidFill>
-                <a:ln w="19050">
-                  <a:solidFill>
-                    <a:schemeClr val="tx1"/>
-                  </a:solidFill>
-                  <a:round/>
-                  <a:headEnd type="none" w="sm" len="sm"/>
-                  <a:tailEnd type="none" w="sm" len="sm"/>
-                </a:ln>
-              </p:spPr>
-              <p:txBody>
-                <a:bodyPr wrap="none" anchor="ctr"/>
-                <a:lstStyle/>
-                <a:p>
-                  <a:endParaRPr lang="nl-NL"/>
-                </a:p>
-              </p:txBody>
-            </p:sp>
-            <p:sp>
-              <p:nvSpPr>
-                <p:cNvPr id="15384" name="Text Box 30"/>
-                <p:cNvSpPr txBox="1">
-                  <a:spLocks noChangeArrowheads="1"/>
-                </p:cNvSpPr>
-                <p:nvPr/>
-              </p:nvSpPr>
-              <p:spPr bwMode="auto">
-                <a:xfrm>
-                  <a:off x="3915" y="2707"/>
-                  <a:ext cx="196" cy="250"/>
-                </a:xfrm>
-                <a:prstGeom prst="rect">
-                  <a:avLst/>
-                </a:prstGeom>
-                <a:noFill/>
-                <a:ln w="12700">
-                  <a:noFill/>
-                  <a:miter lim="800000"/>
-                  <a:headEnd type="none" w="sm" len="sm"/>
-                  <a:tailEnd type="none" w="sm" len="sm"/>
-                </a:ln>
-              </p:spPr>
-              <p:txBody>
-                <a:bodyPr wrap="none">
-                  <a:spAutoFit/>
-                </a:bodyPr>
-                <a:lstStyle/>
-                <a:p>
-                  <a:r>
-                    <a:rPr lang="en-US"/>
-                    <a:t>4</a:t>
-                  </a:r>
-                </a:p>
-              </p:txBody>
-            </p:sp>
-          </p:grpSp>
-        </p:grpSp>
-        <p:sp>
-          <p:nvSpPr>
-            <p:cNvPr id="15374" name="Line 33"/>
-            <p:cNvSpPr>
-              <a:spLocks noChangeShapeType="1"/>
-            </p:cNvSpPr>
-            <p:nvPr/>
-          </p:nvSpPr>
-          <p:spPr bwMode="auto">
-            <a:xfrm flipV="1">
-              <a:off x="2679" y="3513"/>
-              <a:ext cx="250" cy="167"/>
-            </a:xfrm>
-            <a:prstGeom prst="line">
-              <a:avLst/>
-            </a:prstGeom>
-            <a:noFill/>
-            <a:ln w="19050">
-              <a:solidFill>
-                <a:schemeClr val="tx1"/>
-              </a:solidFill>
-              <a:round/>
-              <a:headEnd type="none" w="sm" len="sm"/>
-              <a:tailEnd type="arrow" w="med" len="med"/>
-            </a:ln>
-          </p:spPr>
-          <p:txBody>
-            <a:bodyPr/>
-            <a:lstStyle/>
-            <a:p>
-              <a:endParaRPr lang="en-US"/>
-            </a:p>
-          </p:txBody>
-        </p:sp>
-        <p:sp>
-          <p:nvSpPr>
-            <p:cNvPr id="15375" name="Line 34"/>
-            <p:cNvSpPr>
-              <a:spLocks noChangeShapeType="1"/>
-            </p:cNvSpPr>
-            <p:nvPr/>
-          </p:nvSpPr>
-          <p:spPr bwMode="auto">
-            <a:xfrm flipV="1">
-              <a:off x="1595" y="3513"/>
-              <a:ext cx="250" cy="167"/>
-            </a:xfrm>
-            <a:prstGeom prst="line">
-              <a:avLst/>
-            </a:prstGeom>
-            <a:noFill/>
-            <a:ln w="19050">
-              <a:solidFill>
-                <a:schemeClr val="tx1"/>
-              </a:solidFill>
-              <a:round/>
-              <a:headEnd type="none" w="sm" len="sm"/>
-              <a:tailEnd type="arrow" w="med" len="med"/>
-            </a:ln>
-          </p:spPr>
-          <p:txBody>
-            <a:bodyPr/>
-            <a:lstStyle/>
-            <a:p>
-              <a:endParaRPr lang="en-US"/>
-            </a:p>
-          </p:txBody>
-        </p:sp>
-        <p:sp>
-          <p:nvSpPr>
-            <p:cNvPr id="15376" name="Line 35"/>
-            <p:cNvSpPr>
-              <a:spLocks noChangeShapeType="1"/>
-            </p:cNvSpPr>
-            <p:nvPr/>
-          </p:nvSpPr>
-          <p:spPr bwMode="auto">
-            <a:xfrm flipV="1">
-              <a:off x="2147" y="3193"/>
-              <a:ext cx="250" cy="167"/>
-            </a:xfrm>
-            <a:prstGeom prst="line">
-              <a:avLst/>
-            </a:prstGeom>
-            <a:noFill/>
-            <a:ln w="19050">
-              <a:solidFill>
-                <a:schemeClr val="tx1"/>
-              </a:solidFill>
-              <a:round/>
-              <a:headEnd type="none" w="sm" len="sm"/>
-              <a:tailEnd type="arrow" w="med" len="med"/>
-            </a:ln>
-          </p:spPr>
-          <p:txBody>
-            <a:bodyPr/>
-            <a:lstStyle/>
-            <a:p>
-              <a:endParaRPr lang="en-US"/>
-            </a:p>
-          </p:txBody>
-        </p:sp>
-        <p:sp>
-          <p:nvSpPr>
-            <p:cNvPr id="15377" name="Line 36"/>
-            <p:cNvSpPr>
-              <a:spLocks noChangeShapeType="1"/>
-            </p:cNvSpPr>
-            <p:nvPr/>
-          </p:nvSpPr>
-          <p:spPr bwMode="auto">
-            <a:xfrm>
-              <a:off x="1055" y="3517"/>
-              <a:ext cx="218" cy="157"/>
-            </a:xfrm>
-            <a:prstGeom prst="line">
-              <a:avLst/>
-            </a:prstGeom>
-            <a:noFill/>
-            <a:ln w="19050">
-              <a:solidFill>
-                <a:schemeClr val="tx1"/>
-              </a:solidFill>
-              <a:round/>
-              <a:headEnd type="none" w="sm" len="sm"/>
-              <a:tailEnd type="arrow" w="med" len="med"/>
-            </a:ln>
-          </p:spPr>
-          <p:txBody>
-            <a:bodyPr/>
-            <a:lstStyle/>
-            <a:p>
-              <a:endParaRPr lang="en-US"/>
-            </a:p>
-          </p:txBody>
-        </p:sp>
-        <p:sp>
-          <p:nvSpPr>
-            <p:cNvPr id="15378" name="Line 37"/>
-            <p:cNvSpPr>
-              <a:spLocks noChangeShapeType="1"/>
-            </p:cNvSpPr>
-            <p:nvPr/>
-          </p:nvSpPr>
-          <p:spPr bwMode="auto">
-            <a:xfrm>
-              <a:off x="1607" y="3198"/>
-              <a:ext cx="218" cy="157"/>
-            </a:xfrm>
-            <a:prstGeom prst="line">
-              <a:avLst/>
-            </a:prstGeom>
-            <a:noFill/>
-            <a:ln w="19050">
-              <a:solidFill>
-                <a:schemeClr val="tx1"/>
-              </a:solidFill>
-              <a:round/>
-              <a:headEnd type="none" w="sm" len="sm"/>
-              <a:tailEnd type="arrow" w="med" len="med"/>
-            </a:ln>
-          </p:spPr>
-          <p:txBody>
-            <a:bodyPr/>
-            <a:lstStyle/>
-            <a:p>
-              <a:endParaRPr lang="en-US"/>
-            </a:p>
-          </p:txBody>
-        </p:sp>
-        <p:sp>
-          <p:nvSpPr>
-            <p:cNvPr id="15379" name="Line 38"/>
-            <p:cNvSpPr>
-              <a:spLocks noChangeShapeType="1"/>
-            </p:cNvSpPr>
-            <p:nvPr/>
-          </p:nvSpPr>
-          <p:spPr bwMode="auto">
-            <a:xfrm>
-              <a:off x="2123" y="3518"/>
-              <a:ext cx="218" cy="157"/>
-            </a:xfrm>
-            <a:prstGeom prst="line">
-              <a:avLst/>
-            </a:prstGeom>
-            <a:noFill/>
-            <a:ln w="19050">
-              <a:solidFill>
-                <a:schemeClr val="tx1"/>
-              </a:solidFill>
-              <a:round/>
-              <a:headEnd type="none" w="sm" len="sm"/>
-              <a:tailEnd type="arrow" w="med" len="med"/>
-            </a:ln>
-          </p:spPr>
-          <p:txBody>
-            <a:bodyPr/>
-            <a:lstStyle/>
-            <a:p>
-              <a:endParaRPr lang="en-US"/>
-            </a:p>
-          </p:txBody>
-        </p:sp>
-        <p:sp>
-          <p:nvSpPr>
-            <p:cNvPr id="15380" name="Line 39"/>
-            <p:cNvSpPr>
-              <a:spLocks noChangeShapeType="1"/>
-            </p:cNvSpPr>
-            <p:nvPr/>
-          </p:nvSpPr>
-          <p:spPr bwMode="auto">
-            <a:xfrm>
-              <a:off x="2707" y="3197"/>
-              <a:ext cx="218" cy="157"/>
-            </a:xfrm>
-            <a:prstGeom prst="line">
-              <a:avLst/>
-            </a:prstGeom>
-            <a:noFill/>
-            <a:ln w="19050">
-              <a:solidFill>
-                <a:schemeClr val="tx1"/>
-              </a:solidFill>
-              <a:round/>
-              <a:headEnd type="none" w="sm" len="sm"/>
-              <a:tailEnd type="arrow" w="med" len="med"/>
-            </a:ln>
-          </p:spPr>
-          <p:txBody>
-            <a:bodyPr/>
-            <a:lstStyle/>
-            <a:p>
-              <a:endParaRPr lang="en-US"/>
-            </a:p>
-          </p:txBody>
-        </p:sp>
       </p:grpSp>
+      <p:sp>
+        <p:nvSpPr>
+          <p:cNvPr id="15374" name="Line 33"/>
+          <p:cNvSpPr>
+            <a:spLocks noChangeShapeType="1"/>
+          </p:cNvSpPr>
+          <p:nvPr/>
+        </p:nvSpPr>
+        <p:spPr bwMode="auto">
+          <a:xfrm flipV="1">
+            <a:off x="6946530" y="2830163"/>
+            <a:ext cx="396875" cy="265112"/>
+          </a:xfrm>
+          <a:prstGeom prst="line">
+            <a:avLst/>
+          </a:prstGeom>
+          <a:noFill/>
+          <a:ln w="19050">
+            <a:solidFill>
+              <a:schemeClr val="tx1"/>
+            </a:solidFill>
+            <a:round/>
+            <a:headEnd type="none" w="sm" len="sm"/>
+            <a:tailEnd type="arrow" w="med" len="med"/>
+          </a:ln>
+        </p:spPr>
+        <p:txBody>
+          <a:bodyPr/>
+          <a:lstStyle/>
+          <a:p>
+            <a:endParaRPr lang="en-US"/>
+          </a:p>
+        </p:txBody>
+      </p:sp>
+      <p:sp>
+        <p:nvSpPr>
+          <p:cNvPr id="15375" name="Line 34"/>
+          <p:cNvSpPr>
+            <a:spLocks noChangeShapeType="1"/>
+          </p:cNvSpPr>
+          <p:nvPr/>
+        </p:nvSpPr>
+        <p:spPr bwMode="auto">
+          <a:xfrm flipV="1">
+            <a:off x="5225680" y="2830163"/>
+            <a:ext cx="396875" cy="265112"/>
+          </a:xfrm>
+          <a:prstGeom prst="line">
+            <a:avLst/>
+          </a:prstGeom>
+          <a:noFill/>
+          <a:ln w="19050">
+            <a:solidFill>
+              <a:schemeClr val="tx1"/>
+            </a:solidFill>
+            <a:round/>
+            <a:headEnd type="none" w="sm" len="sm"/>
+            <a:tailEnd type="arrow" w="med" len="med"/>
+          </a:ln>
+        </p:spPr>
+        <p:txBody>
+          <a:bodyPr/>
+          <a:lstStyle/>
+          <a:p>
+            <a:endParaRPr lang="en-US"/>
+          </a:p>
+        </p:txBody>
+      </p:sp>
+      <p:sp>
+        <p:nvSpPr>
+          <p:cNvPr id="15376" name="Line 35"/>
+          <p:cNvSpPr>
+            <a:spLocks noChangeShapeType="1"/>
+          </p:cNvSpPr>
+          <p:nvPr/>
+        </p:nvSpPr>
+        <p:spPr bwMode="auto">
+          <a:xfrm flipV="1">
+            <a:off x="6101980" y="2322163"/>
+            <a:ext cx="396875" cy="265112"/>
+          </a:xfrm>
+          <a:prstGeom prst="line">
+            <a:avLst/>
+          </a:prstGeom>
+          <a:noFill/>
+          <a:ln w="19050">
+            <a:solidFill>
+              <a:schemeClr val="tx1"/>
+            </a:solidFill>
+            <a:round/>
+            <a:headEnd type="none" w="sm" len="sm"/>
+            <a:tailEnd type="arrow" w="med" len="med"/>
+          </a:ln>
+        </p:spPr>
+        <p:txBody>
+          <a:bodyPr/>
+          <a:lstStyle/>
+          <a:p>
+            <a:endParaRPr lang="en-US"/>
+          </a:p>
+        </p:txBody>
+      </p:sp>
+      <p:sp>
+        <p:nvSpPr>
+          <p:cNvPr id="15377" name="Line 36"/>
+          <p:cNvSpPr>
+            <a:spLocks noChangeShapeType="1"/>
+          </p:cNvSpPr>
+          <p:nvPr/>
+        </p:nvSpPr>
+        <p:spPr bwMode="auto">
+          <a:xfrm>
+            <a:off x="4368430" y="2836513"/>
+            <a:ext cx="346075" cy="249237"/>
+          </a:xfrm>
+          <a:prstGeom prst="line">
+            <a:avLst/>
+          </a:prstGeom>
+          <a:noFill/>
+          <a:ln w="19050">
+            <a:solidFill>
+              <a:schemeClr val="tx1"/>
+            </a:solidFill>
+            <a:round/>
+            <a:headEnd type="none" w="sm" len="sm"/>
+            <a:tailEnd type="arrow" w="med" len="med"/>
+          </a:ln>
+        </p:spPr>
+        <p:txBody>
+          <a:bodyPr/>
+          <a:lstStyle/>
+          <a:p>
+            <a:endParaRPr lang="en-US"/>
+          </a:p>
+        </p:txBody>
+      </p:sp>
+      <p:sp>
+        <p:nvSpPr>
+          <p:cNvPr id="15378" name="Line 37"/>
+          <p:cNvSpPr>
+            <a:spLocks noChangeShapeType="1"/>
+          </p:cNvSpPr>
+          <p:nvPr/>
+        </p:nvSpPr>
+        <p:spPr bwMode="auto">
+          <a:xfrm>
+            <a:off x="5244730" y="2330101"/>
+            <a:ext cx="346075" cy="249237"/>
+          </a:xfrm>
+          <a:prstGeom prst="line">
+            <a:avLst/>
+          </a:prstGeom>
+          <a:noFill/>
+          <a:ln w="19050">
+            <a:solidFill>
+              <a:schemeClr val="tx1"/>
+            </a:solidFill>
+            <a:round/>
+            <a:headEnd type="none" w="sm" len="sm"/>
+            <a:tailEnd type="arrow" w="med" len="med"/>
+          </a:ln>
+        </p:spPr>
+        <p:txBody>
+          <a:bodyPr/>
+          <a:lstStyle/>
+          <a:p>
+            <a:endParaRPr lang="en-US"/>
+          </a:p>
+        </p:txBody>
+      </p:sp>
+      <p:sp>
+        <p:nvSpPr>
+          <p:cNvPr id="15379" name="Line 38"/>
+          <p:cNvSpPr>
+            <a:spLocks noChangeShapeType="1"/>
+          </p:cNvSpPr>
+          <p:nvPr/>
+        </p:nvSpPr>
+        <p:spPr bwMode="auto">
+          <a:xfrm>
+            <a:off x="6063880" y="2838101"/>
+            <a:ext cx="346075" cy="249237"/>
+          </a:xfrm>
+          <a:prstGeom prst="line">
+            <a:avLst/>
+          </a:prstGeom>
+          <a:noFill/>
+          <a:ln w="19050">
+            <a:solidFill>
+              <a:schemeClr val="tx1"/>
+            </a:solidFill>
+            <a:round/>
+            <a:headEnd type="none" w="sm" len="sm"/>
+            <a:tailEnd type="arrow" w="med" len="med"/>
+          </a:ln>
+        </p:spPr>
+        <p:txBody>
+          <a:bodyPr/>
+          <a:lstStyle/>
+          <a:p>
+            <a:endParaRPr lang="en-US"/>
+          </a:p>
+        </p:txBody>
+      </p:sp>
+      <p:sp>
+        <p:nvSpPr>
+          <p:cNvPr id="15380" name="Line 39"/>
+          <p:cNvSpPr>
+            <a:spLocks noChangeShapeType="1"/>
+          </p:cNvSpPr>
+          <p:nvPr/>
+        </p:nvSpPr>
+        <p:spPr bwMode="auto">
+          <a:xfrm>
+            <a:off x="6990980" y="2328513"/>
+            <a:ext cx="346075" cy="249237"/>
+          </a:xfrm>
+          <a:prstGeom prst="line">
+            <a:avLst/>
+          </a:prstGeom>
+          <a:noFill/>
+          <a:ln w="19050">
+            <a:solidFill>
+              <a:schemeClr val="tx1"/>
+            </a:solidFill>
+            <a:round/>
+            <a:headEnd type="none" w="sm" len="sm"/>
+            <a:tailEnd type="arrow" w="med" len="med"/>
+          </a:ln>
+        </p:spPr>
+        <p:txBody>
+          <a:bodyPr/>
+          <a:lstStyle/>
+          <a:p>
+            <a:endParaRPr lang="en-US"/>
+          </a:p>
+        </p:txBody>
+      </p:sp>
       <p:graphicFrame>
         <p:nvGraphicFramePr>
           <p:cNvPr id="3" name="Table 4">
@@ -14686,7 +14574,7 @@
           <a:p>
             <a:r>
               <a:rPr lang="en-US" sz="3600" dirty="0"/>
-              <a:t>What if we insists on covering ALL paths?</a:t>
+              <a:t>What if we insist on covering ALL paths?</a:t>
             </a:r>
           </a:p>
         </p:txBody>
@@ -14722,7 +14610,7 @@
       </p:sp>
       <p:grpSp>
         <p:nvGrpSpPr>
-          <p:cNvPr id="16405" name="Group 57"/>
+          <p:cNvPr id="16407" name="Group 18"/>
           <p:cNvGrpSpPr>
             <a:grpSpLocks/>
           </p:cNvGrpSpPr>
@@ -14730,15 +14618,106 @@
         </p:nvGrpSpPr>
         <p:grpSpPr bwMode="auto">
           <a:xfrm>
-            <a:off x="1331640" y="1829653"/>
-            <a:ext cx="6081713" cy="1455738"/>
-            <a:chOff x="642910" y="1701798"/>
-            <a:chExt cx="6081745" cy="1455727"/>
+            <a:off x="1692001" y="2329709"/>
+            <a:ext cx="555622" cy="469904"/>
+            <a:chOff x="4288" y="1746"/>
+            <a:chExt cx="350" cy="296"/>
+          </a:xfrm>
+        </p:grpSpPr>
+        <p:sp>
+          <p:nvSpPr>
+            <p:cNvPr id="16450" name="Oval 5"/>
+            <p:cNvSpPr>
+              <a:spLocks noChangeArrowheads="1"/>
+            </p:cNvSpPr>
+            <p:nvPr/>
+          </p:nvSpPr>
+          <p:spPr bwMode="auto">
+            <a:xfrm>
+              <a:off x="4288" y="1746"/>
+              <a:ext cx="350" cy="296"/>
+            </a:xfrm>
+            <a:prstGeom prst="ellipse">
+              <a:avLst/>
+            </a:prstGeom>
+            <a:solidFill>
+              <a:srgbClr val="0066FF"/>
+            </a:solidFill>
+            <a:ln w="19050">
+              <a:solidFill>
+                <a:schemeClr val="tx1"/>
+              </a:solidFill>
+              <a:round/>
+              <a:headEnd type="none" w="sm" len="sm"/>
+              <a:tailEnd type="none" w="sm" len="sm"/>
+            </a:ln>
+          </p:spPr>
+          <p:txBody>
+            <a:bodyPr wrap="none" anchor="ctr"/>
+            <a:lstStyle/>
+            <a:p>
+              <a:endParaRPr lang="nl-NL"/>
+            </a:p>
+          </p:txBody>
+        </p:sp>
+        <p:sp>
+          <p:nvSpPr>
+            <p:cNvPr id="16451" name="Text Box 6"/>
+            <p:cNvSpPr txBox="1">
+              <a:spLocks noChangeArrowheads="1"/>
+            </p:cNvSpPr>
+            <p:nvPr/>
+          </p:nvSpPr>
+          <p:spPr bwMode="auto">
+            <a:xfrm>
+              <a:off x="4365" y="1769"/>
+              <a:ext cx="196" cy="250"/>
+            </a:xfrm>
+            <a:prstGeom prst="rect">
+              <a:avLst/>
+            </a:prstGeom>
+            <a:noFill/>
+            <a:ln w="12700">
+              <a:noFill/>
+              <a:miter lim="800000"/>
+              <a:headEnd type="none" w="sm" len="sm"/>
+              <a:tailEnd type="none" w="sm" len="sm"/>
+            </a:ln>
+          </p:spPr>
+          <p:txBody>
+            <a:bodyPr wrap="none">
+              <a:spAutoFit/>
+            </a:bodyPr>
+            <a:lstStyle/>
+            <a:p>
+              <a:pPr algn="r"/>
+              <a:r>
+                <a:rPr lang="en-US"/>
+                <a:t>0</a:t>
+              </a:r>
+            </a:p>
+          </p:txBody>
+        </p:sp>
+      </p:grpSp>
+      <p:grpSp>
+        <p:nvGrpSpPr>
+          <p:cNvPr id="16408" name="Group 31"/>
+          <p:cNvGrpSpPr>
+            <a:grpSpLocks/>
+          </p:cNvGrpSpPr>
+          <p:nvPr/>
+        </p:nvGrpSpPr>
+        <p:grpSpPr bwMode="auto">
+          <a:xfrm>
+            <a:off x="2525434" y="1842343"/>
+            <a:ext cx="603247" cy="1441461"/>
+            <a:chOff x="1346" y="2965"/>
+            <a:chExt cx="380" cy="908"/>
           </a:xfrm>
         </p:grpSpPr>
         <p:grpSp>
           <p:nvGrpSpPr>
-            <p:cNvPr id="16407" name="Group 18"/>
+            <p:cNvPr id="16444" name="Group 19"/>
             <p:cNvGrpSpPr>
               <a:grpSpLocks/>
             </p:cNvGrpSpPr>
@@ -14746,15 +14725,15 @@
           </p:nvGrpSpPr>
           <p:grpSpPr bwMode="auto">
             <a:xfrm>
-              <a:off x="1003273" y="2201850"/>
-              <a:ext cx="555625" cy="469900"/>
-              <a:chOff x="4288" y="1746"/>
+              <a:off x="1346" y="3577"/>
+              <a:ext cx="350" cy="296"/>
+              <a:chOff x="4738" y="2684"/>
               <a:chExt cx="350" cy="296"/>
             </a:xfrm>
           </p:grpSpPr>
           <p:sp>
             <p:nvSpPr>
-              <p:cNvPr id="16450" name="Oval 5"/>
+              <p:cNvPr id="16448" name="Oval 7"/>
               <p:cNvSpPr>
                 <a:spLocks noChangeArrowheads="1"/>
               </p:cNvSpPr>
@@ -14762,7 +14741,7 @@
             </p:nvSpPr>
             <p:spPr bwMode="auto">
               <a:xfrm>
-                <a:off x="4288" y="1746"/>
+                <a:off x="4738" y="2684"/>
                 <a:ext cx="350" cy="296"/>
               </a:xfrm>
               <a:prstGeom prst="ellipse">
@@ -14790,7 +14769,7 @@
           </p:sp>
           <p:sp>
             <p:nvSpPr>
-              <p:cNvPr id="16451" name="Text Box 6"/>
+              <p:cNvPr id="16449" name="Text Box 8"/>
               <p:cNvSpPr txBox="1">
                 <a:spLocks noChangeArrowheads="1"/>
               </p:cNvSpPr>
@@ -14798,296 +14777,8 @@
             </p:nvSpPr>
             <p:spPr bwMode="auto">
               <a:xfrm>
-                <a:off x="4365" y="1769"/>
+                <a:off x="4815" y="2707"/>
                 <a:ext cx="196" cy="250"/>
-              </a:xfrm>
-              <a:prstGeom prst="rect">
-                <a:avLst/>
-              </a:prstGeom>
-              <a:noFill/>
-              <a:ln w="12700">
-                <a:noFill/>
-                <a:miter lim="800000"/>
-                <a:headEnd type="none" w="sm" len="sm"/>
-                <a:tailEnd type="none" w="sm" len="sm"/>
-              </a:ln>
-            </p:spPr>
-            <p:txBody>
-              <a:bodyPr wrap="none">
-                <a:spAutoFit/>
-              </a:bodyPr>
-              <a:lstStyle/>
-              <a:p>
-                <a:pPr algn="r"/>
-                <a:r>
-                  <a:rPr lang="en-US"/>
-                  <a:t>0</a:t>
-                </a:r>
-              </a:p>
-            </p:txBody>
-          </p:sp>
-        </p:grpSp>
-        <p:grpSp>
-          <p:nvGrpSpPr>
-            <p:cNvPr id="16408" name="Group 31"/>
-            <p:cNvGrpSpPr>
-              <a:grpSpLocks/>
-            </p:cNvGrpSpPr>
-            <p:nvPr/>
-          </p:nvGrpSpPr>
-          <p:grpSpPr bwMode="auto">
-            <a:xfrm>
-              <a:off x="1836710" y="1714488"/>
-              <a:ext cx="603250" cy="1441450"/>
-              <a:chOff x="1346" y="2965"/>
-              <a:chExt cx="380" cy="908"/>
-            </a:xfrm>
-          </p:grpSpPr>
-          <p:grpSp>
-            <p:nvGrpSpPr>
-              <p:cNvPr id="16444" name="Group 19"/>
-              <p:cNvGrpSpPr>
-                <a:grpSpLocks/>
-              </p:cNvGrpSpPr>
-              <p:nvPr/>
-            </p:nvGrpSpPr>
-            <p:grpSpPr bwMode="auto">
-              <a:xfrm>
-                <a:off x="1346" y="3577"/>
-                <a:ext cx="350" cy="296"/>
-                <a:chOff x="4738" y="2684"/>
-                <a:chExt cx="350" cy="296"/>
-              </a:xfrm>
-            </p:grpSpPr>
-            <p:sp>
-              <p:nvSpPr>
-                <p:cNvPr id="16448" name="Oval 7"/>
-                <p:cNvSpPr>
-                  <a:spLocks noChangeArrowheads="1"/>
-                </p:cNvSpPr>
-                <p:nvPr/>
-              </p:nvSpPr>
-              <p:spPr bwMode="auto">
-                <a:xfrm>
-                  <a:off x="4738" y="2684"/>
-                  <a:ext cx="350" cy="296"/>
-                </a:xfrm>
-                <a:prstGeom prst="ellipse">
-                  <a:avLst/>
-                </a:prstGeom>
-                <a:solidFill>
-                  <a:srgbClr val="0066FF"/>
-                </a:solidFill>
-                <a:ln w="19050">
-                  <a:solidFill>
-                    <a:schemeClr val="tx1"/>
-                  </a:solidFill>
-                  <a:round/>
-                  <a:headEnd type="none" w="sm" len="sm"/>
-                  <a:tailEnd type="none" w="sm" len="sm"/>
-                </a:ln>
-              </p:spPr>
-              <p:txBody>
-                <a:bodyPr wrap="none" anchor="ctr"/>
-                <a:lstStyle/>
-                <a:p>
-                  <a:endParaRPr lang="nl-NL"/>
-                </a:p>
-              </p:txBody>
-            </p:sp>
-            <p:sp>
-              <p:nvSpPr>
-                <p:cNvPr id="16449" name="Text Box 8"/>
-                <p:cNvSpPr txBox="1">
-                  <a:spLocks noChangeArrowheads="1"/>
-                </p:cNvSpPr>
-                <p:nvPr/>
-              </p:nvSpPr>
-              <p:spPr bwMode="auto">
-                <a:xfrm>
-                  <a:off x="4815" y="2707"/>
-                  <a:ext cx="196" cy="250"/>
-                </a:xfrm>
-                <a:prstGeom prst="rect">
-                  <a:avLst/>
-                </a:prstGeom>
-                <a:noFill/>
-                <a:ln w="12700">
-                  <a:noFill/>
-                  <a:miter lim="800000"/>
-                  <a:headEnd type="none" w="sm" len="sm"/>
-                  <a:tailEnd type="none" w="sm" len="sm"/>
-                </a:ln>
-              </p:spPr>
-              <p:txBody>
-                <a:bodyPr wrap="none">
-                  <a:spAutoFit/>
-                </a:bodyPr>
-                <a:lstStyle/>
-                <a:p>
-                  <a:r>
-                    <a:rPr lang="en-US"/>
-                    <a:t>2</a:t>
-                  </a:r>
-                </a:p>
-              </p:txBody>
-            </p:sp>
-          </p:grpSp>
-          <p:grpSp>
-            <p:nvGrpSpPr>
-              <p:cNvPr id="16445" name="Group 20"/>
-              <p:cNvGrpSpPr>
-                <a:grpSpLocks/>
-              </p:cNvGrpSpPr>
-              <p:nvPr/>
-            </p:nvGrpSpPr>
-            <p:grpSpPr bwMode="auto">
-              <a:xfrm>
-                <a:off x="1376" y="2965"/>
-                <a:ext cx="350" cy="296"/>
-                <a:chOff x="3838" y="2684"/>
-                <a:chExt cx="350" cy="296"/>
-              </a:xfrm>
-            </p:grpSpPr>
-            <p:sp>
-              <p:nvSpPr>
-                <p:cNvPr id="16446" name="Oval 9"/>
-                <p:cNvSpPr>
-                  <a:spLocks noChangeArrowheads="1"/>
-                </p:cNvSpPr>
-                <p:nvPr/>
-              </p:nvSpPr>
-              <p:spPr bwMode="auto">
-                <a:xfrm>
-                  <a:off x="3838" y="2684"/>
-                  <a:ext cx="350" cy="296"/>
-                </a:xfrm>
-                <a:prstGeom prst="ellipse">
-                  <a:avLst/>
-                </a:prstGeom>
-                <a:solidFill>
-                  <a:srgbClr val="0066FF"/>
-                </a:solidFill>
-                <a:ln w="19050">
-                  <a:solidFill>
-                    <a:schemeClr val="tx1"/>
-                  </a:solidFill>
-                  <a:round/>
-                  <a:headEnd type="none" w="sm" len="sm"/>
-                  <a:tailEnd type="none" w="sm" len="sm"/>
-                </a:ln>
-              </p:spPr>
-              <p:txBody>
-                <a:bodyPr wrap="none" anchor="ctr"/>
-                <a:lstStyle/>
-                <a:p>
-                  <a:endParaRPr lang="nl-NL"/>
-                </a:p>
-              </p:txBody>
-            </p:sp>
-            <p:sp>
-              <p:nvSpPr>
-                <p:cNvPr id="16447" name="Text Box 10"/>
-                <p:cNvSpPr txBox="1">
-                  <a:spLocks noChangeArrowheads="1"/>
-                </p:cNvSpPr>
-                <p:nvPr/>
-              </p:nvSpPr>
-              <p:spPr bwMode="auto">
-                <a:xfrm>
-                  <a:off x="3915" y="2707"/>
-                  <a:ext cx="196" cy="250"/>
-                </a:xfrm>
-                <a:prstGeom prst="rect">
-                  <a:avLst/>
-                </a:prstGeom>
-                <a:noFill/>
-                <a:ln w="12700">
-                  <a:noFill/>
-                  <a:miter lim="800000"/>
-                  <a:headEnd type="none" w="sm" len="sm"/>
-                  <a:tailEnd type="none" w="sm" len="sm"/>
-                </a:ln>
-              </p:spPr>
-              <p:txBody>
-                <a:bodyPr wrap="none">
-                  <a:spAutoFit/>
-                </a:bodyPr>
-                <a:lstStyle/>
-                <a:p>
-                  <a:r>
-                    <a:rPr lang="en-US" dirty="0"/>
-                    <a:t>1</a:t>
-                  </a:r>
-                </a:p>
-              </p:txBody>
-            </p:sp>
-          </p:grpSp>
-        </p:grpSp>
-        <p:grpSp>
-          <p:nvGrpSpPr>
-            <p:cNvPr id="16409" name="Group 38"/>
-            <p:cNvGrpSpPr>
-              <a:grpSpLocks/>
-            </p:cNvGrpSpPr>
-            <p:nvPr/>
-          </p:nvGrpSpPr>
-          <p:grpSpPr bwMode="auto">
-            <a:xfrm>
-              <a:off x="4433860" y="2201850"/>
-              <a:ext cx="555625" cy="469900"/>
-              <a:chOff x="4433860" y="2201850"/>
-              <a:chExt cx="555625" cy="469900"/>
-            </a:xfrm>
-          </p:grpSpPr>
-          <p:sp>
-            <p:nvSpPr>
-              <p:cNvPr id="16442" name="Oval 11"/>
-              <p:cNvSpPr>
-                <a:spLocks noChangeArrowheads="1"/>
-              </p:cNvSpPr>
-              <p:nvPr/>
-            </p:nvSpPr>
-            <p:spPr bwMode="auto">
-              <a:xfrm>
-                <a:off x="4433860" y="2201850"/>
-                <a:ext cx="555625" cy="469900"/>
-              </a:xfrm>
-              <a:prstGeom prst="ellipse">
-                <a:avLst/>
-              </a:prstGeom>
-              <a:solidFill>
-                <a:srgbClr val="0066FF"/>
-              </a:solidFill>
-              <a:ln w="9525">
-                <a:solidFill>
-                  <a:schemeClr val="tx1"/>
-                </a:solidFill>
-                <a:round/>
-                <a:headEnd type="none" w="sm" len="sm"/>
-                <a:tailEnd type="none" w="sm" len="sm"/>
-              </a:ln>
-            </p:spPr>
-            <p:txBody>
-              <a:bodyPr wrap="none" anchor="ctr"/>
-              <a:lstStyle/>
-              <a:p>
-                <a:endParaRPr lang="nl-NL"/>
-              </a:p>
-            </p:txBody>
-          </p:sp>
-          <p:sp>
-            <p:nvSpPr>
-              <p:cNvPr id="16443" name="Text Box 12"/>
-              <p:cNvSpPr txBox="1">
-                <a:spLocks noChangeArrowheads="1"/>
-              </p:cNvSpPr>
-              <p:nvPr/>
-            </p:nvSpPr>
-            <p:spPr bwMode="auto">
-              <a:xfrm>
-                <a:off x="4556098" y="2238363"/>
-                <a:ext cx="311150" cy="396875"/>
               </a:xfrm>
               <a:prstGeom prst="rect">
                 <a:avLst/>
@@ -15108,83 +14799,15 @@
               <a:p>
                 <a:r>
                   <a:rPr lang="en-US"/>
-                  <a:t>6</a:t>
+                  <a:t>2</a:t>
                 </a:r>
               </a:p>
             </p:txBody>
           </p:sp>
         </p:grpSp>
-        <p:sp>
-          <p:nvSpPr>
-            <p:cNvPr id="16410" name="Line 13"/>
-            <p:cNvSpPr>
-              <a:spLocks noChangeShapeType="1"/>
-            </p:cNvSpPr>
-            <p:nvPr/>
-          </p:nvSpPr>
-          <p:spPr bwMode="auto">
-            <a:xfrm flipV="1">
-              <a:off x="1550960" y="2074850"/>
-              <a:ext cx="396875" cy="265112"/>
-            </a:xfrm>
-            <a:prstGeom prst="line">
-              <a:avLst/>
-            </a:prstGeom>
-            <a:noFill/>
-            <a:ln w="19050">
-              <a:solidFill>
-                <a:schemeClr val="tx1"/>
-              </a:solidFill>
-              <a:round/>
-              <a:headEnd type="none" w="sm" len="sm"/>
-              <a:tailEnd type="arrow" w="med" len="med"/>
-            </a:ln>
-          </p:spPr>
-          <p:txBody>
-            <a:bodyPr/>
-            <a:lstStyle/>
-            <a:p>
-              <a:endParaRPr lang="en-US"/>
-            </a:p>
-          </p:txBody>
-        </p:sp>
-        <p:sp>
-          <p:nvSpPr>
-            <p:cNvPr id="16411" name="Line 17"/>
-            <p:cNvSpPr>
-              <a:spLocks noChangeShapeType="1"/>
-            </p:cNvSpPr>
-            <p:nvPr/>
-          </p:nvSpPr>
-          <p:spPr bwMode="auto">
-            <a:xfrm>
-              <a:off x="642910" y="2436800"/>
-              <a:ext cx="354013" cy="0"/>
-            </a:xfrm>
-            <a:prstGeom prst="line">
-              <a:avLst/>
-            </a:prstGeom>
-            <a:noFill/>
-            <a:ln w="19050">
-              <a:solidFill>
-                <a:schemeClr val="tx1"/>
-              </a:solidFill>
-              <a:round/>
-              <a:headEnd type="none" w="sm" len="sm"/>
-              <a:tailEnd type="arrow" w="med" len="med"/>
-            </a:ln>
-          </p:spPr>
-          <p:txBody>
-            <a:bodyPr/>
-            <a:lstStyle/>
-            <a:p>
-              <a:endParaRPr lang="en-US"/>
-            </a:p>
-          </p:txBody>
-        </p:sp>
         <p:grpSp>
           <p:nvGrpSpPr>
-            <p:cNvPr id="16412" name="Group 22"/>
+            <p:cNvPr id="16445" name="Group 20"/>
             <p:cNvGrpSpPr>
               <a:grpSpLocks/>
             </p:cNvGrpSpPr>
@@ -15192,15 +14815,15 @@
           </p:nvGrpSpPr>
           <p:grpSpPr bwMode="auto">
             <a:xfrm>
-              <a:off x="2717773" y="2201850"/>
-              <a:ext cx="555625" cy="469900"/>
-              <a:chOff x="4288" y="1746"/>
+              <a:off x="1376" y="2965"/>
+              <a:ext cx="350" cy="296"/>
+              <a:chOff x="3838" y="2684"/>
               <a:chExt cx="350" cy="296"/>
             </a:xfrm>
           </p:grpSpPr>
           <p:sp>
             <p:nvSpPr>
-              <p:cNvPr id="16440" name="Oval 23"/>
+              <p:cNvPr id="16446" name="Oval 9"/>
               <p:cNvSpPr>
                 <a:spLocks noChangeArrowheads="1"/>
               </p:cNvSpPr>
@@ -15208,7 +14831,7 @@
             </p:nvSpPr>
             <p:spPr bwMode="auto">
               <a:xfrm>
-                <a:off x="4288" y="1746"/>
+                <a:off x="3838" y="2684"/>
                 <a:ext cx="350" cy="296"/>
               </a:xfrm>
               <a:prstGeom prst="ellipse">
@@ -15236,7 +14859,7 @@
           </p:sp>
           <p:sp>
             <p:nvSpPr>
-              <p:cNvPr id="16441" name="Text Box 24"/>
+              <p:cNvPr id="16447" name="Text Box 10"/>
               <p:cNvSpPr txBox="1">
                 <a:spLocks noChangeArrowheads="1"/>
               </p:cNvSpPr>
@@ -15244,7 +14867,7 @@
             </p:nvSpPr>
             <p:spPr bwMode="auto">
               <a:xfrm>
-                <a:off x="4365" y="1769"/>
+                <a:off x="3915" y="2707"/>
                 <a:ext cx="196" cy="250"/>
               </a:xfrm>
               <a:prstGeom prst="rect">
@@ -15264,453 +14887,34 @@
               </a:bodyPr>
               <a:lstStyle/>
               <a:p>
-                <a:pPr algn="r"/>
                 <a:r>
-                  <a:rPr lang="en-US"/>
-                  <a:t>3</a:t>
+                  <a:rPr lang="en-US" dirty="0"/>
+                  <a:t>1</a:t>
                 </a:r>
               </a:p>
             </p:txBody>
           </p:sp>
         </p:grpSp>
-        <p:grpSp>
-          <p:nvGrpSpPr>
-            <p:cNvPr id="16413" name="Group 32"/>
-            <p:cNvGrpSpPr>
-              <a:grpSpLocks/>
-            </p:cNvGrpSpPr>
-            <p:nvPr/>
-          </p:nvGrpSpPr>
-          <p:grpSpPr bwMode="auto">
-            <a:xfrm>
-              <a:off x="3551210" y="1716075"/>
-              <a:ext cx="603250" cy="1441450"/>
-              <a:chOff x="2450" y="2968"/>
-              <a:chExt cx="380" cy="908"/>
-            </a:xfrm>
-          </p:grpSpPr>
-          <p:grpSp>
-            <p:nvGrpSpPr>
-              <p:cNvPr id="16434" name="Group 25"/>
-              <p:cNvGrpSpPr>
-                <a:grpSpLocks/>
-              </p:cNvGrpSpPr>
-              <p:nvPr/>
-            </p:nvGrpSpPr>
-            <p:grpSpPr bwMode="auto">
-              <a:xfrm>
-                <a:off x="2450" y="3580"/>
-                <a:ext cx="350" cy="296"/>
-                <a:chOff x="4738" y="2684"/>
-                <a:chExt cx="350" cy="296"/>
-              </a:xfrm>
-            </p:grpSpPr>
-            <p:sp>
-              <p:nvSpPr>
-                <p:cNvPr id="16438" name="Oval 26"/>
-                <p:cNvSpPr>
-                  <a:spLocks noChangeArrowheads="1"/>
-                </p:cNvSpPr>
-                <p:nvPr/>
-              </p:nvSpPr>
-              <p:spPr bwMode="auto">
-                <a:xfrm>
-                  <a:off x="4738" y="2684"/>
-                  <a:ext cx="350" cy="296"/>
-                </a:xfrm>
-                <a:prstGeom prst="ellipse">
-                  <a:avLst/>
-                </a:prstGeom>
-                <a:solidFill>
-                  <a:srgbClr val="0066FF"/>
-                </a:solidFill>
-                <a:ln w="19050">
-                  <a:solidFill>
-                    <a:schemeClr val="tx1"/>
-                  </a:solidFill>
-                  <a:round/>
-                  <a:headEnd type="none" w="sm" len="sm"/>
-                  <a:tailEnd type="none" w="sm" len="sm"/>
-                </a:ln>
-              </p:spPr>
-              <p:txBody>
-                <a:bodyPr wrap="none" anchor="ctr"/>
-                <a:lstStyle/>
-                <a:p>
-                  <a:endParaRPr lang="nl-NL"/>
-                </a:p>
-              </p:txBody>
-            </p:sp>
-            <p:sp>
-              <p:nvSpPr>
-                <p:cNvPr id="16439" name="Text Box 27"/>
-                <p:cNvSpPr txBox="1">
-                  <a:spLocks noChangeArrowheads="1"/>
-                </p:cNvSpPr>
-                <p:nvPr/>
-              </p:nvSpPr>
-              <p:spPr bwMode="auto">
-                <a:xfrm>
-                  <a:off x="4815" y="2707"/>
-                  <a:ext cx="196" cy="250"/>
-                </a:xfrm>
-                <a:prstGeom prst="rect">
-                  <a:avLst/>
-                </a:prstGeom>
-                <a:noFill/>
-                <a:ln w="12700">
-                  <a:noFill/>
-                  <a:miter lim="800000"/>
-                  <a:headEnd type="none" w="sm" len="sm"/>
-                  <a:tailEnd type="none" w="sm" len="sm"/>
-                </a:ln>
-              </p:spPr>
-              <p:txBody>
-                <a:bodyPr wrap="none">
-                  <a:spAutoFit/>
-                </a:bodyPr>
-                <a:lstStyle/>
-                <a:p>
-                  <a:r>
-                    <a:rPr lang="en-US"/>
-                    <a:t>5</a:t>
-                  </a:r>
-                </a:p>
-              </p:txBody>
-            </p:sp>
-          </p:grpSp>
-          <p:grpSp>
-            <p:nvGrpSpPr>
-              <p:cNvPr id="16435" name="Group 28"/>
-              <p:cNvGrpSpPr>
-                <a:grpSpLocks/>
-              </p:cNvGrpSpPr>
-              <p:nvPr/>
-            </p:nvGrpSpPr>
-            <p:grpSpPr bwMode="auto">
-              <a:xfrm>
-                <a:off x="2480" y="2968"/>
-                <a:ext cx="350" cy="296"/>
-                <a:chOff x="3838" y="2684"/>
-                <a:chExt cx="350" cy="296"/>
-              </a:xfrm>
-            </p:grpSpPr>
-            <p:sp>
-              <p:nvSpPr>
-                <p:cNvPr id="16436" name="Oval 29"/>
-                <p:cNvSpPr>
-                  <a:spLocks noChangeArrowheads="1"/>
-                </p:cNvSpPr>
-                <p:nvPr/>
-              </p:nvSpPr>
-              <p:spPr bwMode="auto">
-                <a:xfrm>
-                  <a:off x="3838" y="2684"/>
-                  <a:ext cx="350" cy="296"/>
-                </a:xfrm>
-                <a:prstGeom prst="ellipse">
-                  <a:avLst/>
-                </a:prstGeom>
-                <a:solidFill>
-                  <a:srgbClr val="0066FF"/>
-                </a:solidFill>
-                <a:ln w="19050">
-                  <a:solidFill>
-                    <a:schemeClr val="tx1"/>
-                  </a:solidFill>
-                  <a:round/>
-                  <a:headEnd type="none" w="sm" len="sm"/>
-                  <a:tailEnd type="none" w="sm" len="sm"/>
-                </a:ln>
-              </p:spPr>
-              <p:txBody>
-                <a:bodyPr wrap="none" anchor="ctr"/>
-                <a:lstStyle/>
-                <a:p>
-                  <a:endParaRPr lang="nl-NL"/>
-                </a:p>
-              </p:txBody>
-            </p:sp>
-            <p:sp>
-              <p:nvSpPr>
-                <p:cNvPr id="16437" name="Text Box 30"/>
-                <p:cNvSpPr txBox="1">
-                  <a:spLocks noChangeArrowheads="1"/>
-                </p:cNvSpPr>
-                <p:nvPr/>
-              </p:nvSpPr>
-              <p:spPr bwMode="auto">
-                <a:xfrm>
-                  <a:off x="3915" y="2707"/>
-                  <a:ext cx="196" cy="250"/>
-                </a:xfrm>
-                <a:prstGeom prst="rect">
-                  <a:avLst/>
-                </a:prstGeom>
-                <a:noFill/>
-                <a:ln w="12700">
-                  <a:noFill/>
-                  <a:miter lim="800000"/>
-                  <a:headEnd type="none" w="sm" len="sm"/>
-                  <a:tailEnd type="none" w="sm" len="sm"/>
-                </a:ln>
-              </p:spPr>
-              <p:txBody>
-                <a:bodyPr wrap="none">
-                  <a:spAutoFit/>
-                </a:bodyPr>
-                <a:lstStyle/>
-                <a:p>
-                  <a:r>
-                    <a:rPr lang="en-US"/>
-                    <a:t>4</a:t>
-                  </a:r>
-                </a:p>
-              </p:txBody>
-            </p:sp>
-          </p:grpSp>
-        </p:grpSp>
+      </p:grpSp>
+      <p:grpSp>
+        <p:nvGrpSpPr>
+          <p:cNvPr id="16409" name="Group 38"/>
+          <p:cNvGrpSpPr>
+            <a:grpSpLocks/>
+          </p:cNvGrpSpPr>
+          <p:nvPr/>
+        </p:nvGrpSpPr>
+        <p:grpSpPr bwMode="auto">
+          <a:xfrm>
+            <a:off x="5122570" y="2329709"/>
+            <a:ext cx="555622" cy="469904"/>
+            <a:chOff x="4433860" y="2201850"/>
+            <a:chExt cx="555625" cy="469900"/>
+          </a:xfrm>
+        </p:grpSpPr>
         <p:sp>
           <p:nvSpPr>
-            <p:cNvPr id="16414" name="Line 33"/>
-            <p:cNvSpPr>
-              <a:spLocks noChangeShapeType="1"/>
-            </p:cNvSpPr>
-            <p:nvPr/>
-          </p:nvSpPr>
-          <p:spPr bwMode="auto">
-            <a:xfrm flipV="1">
-              <a:off x="4097310" y="2582850"/>
-              <a:ext cx="396875" cy="265112"/>
-            </a:xfrm>
-            <a:prstGeom prst="line">
-              <a:avLst/>
-            </a:prstGeom>
-            <a:noFill/>
-            <a:ln w="19050">
-              <a:solidFill>
-                <a:schemeClr val="tx1"/>
-              </a:solidFill>
-              <a:round/>
-              <a:headEnd type="none" w="sm" len="sm"/>
-              <a:tailEnd type="arrow" w="med" len="med"/>
-            </a:ln>
-          </p:spPr>
-          <p:txBody>
-            <a:bodyPr/>
-            <a:lstStyle/>
-            <a:p>
-              <a:endParaRPr lang="en-US"/>
-            </a:p>
-          </p:txBody>
-        </p:sp>
-        <p:sp>
-          <p:nvSpPr>
-            <p:cNvPr id="16415" name="Line 34"/>
-            <p:cNvSpPr>
-              <a:spLocks noChangeShapeType="1"/>
-            </p:cNvSpPr>
-            <p:nvPr/>
-          </p:nvSpPr>
-          <p:spPr bwMode="auto">
-            <a:xfrm flipV="1">
-              <a:off x="2376460" y="2582850"/>
-              <a:ext cx="396875" cy="265112"/>
-            </a:xfrm>
-            <a:prstGeom prst="line">
-              <a:avLst/>
-            </a:prstGeom>
-            <a:noFill/>
-            <a:ln w="19050">
-              <a:solidFill>
-                <a:schemeClr val="tx1"/>
-              </a:solidFill>
-              <a:round/>
-              <a:headEnd type="none" w="sm" len="sm"/>
-              <a:tailEnd type="arrow" w="med" len="med"/>
-            </a:ln>
-          </p:spPr>
-          <p:txBody>
-            <a:bodyPr/>
-            <a:lstStyle/>
-            <a:p>
-              <a:endParaRPr lang="en-US"/>
-            </a:p>
-          </p:txBody>
-        </p:sp>
-        <p:sp>
-          <p:nvSpPr>
-            <p:cNvPr id="16416" name="Line 35"/>
-            <p:cNvSpPr>
-              <a:spLocks noChangeShapeType="1"/>
-            </p:cNvSpPr>
-            <p:nvPr/>
-          </p:nvSpPr>
-          <p:spPr bwMode="auto">
-            <a:xfrm flipV="1">
-              <a:off x="3252760" y="2074850"/>
-              <a:ext cx="396875" cy="265112"/>
-            </a:xfrm>
-            <a:prstGeom prst="line">
-              <a:avLst/>
-            </a:prstGeom>
-            <a:noFill/>
-            <a:ln w="19050">
-              <a:solidFill>
-                <a:schemeClr val="tx1"/>
-              </a:solidFill>
-              <a:round/>
-              <a:headEnd type="none" w="sm" len="sm"/>
-              <a:tailEnd type="arrow" w="med" len="med"/>
-            </a:ln>
-          </p:spPr>
-          <p:txBody>
-            <a:bodyPr/>
-            <a:lstStyle/>
-            <a:p>
-              <a:endParaRPr lang="en-US"/>
-            </a:p>
-          </p:txBody>
-        </p:sp>
-        <p:sp>
-          <p:nvSpPr>
-            <p:cNvPr id="16417" name="Line 36"/>
-            <p:cNvSpPr>
-              <a:spLocks noChangeShapeType="1"/>
-            </p:cNvSpPr>
-            <p:nvPr/>
-          </p:nvSpPr>
-          <p:spPr bwMode="auto">
-            <a:xfrm>
-              <a:off x="1519210" y="2589200"/>
-              <a:ext cx="346075" cy="249237"/>
-            </a:xfrm>
-            <a:prstGeom prst="line">
-              <a:avLst/>
-            </a:prstGeom>
-            <a:noFill/>
-            <a:ln w="19050">
-              <a:solidFill>
-                <a:schemeClr val="tx1"/>
-              </a:solidFill>
-              <a:round/>
-              <a:headEnd type="none" w="sm" len="sm"/>
-              <a:tailEnd type="arrow" w="med" len="med"/>
-            </a:ln>
-          </p:spPr>
-          <p:txBody>
-            <a:bodyPr/>
-            <a:lstStyle/>
-            <a:p>
-              <a:endParaRPr lang="en-US"/>
-            </a:p>
-          </p:txBody>
-        </p:sp>
-        <p:sp>
-          <p:nvSpPr>
-            <p:cNvPr id="16418" name="Line 37"/>
-            <p:cNvSpPr>
-              <a:spLocks noChangeShapeType="1"/>
-            </p:cNvSpPr>
-            <p:nvPr/>
-          </p:nvSpPr>
-          <p:spPr bwMode="auto">
-            <a:xfrm>
-              <a:off x="2395510" y="2082788"/>
-              <a:ext cx="346075" cy="249237"/>
-            </a:xfrm>
-            <a:prstGeom prst="line">
-              <a:avLst/>
-            </a:prstGeom>
-            <a:noFill/>
-            <a:ln w="19050">
-              <a:solidFill>
-                <a:schemeClr val="tx1"/>
-              </a:solidFill>
-              <a:round/>
-              <a:headEnd type="none" w="sm" len="sm"/>
-              <a:tailEnd type="arrow" w="med" len="med"/>
-            </a:ln>
-          </p:spPr>
-          <p:txBody>
-            <a:bodyPr/>
-            <a:lstStyle/>
-            <a:p>
-              <a:endParaRPr lang="en-US"/>
-            </a:p>
-          </p:txBody>
-        </p:sp>
-        <p:sp>
-          <p:nvSpPr>
-            <p:cNvPr id="16419" name="Line 38"/>
-            <p:cNvSpPr>
-              <a:spLocks noChangeShapeType="1"/>
-            </p:cNvSpPr>
-            <p:nvPr/>
-          </p:nvSpPr>
-          <p:spPr bwMode="auto">
-            <a:xfrm>
-              <a:off x="3214660" y="2590788"/>
-              <a:ext cx="346075" cy="249237"/>
-            </a:xfrm>
-            <a:prstGeom prst="line">
-              <a:avLst/>
-            </a:prstGeom>
-            <a:noFill/>
-            <a:ln w="19050">
-              <a:solidFill>
-                <a:schemeClr val="tx1"/>
-              </a:solidFill>
-              <a:round/>
-              <a:headEnd type="none" w="sm" len="sm"/>
-              <a:tailEnd type="arrow" w="med" len="med"/>
-            </a:ln>
-          </p:spPr>
-          <p:txBody>
-            <a:bodyPr/>
-            <a:lstStyle/>
-            <a:p>
-              <a:endParaRPr lang="en-US"/>
-            </a:p>
-          </p:txBody>
-        </p:sp>
-        <p:sp>
-          <p:nvSpPr>
-            <p:cNvPr id="16420" name="Line 39"/>
-            <p:cNvSpPr>
-              <a:spLocks noChangeShapeType="1"/>
-            </p:cNvSpPr>
-            <p:nvPr/>
-          </p:nvSpPr>
-          <p:spPr bwMode="auto">
-            <a:xfrm>
-              <a:off x="4141760" y="2081200"/>
-              <a:ext cx="346075" cy="249237"/>
-            </a:xfrm>
-            <a:prstGeom prst="line">
-              <a:avLst/>
-            </a:prstGeom>
-            <a:noFill/>
-            <a:ln w="19050">
-              <a:solidFill>
-                <a:schemeClr val="tx1"/>
-              </a:solidFill>
-              <a:round/>
-              <a:headEnd type="none" w="sm" len="sm"/>
-              <a:tailEnd type="arrow" w="med" len="med"/>
-            </a:ln>
-          </p:spPr>
-          <p:txBody>
-            <a:bodyPr/>
-            <a:lstStyle/>
-            <a:p>
-              <a:endParaRPr lang="en-US"/>
-            </a:p>
-          </p:txBody>
-        </p:sp>
-        <p:sp>
-          <p:nvSpPr>
-            <p:cNvPr id="16421" name="Oval 11"/>
+            <p:cNvPr id="16442" name="Oval 11"/>
             <p:cNvSpPr>
               <a:spLocks noChangeArrowheads="1"/>
             </p:cNvSpPr>
@@ -15718,7 +14922,7 @@
           </p:nvSpPr>
           <p:spPr bwMode="auto">
             <a:xfrm>
-              <a:off x="6169030" y="2187573"/>
+              <a:off x="4433860" y="2201850"/>
               <a:ext cx="555625" cy="469900"/>
             </a:xfrm>
             <a:prstGeom prst="ellipse">
@@ -15727,7 +14931,7 @@
             <a:solidFill>
               <a:srgbClr val="0066FF"/>
             </a:solidFill>
-            <a:ln w="28575">
+            <a:ln w="9525">
               <a:solidFill>
                 <a:schemeClr val="tx1"/>
               </a:solidFill>
@@ -15746,7 +14950,7 @@
         </p:sp>
         <p:sp>
           <p:nvSpPr>
-            <p:cNvPr id="16422" name="Text Box 12"/>
+            <p:cNvPr id="16443" name="Text Box 12"/>
             <p:cNvSpPr txBox="1">
               <a:spLocks noChangeArrowheads="1"/>
             </p:cNvSpPr>
@@ -15754,8 +14958,8 @@
           </p:nvSpPr>
           <p:spPr bwMode="auto">
             <a:xfrm>
-              <a:off x="6291268" y="2224086"/>
-              <a:ext cx="312906" cy="369332"/>
+              <a:off x="4556098" y="2238363"/>
+              <a:ext cx="311150" cy="396875"/>
             </a:xfrm>
             <a:prstGeom prst="rect">
               <a:avLst/>
@@ -15775,15 +14979,191 @@
             <a:lstStyle/>
             <a:p>
               <a:r>
-                <a:rPr lang="en-US"/>
-                <a:t>9</a:t>
+                <a:rPr lang="en-US" dirty="0"/>
+                <a:t>6</a:t>
               </a:r>
             </a:p>
           </p:txBody>
         </p:sp>
+      </p:grpSp>
+      <p:sp>
+        <p:nvSpPr>
+          <p:cNvPr id="16410" name="Line 13"/>
+          <p:cNvSpPr>
+            <a:spLocks noChangeShapeType="1"/>
+          </p:cNvSpPr>
+          <p:nvPr/>
+        </p:nvSpPr>
+        <p:spPr bwMode="auto">
+          <a:xfrm flipV="1">
+            <a:off x="2239685" y="2202708"/>
+            <a:ext cx="396873" cy="265114"/>
+          </a:xfrm>
+          <a:prstGeom prst="line">
+            <a:avLst/>
+          </a:prstGeom>
+          <a:noFill/>
+          <a:ln w="19050">
+            <a:solidFill>
+              <a:schemeClr val="tx1"/>
+            </a:solidFill>
+            <a:round/>
+            <a:headEnd type="none" w="sm" len="sm"/>
+            <a:tailEnd type="arrow" w="med" len="med"/>
+          </a:ln>
+        </p:spPr>
+        <p:txBody>
+          <a:bodyPr/>
+          <a:lstStyle/>
+          <a:p>
+            <a:endParaRPr lang="en-US"/>
+          </a:p>
+        </p:txBody>
+      </p:sp>
+      <p:sp>
+        <p:nvSpPr>
+          <p:cNvPr id="16411" name="Line 17"/>
+          <p:cNvSpPr>
+            <a:spLocks noChangeShapeType="1"/>
+          </p:cNvSpPr>
+          <p:nvPr/>
+        </p:nvSpPr>
+        <p:spPr bwMode="auto">
+          <a:xfrm>
+            <a:off x="1331640" y="2564661"/>
+            <a:ext cx="354011" cy="0"/>
+          </a:xfrm>
+          <a:prstGeom prst="line">
+            <a:avLst/>
+          </a:prstGeom>
+          <a:noFill/>
+          <a:ln w="19050">
+            <a:solidFill>
+              <a:schemeClr val="tx1"/>
+            </a:solidFill>
+            <a:round/>
+            <a:headEnd type="none" w="sm" len="sm"/>
+            <a:tailEnd type="arrow" w="med" len="med"/>
+          </a:ln>
+        </p:spPr>
+        <p:txBody>
+          <a:bodyPr/>
+          <a:lstStyle/>
+          <a:p>
+            <a:endParaRPr lang="en-US"/>
+          </a:p>
+        </p:txBody>
+      </p:sp>
+      <p:grpSp>
+        <p:nvGrpSpPr>
+          <p:cNvPr id="16412" name="Group 22"/>
+          <p:cNvGrpSpPr>
+            <a:grpSpLocks/>
+          </p:cNvGrpSpPr>
+          <p:nvPr/>
+        </p:nvGrpSpPr>
+        <p:grpSpPr bwMode="auto">
+          <a:xfrm>
+            <a:off x="3406492" y="2329709"/>
+            <a:ext cx="555622" cy="469904"/>
+            <a:chOff x="4288" y="1746"/>
+            <a:chExt cx="350" cy="296"/>
+          </a:xfrm>
+        </p:grpSpPr>
+        <p:sp>
+          <p:nvSpPr>
+            <p:cNvPr id="16440" name="Oval 23"/>
+            <p:cNvSpPr>
+              <a:spLocks noChangeArrowheads="1"/>
+            </p:cNvSpPr>
+            <p:nvPr/>
+          </p:nvSpPr>
+          <p:spPr bwMode="auto">
+            <a:xfrm>
+              <a:off x="4288" y="1746"/>
+              <a:ext cx="350" cy="296"/>
+            </a:xfrm>
+            <a:prstGeom prst="ellipse">
+              <a:avLst/>
+            </a:prstGeom>
+            <a:solidFill>
+              <a:srgbClr val="0066FF"/>
+            </a:solidFill>
+            <a:ln w="19050">
+              <a:solidFill>
+                <a:schemeClr val="tx1"/>
+              </a:solidFill>
+              <a:round/>
+              <a:headEnd type="none" w="sm" len="sm"/>
+              <a:tailEnd type="none" w="sm" len="sm"/>
+            </a:ln>
+          </p:spPr>
+          <p:txBody>
+            <a:bodyPr wrap="none" anchor="ctr"/>
+            <a:lstStyle/>
+            <a:p>
+              <a:endParaRPr lang="nl-NL"/>
+            </a:p>
+          </p:txBody>
+        </p:sp>
+        <p:sp>
+          <p:nvSpPr>
+            <p:cNvPr id="16441" name="Text Box 24"/>
+            <p:cNvSpPr txBox="1">
+              <a:spLocks noChangeArrowheads="1"/>
+            </p:cNvSpPr>
+            <p:nvPr/>
+          </p:nvSpPr>
+          <p:spPr bwMode="auto">
+            <a:xfrm>
+              <a:off x="4365" y="1769"/>
+              <a:ext cx="196" cy="250"/>
+            </a:xfrm>
+            <a:prstGeom prst="rect">
+              <a:avLst/>
+            </a:prstGeom>
+            <a:noFill/>
+            <a:ln w="12700">
+              <a:noFill/>
+              <a:miter lim="800000"/>
+              <a:headEnd type="none" w="sm" len="sm"/>
+              <a:tailEnd type="none" w="sm" len="sm"/>
+            </a:ln>
+          </p:spPr>
+          <p:txBody>
+            <a:bodyPr wrap="none">
+              <a:spAutoFit/>
+            </a:bodyPr>
+            <a:lstStyle/>
+            <a:p>
+              <a:pPr algn="r"/>
+              <a:r>
+                <a:rPr lang="en-US"/>
+                <a:t>3</a:t>
+              </a:r>
+            </a:p>
+          </p:txBody>
+        </p:sp>
+      </p:grpSp>
+      <p:grpSp>
+        <p:nvGrpSpPr>
+          <p:cNvPr id="16413" name="Group 32"/>
+          <p:cNvGrpSpPr>
+            <a:grpSpLocks/>
+          </p:cNvGrpSpPr>
+          <p:nvPr/>
+        </p:nvGrpSpPr>
+        <p:grpSpPr bwMode="auto">
+          <a:xfrm>
+            <a:off x="4239925" y="1843930"/>
+            <a:ext cx="603247" cy="1441461"/>
+            <a:chOff x="2450" y="2968"/>
+            <a:chExt cx="380" cy="908"/>
+          </a:xfrm>
+        </p:grpSpPr>
         <p:grpSp>
           <p:nvGrpSpPr>
-            <p:cNvPr id="16423" name="Group 32"/>
+            <p:cNvPr id="16434" name="Group 25"/>
             <p:cNvGrpSpPr>
               <a:grpSpLocks/>
             </p:cNvGrpSpPr>
@@ -15791,330 +15171,829 @@
           </p:nvGrpSpPr>
           <p:grpSpPr bwMode="auto">
             <a:xfrm>
-              <a:off x="5286380" y="1701798"/>
-              <a:ext cx="603250" cy="1441450"/>
-              <a:chOff x="2450" y="2968"/>
-              <a:chExt cx="380" cy="908"/>
+              <a:off x="2450" y="3580"/>
+              <a:ext cx="350" cy="296"/>
+              <a:chOff x="4738" y="2684"/>
+              <a:chExt cx="350" cy="296"/>
             </a:xfrm>
           </p:grpSpPr>
-          <p:grpSp>
-            <p:nvGrpSpPr>
-              <p:cNvPr id="16428" name="Group 25"/>
-              <p:cNvGrpSpPr>
-                <a:grpSpLocks/>
-              </p:cNvGrpSpPr>
+          <p:sp>
+            <p:nvSpPr>
+              <p:cNvPr id="16438" name="Oval 26"/>
+              <p:cNvSpPr>
+                <a:spLocks noChangeArrowheads="1"/>
+              </p:cNvSpPr>
               <p:nvPr/>
-            </p:nvGrpSpPr>
-            <p:grpSpPr bwMode="auto">
+            </p:nvSpPr>
+            <p:spPr bwMode="auto">
               <a:xfrm>
-                <a:off x="2450" y="3580"/>
+                <a:off x="4738" y="2684"/>
                 <a:ext cx="350" cy="296"/>
-                <a:chOff x="4738" y="2684"/>
-                <a:chExt cx="350" cy="296"/>
               </a:xfrm>
-            </p:grpSpPr>
-            <p:sp>
-              <p:nvSpPr>
-                <p:cNvPr id="16432" name="Oval 26"/>
-                <p:cNvSpPr>
-                  <a:spLocks noChangeArrowheads="1"/>
-                </p:cNvSpPr>
-                <p:nvPr/>
-              </p:nvSpPr>
-              <p:spPr bwMode="auto">
-                <a:xfrm>
-                  <a:off x="4738" y="2684"/>
-                  <a:ext cx="350" cy="296"/>
-                </a:xfrm>
-                <a:prstGeom prst="ellipse">
-                  <a:avLst/>
-                </a:prstGeom>
+              <a:prstGeom prst="ellipse">
+                <a:avLst/>
+              </a:prstGeom>
+              <a:solidFill>
+                <a:srgbClr val="0066FF"/>
+              </a:solidFill>
+              <a:ln w="19050">
                 <a:solidFill>
-                  <a:srgbClr val="0066FF"/>
+                  <a:schemeClr val="tx1"/>
                 </a:solidFill>
-                <a:ln w="19050">
-                  <a:solidFill>
-                    <a:schemeClr val="tx1"/>
-                  </a:solidFill>
-                  <a:round/>
-                  <a:headEnd type="none" w="sm" len="sm"/>
-                  <a:tailEnd type="none" w="sm" len="sm"/>
-                </a:ln>
-              </p:spPr>
-              <p:txBody>
-                <a:bodyPr wrap="none" anchor="ctr"/>
-                <a:lstStyle/>
-                <a:p>
-                  <a:endParaRPr lang="nl-NL"/>
-                </a:p>
-              </p:txBody>
-            </p:sp>
-            <p:sp>
-              <p:nvSpPr>
-                <p:cNvPr id="16433" name="Text Box 27"/>
-                <p:cNvSpPr txBox="1">
-                  <a:spLocks noChangeArrowheads="1"/>
-                </p:cNvSpPr>
-                <p:nvPr/>
-              </p:nvSpPr>
-              <p:spPr bwMode="auto">
-                <a:xfrm>
-                  <a:off x="4815" y="2707"/>
-                  <a:ext cx="197" cy="233"/>
-                </a:xfrm>
-                <a:prstGeom prst="rect">
-                  <a:avLst/>
-                </a:prstGeom>
+                <a:round/>
+                <a:headEnd type="none" w="sm" len="sm"/>
+                <a:tailEnd type="none" w="sm" len="sm"/>
+              </a:ln>
+            </p:spPr>
+            <p:txBody>
+              <a:bodyPr wrap="none" anchor="ctr"/>
+              <a:lstStyle/>
+              <a:p>
+                <a:endParaRPr lang="nl-NL"/>
+              </a:p>
+            </p:txBody>
+          </p:sp>
+          <p:sp>
+            <p:nvSpPr>
+              <p:cNvPr id="16439" name="Text Box 27"/>
+              <p:cNvSpPr txBox="1">
+                <a:spLocks noChangeArrowheads="1"/>
+              </p:cNvSpPr>
+              <p:nvPr/>
+            </p:nvSpPr>
+            <p:spPr bwMode="auto">
+              <a:xfrm>
+                <a:off x="4815" y="2707"/>
+                <a:ext cx="196" cy="250"/>
+              </a:xfrm>
+              <a:prstGeom prst="rect">
+                <a:avLst/>
+              </a:prstGeom>
+              <a:noFill/>
+              <a:ln w="12700">
                 <a:noFill/>
-                <a:ln w="12700">
-                  <a:noFill/>
-                  <a:miter lim="800000"/>
-                  <a:headEnd type="none" w="sm" len="sm"/>
-                  <a:tailEnd type="none" w="sm" len="sm"/>
-                </a:ln>
-              </p:spPr>
-              <p:txBody>
-                <a:bodyPr wrap="none">
-                  <a:spAutoFit/>
-                </a:bodyPr>
-                <a:lstStyle/>
-                <a:p>
-                  <a:r>
-                    <a:rPr lang="en-US"/>
-                    <a:t>7</a:t>
-                  </a:r>
-                </a:p>
-              </p:txBody>
-            </p:sp>
-          </p:grpSp>
-          <p:grpSp>
-            <p:nvGrpSpPr>
-              <p:cNvPr id="16429" name="Group 28"/>
-              <p:cNvGrpSpPr>
-                <a:grpSpLocks/>
-              </p:cNvGrpSpPr>
+                <a:miter lim="800000"/>
+                <a:headEnd type="none" w="sm" len="sm"/>
+                <a:tailEnd type="none" w="sm" len="sm"/>
+              </a:ln>
+            </p:spPr>
+            <p:txBody>
+              <a:bodyPr wrap="none">
+                <a:spAutoFit/>
+              </a:bodyPr>
+              <a:lstStyle/>
+              <a:p>
+                <a:r>
+                  <a:rPr lang="en-US"/>
+                  <a:t>5</a:t>
+                </a:r>
+              </a:p>
+            </p:txBody>
+          </p:sp>
+        </p:grpSp>
+        <p:grpSp>
+          <p:nvGrpSpPr>
+            <p:cNvPr id="16435" name="Group 28"/>
+            <p:cNvGrpSpPr>
+              <a:grpSpLocks/>
+            </p:cNvGrpSpPr>
+            <p:nvPr/>
+          </p:nvGrpSpPr>
+          <p:grpSpPr bwMode="auto">
+            <a:xfrm>
+              <a:off x="2480" y="2968"/>
+              <a:ext cx="350" cy="296"/>
+              <a:chOff x="3838" y="2684"/>
+              <a:chExt cx="350" cy="296"/>
+            </a:xfrm>
+          </p:grpSpPr>
+          <p:sp>
+            <p:nvSpPr>
+              <p:cNvPr id="16436" name="Oval 29"/>
+              <p:cNvSpPr>
+                <a:spLocks noChangeArrowheads="1"/>
+              </p:cNvSpPr>
               <p:nvPr/>
-            </p:nvGrpSpPr>
-            <p:grpSpPr bwMode="auto">
+            </p:nvSpPr>
+            <p:spPr bwMode="auto">
               <a:xfrm>
-                <a:off x="2480" y="2968"/>
+                <a:off x="3838" y="2684"/>
                 <a:ext cx="350" cy="296"/>
-                <a:chOff x="3838" y="2684"/>
-                <a:chExt cx="350" cy="296"/>
               </a:xfrm>
-            </p:grpSpPr>
-            <p:sp>
-              <p:nvSpPr>
-                <p:cNvPr id="16430" name="Oval 29"/>
-                <p:cNvSpPr>
-                  <a:spLocks noChangeArrowheads="1"/>
-                </p:cNvSpPr>
-                <p:nvPr/>
-              </p:nvSpPr>
-              <p:spPr bwMode="auto">
-                <a:xfrm>
-                  <a:off x="3838" y="2684"/>
-                  <a:ext cx="350" cy="296"/>
-                </a:xfrm>
-                <a:prstGeom prst="ellipse">
-                  <a:avLst/>
-                </a:prstGeom>
+              <a:prstGeom prst="ellipse">
+                <a:avLst/>
+              </a:prstGeom>
+              <a:solidFill>
+                <a:srgbClr val="0066FF"/>
+              </a:solidFill>
+              <a:ln w="19050">
                 <a:solidFill>
-                  <a:srgbClr val="0066FF"/>
+                  <a:schemeClr val="tx1"/>
                 </a:solidFill>
-                <a:ln w="19050">
-                  <a:solidFill>
-                    <a:schemeClr val="tx1"/>
-                  </a:solidFill>
-                  <a:round/>
-                  <a:headEnd type="none" w="sm" len="sm"/>
-                  <a:tailEnd type="none" w="sm" len="sm"/>
-                </a:ln>
-              </p:spPr>
-              <p:txBody>
-                <a:bodyPr wrap="none" anchor="ctr"/>
-                <a:lstStyle/>
-                <a:p>
-                  <a:endParaRPr lang="nl-NL"/>
-                </a:p>
-              </p:txBody>
-            </p:sp>
-            <p:sp>
-              <p:nvSpPr>
-                <p:cNvPr id="16431" name="Text Box 30"/>
-                <p:cNvSpPr txBox="1">
-                  <a:spLocks noChangeArrowheads="1"/>
-                </p:cNvSpPr>
-                <p:nvPr/>
-              </p:nvSpPr>
-              <p:spPr bwMode="auto">
-                <a:xfrm>
-                  <a:off x="3915" y="2707"/>
-                  <a:ext cx="197" cy="233"/>
-                </a:xfrm>
-                <a:prstGeom prst="rect">
-                  <a:avLst/>
-                </a:prstGeom>
+                <a:round/>
+                <a:headEnd type="none" w="sm" len="sm"/>
+                <a:tailEnd type="none" w="sm" len="sm"/>
+              </a:ln>
+            </p:spPr>
+            <p:txBody>
+              <a:bodyPr wrap="none" anchor="ctr"/>
+              <a:lstStyle/>
+              <a:p>
+                <a:endParaRPr lang="nl-NL"/>
+              </a:p>
+            </p:txBody>
+          </p:sp>
+          <p:sp>
+            <p:nvSpPr>
+              <p:cNvPr id="16437" name="Text Box 30"/>
+              <p:cNvSpPr txBox="1">
+                <a:spLocks noChangeArrowheads="1"/>
+              </p:cNvSpPr>
+              <p:nvPr/>
+            </p:nvSpPr>
+            <p:spPr bwMode="auto">
+              <a:xfrm>
+                <a:off x="3915" y="2707"/>
+                <a:ext cx="196" cy="250"/>
+              </a:xfrm>
+              <a:prstGeom prst="rect">
+                <a:avLst/>
+              </a:prstGeom>
+              <a:noFill/>
+              <a:ln w="12700">
                 <a:noFill/>
-                <a:ln w="12700">
-                  <a:noFill/>
-                  <a:miter lim="800000"/>
-                  <a:headEnd type="none" w="sm" len="sm"/>
-                  <a:tailEnd type="none" w="sm" len="sm"/>
-                </a:ln>
-              </p:spPr>
-              <p:txBody>
-                <a:bodyPr wrap="none">
-                  <a:spAutoFit/>
-                </a:bodyPr>
-                <a:lstStyle/>
-                <a:p>
-                  <a:r>
-                    <a:rPr lang="en-US"/>
-                    <a:t>8</a:t>
-                  </a:r>
-                </a:p>
-              </p:txBody>
-            </p:sp>
-          </p:grpSp>
+                <a:miter lim="800000"/>
+                <a:headEnd type="none" w="sm" len="sm"/>
+                <a:tailEnd type="none" w="sm" len="sm"/>
+              </a:ln>
+            </p:spPr>
+            <p:txBody>
+              <a:bodyPr wrap="none">
+                <a:spAutoFit/>
+              </a:bodyPr>
+              <a:lstStyle/>
+              <a:p>
+                <a:r>
+                  <a:rPr lang="en-US"/>
+                  <a:t>4</a:t>
+                </a:r>
+              </a:p>
+            </p:txBody>
+          </p:sp>
         </p:grpSp>
-        <p:sp>
-          <p:nvSpPr>
-            <p:cNvPr id="16424" name="Line 33"/>
-            <p:cNvSpPr>
-              <a:spLocks noChangeShapeType="1"/>
-            </p:cNvSpPr>
+      </p:grpSp>
+      <p:sp>
+        <p:nvSpPr>
+          <p:cNvPr id="16414" name="Line 33"/>
+          <p:cNvSpPr>
+            <a:spLocks noChangeShapeType="1"/>
+          </p:cNvSpPr>
+          <p:nvPr/>
+        </p:nvSpPr>
+        <p:spPr bwMode="auto">
+          <a:xfrm flipV="1">
+            <a:off x="4786022" y="2710712"/>
+            <a:ext cx="396873" cy="265114"/>
+          </a:xfrm>
+          <a:prstGeom prst="line">
+            <a:avLst/>
+          </a:prstGeom>
+          <a:noFill/>
+          <a:ln w="19050">
+            <a:solidFill>
+              <a:schemeClr val="tx1"/>
+            </a:solidFill>
+            <a:round/>
+            <a:headEnd type="none" w="sm" len="sm"/>
+            <a:tailEnd type="arrow" w="med" len="med"/>
+          </a:ln>
+        </p:spPr>
+        <p:txBody>
+          <a:bodyPr/>
+          <a:lstStyle/>
+          <a:p>
+            <a:endParaRPr lang="en-US"/>
+          </a:p>
+        </p:txBody>
+      </p:sp>
+      <p:sp>
+        <p:nvSpPr>
+          <p:cNvPr id="16415" name="Line 34"/>
+          <p:cNvSpPr>
+            <a:spLocks noChangeShapeType="1"/>
+          </p:cNvSpPr>
+          <p:nvPr/>
+        </p:nvSpPr>
+        <p:spPr bwMode="auto">
+          <a:xfrm flipV="1">
+            <a:off x="3065181" y="2710712"/>
+            <a:ext cx="396873" cy="265114"/>
+          </a:xfrm>
+          <a:prstGeom prst="line">
+            <a:avLst/>
+          </a:prstGeom>
+          <a:noFill/>
+          <a:ln w="19050">
+            <a:solidFill>
+              <a:schemeClr val="tx1"/>
+            </a:solidFill>
+            <a:round/>
+            <a:headEnd type="none" w="sm" len="sm"/>
+            <a:tailEnd type="arrow" w="med" len="med"/>
+          </a:ln>
+        </p:spPr>
+        <p:txBody>
+          <a:bodyPr/>
+          <a:lstStyle/>
+          <a:p>
+            <a:endParaRPr lang="en-US"/>
+          </a:p>
+        </p:txBody>
+      </p:sp>
+      <p:sp>
+        <p:nvSpPr>
+          <p:cNvPr id="16416" name="Line 35"/>
+          <p:cNvSpPr>
+            <a:spLocks noChangeShapeType="1"/>
+          </p:cNvSpPr>
+          <p:nvPr/>
+        </p:nvSpPr>
+        <p:spPr bwMode="auto">
+          <a:xfrm flipV="1">
+            <a:off x="3941476" y="2202708"/>
+            <a:ext cx="396873" cy="265114"/>
+          </a:xfrm>
+          <a:prstGeom prst="line">
+            <a:avLst/>
+          </a:prstGeom>
+          <a:noFill/>
+          <a:ln w="19050">
+            <a:solidFill>
+              <a:schemeClr val="tx1"/>
+            </a:solidFill>
+            <a:round/>
+            <a:headEnd type="none" w="sm" len="sm"/>
+            <a:tailEnd type="arrow" w="med" len="med"/>
+          </a:ln>
+        </p:spPr>
+        <p:txBody>
+          <a:bodyPr/>
+          <a:lstStyle/>
+          <a:p>
+            <a:endParaRPr lang="en-US"/>
+          </a:p>
+        </p:txBody>
+      </p:sp>
+      <p:sp>
+        <p:nvSpPr>
+          <p:cNvPr id="16417" name="Line 36"/>
+          <p:cNvSpPr>
+            <a:spLocks noChangeShapeType="1"/>
+          </p:cNvSpPr>
+          <p:nvPr/>
+        </p:nvSpPr>
+        <p:spPr bwMode="auto">
+          <a:xfrm>
+            <a:off x="2207935" y="2717062"/>
+            <a:ext cx="346073" cy="249239"/>
+          </a:xfrm>
+          <a:prstGeom prst="line">
+            <a:avLst/>
+          </a:prstGeom>
+          <a:noFill/>
+          <a:ln w="19050">
+            <a:solidFill>
+              <a:schemeClr val="tx1"/>
+            </a:solidFill>
+            <a:round/>
+            <a:headEnd type="none" w="sm" len="sm"/>
+            <a:tailEnd type="arrow" w="med" len="med"/>
+          </a:ln>
+        </p:spPr>
+        <p:txBody>
+          <a:bodyPr/>
+          <a:lstStyle/>
+          <a:p>
+            <a:endParaRPr lang="en-US"/>
+          </a:p>
+        </p:txBody>
+      </p:sp>
+      <p:sp>
+        <p:nvSpPr>
+          <p:cNvPr id="16418" name="Line 37"/>
+          <p:cNvSpPr>
+            <a:spLocks noChangeShapeType="1"/>
+          </p:cNvSpPr>
+          <p:nvPr/>
+        </p:nvSpPr>
+        <p:spPr bwMode="auto">
+          <a:xfrm>
+            <a:off x="3084231" y="2210646"/>
+            <a:ext cx="346073" cy="249239"/>
+          </a:xfrm>
+          <a:prstGeom prst="line">
+            <a:avLst/>
+          </a:prstGeom>
+          <a:noFill/>
+          <a:ln w="19050">
+            <a:solidFill>
+              <a:schemeClr val="tx1"/>
+            </a:solidFill>
+            <a:round/>
+            <a:headEnd type="none" w="sm" len="sm"/>
+            <a:tailEnd type="arrow" w="med" len="med"/>
+          </a:ln>
+        </p:spPr>
+        <p:txBody>
+          <a:bodyPr/>
+          <a:lstStyle/>
+          <a:p>
+            <a:endParaRPr lang="en-US"/>
+          </a:p>
+        </p:txBody>
+      </p:sp>
+      <p:sp>
+        <p:nvSpPr>
+          <p:cNvPr id="16419" name="Line 38"/>
+          <p:cNvSpPr>
+            <a:spLocks noChangeShapeType="1"/>
+          </p:cNvSpPr>
+          <p:nvPr/>
+        </p:nvSpPr>
+        <p:spPr bwMode="auto">
+          <a:xfrm>
+            <a:off x="3903376" y="2718650"/>
+            <a:ext cx="346073" cy="249239"/>
+          </a:xfrm>
+          <a:prstGeom prst="line">
+            <a:avLst/>
+          </a:prstGeom>
+          <a:noFill/>
+          <a:ln w="19050">
+            <a:solidFill>
+              <a:schemeClr val="tx1"/>
+            </a:solidFill>
+            <a:round/>
+            <a:headEnd type="none" w="sm" len="sm"/>
+            <a:tailEnd type="arrow" w="med" len="med"/>
+          </a:ln>
+        </p:spPr>
+        <p:txBody>
+          <a:bodyPr/>
+          <a:lstStyle/>
+          <a:p>
+            <a:endParaRPr lang="en-US"/>
+          </a:p>
+        </p:txBody>
+      </p:sp>
+      <p:sp>
+        <p:nvSpPr>
+          <p:cNvPr id="16420" name="Line 39"/>
+          <p:cNvSpPr>
+            <a:spLocks noChangeShapeType="1"/>
+          </p:cNvSpPr>
+          <p:nvPr/>
+        </p:nvSpPr>
+        <p:spPr bwMode="auto">
+          <a:xfrm>
+            <a:off x="4830472" y="2209058"/>
+            <a:ext cx="346073" cy="249239"/>
+          </a:xfrm>
+          <a:prstGeom prst="line">
+            <a:avLst/>
+          </a:prstGeom>
+          <a:noFill/>
+          <a:ln w="19050">
+            <a:solidFill>
+              <a:schemeClr val="tx1"/>
+            </a:solidFill>
+            <a:round/>
+            <a:headEnd type="none" w="sm" len="sm"/>
+            <a:tailEnd type="arrow" w="med" len="med"/>
+          </a:ln>
+        </p:spPr>
+        <p:txBody>
+          <a:bodyPr/>
+          <a:lstStyle/>
+          <a:p>
+            <a:endParaRPr lang="en-US"/>
+          </a:p>
+        </p:txBody>
+      </p:sp>
+      <p:sp>
+        <p:nvSpPr>
+          <p:cNvPr id="16421" name="Oval 11"/>
+          <p:cNvSpPr>
+            <a:spLocks noChangeArrowheads="1"/>
+          </p:cNvSpPr>
+          <p:nvPr/>
+        </p:nvSpPr>
+        <p:spPr bwMode="auto">
+          <a:xfrm>
+            <a:off x="6857731" y="2315432"/>
+            <a:ext cx="555622" cy="469904"/>
+          </a:xfrm>
+          <a:prstGeom prst="ellipse">
+            <a:avLst/>
+          </a:prstGeom>
+          <a:solidFill>
+            <a:srgbClr val="0066FF"/>
+          </a:solidFill>
+          <a:ln w="28575">
+            <a:solidFill>
+              <a:schemeClr val="tx1"/>
+            </a:solidFill>
+            <a:round/>
+            <a:headEnd type="none" w="sm" len="sm"/>
+            <a:tailEnd type="none" w="sm" len="sm"/>
+          </a:ln>
+        </p:spPr>
+        <p:txBody>
+          <a:bodyPr wrap="none" anchor="ctr"/>
+          <a:lstStyle/>
+          <a:p>
+            <a:endParaRPr lang="nl-NL">
+              <a:solidFill>
+                <a:schemeClr val="bg1"/>
+              </a:solidFill>
+            </a:endParaRPr>
+          </a:p>
+        </p:txBody>
+      </p:sp>
+      <p:sp>
+        <p:nvSpPr>
+          <p:cNvPr id="16422" name="Text Box 12"/>
+          <p:cNvSpPr txBox="1">
+            <a:spLocks noChangeArrowheads="1"/>
+          </p:cNvSpPr>
+          <p:nvPr/>
+        </p:nvSpPr>
+        <p:spPr bwMode="auto">
+          <a:xfrm>
+            <a:off x="6979968" y="2351945"/>
+            <a:ext cx="312904" cy="369335"/>
+          </a:xfrm>
+          <a:prstGeom prst="rect">
+            <a:avLst/>
+          </a:prstGeom>
+          <a:noFill/>
+          <a:ln w="12700">
+            <a:noFill/>
+            <a:miter lim="800000"/>
+            <a:headEnd type="none" w="sm" len="sm"/>
+            <a:tailEnd type="none" w="sm" len="sm"/>
+          </a:ln>
+        </p:spPr>
+        <p:txBody>
+          <a:bodyPr wrap="none">
+            <a:spAutoFit/>
+          </a:bodyPr>
+          <a:lstStyle/>
+          <a:p>
+            <a:r>
+              <a:rPr lang="en-US" dirty="0">
+                <a:solidFill>
+                  <a:schemeClr val="bg1"/>
+                </a:solidFill>
+              </a:rPr>
+              <a:t>9</a:t>
+            </a:r>
+          </a:p>
+        </p:txBody>
+      </p:sp>
+      <p:grpSp>
+        <p:nvGrpSpPr>
+          <p:cNvPr id="16423" name="Group 32"/>
+          <p:cNvGrpSpPr>
+            <a:grpSpLocks/>
+          </p:cNvGrpSpPr>
+          <p:nvPr/>
+        </p:nvGrpSpPr>
+        <p:grpSpPr bwMode="auto">
+          <a:xfrm>
+            <a:off x="5975086" y="1829653"/>
+            <a:ext cx="603247" cy="1441461"/>
+            <a:chOff x="2450" y="2968"/>
+            <a:chExt cx="380" cy="908"/>
+          </a:xfrm>
+        </p:grpSpPr>
+        <p:grpSp>
+          <p:nvGrpSpPr>
+            <p:cNvPr id="16428" name="Group 25"/>
+            <p:cNvGrpSpPr>
+              <a:grpSpLocks/>
+            </p:cNvGrpSpPr>
             <p:nvPr/>
-          </p:nvSpPr>
-          <p:spPr bwMode="auto">
-            <a:xfrm flipV="1">
-              <a:off x="5832480" y="2568573"/>
-              <a:ext cx="396875" cy="265112"/>
+          </p:nvGrpSpPr>
+          <p:grpSpPr bwMode="auto">
+            <a:xfrm>
+              <a:off x="2450" y="3580"/>
+              <a:ext cx="350" cy="296"/>
+              <a:chOff x="4738" y="2684"/>
+              <a:chExt cx="350" cy="296"/>
             </a:xfrm>
-            <a:prstGeom prst="line">
-              <a:avLst/>
-            </a:prstGeom>
-            <a:noFill/>
-            <a:ln w="19050">
+          </p:grpSpPr>
+          <p:sp>
+            <p:nvSpPr>
+              <p:cNvPr id="16432" name="Oval 26"/>
+              <p:cNvSpPr>
+                <a:spLocks noChangeArrowheads="1"/>
+              </p:cNvSpPr>
+              <p:nvPr/>
+            </p:nvSpPr>
+            <p:spPr bwMode="auto">
+              <a:xfrm>
+                <a:off x="4738" y="2684"/>
+                <a:ext cx="350" cy="296"/>
+              </a:xfrm>
+              <a:prstGeom prst="ellipse">
+                <a:avLst/>
+              </a:prstGeom>
               <a:solidFill>
-                <a:schemeClr val="tx1"/>
+                <a:srgbClr val="0066FF"/>
               </a:solidFill>
-              <a:round/>
-              <a:headEnd type="none" w="sm" len="sm"/>
-              <a:tailEnd type="arrow" w="med" len="med"/>
-            </a:ln>
-          </p:spPr>
-          <p:txBody>
-            <a:bodyPr/>
-            <a:lstStyle/>
-            <a:p>
-              <a:endParaRPr lang="en-US"/>
-            </a:p>
-          </p:txBody>
-        </p:sp>
-        <p:sp>
-          <p:nvSpPr>
-            <p:cNvPr id="16425" name="Line 39"/>
-            <p:cNvSpPr>
-              <a:spLocks noChangeShapeType="1"/>
-            </p:cNvSpPr>
+              <a:ln w="19050">
+                <a:solidFill>
+                  <a:schemeClr val="tx1"/>
+                </a:solidFill>
+                <a:round/>
+                <a:headEnd type="none" w="sm" len="sm"/>
+                <a:tailEnd type="none" w="sm" len="sm"/>
+              </a:ln>
+            </p:spPr>
+            <p:txBody>
+              <a:bodyPr wrap="none" anchor="ctr"/>
+              <a:lstStyle/>
+              <a:p>
+                <a:endParaRPr lang="nl-NL"/>
+              </a:p>
+            </p:txBody>
+          </p:sp>
+          <p:sp>
+            <p:nvSpPr>
+              <p:cNvPr id="16433" name="Text Box 27"/>
+              <p:cNvSpPr txBox="1">
+                <a:spLocks noChangeArrowheads="1"/>
+              </p:cNvSpPr>
+              <p:nvPr/>
+            </p:nvSpPr>
+            <p:spPr bwMode="auto">
+              <a:xfrm>
+                <a:off x="4815" y="2707"/>
+                <a:ext cx="197" cy="233"/>
+              </a:xfrm>
+              <a:prstGeom prst="rect">
+                <a:avLst/>
+              </a:prstGeom>
+              <a:noFill/>
+              <a:ln w="12700">
+                <a:noFill/>
+                <a:miter lim="800000"/>
+                <a:headEnd type="none" w="sm" len="sm"/>
+                <a:tailEnd type="none" w="sm" len="sm"/>
+              </a:ln>
+            </p:spPr>
+            <p:txBody>
+              <a:bodyPr wrap="none">
+                <a:spAutoFit/>
+              </a:bodyPr>
+              <a:lstStyle/>
+              <a:p>
+                <a:r>
+                  <a:rPr lang="en-US"/>
+                  <a:t>7</a:t>
+                </a:r>
+              </a:p>
+            </p:txBody>
+          </p:sp>
+        </p:grpSp>
+        <p:grpSp>
+          <p:nvGrpSpPr>
+            <p:cNvPr id="16429" name="Group 28"/>
+            <p:cNvGrpSpPr>
+              <a:grpSpLocks/>
+            </p:cNvGrpSpPr>
             <p:nvPr/>
-          </p:nvSpPr>
-          <p:spPr bwMode="auto">
+          </p:nvGrpSpPr>
+          <p:grpSpPr bwMode="auto">
             <a:xfrm>
-              <a:off x="5876930" y="2066923"/>
-              <a:ext cx="346075" cy="249237"/>
+              <a:off x="2480" y="2968"/>
+              <a:ext cx="350" cy="296"/>
+              <a:chOff x="3838" y="2684"/>
+              <a:chExt cx="350" cy="296"/>
             </a:xfrm>
-            <a:prstGeom prst="line">
-              <a:avLst/>
-            </a:prstGeom>
-            <a:noFill/>
-            <a:ln w="19050">
+          </p:grpSpPr>
+          <p:sp>
+            <p:nvSpPr>
+              <p:cNvPr id="16430" name="Oval 29"/>
+              <p:cNvSpPr>
+                <a:spLocks noChangeArrowheads="1"/>
+              </p:cNvSpPr>
+              <p:nvPr/>
+            </p:nvSpPr>
+            <p:spPr bwMode="auto">
+              <a:xfrm>
+                <a:off x="3838" y="2684"/>
+                <a:ext cx="350" cy="296"/>
+              </a:xfrm>
+              <a:prstGeom prst="ellipse">
+                <a:avLst/>
+              </a:prstGeom>
               <a:solidFill>
-                <a:schemeClr val="tx1"/>
+                <a:srgbClr val="0066FF"/>
               </a:solidFill>
-              <a:round/>
-              <a:headEnd type="none" w="sm" len="sm"/>
-              <a:tailEnd type="arrow" w="med" len="med"/>
-            </a:ln>
-          </p:spPr>
-          <p:txBody>
-            <a:bodyPr/>
-            <a:lstStyle/>
-            <a:p>
-              <a:endParaRPr lang="en-US"/>
-            </a:p>
-          </p:txBody>
-        </p:sp>
-        <p:sp>
-          <p:nvSpPr>
-            <p:cNvPr id="16426" name="Line 33"/>
-            <p:cNvSpPr>
-              <a:spLocks noChangeShapeType="1"/>
-            </p:cNvSpPr>
-            <p:nvPr/>
-          </p:nvSpPr>
-          <p:spPr bwMode="auto">
-            <a:xfrm flipV="1">
-              <a:off x="4929190" y="2000240"/>
-              <a:ext cx="396875" cy="265112"/>
-            </a:xfrm>
-            <a:prstGeom prst="line">
-              <a:avLst/>
-            </a:prstGeom>
-            <a:noFill/>
-            <a:ln w="19050">
-              <a:solidFill>
-                <a:schemeClr val="tx1"/>
-              </a:solidFill>
-              <a:round/>
-              <a:headEnd type="none" w="sm" len="sm"/>
-              <a:tailEnd type="arrow" w="med" len="med"/>
-            </a:ln>
-          </p:spPr>
-          <p:txBody>
-            <a:bodyPr/>
-            <a:lstStyle/>
-            <a:p>
-              <a:endParaRPr lang="en-US"/>
-            </a:p>
-          </p:txBody>
-        </p:sp>
-        <p:sp>
-          <p:nvSpPr>
-            <p:cNvPr id="16427" name="Line 39"/>
-            <p:cNvSpPr>
-              <a:spLocks noChangeShapeType="1"/>
-            </p:cNvSpPr>
-            <p:nvPr/>
-          </p:nvSpPr>
-          <p:spPr bwMode="auto">
-            <a:xfrm>
-              <a:off x="4929190" y="2571744"/>
-              <a:ext cx="346075" cy="249237"/>
-            </a:xfrm>
-            <a:prstGeom prst="line">
-              <a:avLst/>
-            </a:prstGeom>
-            <a:noFill/>
-            <a:ln w="19050">
-              <a:solidFill>
-                <a:schemeClr val="tx1"/>
-              </a:solidFill>
-              <a:round/>
-              <a:headEnd type="none" w="sm" len="sm"/>
-              <a:tailEnd type="arrow" w="med" len="med"/>
-            </a:ln>
-          </p:spPr>
-          <p:txBody>
-            <a:bodyPr/>
-            <a:lstStyle/>
-            <a:p>
-              <a:endParaRPr lang="en-US"/>
-            </a:p>
-          </p:txBody>
-        </p:sp>
+              <a:ln w="19050">
+                <a:solidFill>
+                  <a:schemeClr val="tx1"/>
+                </a:solidFill>
+                <a:round/>
+                <a:headEnd type="none" w="sm" len="sm"/>
+                <a:tailEnd type="none" w="sm" len="sm"/>
+              </a:ln>
+            </p:spPr>
+            <p:txBody>
+              <a:bodyPr wrap="none" anchor="ctr"/>
+              <a:lstStyle/>
+              <a:p>
+                <a:endParaRPr lang="nl-NL"/>
+              </a:p>
+            </p:txBody>
+          </p:sp>
+          <p:sp>
+            <p:nvSpPr>
+              <p:cNvPr id="16431" name="Text Box 30"/>
+              <p:cNvSpPr txBox="1">
+                <a:spLocks noChangeArrowheads="1"/>
+              </p:cNvSpPr>
+              <p:nvPr/>
+            </p:nvSpPr>
+            <p:spPr bwMode="auto">
+              <a:xfrm>
+                <a:off x="3915" y="2707"/>
+                <a:ext cx="197" cy="233"/>
+              </a:xfrm>
+              <a:prstGeom prst="rect">
+                <a:avLst/>
+              </a:prstGeom>
+              <a:noFill/>
+              <a:ln w="12700">
+                <a:noFill/>
+                <a:miter lim="800000"/>
+                <a:headEnd type="none" w="sm" len="sm"/>
+                <a:tailEnd type="none" w="sm" len="sm"/>
+              </a:ln>
+            </p:spPr>
+            <p:txBody>
+              <a:bodyPr wrap="none">
+                <a:spAutoFit/>
+              </a:bodyPr>
+              <a:lstStyle/>
+              <a:p>
+                <a:r>
+                  <a:rPr lang="en-US"/>
+                  <a:t>8</a:t>
+                </a:r>
+              </a:p>
+            </p:txBody>
+          </p:sp>
+        </p:grpSp>
       </p:grpSp>
+      <p:sp>
+        <p:nvSpPr>
+          <p:cNvPr id="16424" name="Line 33"/>
+          <p:cNvSpPr>
+            <a:spLocks noChangeShapeType="1"/>
+          </p:cNvSpPr>
+          <p:nvPr/>
+        </p:nvSpPr>
+        <p:spPr bwMode="auto">
+          <a:xfrm flipV="1">
+            <a:off x="6521183" y="2696435"/>
+            <a:ext cx="396873" cy="265114"/>
+          </a:xfrm>
+          <a:prstGeom prst="line">
+            <a:avLst/>
+          </a:prstGeom>
+          <a:noFill/>
+          <a:ln w="19050">
+            <a:solidFill>
+              <a:schemeClr val="tx1"/>
+            </a:solidFill>
+            <a:round/>
+            <a:headEnd type="none" w="sm" len="sm"/>
+            <a:tailEnd type="arrow" w="med" len="med"/>
+          </a:ln>
+        </p:spPr>
+        <p:txBody>
+          <a:bodyPr/>
+          <a:lstStyle/>
+          <a:p>
+            <a:endParaRPr lang="en-US"/>
+          </a:p>
+        </p:txBody>
+      </p:sp>
+      <p:sp>
+        <p:nvSpPr>
+          <p:cNvPr id="16425" name="Line 39"/>
+          <p:cNvSpPr>
+            <a:spLocks noChangeShapeType="1"/>
+          </p:cNvSpPr>
+          <p:nvPr/>
+        </p:nvSpPr>
+        <p:spPr bwMode="auto">
+          <a:xfrm>
+            <a:off x="6565632" y="2194781"/>
+            <a:ext cx="346073" cy="249239"/>
+          </a:xfrm>
+          <a:prstGeom prst="line">
+            <a:avLst/>
+          </a:prstGeom>
+          <a:noFill/>
+          <a:ln w="19050">
+            <a:solidFill>
+              <a:schemeClr val="tx1"/>
+            </a:solidFill>
+            <a:round/>
+            <a:headEnd type="none" w="sm" len="sm"/>
+            <a:tailEnd type="arrow" w="med" len="med"/>
+          </a:ln>
+        </p:spPr>
+        <p:txBody>
+          <a:bodyPr/>
+          <a:lstStyle/>
+          <a:p>
+            <a:endParaRPr lang="en-US"/>
+          </a:p>
+        </p:txBody>
+      </p:sp>
+      <p:sp>
+        <p:nvSpPr>
+          <p:cNvPr id="16426" name="Line 33"/>
+          <p:cNvSpPr>
+            <a:spLocks noChangeShapeType="1"/>
+          </p:cNvSpPr>
+          <p:nvPr/>
+        </p:nvSpPr>
+        <p:spPr bwMode="auto">
+          <a:xfrm flipV="1">
+            <a:off x="5617897" y="2128097"/>
+            <a:ext cx="396873" cy="265114"/>
+          </a:xfrm>
+          <a:prstGeom prst="line">
+            <a:avLst/>
+          </a:prstGeom>
+          <a:noFill/>
+          <a:ln w="19050">
+            <a:solidFill>
+              <a:schemeClr val="tx1"/>
+            </a:solidFill>
+            <a:round/>
+            <a:headEnd type="none" w="sm" len="sm"/>
+            <a:tailEnd type="arrow" w="med" len="med"/>
+          </a:ln>
+        </p:spPr>
+        <p:txBody>
+          <a:bodyPr/>
+          <a:lstStyle/>
+          <a:p>
+            <a:endParaRPr lang="en-US"/>
+          </a:p>
+        </p:txBody>
+      </p:sp>
+      <p:sp>
+        <p:nvSpPr>
+          <p:cNvPr id="16427" name="Line 39"/>
+          <p:cNvSpPr>
+            <a:spLocks noChangeShapeType="1"/>
+          </p:cNvSpPr>
+          <p:nvPr/>
+        </p:nvSpPr>
+        <p:spPr bwMode="auto">
+          <a:xfrm>
+            <a:off x="5617897" y="2699606"/>
+            <a:ext cx="346073" cy="249239"/>
+          </a:xfrm>
+          <a:prstGeom prst="line">
+            <a:avLst/>
+          </a:prstGeom>
+          <a:noFill/>
+          <a:ln w="19050">
+            <a:solidFill>
+              <a:schemeClr val="tx1"/>
+            </a:solidFill>
+            <a:round/>
+            <a:headEnd type="none" w="sm" len="sm"/>
+            <a:tailEnd type="arrow" w="med" len="med"/>
+          </a:ln>
+        </p:spPr>
+        <p:txBody>
+          <a:bodyPr/>
+          <a:lstStyle/>
+          <a:p>
+            <a:endParaRPr lang="en-US"/>
+          </a:p>
+        </p:txBody>
+      </p:sp>
       <p:sp>
         <p:nvSpPr>
           <p:cNvPr id="61" name="TextBox 60"/>
@@ -16491,7 +16370,7 @@
                             </p:stCondLst>
                             <p:childTnLst>
                               <p:par>
-                                <p:cTn id="5" presetID="1" presetClass="entr" presetSubtype="0" fill="hold" grpId="0" nodeType="clickEffect">
+                                <p:cTn id="5" presetID="1" presetClass="entr" presetSubtype="0" fill="hold" nodeType="clickEffect">
                                   <p:stCondLst>
                                     <p:cond delay="0"/>
                                   </p:stCondLst>
@@ -16499,51 +16378,6 @@
                                     <p:set>
                                       <p:cBhvr>
                                         <p:cTn id="6" dur="1" fill="hold">
-                                          <p:stCondLst>
-                                            <p:cond delay="0"/>
-                                          </p:stCondLst>
-                                        </p:cTn>
-                                        <p:tgtEl>
-                                          <p:spTgt spid="61"/>
-                                        </p:tgtEl>
-                                        <p:attrNameLst>
-                                          <p:attrName>style.visibility</p:attrName>
-                                        </p:attrNameLst>
-                                      </p:cBhvr>
-                                      <p:to>
-                                        <p:strVal val="visible"/>
-                                      </p:to>
-                                    </p:set>
-                                  </p:childTnLst>
-                                </p:cTn>
-                              </p:par>
-                            </p:childTnLst>
-                          </p:cTn>
-                        </p:par>
-                      </p:childTnLst>
-                    </p:cTn>
-                  </p:par>
-                  <p:par>
-                    <p:cTn id="7" fill="hold">
-                      <p:stCondLst>
-                        <p:cond delay="indefinite"/>
-                      </p:stCondLst>
-                      <p:childTnLst>
-                        <p:par>
-                          <p:cTn id="8" fill="hold">
-                            <p:stCondLst>
-                              <p:cond delay="0"/>
-                            </p:stCondLst>
-                            <p:childTnLst>
-                              <p:par>
-                                <p:cTn id="9" presetID="1" presetClass="entr" presetSubtype="0" fill="hold" nodeType="clickEffect">
-                                  <p:stCondLst>
-                                    <p:cond delay="0"/>
-                                  </p:stCondLst>
-                                  <p:childTnLst>
-                                    <p:set>
-                                      <p:cBhvr>
-                                        <p:cTn id="10" dur="1" fill="hold">
                                           <p:stCondLst>
                                             <p:cond delay="0"/>
                                           </p:stCondLst>
@@ -16589,9 +16423,6 @@
         </p:cTn>
       </p:par>
     </p:tnLst>
-    <p:bldLst>
-      <p:bldP spid="61" grpId="0"/>
-    </p:bldLst>
   </p:timing>
 </p:sld>
 </file>
@@ -17384,7 +17215,11 @@
           <a:bodyPr/>
           <a:lstStyle/>
           <a:p>
-            <a:endParaRPr lang="en-US"/>
+            <a:endParaRPr lang="en-US">
+              <a:solidFill>
+                <a:schemeClr val="bg1"/>
+              </a:solidFill>
+            </a:endParaRPr>
           </a:p>
         </p:txBody>
       </p:sp>
@@ -17466,7 +17301,11 @@
           <a:bodyPr wrap="none" anchor="ctr"/>
           <a:lstStyle/>
           <a:p>
-            <a:endParaRPr lang="nl-NL"/>
+            <a:endParaRPr lang="nl-NL">
+              <a:solidFill>
+                <a:schemeClr val="bg1"/>
+              </a:solidFill>
+            </a:endParaRPr>
           </a:p>
         </p:txBody>
       </p:sp>
@@ -17487,7 +17326,7 @@
         <p:spPr bwMode="auto">
           <a:xfrm>
             <a:off x="4556075" y="2857533"/>
-            <a:ext cx="311150" cy="396875"/>
+            <a:ext cx="312906" cy="369332"/>
           </a:xfrm>
           <a:prstGeom prst="rect">
             <a:avLst/>
@@ -17507,7 +17346,11 @@
           <a:lstStyle/>
           <a:p>
             <a:r>
-              <a:rPr lang="en-US"/>
+              <a:rPr lang="en-US">
+                <a:solidFill>
+                  <a:schemeClr val="bg1"/>
+                </a:solidFill>
+              </a:rPr>
               <a:t>3</a:t>
             </a:r>
           </a:p>
@@ -17589,7 +17432,11 @@
           <a:bodyPr/>
           <a:lstStyle/>
           <a:p>
-            <a:endParaRPr lang="en-US"/>
+            <a:endParaRPr lang="en-US">
+              <a:solidFill>
+                <a:schemeClr val="bg1"/>
+              </a:solidFill>
+            </a:endParaRPr>
           </a:p>
         </p:txBody>
       </p:sp>
@@ -17628,6 +17475,46 @@
           </a:ln>
         </p:spPr>
       </p:cxnSp>
+      <p:sp>
+        <p:nvSpPr>
+          <p:cNvPr id="21" name="Line 21">
+            <a:extLst>
+              <a:ext uri="{FF2B5EF4-FFF2-40B4-BE49-F238E27FC236}">
+                <a16:creationId xmlns:a16="http://schemas.microsoft.com/office/drawing/2014/main" id="{A7B4F302-3427-5ABC-FA10-B1AF01464FDD}"/>
+              </a:ext>
+            </a:extLst>
+          </p:cNvPr>
+          <p:cNvSpPr>
+            <a:spLocks noChangeShapeType="1"/>
+          </p:cNvSpPr>
+          <p:nvPr/>
+        </p:nvSpPr>
+        <p:spPr bwMode="auto">
+          <a:xfrm>
+            <a:off x="4711650" y="3317897"/>
+            <a:ext cx="0" cy="183111"/>
+          </a:xfrm>
+          <a:prstGeom prst="line">
+            <a:avLst/>
+          </a:prstGeom>
+          <a:noFill/>
+          <a:ln w="19050">
+            <a:solidFill>
+              <a:schemeClr val="tx1"/>
+            </a:solidFill>
+            <a:round/>
+            <a:headEnd type="none" w="sm" len="sm"/>
+            <a:tailEnd type="arrow" w="med" len="med"/>
+          </a:ln>
+        </p:spPr>
+        <p:txBody>
+          <a:bodyPr/>
+          <a:lstStyle/>
+          <a:p>
+            <a:endParaRPr lang="en-US"/>
+          </a:p>
+        </p:txBody>
+      </p:sp>
     </p:spTree>
   </p:cSld>
   <p:clrMapOvr>
@@ -17670,7 +17557,7 @@
           <a:p>
             <a:r>
               <a:rPr lang="en-US" dirty="0"/>
-              <a:t>Another example</a:t>
+              <a:t>Example</a:t>
             </a:r>
           </a:p>
         </p:txBody>
@@ -18109,7 +17996,11 @@
           <a:bodyPr wrap="none" anchor="ctr"/>
           <a:lstStyle/>
           <a:p>
-            <a:endParaRPr lang="nl-NL"/>
+            <a:endParaRPr lang="nl-NL">
+              <a:solidFill>
+                <a:schemeClr val="bg1"/>
+              </a:solidFill>
+            </a:endParaRPr>
           </a:p>
         </p:txBody>
       </p:sp>
@@ -18124,7 +18015,7 @@
         <p:spPr bwMode="auto">
           <a:xfrm>
             <a:off x="2316386" y="3072251"/>
-            <a:ext cx="311150" cy="396875"/>
+            <a:ext cx="312906" cy="369332"/>
           </a:xfrm>
           <a:prstGeom prst="rect">
             <a:avLst/>
@@ -18144,7 +18035,11 @@
           <a:lstStyle/>
           <a:p>
             <a:r>
-              <a:rPr lang="en-US"/>
+              <a:rPr lang="en-US" dirty="0">
+                <a:solidFill>
+                  <a:schemeClr val="bg1"/>
+                </a:solidFill>
+              </a:rPr>
               <a:t>3</a:t>
             </a:r>
           </a:p>
@@ -18531,6 +18426,81 @@
           </a:p>
           <a:p>
             <a:endParaRPr lang="en-US" sz="2800" dirty="0"/>
+          </a:p>
+        </p:txBody>
+      </p:sp>
+      <p:sp>
+        <p:nvSpPr>
+          <p:cNvPr id="2" name="Line 21">
+            <a:extLst>
+              <a:ext uri="{FF2B5EF4-FFF2-40B4-BE49-F238E27FC236}">
+                <a16:creationId xmlns:a16="http://schemas.microsoft.com/office/drawing/2014/main" id="{7824BADF-4EA5-7316-0F14-5FD540E0FC6D}"/>
+              </a:ext>
+            </a:extLst>
+          </p:cNvPr>
+          <p:cNvSpPr>
+            <a:spLocks noChangeShapeType="1"/>
+          </p:cNvSpPr>
+          <p:nvPr/>
+        </p:nvSpPr>
+        <p:spPr bwMode="auto">
+          <a:xfrm>
+            <a:off x="2483792" y="3547900"/>
+            <a:ext cx="0" cy="183111"/>
+          </a:xfrm>
+          <a:prstGeom prst="line">
+            <a:avLst/>
+          </a:prstGeom>
+          <a:noFill/>
+          <a:ln w="19050">
+            <a:solidFill>
+              <a:schemeClr val="tx1"/>
+            </a:solidFill>
+            <a:round/>
+            <a:headEnd type="none" w="sm" len="sm"/>
+            <a:tailEnd type="arrow" w="med" len="med"/>
+          </a:ln>
+        </p:spPr>
+        <p:txBody>
+          <a:bodyPr/>
+          <a:lstStyle/>
+          <a:p>
+            <a:endParaRPr lang="en-US"/>
+          </a:p>
+        </p:txBody>
+      </p:sp>
+      <p:sp>
+        <p:nvSpPr>
+          <p:cNvPr id="3" name="TextBox 2">
+            <a:extLst>
+              <a:ext uri="{FF2B5EF4-FFF2-40B4-BE49-F238E27FC236}">
+                <a16:creationId xmlns:a16="http://schemas.microsoft.com/office/drawing/2014/main" id="{FE156DAB-0AD2-F14F-F152-0F4D746EC711}"/>
+              </a:ext>
+            </a:extLst>
+          </p:cNvPr>
+          <p:cNvSpPr txBox="1"/>
+          <p:nvPr/>
+        </p:nvSpPr>
+        <p:spPr>
+          <a:xfrm>
+            <a:off x="4604393" y="3760326"/>
+            <a:ext cx="2969083" cy="307777"/>
+          </a:xfrm>
+          <a:prstGeom prst="rect">
+            <a:avLst/>
+          </a:prstGeom>
+          <a:noFill/>
+        </p:spPr>
+        <p:txBody>
+          <a:bodyPr wrap="none" rtlCol="0">
+            <a:spAutoFit/>
+          </a:bodyPr>
+          <a:lstStyle/>
+          <a:p>
+            <a:r>
+              <a:rPr lang="en-NL" sz="1400" dirty="0"/>
+              <a:t>Note that [0,2,3] is not a pp (why?).</a:t>
+            </a:r>
           </a:p>
         </p:txBody>
       </p:sp>
@@ -19076,7 +19046,7 @@
         </p:nvSpPr>
         <p:spPr>
           <a:xfrm>
-            <a:off x="457200" y="1783076"/>
+            <a:off x="251007" y="1597084"/>
             <a:ext cx="8067300" cy="369332"/>
           </a:xfrm>
           <a:prstGeom prst="rect">
@@ -19092,7 +19062,7 @@
           <a:p>
             <a:r>
               <a:rPr lang="en-US" dirty="0"/>
-              <a:t>Recall: #TR may not reflect the #test cases you need. Example:</a:t>
+              <a:t>Recall: #TR = N does not mean you also need N tests. Example:</a:t>
             </a:r>
           </a:p>
         </p:txBody>
@@ -20409,15 +20379,15 @@
           <a:lstStyle/>
           <a:p>
             <a:r>
-              <a:rPr lang="en-US" dirty="0"/>
-              <a:t>Identifying the PPCs</a:t>
+              <a:rPr lang="en-US" sz="2800" dirty="0"/>
+              <a:t>AO’s PPs Algorithm</a:t>
             </a:r>
             <a:br>
-              <a:rPr lang="en-US" dirty="0"/>
+              <a:rPr lang="en-US" sz="2400" dirty="0"/>
             </a:br>
             <a:r>
-              <a:rPr lang="en-US" sz="2400" dirty="0"/>
-              <a:t>AO’s Algorithm</a:t>
+              <a:rPr lang="en-US" sz="2000" dirty="0"/>
+              <a:t>(to get the set of prime paths)</a:t>
             </a:r>
             <a:endParaRPr lang="en-US" dirty="0"/>
           </a:p>
@@ -20443,49 +20413,13 @@
           <a:bodyPr/>
           <a:lstStyle/>
           <a:p>
-            <a:r>
-              <a:rPr lang="en-US" sz="2800" dirty="0"/>
-              <a:t>How long can a prime path be? </a:t>
-            </a:r>
-          </a:p>
-          <a:p>
-            <a:r>
-              <a:rPr lang="en-US" sz="2800" dirty="0"/>
-              <a:t>It follows that they can be systematically calculated, e.g. :</a:t>
-            </a:r>
-          </a:p>
-          <a:p>
             <a:pPr marL="971550" lvl="1" indent="-514350">
               <a:buFont typeface="Calibri" pitchFamily="34" charset="0"/>
               <a:buAutoNum type="arabicPeriod"/>
             </a:pPr>
             <a:r>
               <a:rPr lang="en-US" sz="2400" dirty="0"/>
-              <a:t>“invariant”: maintain a set </a:t>
-            </a:r>
-            <a:r>
-              <a:rPr lang="en-US" sz="2400" i="1" dirty="0"/>
-              <a:t>S</a:t>
-            </a:r>
-            <a:r>
-              <a:rPr lang="en-US" sz="2400" dirty="0"/>
-              <a:t> of  simple but </a:t>
-            </a:r>
-            <a:r>
-              <a:rPr lang="en-US" sz="2400" b="1" dirty="0"/>
-              <a:t>not</a:t>
-            </a:r>
-            <a:r>
-              <a:rPr lang="en-US" sz="2400" dirty="0"/>
-              <a:t> right-maximal paths, and </a:t>
-            </a:r>
-            <a:r>
-              <a:rPr lang="en-US" sz="2400" i="1" dirty="0"/>
-              <a:t>T</a:t>
-            </a:r>
-            <a:r>
-              <a:rPr lang="en-US" sz="2400" dirty="0"/>
-              <a:t> of “right”-maximal simple paths.</a:t>
+              <a:t>We start with S = set of singleton paths</a:t>
             </a:r>
           </a:p>
           <a:p>
@@ -20495,31 +20429,14 @@
             </a:pPr>
             <a:r>
               <a:rPr lang="en-US" sz="2400" dirty="0"/>
-              <a:t>Repeat: “right-extend” the paths in </a:t>
-            </a:r>
-            <a:r>
-              <a:rPr lang="en-US" sz="2400" i="1" dirty="0"/>
-              <a:t>S</a:t>
-            </a:r>
-            <a:r>
+              <a:t>T  := subset of S that is right-maximal</a:t>
+            </a:r>
+            <a:br>
               <a:rPr lang="en-US" sz="2400" dirty="0"/>
-              <a:t>; we move them to </a:t>
-            </a:r>
-            <a:r>
-              <a:rPr lang="en-US" sz="2400" i="1" dirty="0"/>
-              <a:t>T</a:t>
-            </a:r>
+            </a:br>
             <a:r>
               <a:rPr lang="en-US" sz="2400" dirty="0"/>
-              <a:t> if they become right-</a:t>
-            </a:r>
-            <a:r>
-              <a:rPr lang="en-US" sz="2400" dirty="0" err="1"/>
-              <a:t>maximals</a:t>
-            </a:r>
-            <a:r>
-              <a:rPr lang="en-US" sz="2400" dirty="0"/>
-              <a:t>. </a:t>
+              <a:t>S := S/T</a:t>
             </a:r>
           </a:p>
           <a:p>
@@ -20529,7 +20446,61 @@
             </a:pPr>
             <a:r>
               <a:rPr lang="en-US" sz="2400" dirty="0"/>
-              <a:t>(2) will terminate.</a:t>
+              <a:t>while S is not empty:</a:t>
+            </a:r>
+          </a:p>
+          <a:p>
+            <a:pPr marL="1371600" lvl="2" indent="-514350">
+              <a:buFont typeface="Calibri" pitchFamily="34" charset="0"/>
+              <a:buAutoNum type="arabicPeriod"/>
+            </a:pPr>
+            <a:r>
+              <a:rPr lang="en-US" dirty="0"/>
+              <a:t>extend paths in S on the right-side</a:t>
+            </a:r>
+          </a:p>
+          <a:p>
+            <a:pPr marL="1371600" lvl="2" indent="-514350">
+              <a:buFont typeface="Calibri" pitchFamily="34" charset="0"/>
+              <a:buAutoNum type="arabicPeriod"/>
+            </a:pPr>
+            <a:r>
+              <a:rPr lang="en-US" dirty="0"/>
+              <a:t>move those that become right-maximal (cannot be extended to the right and still remain simple paths) to T</a:t>
+            </a:r>
+          </a:p>
+          <a:p>
+            <a:pPr marL="1371600" lvl="2" indent="-514350">
+              <a:buFont typeface="Calibri" pitchFamily="34" charset="0"/>
+              <a:buAutoNum type="arabicPeriod"/>
+            </a:pPr>
+            <a:r>
+              <a:rPr lang="en-US" dirty="0"/>
+              <a:t>Remove members of </a:t>
+            </a:r>
+            <a:r>
+              <a:rPr lang="en-US" i="1" dirty="0"/>
+              <a:t>T</a:t>
+            </a:r>
+            <a:r>
+              <a:rPr lang="en-US" dirty="0"/>
+              <a:t> which are </a:t>
+            </a:r>
+            <a:r>
+              <a:rPr lang="en-US" dirty="0" err="1"/>
+              <a:t>subpaths</a:t>
+            </a:r>
+            <a:r>
+              <a:rPr lang="en-US" dirty="0"/>
+              <a:t> of other members of </a:t>
+            </a:r>
+            <a:r>
+              <a:rPr lang="en-US" i="1" dirty="0"/>
+              <a:t>T</a:t>
+            </a:r>
+            <a:r>
+              <a:rPr lang="en-US" dirty="0"/>
+              <a:t>.</a:t>
             </a:r>
           </a:p>
           <a:p>
@@ -20539,31 +20510,7 @@
             </a:pPr>
             <a:r>
               <a:rPr lang="en-US" sz="2400" dirty="0"/>
-              <a:t>Remove members of </a:t>
-            </a:r>
-            <a:r>
-              <a:rPr lang="en-US" sz="2400" i="1" dirty="0"/>
-              <a:t>T</a:t>
-            </a:r>
-            <a:r>
-              <a:rPr lang="en-US" sz="2400" dirty="0"/>
-              <a:t> which are </a:t>
-            </a:r>
-            <a:r>
-              <a:rPr lang="en-US" sz="2400" dirty="0" err="1"/>
-              <a:t>subpaths</a:t>
-            </a:r>
-            <a:r>
-              <a:rPr lang="en-US" sz="2400" dirty="0"/>
-              <a:t> of other members of </a:t>
-            </a:r>
-            <a:r>
-              <a:rPr lang="en-US" sz="2400" i="1" dirty="0"/>
-              <a:t>T</a:t>
-            </a:r>
-            <a:r>
-              <a:rPr lang="en-US" sz="2400" dirty="0"/>
-              <a:t>.</a:t>
+              <a:t>paths in T are prime paths.</a:t>
             </a:r>
           </a:p>
         </p:txBody>
@@ -20836,7 +20783,7 @@
         </p:nvGrpSpPr>
         <p:grpSpPr bwMode="auto">
           <a:xfrm>
-            <a:off x="794916" y="1484784"/>
+            <a:off x="395536" y="1484784"/>
             <a:ext cx="2120900" cy="3635375"/>
             <a:chOff x="287" y="1509"/>
             <a:chExt cx="1336" cy="2290"/>
@@ -21944,7 +21891,7 @@
                   <a:schemeClr val="tx1"/>
                 </a:solidFill>
               </a:rPr>
-              <a:t>[6] !</a:t>
+              <a:t>[6] </a:t>
             </a:r>
           </a:p>
         </p:txBody>
@@ -21959,7 +21906,7 @@
         </p:nvSpPr>
         <p:spPr bwMode="auto">
           <a:xfrm>
-            <a:off x="5072063" y="1857375"/>
+            <a:off x="5072063" y="1884908"/>
             <a:ext cx="1285875" cy="3416300"/>
           </a:xfrm>
           <a:prstGeom prst="rect">
@@ -22046,7 +21993,7 @@
               <a:rPr lang="en-US" sz="2400" dirty="0">
                 <a:latin typeface="+mn-lt"/>
               </a:rPr>
-              <a:t>[3, 6] !</a:t>
+              <a:t>[3, 6] </a:t>
             </a:r>
           </a:p>
           <a:p>
@@ -22057,7 +22004,7 @@
               <a:rPr lang="en-US" sz="2400" dirty="0">
                 <a:latin typeface="+mn-lt"/>
               </a:rPr>
-              <a:t>[4, 6] !</a:t>
+              <a:t>[4, 6] </a:t>
             </a:r>
           </a:p>
           <a:p>
@@ -22092,8 +22039,8 @@
         </p:nvSpPr>
         <p:spPr>
           <a:xfrm>
-            <a:off x="2298279" y="4971519"/>
-            <a:ext cx="3986462" cy="1477328"/>
+            <a:off x="1510734" y="5025662"/>
+            <a:ext cx="3275579" cy="1815882"/>
           </a:xfrm>
           <a:prstGeom prst="rect">
             <a:avLst/>
@@ -22110,10 +22057,33 @@
               <a:defRPr/>
             </a:pPr>
             <a:r>
-              <a:rPr lang="en-US" i="1" dirty="0">
-                <a:latin typeface="+mn-lt"/>
+              <a:rPr lang="en-US" sz="1600" i="1" dirty="0">
+                <a:latin typeface="+mj-lt"/>
               </a:rPr>
-              <a:t>Red: T, consisting of paths</a:t>
+              <a:t>All reds are T, consisting of paths which become right-maximal, and are not a </a:t>
+            </a:r>
+            <a:r>
+              <a:rPr lang="en-US" sz="1600" i="1" dirty="0" err="1">
+                <a:latin typeface="+mj-lt"/>
+              </a:rPr>
+              <a:t>subpath</a:t>
+            </a:r>
+            <a:r>
+              <a:rPr lang="en-US" sz="1600" i="1" dirty="0">
+                <a:latin typeface="+mj-lt"/>
+              </a:rPr>
+              <a:t> of other members of T.  </a:t>
+            </a:r>
+            <a:br>
+              <a:rPr lang="en-US" sz="1600" i="1" dirty="0">
+                <a:latin typeface="+mj-lt"/>
+              </a:rPr>
+            </a:br>
+            <a:r>
+              <a:rPr lang="en-US" sz="1600" i="1" dirty="0">
+                <a:latin typeface="+mj-lt"/>
+              </a:rPr>
+              <a:t>We also mark :</a:t>
             </a:r>
           </a:p>
           <a:p>
@@ -22121,49 +22091,37 @@
               <a:defRPr/>
             </a:pPr>
             <a:r>
-              <a:rPr lang="en-US" i="1" dirty="0">
-                <a:latin typeface="+mn-lt"/>
-              </a:rPr>
-              <a:t>which become right-maximal.  </a:t>
-            </a:r>
-            <a:br>
-              <a:rPr lang="en-US" i="1" dirty="0">
-                <a:latin typeface="+mn-lt"/>
-              </a:rPr>
-            </a:br>
-            <a:r>
-              <a:rPr lang="en-US" i="1" dirty="0">
-                <a:latin typeface="+mn-lt"/>
-              </a:rPr>
-              <a:t>We also mark :</a:t>
-            </a:r>
-          </a:p>
-          <a:p>
-            <a:pPr>
-              <a:defRPr/>
-            </a:pPr>
-            <a:r>
-              <a:rPr lang="en-US" i="1" dirty="0">
-                <a:latin typeface="+mn-lt"/>
+              <a:rPr lang="en-US" sz="1600" i="1" dirty="0">
+                <a:latin typeface="+mj-lt"/>
                 <a:sym typeface="Wingdings" pitchFamily="2" charset="2"/>
               </a:rPr>
               <a:t>*    cycle ; definitely a prime path</a:t>
             </a:r>
             <a:br>
-              <a:rPr lang="en-US" i="1" dirty="0">
-                <a:latin typeface="+mn-lt"/>
+              <a:rPr lang="en-US" sz="1600" i="1" dirty="0">
+                <a:latin typeface="+mj-lt"/>
                 <a:sym typeface="Wingdings" pitchFamily="2" charset="2"/>
               </a:rPr>
             </a:br>
             <a:r>
-              <a:rPr lang="en-US" i="1" dirty="0"/>
-              <a:t>!  </a:t>
-            </a:r>
-            <a:r>
-              <a:rPr lang="en-US" i="1" dirty="0">
+              <a:rPr lang="en-US" sz="1600" i="1" dirty="0">
+                <a:latin typeface="+mj-lt"/>
                 <a:sym typeface="Wingdings" pitchFamily="2" charset="2"/>
               </a:rPr>
-              <a:t>  right-maximal, non cycle</a:t>
+              <a:t>x</a:t>
+            </a:r>
+            <a:r>
+              <a:rPr lang="en-US" sz="1600" i="1" dirty="0">
+                <a:latin typeface="+mj-lt"/>
+              </a:rPr>
+              <a:t>  </a:t>
+            </a:r>
+            <a:r>
+              <a:rPr lang="en-US" sz="1600" i="1" dirty="0">
+                <a:latin typeface="+mj-lt"/>
+                <a:sym typeface="Wingdings" pitchFamily="2" charset="2"/>
+              </a:rPr>
+              <a:t> dropped from T</a:t>
             </a:r>
           </a:p>
         </p:txBody>
@@ -22295,7 +22253,7 @@
               <a:rPr lang="en-US" sz="2400" dirty="0">
                 <a:latin typeface="+mn-lt"/>
               </a:rPr>
-              <a:t>[2, 3, 6] !</a:t>
+              <a:t>[2, 3, 6] </a:t>
             </a:r>
           </a:p>
           <a:p>
@@ -22306,7 +22264,7 @@
               <a:rPr lang="en-US" sz="2400" dirty="0">
                 <a:latin typeface="+mn-lt"/>
               </a:rPr>
-              <a:t>[2, 4, 6] !</a:t>
+              <a:t>[2, 4, 6] </a:t>
             </a:r>
           </a:p>
           <a:p>
@@ -22315,9 +22273,15 @@
             </a:pPr>
             <a:r>
               <a:rPr lang="en-US" sz="2400" dirty="0">
+                <a:solidFill>
+                  <a:schemeClr val="accent4">
+                    <a:lumMod val="60000"/>
+                    <a:lumOff val="40000"/>
+                  </a:schemeClr>
+                </a:solidFill>
                 <a:latin typeface="+mn-lt"/>
               </a:rPr>
-              <a:t>[2, 4, 5] !</a:t>
+              <a:t>[2, 4, 5]</a:t>
             </a:r>
           </a:p>
           <a:p>
@@ -22339,7 +22303,7 @@
               <a:rPr lang="en-US" sz="2400" dirty="0">
                 <a:latin typeface="+mn-lt"/>
               </a:rPr>
-              <a:t>[5, 4, 6] !</a:t>
+              <a:t>[5, 4, 6] </a:t>
             </a:r>
           </a:p>
           <a:p>
@@ -22386,8 +22350,139 @@
           <a:lstStyle/>
           <a:p>
             <a:r>
-              <a:rPr lang="en-US" sz="3600" i="1"/>
+              <a:rPr lang="en-US" sz="3600" i="1" dirty="0"/>
               <a:t>S :</a:t>
+            </a:r>
+          </a:p>
+        </p:txBody>
+      </p:sp>
+      <p:sp>
+        <p:nvSpPr>
+          <p:cNvPr id="2" name="TextBox 46">
+            <a:extLst>
+              <a:ext uri="{FF2B5EF4-FFF2-40B4-BE49-F238E27FC236}">
+                <a16:creationId xmlns:a16="http://schemas.microsoft.com/office/drawing/2014/main" id="{FBF88D01-BCC8-8C7D-AB1F-51E77DA2604D}"/>
+              </a:ext>
+            </a:extLst>
+          </p:cNvPr>
+          <p:cNvSpPr txBox="1">
+            <a:spLocks noChangeArrowheads="1"/>
+          </p:cNvSpPr>
+          <p:nvPr/>
+        </p:nvSpPr>
+        <p:spPr bwMode="auto">
+          <a:xfrm>
+            <a:off x="2833688" y="3911878"/>
+            <a:ext cx="723275" cy="646331"/>
+          </a:xfrm>
+          <a:prstGeom prst="rect">
+            <a:avLst/>
+          </a:prstGeom>
+          <a:noFill/>
+          <a:ln w="9525">
+            <a:noFill/>
+            <a:miter lim="800000"/>
+            <a:headEnd/>
+            <a:tailEnd/>
+          </a:ln>
+        </p:spPr>
+        <p:txBody>
+          <a:bodyPr wrap="none">
+            <a:spAutoFit/>
+          </a:bodyPr>
+          <a:lstStyle/>
+          <a:p>
+            <a:r>
+              <a:rPr lang="en-US" sz="3600" i="1" dirty="0"/>
+              <a:t>T :</a:t>
+            </a:r>
+          </a:p>
+        </p:txBody>
+      </p:sp>
+      <p:sp>
+        <p:nvSpPr>
+          <p:cNvPr id="3" name="TextBox 2">
+            <a:extLst>
+              <a:ext uri="{FF2B5EF4-FFF2-40B4-BE49-F238E27FC236}">
+                <a16:creationId xmlns:a16="http://schemas.microsoft.com/office/drawing/2014/main" id="{65033B25-AD19-FDE4-F54A-AE7B3FF9E5F9}"/>
+              </a:ext>
+            </a:extLst>
+          </p:cNvPr>
+          <p:cNvSpPr txBox="1"/>
+          <p:nvPr/>
+        </p:nvSpPr>
+        <p:spPr>
+          <a:xfrm>
+            <a:off x="4198521" y="3963963"/>
+            <a:ext cx="338554" cy="461665"/>
+          </a:xfrm>
+          <a:prstGeom prst="rect">
+            <a:avLst/>
+          </a:prstGeom>
+          <a:noFill/>
+        </p:spPr>
+        <p:txBody>
+          <a:bodyPr wrap="none" rtlCol="0">
+            <a:spAutoFit/>
+          </a:bodyPr>
+          <a:lstStyle/>
+          <a:p>
+            <a:r>
+              <a:rPr lang="en-NL" sz="2400" dirty="0">
+                <a:solidFill>
+                  <a:srgbClr val="FFFF00"/>
+                </a:solidFill>
+              </a:rPr>
+              <a:t>x</a:t>
+            </a:r>
+          </a:p>
+        </p:txBody>
+      </p:sp>
+      <p:sp>
+        <p:nvSpPr>
+          <p:cNvPr id="5" name="TextBox 4">
+            <a:extLst>
+              <a:ext uri="{FF2B5EF4-FFF2-40B4-BE49-F238E27FC236}">
+                <a16:creationId xmlns:a16="http://schemas.microsoft.com/office/drawing/2014/main" id="{66CF70E1-C30A-F9A6-1902-B216A40802A5}"/>
+              </a:ext>
+            </a:extLst>
+          </p:cNvPr>
+          <p:cNvSpPr txBox="1"/>
+          <p:nvPr/>
+        </p:nvSpPr>
+        <p:spPr>
+          <a:xfrm>
+            <a:off x="5818740" y="3665994"/>
+            <a:ext cx="338554" cy="830997"/>
+          </a:xfrm>
+          <a:prstGeom prst="rect">
+            <a:avLst/>
+          </a:prstGeom>
+          <a:noFill/>
+        </p:spPr>
+        <p:txBody>
+          <a:bodyPr wrap="none" rtlCol="0">
+            <a:spAutoFit/>
+          </a:bodyPr>
+          <a:lstStyle/>
+          <a:p>
+            <a:r>
+              <a:rPr lang="en-NL" sz="2400" dirty="0">
+                <a:solidFill>
+                  <a:srgbClr val="FFFF00"/>
+                </a:solidFill>
+              </a:rPr>
+              <a:t>x</a:t>
+            </a:r>
+          </a:p>
+          <a:p>
+            <a:r>
+              <a:rPr lang="en-NL" sz="2400" dirty="0">
+                <a:solidFill>
+                  <a:srgbClr val="FFFF00"/>
+                </a:solidFill>
+              </a:rPr>
+              <a:t>x</a:t>
             </a:r>
           </a:p>
         </p:txBody>
@@ -22444,15 +22539,33 @@
                                   </p:childTnLst>
                                 </p:cTn>
                               </p:par>
+                            </p:childTnLst>
+                          </p:cTn>
+                        </p:par>
+                      </p:childTnLst>
+                    </p:cTn>
+                  </p:par>
+                  <p:par>
+                    <p:cTn id="7" fill="hold">
+                      <p:stCondLst>
+                        <p:cond delay="indefinite"/>
+                      </p:stCondLst>
+                      <p:childTnLst>
+                        <p:par>
+                          <p:cTn id="8" fill="hold">
+                            <p:stCondLst>
+                              <p:cond delay="0"/>
+                            </p:stCondLst>
+                            <p:childTnLst>
                               <p:par>
-                                <p:cTn id="7" presetID="1" presetClass="entr" presetSubtype="0" fill="hold" grpId="0" nodeType="withEffect">
+                                <p:cTn id="9" presetID="1" presetClass="entr" presetSubtype="0" fill="hold" grpId="0" nodeType="clickEffect">
                                   <p:stCondLst>
                                     <p:cond delay="0"/>
                                   </p:stCondLst>
                                   <p:childTnLst>
                                     <p:set>
                                       <p:cBhvr>
-                                        <p:cTn id="8" dur="1" fill="hold">
+                                        <p:cTn id="10" dur="1" fill="hold">
                                           <p:stCondLst>
                                             <p:cond delay="0"/>
                                           </p:stCondLst>
@@ -22478,26 +22591,71 @@
                     </p:cTn>
                   </p:par>
                   <p:par>
-                    <p:cTn id="9" fill="hold">
+                    <p:cTn id="11" fill="hold">
                       <p:stCondLst>
                         <p:cond delay="indefinite"/>
                       </p:stCondLst>
                       <p:childTnLst>
                         <p:par>
-                          <p:cTn id="10" fill="hold">
+                          <p:cTn id="12" fill="hold">
                             <p:stCondLst>
                               <p:cond delay="0"/>
                             </p:stCondLst>
                             <p:childTnLst>
                               <p:par>
-                                <p:cTn id="11" presetID="1" presetClass="entr" presetSubtype="0" fill="hold" grpId="0" nodeType="clickEffect">
+                                <p:cTn id="13" presetID="1" presetClass="entr" presetSubtype="0" fill="hold" grpId="0" nodeType="clickEffect">
                                   <p:stCondLst>
                                     <p:cond delay="0"/>
                                   </p:stCondLst>
                                   <p:childTnLst>
                                     <p:set>
                                       <p:cBhvr>
-                                        <p:cTn id="12" dur="1" fill="hold">
+                                        <p:cTn id="14" dur="1" fill="hold">
+                                          <p:stCondLst>
+                                            <p:cond delay="0"/>
+                                          </p:stCondLst>
+                                        </p:cTn>
+                                        <p:tgtEl>
+                                          <p:spTgt spid="3"/>
+                                        </p:tgtEl>
+                                        <p:attrNameLst>
+                                          <p:attrName>style.visibility</p:attrName>
+                                        </p:attrNameLst>
+                                      </p:cBhvr>
+                                      <p:to>
+                                        <p:strVal val="visible"/>
+                                      </p:to>
+                                    </p:set>
+                                  </p:childTnLst>
+                                </p:cTn>
+                              </p:par>
+                            </p:childTnLst>
+                          </p:cTn>
+                        </p:par>
+                      </p:childTnLst>
+                    </p:cTn>
+                  </p:par>
+                  <p:par>
+                    <p:cTn id="15" fill="hold">
+                      <p:stCondLst>
+                        <p:cond delay="indefinite"/>
+                      </p:stCondLst>
+                      <p:childTnLst>
+                        <p:par>
+                          <p:cTn id="16" fill="hold">
+                            <p:stCondLst>
+                              <p:cond delay="0"/>
+                            </p:stCondLst>
+                            <p:childTnLst>
+                              <p:par>
+                                <p:cTn id="17" presetID="1" presetClass="entr" presetSubtype="0" fill="hold" grpId="0" nodeType="clickEffect">
+                                  <p:stCondLst>
+                                    <p:cond delay="0"/>
+                                  </p:stCondLst>
+                                  <p:childTnLst>
+                                    <p:set>
+                                      <p:cBhvr>
+                                        <p:cTn id="18" dur="1" fill="hold">
                                           <p:stCondLst>
                                             <p:cond delay="0"/>
                                           </p:stCondLst>
@@ -22516,21 +22674,84 @@
                                   </p:childTnLst>
                                 </p:cTn>
                               </p:par>
+                            </p:childTnLst>
+                          </p:cTn>
+                        </p:par>
+                      </p:childTnLst>
+                    </p:cTn>
+                  </p:par>
+                  <p:par>
+                    <p:cTn id="19" fill="hold">
+                      <p:stCondLst>
+                        <p:cond delay="indefinite"/>
+                      </p:stCondLst>
+                      <p:childTnLst>
+                        <p:par>
+                          <p:cTn id="20" fill="hold">
+                            <p:stCondLst>
+                              <p:cond delay="0"/>
+                            </p:stCondLst>
+                            <p:childTnLst>
                               <p:par>
-                                <p:cTn id="13" presetID="1" presetClass="entr" presetSubtype="0" fill="hold" grpId="0" nodeType="withEffect">
+                                <p:cTn id="21" presetID="1" presetClass="entr" presetSubtype="0" fill="hold" grpId="0" nodeType="clickEffect">
                                   <p:stCondLst>
                                     <p:cond delay="0"/>
                                   </p:stCondLst>
                                   <p:childTnLst>
                                     <p:set>
                                       <p:cBhvr>
-                                        <p:cTn id="14" dur="1" fill="hold">
+                                        <p:cTn id="22" dur="1" fill="hold">
                                           <p:stCondLst>
                                             <p:cond delay="0"/>
                                           </p:stCondLst>
                                         </p:cTn>
                                         <p:tgtEl>
                                           <p:spTgt spid="45"/>
+                                        </p:tgtEl>
+                                        <p:attrNameLst>
+                                          <p:attrName>style.visibility</p:attrName>
+                                        </p:attrNameLst>
+                                      </p:cBhvr>
+                                      <p:to>
+                                        <p:strVal val="visible"/>
+                                      </p:to>
+                                    </p:set>
+                                  </p:childTnLst>
+                                </p:cTn>
+                              </p:par>
+                            </p:childTnLst>
+                          </p:cTn>
+                        </p:par>
+                      </p:childTnLst>
+                    </p:cTn>
+                  </p:par>
+                  <p:par>
+                    <p:cTn id="23" fill="hold">
+                      <p:stCondLst>
+                        <p:cond delay="indefinite"/>
+                      </p:stCondLst>
+                      <p:childTnLst>
+                        <p:par>
+                          <p:cTn id="24" fill="hold">
+                            <p:stCondLst>
+                              <p:cond delay="0"/>
+                            </p:stCondLst>
+                            <p:childTnLst>
+                              <p:par>
+                                <p:cTn id="25" presetID="1" presetClass="entr" presetSubtype="0" fill="hold" grpId="0" nodeType="clickEffect">
+                                  <p:stCondLst>
+                                    <p:cond delay="0"/>
+                                  </p:stCondLst>
+                                  <p:childTnLst>
+                                    <p:set>
+                                      <p:cBhvr>
+                                        <p:cTn id="26" dur="1" fill="hold">
+                                          <p:stCondLst>
+                                            <p:cond delay="0"/>
+                                          </p:stCondLst>
+                                        </p:cTn>
+                                        <p:tgtEl>
+                                          <p:spTgt spid="5"/>
                                         </p:tgtEl>
                                         <p:attrNameLst>
                                           <p:attrName>style.visibility</p:attrName>
@@ -22575,6 +22796,8 @@
       <p:bldP spid="43" grpId="0" animBg="1"/>
       <p:bldP spid="38" grpId="0" animBg="1" autoUpdateAnimBg="0"/>
       <p:bldP spid="44" grpId="0" animBg="1"/>
+      <p:bldP spid="3" grpId="0"/>
+      <p:bldP spid="5" grpId="0"/>
     </p:bldLst>
   </p:timing>
 </p:sld>
@@ -23836,7 +24059,7 @@
               <a:rPr lang="en-US" sz="2400" dirty="0">
                 <a:latin typeface="+mn-lt"/>
               </a:rPr>
-              <a:t>[2, 3, 6] !</a:t>
+              <a:t>[2, 3, 6] </a:t>
             </a:r>
           </a:p>
           <a:p>
@@ -23847,7 +24070,7 @@
               <a:rPr lang="en-US" sz="2400" dirty="0">
                 <a:latin typeface="+mn-lt"/>
               </a:rPr>
-              <a:t>[2, 4, 6] !</a:t>
+              <a:t>[2, 4, 6] </a:t>
             </a:r>
           </a:p>
           <a:p>
@@ -23858,7 +24081,7 @@
               <a:rPr lang="en-US" sz="2400" dirty="0">
                 <a:latin typeface="+mn-lt"/>
               </a:rPr>
-              <a:t>[2, 4, 5] !</a:t>
+              <a:t>[2, 4, 5] </a:t>
             </a:r>
           </a:p>
           <a:p>
@@ -23880,7 +24103,7 @@
               <a:rPr lang="en-US" sz="2400" dirty="0">
                 <a:latin typeface="+mn-lt"/>
               </a:rPr>
-              <a:t>[5, 4, 6] !</a:t>
+              <a:t>[5, 4, 6] </a:t>
             </a:r>
           </a:p>
           <a:p>
@@ -23960,7 +24183,7 @@
               <a:rPr lang="en-US" sz="2400" dirty="0">
                 <a:latin typeface="+mn-lt"/>
               </a:rPr>
-              <a:t>[0, 2, 3, 6] !</a:t>
+              <a:t>[0, 2, 3, 6] </a:t>
             </a:r>
           </a:p>
           <a:p>
@@ -23971,7 +24194,7 @@
               <a:rPr lang="en-US" sz="2400" dirty="0">
                 <a:latin typeface="+mn-lt"/>
               </a:rPr>
-              <a:t>[0, 2, 4, 6] !</a:t>
+              <a:t>[0, 2, 4, 6] </a:t>
             </a:r>
           </a:p>
           <a:p>
@@ -23982,7 +24205,7 @@
               <a:rPr lang="en-US" sz="2400" dirty="0">
                 <a:latin typeface="+mn-lt"/>
               </a:rPr>
-              <a:t>[0, 2, 4, 5] !</a:t>
+              <a:t>[0, 2, 4, 5] </a:t>
             </a:r>
           </a:p>
           <a:p>
@@ -23993,7 +24216,7 @@
               <a:rPr lang="en-US" sz="2400" dirty="0">
                 <a:latin typeface="+mn-lt"/>
               </a:rPr>
-              <a:t>[1, 2, 3, 6] !</a:t>
+              <a:t>[1, 2, 3, 6] </a:t>
             </a:r>
           </a:p>
           <a:p>
@@ -24004,7 +24227,7 @@
               <a:rPr lang="en-US" sz="2400" dirty="0">
                 <a:latin typeface="+mn-lt"/>
               </a:rPr>
-              <a:t>[1, 2, 4, 5] !</a:t>
+              <a:t>[1, 2, 4, 5] </a:t>
             </a:r>
           </a:p>
           <a:p>
@@ -24015,7 +24238,7 @@
               <a:rPr lang="en-US" sz="2400" dirty="0">
                 <a:latin typeface="+mn-lt"/>
               </a:rPr>
-              <a:t>[1, 2, 4, 6] !</a:t>
+              <a:t>[1, 2, 4, 6] </a:t>
             </a:r>
           </a:p>
         </p:txBody>
@@ -24067,7 +24290,7 @@
               <a:rPr lang="en-US" sz="2400" dirty="0">
                 <a:latin typeface="+mn-lt"/>
               </a:rPr>
-              <a:t>[0, 1, 2, 3, 6] !</a:t>
+              <a:t>[0, 1, 2, 3, 6] </a:t>
             </a:r>
           </a:p>
           <a:p>
@@ -24078,7 +24301,7 @@
               <a:rPr lang="en-US" sz="2400" dirty="0">
                 <a:latin typeface="+mn-lt"/>
               </a:rPr>
-              <a:t>[0, 1, 2, 4, 6] !</a:t>
+              <a:t>[0, 1, 2, 4, 6] </a:t>
             </a:r>
           </a:p>
           <a:p>
@@ -24089,7 +24312,7 @@
               <a:rPr lang="en-US" sz="2400" dirty="0">
                 <a:latin typeface="+mn-lt"/>
               </a:rPr>
-              <a:t>[0, 1, 2, 4, 5] !</a:t>
+              <a:t>[0, 1, 2, 4, 5] </a:t>
             </a:r>
           </a:p>
         </p:txBody>
@@ -24102,7 +24325,7 @@
         </p:nvSpPr>
         <p:spPr>
           <a:xfrm>
-            <a:off x="6215063" y="3071813"/>
+            <a:off x="6300210" y="3099417"/>
             <a:ext cx="2486025" cy="830262"/>
           </a:xfrm>
           <a:prstGeom prst="rect">
@@ -24144,8 +24367,8 @@
         </p:nvSpPr>
         <p:spPr bwMode="auto">
           <a:xfrm>
-            <a:off x="4716463" y="5013325"/>
-            <a:ext cx="4032250" cy="1477328"/>
+            <a:off x="4654550" y="5114820"/>
+            <a:ext cx="4032250" cy="923330"/>
           </a:xfrm>
           <a:prstGeom prst="rect">
             <a:avLst/>
@@ -24166,396 +24389,140 @@
           <a:p>
             <a:r>
               <a:rPr lang="en-US" dirty="0"/>
-              <a:t>Prime paths = </a:t>
-            </a:r>
-          </a:p>
-          <a:p>
-            <a:pPr>
-              <a:buFont typeface="Arial" charset="0"/>
-              <a:buChar char="•"/>
-            </a:pPr>
-            <a:r>
-              <a:rPr lang="en-US" dirty="0"/>
-              <a:t> all the (*) paths, plus</a:t>
-            </a:r>
-          </a:p>
-          <a:p>
-            <a:pPr>
-              <a:buFont typeface="Arial" charset="0"/>
-              <a:buChar char="•"/>
-            </a:pPr>
-            <a:r>
-              <a:rPr lang="en-US" dirty="0"/>
-              <a:t> non-cyclic right-max simple paths which are not a </a:t>
-            </a:r>
-            <a:r>
-              <a:rPr lang="en-US" dirty="0" err="1"/>
-              <a:t>subpath</a:t>
-            </a:r>
-            <a:r>
-              <a:rPr lang="en-US" dirty="0"/>
-              <a:t> of another right-max simple path.</a:t>
-            </a:r>
-          </a:p>
-        </p:txBody>
-      </p:sp>
-      <p:sp>
-        <p:nvSpPr>
-          <p:cNvPr id="43" name="Left Arrow 42"/>
-          <p:cNvSpPr/>
+              <a:t>What remain in reds/T (those without x) are maximal simple paths = prime paths.</a:t>
+            </a:r>
+          </a:p>
+        </p:txBody>
+      </p:sp>
+      <p:sp>
+        <p:nvSpPr>
+          <p:cNvPr id="2" name="TextBox 1">
+            <a:extLst>
+              <a:ext uri="{FF2B5EF4-FFF2-40B4-BE49-F238E27FC236}">
+                <a16:creationId xmlns:a16="http://schemas.microsoft.com/office/drawing/2014/main" id="{D751C4ED-B161-04C1-04CA-70FF600D7F98}"/>
+              </a:ext>
+            </a:extLst>
+          </p:cNvPr>
+          <p:cNvSpPr txBox="1"/>
           <p:nvPr/>
         </p:nvSpPr>
         <p:spPr>
           <a:xfrm>
-            <a:off x="8604250" y="1916113"/>
-            <a:ext cx="360363" cy="217487"/>
-          </a:xfrm>
-          <a:prstGeom prst="leftArrow">
+            <a:off x="3847200" y="3591491"/>
+            <a:ext cx="317716" cy="1569660"/>
+          </a:xfrm>
+          <a:prstGeom prst="rect">
             <a:avLst/>
           </a:prstGeom>
-        </p:spPr>
-        <p:style>
-          <a:lnRef idx="2">
-            <a:schemeClr val="accent5"/>
-          </a:lnRef>
-          <a:fillRef idx="1">
-            <a:schemeClr val="lt1"/>
-          </a:fillRef>
-          <a:effectRef idx="0">
-            <a:schemeClr val="accent5"/>
-          </a:effectRef>
-          <a:fontRef idx="minor">
-            <a:schemeClr val="dk1"/>
-          </a:fontRef>
-        </p:style>
-        <p:txBody>
-          <a:bodyPr anchor="ctr"/>
-          <a:lstStyle/>
-          <a:p>
-            <a:pPr algn="ctr">
-              <a:defRPr/>
-            </a:pPr>
-            <a:endParaRPr lang="en-US"/>
-          </a:p>
-        </p:txBody>
-      </p:sp>
-      <p:sp>
-        <p:nvSpPr>
-          <p:cNvPr id="44" name="Left Arrow 43"/>
-          <p:cNvSpPr/>
+          <a:noFill/>
+        </p:spPr>
+        <p:txBody>
+          <a:bodyPr wrap="none" rtlCol="0">
+            <a:spAutoFit/>
+          </a:bodyPr>
+          <a:lstStyle/>
+          <a:p>
+            <a:r>
+              <a:rPr lang="en-NL" sz="2400" dirty="0">
+                <a:solidFill>
+                  <a:srgbClr val="FFFF00"/>
+                </a:solidFill>
+                <a:latin typeface="+mj-lt"/>
+              </a:rPr>
+              <a:t>x</a:t>
+            </a:r>
+          </a:p>
+          <a:p>
+            <a:r>
+              <a:rPr lang="en-NL" sz="2400" dirty="0">
+                <a:solidFill>
+                  <a:srgbClr val="FFFF00"/>
+                </a:solidFill>
+                <a:latin typeface="+mj-lt"/>
+              </a:rPr>
+              <a:t>x</a:t>
+            </a:r>
+          </a:p>
+          <a:p>
+            <a:r>
+              <a:rPr lang="en-NL" sz="2400" dirty="0">
+                <a:solidFill>
+                  <a:srgbClr val="FFFF00"/>
+                </a:solidFill>
+                <a:latin typeface="+mj-lt"/>
+              </a:rPr>
+              <a:t>x</a:t>
+            </a:r>
+          </a:p>
+          <a:p>
+            <a:endParaRPr lang="en-NL" sz="2400" dirty="0">
+              <a:solidFill>
+                <a:srgbClr val="FFFF00"/>
+              </a:solidFill>
+              <a:latin typeface="+mj-lt"/>
+            </a:endParaRPr>
+          </a:p>
+        </p:txBody>
+      </p:sp>
+      <p:sp>
+        <p:nvSpPr>
+          <p:cNvPr id="4" name="TextBox 3">
+            <a:extLst>
+              <a:ext uri="{FF2B5EF4-FFF2-40B4-BE49-F238E27FC236}">
+                <a16:creationId xmlns:a16="http://schemas.microsoft.com/office/drawing/2014/main" id="{E875DD31-588F-882B-5861-C91730943C05}"/>
+              </a:ext>
+            </a:extLst>
+          </p:cNvPr>
+          <p:cNvSpPr txBox="1"/>
           <p:nvPr/>
         </p:nvSpPr>
         <p:spPr>
           <a:xfrm>
-            <a:off x="8604250" y="2276475"/>
-            <a:ext cx="360363" cy="215900"/>
-          </a:xfrm>
-          <a:prstGeom prst="leftArrow">
+            <a:off x="5982494" y="3560585"/>
+            <a:ext cx="317716" cy="1200329"/>
+          </a:xfrm>
+          <a:prstGeom prst="rect">
             <a:avLst/>
           </a:prstGeom>
-        </p:spPr>
-        <p:style>
-          <a:lnRef idx="2">
-            <a:schemeClr val="accent5"/>
-          </a:lnRef>
-          <a:fillRef idx="1">
-            <a:schemeClr val="lt1"/>
-          </a:fillRef>
-          <a:effectRef idx="0">
-            <a:schemeClr val="accent5"/>
-          </a:effectRef>
-          <a:fontRef idx="minor">
-            <a:schemeClr val="dk1"/>
-          </a:fontRef>
-        </p:style>
-        <p:txBody>
-          <a:bodyPr anchor="ctr"/>
-          <a:lstStyle/>
-          <a:p>
-            <a:pPr algn="ctr">
-              <a:defRPr/>
-            </a:pPr>
-            <a:endParaRPr lang="en-US"/>
-          </a:p>
-        </p:txBody>
-      </p:sp>
-      <p:sp>
-        <p:nvSpPr>
-          <p:cNvPr id="45" name="Left Arrow 44"/>
-          <p:cNvSpPr/>
-          <p:nvPr/>
-        </p:nvSpPr>
-        <p:spPr>
-          <a:xfrm>
-            <a:off x="8604250" y="2636838"/>
-            <a:ext cx="360363" cy="215900"/>
-          </a:xfrm>
-          <a:prstGeom prst="leftArrow">
-            <a:avLst/>
-          </a:prstGeom>
-        </p:spPr>
-        <p:style>
-          <a:lnRef idx="2">
-            <a:schemeClr val="accent5"/>
-          </a:lnRef>
-          <a:fillRef idx="1">
-            <a:schemeClr val="lt1"/>
-          </a:fillRef>
-          <a:effectRef idx="0">
-            <a:schemeClr val="accent5"/>
-          </a:effectRef>
-          <a:fontRef idx="minor">
-            <a:schemeClr val="dk1"/>
-          </a:fontRef>
-        </p:style>
-        <p:txBody>
-          <a:bodyPr anchor="ctr"/>
-          <a:lstStyle/>
-          <a:p>
-            <a:pPr algn="ctr">
-              <a:defRPr/>
-            </a:pPr>
-            <a:endParaRPr lang="en-US"/>
-          </a:p>
-        </p:txBody>
-      </p:sp>
-      <p:sp>
-        <p:nvSpPr>
-          <p:cNvPr id="46" name="Left Arrow 45"/>
-          <p:cNvSpPr/>
-          <p:nvPr/>
-        </p:nvSpPr>
-        <p:spPr>
-          <a:xfrm>
-            <a:off x="4284663" y="4797425"/>
-            <a:ext cx="358775" cy="215900"/>
-          </a:xfrm>
-          <a:prstGeom prst="leftArrow">
-            <a:avLst/>
-          </a:prstGeom>
-        </p:spPr>
-        <p:style>
-          <a:lnRef idx="2">
-            <a:schemeClr val="accent5"/>
-          </a:lnRef>
-          <a:fillRef idx="1">
-            <a:schemeClr val="lt1"/>
-          </a:fillRef>
-          <a:effectRef idx="0">
-            <a:schemeClr val="accent5"/>
-          </a:effectRef>
-          <a:fontRef idx="minor">
-            <a:schemeClr val="dk1"/>
-          </a:fontRef>
-        </p:style>
-        <p:txBody>
-          <a:bodyPr anchor="ctr"/>
-          <a:lstStyle/>
-          <a:p>
-            <a:pPr algn="ctr">
-              <a:defRPr/>
-            </a:pPr>
-            <a:endParaRPr lang="en-US"/>
-          </a:p>
-        </p:txBody>
-      </p:sp>
-      <p:sp>
-        <p:nvSpPr>
-          <p:cNvPr id="47" name="Left Arrow 46"/>
-          <p:cNvSpPr/>
-          <p:nvPr/>
-        </p:nvSpPr>
-        <p:spPr>
-          <a:xfrm>
-            <a:off x="4284663" y="5516563"/>
-            <a:ext cx="358775" cy="215900"/>
-          </a:xfrm>
-          <a:prstGeom prst="leftArrow">
-            <a:avLst/>
-          </a:prstGeom>
-        </p:spPr>
-        <p:style>
-          <a:lnRef idx="2">
-            <a:schemeClr val="accent5"/>
-          </a:lnRef>
-          <a:fillRef idx="1">
-            <a:schemeClr val="lt1"/>
-          </a:fillRef>
-          <a:effectRef idx="0">
-            <a:schemeClr val="accent5"/>
-          </a:effectRef>
-          <a:fontRef idx="minor">
-            <a:schemeClr val="dk1"/>
-          </a:fontRef>
-        </p:style>
-        <p:txBody>
-          <a:bodyPr anchor="ctr"/>
-          <a:lstStyle/>
-          <a:p>
-            <a:pPr algn="ctr">
-              <a:defRPr/>
-            </a:pPr>
-            <a:endParaRPr lang="en-US"/>
-          </a:p>
-        </p:txBody>
-      </p:sp>
-      <p:sp>
-        <p:nvSpPr>
-          <p:cNvPr id="48" name="Left Arrow 47"/>
-          <p:cNvSpPr/>
-          <p:nvPr/>
-        </p:nvSpPr>
-        <p:spPr>
-          <a:xfrm>
-            <a:off x="4284663" y="5157788"/>
-            <a:ext cx="358775" cy="215900"/>
-          </a:xfrm>
-          <a:prstGeom prst="leftArrow">
-            <a:avLst/>
-          </a:prstGeom>
-        </p:spPr>
-        <p:style>
-          <a:lnRef idx="2">
-            <a:schemeClr val="accent5"/>
-          </a:lnRef>
-          <a:fillRef idx="1">
-            <a:schemeClr val="lt1"/>
-          </a:fillRef>
-          <a:effectRef idx="0">
-            <a:schemeClr val="accent5"/>
-          </a:effectRef>
-          <a:fontRef idx="minor">
-            <a:schemeClr val="dk1"/>
-          </a:fontRef>
-        </p:style>
-        <p:txBody>
-          <a:bodyPr anchor="ctr"/>
-          <a:lstStyle/>
-          <a:p>
-            <a:pPr algn="ctr">
-              <a:defRPr/>
-            </a:pPr>
-            <a:endParaRPr lang="en-US"/>
-          </a:p>
-        </p:txBody>
-      </p:sp>
-      <p:sp>
-        <p:nvSpPr>
-          <p:cNvPr id="49" name="Left Arrow 48"/>
-          <p:cNvSpPr/>
-          <p:nvPr/>
-        </p:nvSpPr>
-        <p:spPr>
-          <a:xfrm>
-            <a:off x="6227861" y="2564904"/>
-            <a:ext cx="360363" cy="217487"/>
-          </a:xfrm>
-          <a:prstGeom prst="leftArrow">
-            <a:avLst/>
-          </a:prstGeom>
-        </p:spPr>
-        <p:style>
-          <a:lnRef idx="2">
-            <a:schemeClr val="accent5"/>
-          </a:lnRef>
-          <a:fillRef idx="1">
-            <a:schemeClr val="lt1"/>
-          </a:fillRef>
-          <a:effectRef idx="0">
-            <a:schemeClr val="accent5"/>
-          </a:effectRef>
-          <a:fontRef idx="minor">
-            <a:schemeClr val="dk1"/>
-          </a:fontRef>
-        </p:style>
-        <p:txBody>
-          <a:bodyPr anchor="ctr"/>
-          <a:lstStyle/>
-          <a:p>
-            <a:pPr algn="ctr">
-              <a:defRPr/>
-            </a:pPr>
-            <a:endParaRPr lang="en-US"/>
-          </a:p>
-        </p:txBody>
-      </p:sp>
-      <p:sp>
-        <p:nvSpPr>
-          <p:cNvPr id="50" name="Left Arrow 49"/>
-          <p:cNvSpPr/>
-          <p:nvPr/>
-        </p:nvSpPr>
-        <p:spPr>
-          <a:xfrm>
-            <a:off x="6227861" y="2925266"/>
-            <a:ext cx="360363" cy="215900"/>
-          </a:xfrm>
-          <a:prstGeom prst="leftArrow">
-            <a:avLst/>
-          </a:prstGeom>
-        </p:spPr>
-        <p:style>
-          <a:lnRef idx="2">
-            <a:schemeClr val="accent5"/>
-          </a:lnRef>
-          <a:fillRef idx="1">
-            <a:schemeClr val="lt1"/>
-          </a:fillRef>
-          <a:effectRef idx="0">
-            <a:schemeClr val="accent5"/>
-          </a:effectRef>
-          <a:fontRef idx="minor">
-            <a:schemeClr val="dk1"/>
-          </a:fontRef>
-        </p:style>
-        <p:txBody>
-          <a:bodyPr anchor="ctr"/>
-          <a:lstStyle/>
-          <a:p>
-            <a:pPr algn="ctr">
-              <a:defRPr/>
-            </a:pPr>
-            <a:endParaRPr lang="en-US"/>
-          </a:p>
-        </p:txBody>
-      </p:sp>
-      <p:sp>
-        <p:nvSpPr>
-          <p:cNvPr id="51" name="Left Arrow 50"/>
-          <p:cNvSpPr/>
-          <p:nvPr/>
-        </p:nvSpPr>
-        <p:spPr>
-          <a:xfrm>
-            <a:off x="6227861" y="3285629"/>
-            <a:ext cx="360363" cy="215900"/>
-          </a:xfrm>
-          <a:prstGeom prst="leftArrow">
-            <a:avLst/>
-          </a:prstGeom>
-        </p:spPr>
-        <p:style>
-          <a:lnRef idx="2">
-            <a:schemeClr val="accent5"/>
-          </a:lnRef>
-          <a:fillRef idx="1">
-            <a:schemeClr val="lt1"/>
-          </a:fillRef>
-          <a:effectRef idx="0">
-            <a:schemeClr val="accent5"/>
-          </a:effectRef>
-          <a:fontRef idx="minor">
-            <a:schemeClr val="dk1"/>
-          </a:fontRef>
-        </p:style>
-        <p:txBody>
-          <a:bodyPr anchor="ctr"/>
-          <a:lstStyle/>
-          <a:p>
-            <a:pPr algn="ctr">
-              <a:defRPr/>
-            </a:pPr>
-            <a:endParaRPr lang="en-US"/>
+          <a:noFill/>
+        </p:spPr>
+        <p:txBody>
+          <a:bodyPr wrap="none" rtlCol="0">
+            <a:spAutoFit/>
+          </a:bodyPr>
+          <a:lstStyle/>
+          <a:p>
+            <a:r>
+              <a:rPr lang="en-NL" sz="2400" dirty="0">
+                <a:solidFill>
+                  <a:srgbClr val="FFFF00"/>
+                </a:solidFill>
+                <a:latin typeface="+mj-lt"/>
+              </a:rPr>
+              <a:t>x</a:t>
+            </a:r>
+          </a:p>
+          <a:p>
+            <a:r>
+              <a:rPr lang="en-NL" sz="2400" dirty="0">
+                <a:solidFill>
+                  <a:srgbClr val="FFFF00"/>
+                </a:solidFill>
+                <a:latin typeface="+mj-lt"/>
+              </a:rPr>
+              <a:t>x</a:t>
+            </a:r>
+          </a:p>
+          <a:p>
+            <a:r>
+              <a:rPr lang="en-NL" sz="2400" dirty="0">
+                <a:solidFill>
+                  <a:srgbClr val="FFFF00"/>
+                </a:solidFill>
+                <a:latin typeface="+mj-lt"/>
+              </a:rPr>
+              <a:t>x</a:t>
+            </a:r>
           </a:p>
         </p:txBody>
       </p:sp>
@@ -24585,7 +24552,7 @@
                             </p:stCondLst>
                             <p:childTnLst>
                               <p:par>
-                                <p:cTn id="5" presetID="9" presetClass="entr" presetSubtype="0" fill="hold" grpId="0" nodeType="clickEffect">
+                                <p:cTn id="5" presetID="1" presetClass="entr" presetSubtype="0" fill="hold" grpId="0" nodeType="clickEffect">
                                   <p:stCondLst>
                                     <p:cond delay="0"/>
                                   </p:stCondLst>
@@ -24593,6 +24560,141 @@
                                     <p:set>
                                       <p:cBhvr>
                                         <p:cTn id="6" dur="1" fill="hold">
+                                          <p:stCondLst>
+                                            <p:cond delay="0"/>
+                                          </p:stCondLst>
+                                        </p:cTn>
+                                        <p:tgtEl>
+                                          <p:spTgt spid="37"/>
+                                        </p:tgtEl>
+                                        <p:attrNameLst>
+                                          <p:attrName>style.visibility</p:attrName>
+                                        </p:attrNameLst>
+                                      </p:cBhvr>
+                                      <p:to>
+                                        <p:strVal val="visible"/>
+                                      </p:to>
+                                    </p:set>
+                                  </p:childTnLst>
+                                </p:cTn>
+                              </p:par>
+                            </p:childTnLst>
+                          </p:cTn>
+                        </p:par>
+                      </p:childTnLst>
+                    </p:cTn>
+                  </p:par>
+                  <p:par>
+                    <p:cTn id="7" fill="hold">
+                      <p:stCondLst>
+                        <p:cond delay="indefinite"/>
+                      </p:stCondLst>
+                      <p:childTnLst>
+                        <p:par>
+                          <p:cTn id="8" fill="hold">
+                            <p:stCondLst>
+                              <p:cond delay="0"/>
+                            </p:stCondLst>
+                            <p:childTnLst>
+                              <p:par>
+                                <p:cTn id="9" presetID="1" presetClass="entr" presetSubtype="0" fill="hold" grpId="0" nodeType="clickEffect">
+                                  <p:stCondLst>
+                                    <p:cond delay="0"/>
+                                  </p:stCondLst>
+                                  <p:childTnLst>
+                                    <p:set>
+                                      <p:cBhvr>
+                                        <p:cTn id="10" dur="1" fill="hold">
+                                          <p:stCondLst>
+                                            <p:cond delay="0"/>
+                                          </p:stCondLst>
+                                        </p:cTn>
+                                        <p:tgtEl>
+                                          <p:spTgt spid="39"/>
+                                        </p:tgtEl>
+                                        <p:attrNameLst>
+                                          <p:attrName>style.visibility</p:attrName>
+                                        </p:attrNameLst>
+                                      </p:cBhvr>
+                                      <p:to>
+                                        <p:strVal val="visible"/>
+                                      </p:to>
+                                    </p:set>
+                                  </p:childTnLst>
+                                </p:cTn>
+                              </p:par>
+                            </p:childTnLst>
+                          </p:cTn>
+                        </p:par>
+                      </p:childTnLst>
+                    </p:cTn>
+                  </p:par>
+                  <p:par>
+                    <p:cTn id="11" fill="hold">
+                      <p:stCondLst>
+                        <p:cond delay="indefinite"/>
+                      </p:stCondLst>
+                      <p:childTnLst>
+                        <p:par>
+                          <p:cTn id="12" fill="hold">
+                            <p:stCondLst>
+                              <p:cond delay="0"/>
+                            </p:stCondLst>
+                            <p:childTnLst>
+                              <p:par>
+                                <p:cTn id="13" presetID="1" presetClass="entr" presetSubtype="0" fill="hold" grpId="0" nodeType="clickEffect">
+                                  <p:stCondLst>
+                                    <p:cond delay="0"/>
+                                  </p:stCondLst>
+                                  <p:childTnLst>
+                                    <p:set>
+                                      <p:cBhvr>
+                                        <p:cTn id="14" dur="1" fill="hold">
+                                          <p:stCondLst>
+                                            <p:cond delay="0"/>
+                                          </p:stCondLst>
+                                        </p:cTn>
+                                        <p:tgtEl>
+                                          <p:spTgt spid="2"/>
+                                        </p:tgtEl>
+                                        <p:attrNameLst>
+                                          <p:attrName>style.visibility</p:attrName>
+                                        </p:attrNameLst>
+                                      </p:cBhvr>
+                                      <p:to>
+                                        <p:strVal val="visible"/>
+                                      </p:to>
+                                    </p:set>
+                                  </p:childTnLst>
+                                </p:cTn>
+                              </p:par>
+                            </p:childTnLst>
+                          </p:cTn>
+                        </p:par>
+                      </p:childTnLst>
+                    </p:cTn>
+                  </p:par>
+                  <p:par>
+                    <p:cTn id="15" fill="hold">
+                      <p:stCondLst>
+                        <p:cond delay="indefinite"/>
+                      </p:stCondLst>
+                      <p:childTnLst>
+                        <p:par>
+                          <p:cTn id="16" fill="hold">
+                            <p:stCondLst>
+                              <p:cond delay="0"/>
+                            </p:stCondLst>
+                            <p:childTnLst>
+                              <p:par>
+                                <p:cTn id="17" presetID="1" presetClass="entr" presetSubtype="0" fill="hold" grpId="0" nodeType="clickEffect">
+                                  <p:stCondLst>
+                                    <p:cond delay="0"/>
+                                  </p:stCondLst>
+                                  <p:childTnLst>
+                                    <p:set>
+                                      <p:cBhvr>
+                                        <p:cTn id="18" dur="1" fill="hold">
                                           <p:stCondLst>
                                             <p:cond delay="0"/>
                                           </p:stCondLst>
@@ -24608,26 +24710,81 @@
                                         <p:strVal val="visible"/>
                                       </p:to>
                                     </p:set>
-                                    <p:animEffect transition="in" filter="dissolve">
-                                      <p:cBhvr>
-                                        <p:cTn id="7" dur="500"/>
-                                        <p:tgtEl>
-                                          <p:spTgt spid="40"/>
-                                        </p:tgtEl>
-                                      </p:cBhvr>
-                                    </p:animEffect>
                                   </p:childTnLst>
                                 </p:cTn>
                               </p:par>
+                            </p:childTnLst>
+                          </p:cTn>
+                        </p:par>
+                      </p:childTnLst>
+                    </p:cTn>
+                  </p:par>
+                  <p:par>
+                    <p:cTn id="19" fill="hold">
+                      <p:stCondLst>
+                        <p:cond delay="indefinite"/>
+                      </p:stCondLst>
+                      <p:childTnLst>
+                        <p:par>
+                          <p:cTn id="20" fill="hold">
+                            <p:stCondLst>
+                              <p:cond delay="0"/>
+                            </p:stCondLst>
+                            <p:childTnLst>
                               <p:par>
-                                <p:cTn id="8" presetID="1" presetClass="entr" presetSubtype="0" fill="hold" grpId="0" nodeType="withEffect">
+                                <p:cTn id="21" presetID="1" presetClass="entr" presetSubtype="0" fill="hold" grpId="0" nodeType="clickEffect">
                                   <p:stCondLst>
                                     <p:cond delay="0"/>
                                   </p:stCondLst>
                                   <p:childTnLst>
                                     <p:set>
                                       <p:cBhvr>
-                                        <p:cTn id="9" dur="1" fill="hold">
+                                        <p:cTn id="22" dur="1" fill="hold">
+                                          <p:stCondLst>
+                                            <p:cond delay="0"/>
+                                          </p:stCondLst>
+                                        </p:cTn>
+                                        <p:tgtEl>
+                                          <p:spTgt spid="4"/>
+                                        </p:tgtEl>
+                                        <p:attrNameLst>
+                                          <p:attrName>style.visibility</p:attrName>
+                                        </p:attrNameLst>
+                                      </p:cBhvr>
+                                      <p:to>
+                                        <p:strVal val="visible"/>
+                                      </p:to>
+                                    </p:set>
+                                  </p:childTnLst>
+                                </p:cTn>
+                              </p:par>
+                            </p:childTnLst>
+                          </p:cTn>
+                        </p:par>
+                      </p:childTnLst>
+                    </p:cTn>
+                  </p:par>
+                  <p:par>
+                    <p:cTn id="23" fill="hold">
+                      <p:stCondLst>
+                        <p:cond delay="indefinite"/>
+                      </p:stCondLst>
+                      <p:childTnLst>
+                        <p:par>
+                          <p:cTn id="24" fill="hold">
+                            <p:stCondLst>
+                              <p:cond delay="0"/>
+                            </p:stCondLst>
+                            <p:childTnLst>
+                              <p:par>
+                                <p:cTn id="25" presetID="1" presetClass="entr" presetSubtype="0" fill="hold" grpId="0" nodeType="clickEffect">
+                                  <p:stCondLst>
+                                    <p:cond delay="0"/>
+                                  </p:stCondLst>
+                                  <p:childTnLst>
+                                    <p:set>
+                                      <p:cBhvr>
+                                        <p:cTn id="26" dur="1" fill="hold">
                                           <p:stCondLst>
                                             <p:cond delay="0"/>
                                           </p:stCondLst>
@@ -24647,363 +24804,20 @@
                                 </p:cTn>
                               </p:par>
                               <p:par>
-                                <p:cTn id="10" presetID="1" presetClass="entr" presetSubtype="0" fill="hold" grpId="0" nodeType="withEffect">
+                                <p:cTn id="27" presetID="1" presetClass="entr" presetSubtype="0" fill="hold" grpId="0" nodeType="withEffect">
                                   <p:stCondLst>
                                     <p:cond delay="0"/>
                                   </p:stCondLst>
                                   <p:childTnLst>
                                     <p:set>
                                       <p:cBhvr>
-                                        <p:cTn id="11" dur="1" fill="hold">
+                                        <p:cTn id="28" dur="1" fill="hold">
                                           <p:stCondLst>
                                             <p:cond delay="0"/>
                                           </p:stCondLst>
                                         </p:cTn>
                                         <p:tgtEl>
                                           <p:spTgt spid="42"/>
-                                        </p:tgtEl>
-                                        <p:attrNameLst>
-                                          <p:attrName>style.visibility</p:attrName>
-                                        </p:attrNameLst>
-                                      </p:cBhvr>
-                                      <p:to>
-                                        <p:strVal val="visible"/>
-                                      </p:to>
-                                    </p:set>
-                                  </p:childTnLst>
-                                </p:cTn>
-                              </p:par>
-                            </p:childTnLst>
-                          </p:cTn>
-                        </p:par>
-                      </p:childTnLst>
-                    </p:cTn>
-                  </p:par>
-                  <p:par>
-                    <p:cTn id="12" fill="hold">
-                      <p:stCondLst>
-                        <p:cond delay="indefinite"/>
-                      </p:stCondLst>
-                      <p:childTnLst>
-                        <p:par>
-                          <p:cTn id="13" fill="hold">
-                            <p:stCondLst>
-                              <p:cond delay="0"/>
-                            </p:stCondLst>
-                            <p:childTnLst>
-                              <p:par>
-                                <p:cTn id="14" presetID="1" presetClass="entr" presetSubtype="0" fill="hold" grpId="0" nodeType="clickEffect">
-                                  <p:stCondLst>
-                                    <p:cond delay="0"/>
-                                  </p:stCondLst>
-                                  <p:childTnLst>
-                                    <p:set>
-                                      <p:cBhvr>
-                                        <p:cTn id="15" dur="1" fill="hold">
-                                          <p:stCondLst>
-                                            <p:cond delay="0"/>
-                                          </p:stCondLst>
-                                        </p:cTn>
-                                        <p:tgtEl>
-                                          <p:spTgt spid="43"/>
-                                        </p:tgtEl>
-                                        <p:attrNameLst>
-                                          <p:attrName>style.visibility</p:attrName>
-                                        </p:attrNameLst>
-                                      </p:cBhvr>
-                                      <p:to>
-                                        <p:strVal val="visible"/>
-                                      </p:to>
-                                    </p:set>
-                                  </p:childTnLst>
-                                </p:cTn>
-                              </p:par>
-                              <p:par>
-                                <p:cTn id="16" presetID="1" presetClass="entr" presetSubtype="0" fill="hold" grpId="0" nodeType="withEffect">
-                                  <p:stCondLst>
-                                    <p:cond delay="0"/>
-                                  </p:stCondLst>
-                                  <p:childTnLst>
-                                    <p:set>
-                                      <p:cBhvr>
-                                        <p:cTn id="17" dur="1" fill="hold">
-                                          <p:stCondLst>
-                                            <p:cond delay="0"/>
-                                          </p:stCondLst>
-                                        </p:cTn>
-                                        <p:tgtEl>
-                                          <p:spTgt spid="44"/>
-                                        </p:tgtEl>
-                                        <p:attrNameLst>
-                                          <p:attrName>style.visibility</p:attrName>
-                                        </p:attrNameLst>
-                                      </p:cBhvr>
-                                      <p:to>
-                                        <p:strVal val="visible"/>
-                                      </p:to>
-                                    </p:set>
-                                  </p:childTnLst>
-                                </p:cTn>
-                              </p:par>
-                              <p:par>
-                                <p:cTn id="18" presetID="1" presetClass="entr" presetSubtype="0" fill="hold" grpId="0" nodeType="withEffect">
-                                  <p:stCondLst>
-                                    <p:cond delay="0"/>
-                                  </p:stCondLst>
-                                  <p:childTnLst>
-                                    <p:set>
-                                      <p:cBhvr>
-                                        <p:cTn id="19" dur="1" fill="hold">
-                                          <p:stCondLst>
-                                            <p:cond delay="0"/>
-                                          </p:stCondLst>
-                                        </p:cTn>
-                                        <p:tgtEl>
-                                          <p:spTgt spid="45"/>
-                                        </p:tgtEl>
-                                        <p:attrNameLst>
-                                          <p:attrName>style.visibility</p:attrName>
-                                        </p:attrNameLst>
-                                      </p:cBhvr>
-                                      <p:to>
-                                        <p:strVal val="visible"/>
-                                      </p:to>
-                                    </p:set>
-                                  </p:childTnLst>
-                                </p:cTn>
-                              </p:par>
-                              <p:par>
-                                <p:cTn id="20" presetID="1" presetClass="entr" presetSubtype="0" fill="hold" grpId="0" nodeType="withEffect">
-                                  <p:stCondLst>
-                                    <p:cond delay="0"/>
-                                  </p:stCondLst>
-                                  <p:childTnLst>
-                                    <p:set>
-                                      <p:cBhvr>
-                                        <p:cTn id="21" dur="1" fill="hold">
-                                          <p:stCondLst>
-                                            <p:cond delay="0"/>
-                                          </p:stCondLst>
-                                        </p:cTn>
-                                        <p:tgtEl>
-                                          <p:spTgt spid="47"/>
-                                        </p:tgtEl>
-                                        <p:attrNameLst>
-                                          <p:attrName>style.visibility</p:attrName>
-                                        </p:attrNameLst>
-                                      </p:cBhvr>
-                                      <p:to>
-                                        <p:strVal val="visible"/>
-                                      </p:to>
-                                    </p:set>
-                                  </p:childTnLst>
-                                </p:cTn>
-                              </p:par>
-                              <p:par>
-                                <p:cTn id="22" presetID="1" presetClass="entr" presetSubtype="0" fill="hold" grpId="0" nodeType="withEffect">
-                                  <p:stCondLst>
-                                    <p:cond delay="0"/>
-                                  </p:stCondLst>
-                                  <p:childTnLst>
-                                    <p:set>
-                                      <p:cBhvr>
-                                        <p:cTn id="23" dur="1" fill="hold">
-                                          <p:stCondLst>
-                                            <p:cond delay="0"/>
-                                          </p:stCondLst>
-                                        </p:cTn>
-                                        <p:tgtEl>
-                                          <p:spTgt spid="46"/>
-                                        </p:tgtEl>
-                                        <p:attrNameLst>
-                                          <p:attrName>style.visibility</p:attrName>
-                                        </p:attrNameLst>
-                                      </p:cBhvr>
-                                      <p:to>
-                                        <p:strVal val="visible"/>
-                                      </p:to>
-                                    </p:set>
-                                  </p:childTnLst>
-                                </p:cTn>
-                              </p:par>
-                            </p:childTnLst>
-                          </p:cTn>
-                        </p:par>
-                      </p:childTnLst>
-                    </p:cTn>
-                  </p:par>
-                  <p:par>
-                    <p:cTn id="24" fill="hold">
-                      <p:stCondLst>
-                        <p:cond delay="indefinite"/>
-                      </p:stCondLst>
-                      <p:childTnLst>
-                        <p:par>
-                          <p:cTn id="25" fill="hold">
-                            <p:stCondLst>
-                              <p:cond delay="0"/>
-                            </p:stCondLst>
-                            <p:childTnLst>
-                              <p:par>
-                                <p:cTn id="26" presetID="2" presetClass="entr" presetSubtype="4" fill="hold" grpId="0" nodeType="clickEffect">
-                                  <p:stCondLst>
-                                    <p:cond delay="0"/>
-                                  </p:stCondLst>
-                                  <p:childTnLst>
-                                    <p:set>
-                                      <p:cBhvr>
-                                        <p:cTn id="27" dur="1" fill="hold">
-                                          <p:stCondLst>
-                                            <p:cond delay="0"/>
-                                          </p:stCondLst>
-                                        </p:cTn>
-                                        <p:tgtEl>
-                                          <p:spTgt spid="48"/>
-                                        </p:tgtEl>
-                                        <p:attrNameLst>
-                                          <p:attrName>style.visibility</p:attrName>
-                                        </p:attrNameLst>
-                                      </p:cBhvr>
-                                      <p:to>
-                                        <p:strVal val="visible"/>
-                                      </p:to>
-                                    </p:set>
-                                    <p:anim calcmode="lin" valueType="num">
-                                      <p:cBhvr additive="base">
-                                        <p:cTn id="28" dur="500" fill="hold"/>
-                                        <p:tgtEl>
-                                          <p:spTgt spid="48"/>
-                                        </p:tgtEl>
-                                        <p:attrNameLst>
-                                          <p:attrName>ppt_x</p:attrName>
-                                        </p:attrNameLst>
-                                      </p:cBhvr>
-                                      <p:tavLst>
-                                        <p:tav tm="0">
-                                          <p:val>
-                                            <p:strVal val="#ppt_x"/>
-                                          </p:val>
-                                        </p:tav>
-                                        <p:tav tm="100000">
-                                          <p:val>
-                                            <p:strVal val="#ppt_x"/>
-                                          </p:val>
-                                        </p:tav>
-                                      </p:tavLst>
-                                    </p:anim>
-                                    <p:anim calcmode="lin" valueType="num">
-                                      <p:cBhvr additive="base">
-                                        <p:cTn id="29" dur="500" fill="hold"/>
-                                        <p:tgtEl>
-                                          <p:spTgt spid="48"/>
-                                        </p:tgtEl>
-                                        <p:attrNameLst>
-                                          <p:attrName>ppt_y</p:attrName>
-                                        </p:attrNameLst>
-                                      </p:cBhvr>
-                                      <p:tavLst>
-                                        <p:tav tm="0">
-                                          <p:val>
-                                            <p:strVal val="1+#ppt_h/2"/>
-                                          </p:val>
-                                        </p:tav>
-                                        <p:tav tm="100000">
-                                          <p:val>
-                                            <p:strVal val="#ppt_y"/>
-                                          </p:val>
-                                        </p:tav>
-                                      </p:tavLst>
-                                    </p:anim>
-                                  </p:childTnLst>
-                                </p:cTn>
-                              </p:par>
-                            </p:childTnLst>
-                          </p:cTn>
-                        </p:par>
-                      </p:childTnLst>
-                    </p:cTn>
-                  </p:par>
-                  <p:par>
-                    <p:cTn id="30" fill="hold">
-                      <p:stCondLst>
-                        <p:cond delay="indefinite"/>
-                      </p:stCondLst>
-                      <p:childTnLst>
-                        <p:par>
-                          <p:cTn id="31" fill="hold">
-                            <p:stCondLst>
-                              <p:cond delay="0"/>
-                            </p:stCondLst>
-                            <p:childTnLst>
-                              <p:par>
-                                <p:cTn id="32" presetID="1" presetClass="entr" presetSubtype="0" fill="hold" grpId="0" nodeType="clickEffect">
-                                  <p:stCondLst>
-                                    <p:cond delay="0"/>
-                                  </p:stCondLst>
-                                  <p:childTnLst>
-                                    <p:set>
-                                      <p:cBhvr>
-                                        <p:cTn id="33" dur="1" fill="hold">
-                                          <p:stCondLst>
-                                            <p:cond delay="0"/>
-                                          </p:stCondLst>
-                                        </p:cTn>
-                                        <p:tgtEl>
-                                          <p:spTgt spid="49"/>
-                                        </p:tgtEl>
-                                        <p:attrNameLst>
-                                          <p:attrName>style.visibility</p:attrName>
-                                        </p:attrNameLst>
-                                      </p:cBhvr>
-                                      <p:to>
-                                        <p:strVal val="visible"/>
-                                      </p:to>
-                                    </p:set>
-                                  </p:childTnLst>
-                                </p:cTn>
-                              </p:par>
-                              <p:par>
-                                <p:cTn id="34" presetID="1" presetClass="entr" presetSubtype="0" fill="hold" grpId="0" nodeType="withEffect">
-                                  <p:stCondLst>
-                                    <p:cond delay="0"/>
-                                  </p:stCondLst>
-                                  <p:childTnLst>
-                                    <p:set>
-                                      <p:cBhvr>
-                                        <p:cTn id="35" dur="1" fill="hold">
-                                          <p:stCondLst>
-                                            <p:cond delay="0"/>
-                                          </p:stCondLst>
-                                        </p:cTn>
-                                        <p:tgtEl>
-                                          <p:spTgt spid="50"/>
-                                        </p:tgtEl>
-                                        <p:attrNameLst>
-                                          <p:attrName>style.visibility</p:attrName>
-                                        </p:attrNameLst>
-                                      </p:cBhvr>
-                                      <p:to>
-                                        <p:strVal val="visible"/>
-                                      </p:to>
-                                    </p:set>
-                                  </p:childTnLst>
-                                </p:cTn>
-                              </p:par>
-                              <p:par>
-                                <p:cTn id="36" presetID="1" presetClass="entr" presetSubtype="0" fill="hold" grpId="0" nodeType="withEffect">
-                                  <p:stCondLst>
-                                    <p:cond delay="0"/>
-                                  </p:stCondLst>
-                                  <p:childTnLst>
-                                    <p:set>
-                                      <p:cBhvr>
-                                        <p:cTn id="37" dur="1" fill="hold">
-                                          <p:stCondLst>
-                                            <p:cond delay="0"/>
-                                          </p:stCondLst>
-                                        </p:cTn>
-                                        <p:tgtEl>
-                                          <p:spTgt spid="51"/>
                                         </p:tgtEl>
                                         <p:attrNameLst>
                                           <p:attrName>style.visibility</p:attrName>
@@ -25044,18 +24858,13 @@
       </p:par>
     </p:tnLst>
     <p:bldLst>
-      <p:bldP spid="40" grpId="0" animBg="1" autoUpdateAnimBg="0"/>
+      <p:bldP spid="39" grpId="0" animBg="1"/>
+      <p:bldP spid="37" grpId="0" animBg="1"/>
+      <p:bldP spid="40" grpId="0" animBg="1"/>
       <p:bldP spid="41" grpId="0"/>
       <p:bldP spid="42" grpId="0"/>
-      <p:bldP spid="43" grpId="0" animBg="1"/>
-      <p:bldP spid="44" grpId="0" animBg="1"/>
-      <p:bldP spid="45" grpId="0" animBg="1"/>
-      <p:bldP spid="46" grpId="0" animBg="1"/>
-      <p:bldP spid="47" grpId="0" animBg="1"/>
-      <p:bldP spid="48" grpId="0" animBg="1"/>
-      <p:bldP spid="49" grpId="0" animBg="1"/>
-      <p:bldP spid="50" grpId="0" animBg="1"/>
-      <p:bldP spid="51" grpId="0" animBg="1"/>
+      <p:bldP spid="2" grpId="0"/>
+      <p:bldP spid="4" grpId="0"/>
     </p:bldLst>
   </p:timing>
 </p:sld>
@@ -34690,8 +34499,8 @@
         </p:nvSpPr>
         <p:spPr>
           <a:xfrm>
-            <a:off x="1199001" y="4355812"/>
-            <a:ext cx="1159292" cy="369332"/>
+            <a:off x="394869" y="4567973"/>
+            <a:ext cx="2296607" cy="646331"/>
           </a:xfrm>
           <a:prstGeom prst="rect">
             <a:avLst/>
@@ -34699,14 +34508,15 @@
           <a:noFill/>
         </p:spPr>
         <p:txBody>
-          <a:bodyPr wrap="none" rtlCol="0">
+          <a:bodyPr wrap="square" rtlCol="0">
             <a:spAutoFit/>
           </a:bodyPr>
           <a:lstStyle/>
           <a:p>
+            <a:pPr algn="ctr"/>
             <a:r>
               <a:rPr lang="en-NL" dirty="0"/>
-              <a:t>N=7, E=8</a:t>
+              <a:t>N=7, E=8 in the original graph</a:t>
             </a:r>
           </a:p>
         </p:txBody>
@@ -36651,6 +36461,111 @@
   <p:clrMapOvr>
     <a:masterClrMapping/>
   </p:clrMapOvr>
+  <p:timing>
+    <p:tnLst>
+      <p:par>
+        <p:cTn id="1" dur="indefinite" restart="never" nodeType="tmRoot">
+          <p:childTnLst>
+            <p:seq concurrent="1" nextAc="seek">
+              <p:cTn id="2" dur="indefinite" nodeType="mainSeq">
+                <p:childTnLst>
+                  <p:par>
+                    <p:cTn id="3" fill="hold">
+                      <p:stCondLst>
+                        <p:cond delay="indefinite"/>
+                      </p:stCondLst>
+                      <p:childTnLst>
+                        <p:par>
+                          <p:cTn id="4" fill="hold">
+                            <p:stCondLst>
+                              <p:cond delay="0"/>
+                            </p:stCondLst>
+                            <p:childTnLst>
+                              <p:par>
+                                <p:cTn id="5" presetID="1" presetClass="entr" presetSubtype="0" fill="hold" nodeType="clickEffect">
+                                  <p:stCondLst>
+                                    <p:cond delay="0"/>
+                                  </p:stCondLst>
+                                  <p:childTnLst>
+                                    <p:set>
+                                      <p:cBhvr>
+                                        <p:cTn id="6" dur="1" fill="hold">
+                                          <p:stCondLst>
+                                            <p:cond delay="0"/>
+                                          </p:stCondLst>
+                                        </p:cTn>
+                                        <p:tgtEl>
+                                          <p:spTgt spid="75"/>
+                                        </p:tgtEl>
+                                        <p:attrNameLst>
+                                          <p:attrName>style.visibility</p:attrName>
+                                        </p:attrNameLst>
+                                      </p:cBhvr>
+                                      <p:to>
+                                        <p:strVal val="visible"/>
+                                      </p:to>
+                                    </p:set>
+                                  </p:childTnLst>
+                                </p:cTn>
+                              </p:par>
+                              <p:par>
+                                <p:cTn id="7" presetID="1" presetClass="entr" presetSubtype="0" fill="hold" grpId="0" nodeType="withEffect">
+                                  <p:stCondLst>
+                                    <p:cond delay="0"/>
+                                  </p:stCondLst>
+                                  <p:childTnLst>
+                                    <p:set>
+                                      <p:cBhvr>
+                                        <p:cTn id="8" dur="1" fill="hold">
+                                          <p:stCondLst>
+                                            <p:cond delay="0"/>
+                                          </p:stCondLst>
+                                        </p:cTn>
+                                        <p:tgtEl>
+                                          <p:spTgt spid="78"/>
+                                        </p:tgtEl>
+                                        <p:attrNameLst>
+                                          <p:attrName>style.visibility</p:attrName>
+                                        </p:attrNameLst>
+                                      </p:cBhvr>
+                                      <p:to>
+                                        <p:strVal val="visible"/>
+                                      </p:to>
+                                    </p:set>
+                                  </p:childTnLst>
+                                </p:cTn>
+                              </p:par>
+                            </p:childTnLst>
+                          </p:cTn>
+                        </p:par>
+                      </p:childTnLst>
+                    </p:cTn>
+                  </p:par>
+                </p:childTnLst>
+              </p:cTn>
+              <p:prevCondLst>
+                <p:cond evt="onPrev" delay="0">
+                  <p:tgtEl>
+                    <p:sldTgt/>
+                  </p:tgtEl>
+                </p:cond>
+              </p:prevCondLst>
+              <p:nextCondLst>
+                <p:cond evt="onNext" delay="0">
+                  <p:tgtEl>
+                    <p:sldTgt/>
+                  </p:tgtEl>
+                </p:cond>
+              </p:nextCondLst>
+            </p:seq>
+          </p:childTnLst>
+        </p:cTn>
+      </p:par>
+    </p:tnLst>
+    <p:bldLst>
+      <p:bldP spid="78" grpId="0"/>
+    </p:bldLst>
+  </p:timing>
 </p:sld>
 </file>
 
@@ -39177,7 +39092,7 @@
           <a:p>
             <a:r>
               <a:rPr lang="en-US" sz="2800" dirty="0"/>
-              <a:t>For example, we cannot test a Kelvin thermometer below 0K.</a:t>
+              <a:t>For example, we cannot test a Kelvin thermometer below 0 K.</a:t>
             </a:r>
           </a:p>
         </p:txBody>
@@ -47022,7 +46937,7 @@
               </a:pPr>
               <a:t>46</a:t>
             </a:fld>
-            <a:endParaRPr lang="en-US"/>
+            <a:endParaRPr lang="en-US" dirty="0"/>
           </a:p>
         </p:txBody>
       </p:sp>
@@ -47400,7 +47315,7 @@
         </p:nvSpPr>
         <p:spPr>
           <a:xfrm>
-            <a:off x="4416346" y="3949759"/>
+            <a:off x="4416346" y="4303164"/>
             <a:ext cx="1107695" cy="688190"/>
           </a:xfrm>
           <a:prstGeom prst="rect">
@@ -47514,14 +47429,14 @@
         <p:spPr>
           <a:xfrm>
             <a:off x="4970194" y="3691566"/>
-            <a:ext cx="0" cy="258193"/>
+            <a:ext cx="0" cy="611598"/>
           </a:xfrm>
           <a:prstGeom prst="straightConnector1">
             <a:avLst/>
           </a:prstGeom>
-          <a:ln>
+          <a:ln w="28575">
             <a:solidFill>
-              <a:schemeClr val="tx1"/>
+              <a:srgbClr val="C00000"/>
             </a:solidFill>
             <a:tailEnd type="triangle"/>
           </a:ln>
@@ -47592,19 +47507,17 @@
         </p:nvCxnSpPr>
         <p:spPr>
           <a:xfrm rot="10800000" flipH="1">
-            <a:off x="4416346" y="2949342"/>
-            <a:ext cx="121800" cy="1344512"/>
+            <a:off x="4416346" y="2949343"/>
+            <a:ext cx="121800" cy="1697917"/>
           </a:xfrm>
           <a:prstGeom prst="curvedConnector3">
             <a:avLst>
               <a:gd name="adj1" fmla="val -187685"/>
             </a:avLst>
           </a:prstGeom>
-          <a:ln w="28575">
+          <a:ln w="9525">
             <a:solidFill>
-              <a:schemeClr val="accent2">
-                <a:lumMod val="75000"/>
-              </a:schemeClr>
+              <a:schemeClr val="tx1"/>
             </a:solidFill>
             <a:tailEnd type="triangle"/>
           </a:ln>
@@ -47632,7 +47545,7 @@
         </p:nvSpPr>
         <p:spPr>
           <a:xfrm>
-            <a:off x="5621293" y="3935705"/>
+            <a:off x="5621293" y="4287789"/>
             <a:ext cx="1107696" cy="688190"/>
           </a:xfrm>
           <a:prstGeom prst="rect">
@@ -47757,15 +47670,15 @@
         </p:nvCxnSpPr>
         <p:spPr>
           <a:xfrm flipH="1">
-            <a:off x="6697955" y="3144261"/>
-            <a:ext cx="761115" cy="835300"/>
+            <a:off x="6728989" y="3144261"/>
+            <a:ext cx="730081" cy="1157582"/>
           </a:xfrm>
           <a:prstGeom prst="straightConnector1">
             <a:avLst/>
           </a:prstGeom>
-          <a:ln>
+          <a:ln w="28575">
             <a:solidFill>
-              <a:schemeClr val="tx1"/>
+              <a:srgbClr val="C00000"/>
             </a:solidFill>
             <a:tailEnd type="triangle"/>
           </a:ln>
@@ -47798,18 +47711,16 @@
         <p:spPr>
           <a:xfrm flipV="1">
             <a:off x="6728989" y="2979041"/>
-            <a:ext cx="1162129" cy="2167850"/>
+            <a:ext cx="1162129" cy="2519934"/>
           </a:xfrm>
           <a:prstGeom prst="curvedConnector3">
             <a:avLst>
               <a:gd name="adj1" fmla="val 119671"/>
             </a:avLst>
           </a:prstGeom>
-          <a:ln w="28575">
+          <a:ln w="9525">
             <a:solidFill>
-              <a:schemeClr val="accent2">
-                <a:lumMod val="75000"/>
-              </a:schemeClr>
+              <a:schemeClr val="tx1"/>
             </a:solidFill>
             <a:tailEnd type="triangle"/>
           </a:ln>
@@ -47837,7 +47748,7 @@
         </p:nvSpPr>
         <p:spPr>
           <a:xfrm>
-            <a:off x="4664427" y="5639587"/>
+            <a:off x="4664427" y="5991671"/>
             <a:ext cx="2645626" cy="461665"/>
           </a:xfrm>
           <a:prstGeom prst="rect">
@@ -47862,7 +47773,7 @@
             </a:r>
             <a:r>
               <a:rPr lang="en-US" sz="1200" i="1" dirty="0"/>
-              <a:t> cycles should be iterated in equal number of times</a:t>
+              <a:t> red arrows should be taken in equal number of times</a:t>
             </a:r>
           </a:p>
         </p:txBody>
@@ -47976,52 +47887,6 @@
           <a:xfrm flipV="1">
             <a:off x="7459070" y="2375799"/>
             <a:ext cx="0" cy="438021"/>
-          </a:xfrm>
-          <a:prstGeom prst="straightConnector1">
-            <a:avLst/>
-          </a:prstGeom>
-          <a:ln>
-            <a:solidFill>
-              <a:schemeClr val="tx1"/>
-            </a:solidFill>
-            <a:tailEnd type="triangle"/>
-          </a:ln>
-        </p:spPr>
-        <p:style>
-          <a:lnRef idx="1">
-            <a:schemeClr val="accent1"/>
-          </a:lnRef>
-          <a:fillRef idx="0">
-            <a:schemeClr val="accent1"/>
-          </a:fillRef>
-          <a:effectRef idx="0">
-            <a:schemeClr val="accent1"/>
-          </a:effectRef>
-          <a:fontRef idx="minor">
-            <a:schemeClr val="tx1"/>
-          </a:fontRef>
-        </p:style>
-      </p:cxnSp>
-      <p:cxnSp>
-        <p:nvCxnSpPr>
-          <p:cNvPr id="17" name="Straight Arrow Connector 16">
-            <a:extLst>
-              <a:ext uri="{FF2B5EF4-FFF2-40B4-BE49-F238E27FC236}">
-                <a16:creationId xmlns:a16="http://schemas.microsoft.com/office/drawing/2014/main" id="{8EBD5135-039A-9C6E-D605-68014D5FF6C7}"/>
-              </a:ext>
-            </a:extLst>
-          </p:cNvPr>
-          <p:cNvCxnSpPr>
-            <a:cxnSpLocks/>
-            <a:stCxn id="8" idx="2"/>
-            <a:endCxn id="33" idx="0"/>
-          </p:cNvCxnSpPr>
-          <p:nvPr/>
-        </p:nvCxnSpPr>
-        <p:spPr>
-          <a:xfrm flipH="1">
-            <a:off x="6175141" y="3687433"/>
-            <a:ext cx="1724" cy="248272"/>
           </a:xfrm>
           <a:prstGeom prst="straightConnector1">
             <a:avLst/>
@@ -48211,7 +48076,7 @@
         </p:nvSpPr>
         <p:spPr>
           <a:xfrm>
-            <a:off x="5621293" y="4866086"/>
+            <a:off x="5621293" y="5218170"/>
             <a:ext cx="1107696" cy="561610"/>
           </a:xfrm>
           <a:prstGeom prst="rect">
@@ -48303,7 +48168,7 @@
         </p:nvCxnSpPr>
         <p:spPr>
           <a:xfrm>
-            <a:off x="6175141" y="4623895"/>
+            <a:off x="6175141" y="4975979"/>
             <a:ext cx="0" cy="242191"/>
           </a:xfrm>
           <a:prstGeom prst="straightConnector1">
@@ -48345,7 +48210,7 @@
         </p:nvSpPr>
         <p:spPr>
           <a:xfrm>
-            <a:off x="4431382" y="4614185"/>
+            <a:off x="4431382" y="4967590"/>
             <a:ext cx="1107697" cy="261610"/>
           </a:xfrm>
           <a:prstGeom prst="rect">
@@ -48381,7 +48246,7 @@
         </p:nvSpPr>
         <p:spPr>
           <a:xfrm>
-            <a:off x="6444208" y="4246882"/>
+            <a:off x="5303262" y="4943921"/>
             <a:ext cx="1107697" cy="261610"/>
           </a:xfrm>
           <a:prstGeom prst="rect">
@@ -48403,311 +48268,80 @@
           </a:p>
         </p:txBody>
       </p:sp>
+      <p:sp>
+        <p:nvSpPr>
+          <p:cNvPr id="21" name="TextBox 20">
+            <a:extLst>
+              <a:ext uri="{FF2B5EF4-FFF2-40B4-BE49-F238E27FC236}">
+                <a16:creationId xmlns:a16="http://schemas.microsoft.com/office/drawing/2014/main" id="{60656023-986B-5736-58DF-D935432CDCCD}"/>
+              </a:ext>
+            </a:extLst>
+          </p:cNvPr>
+          <p:cNvSpPr txBox="1"/>
+          <p:nvPr/>
+        </p:nvSpPr>
+        <p:spPr>
+          <a:xfrm>
+            <a:off x="4985230" y="3764631"/>
+            <a:ext cx="730082" cy="415498"/>
+          </a:xfrm>
+          <a:prstGeom prst="rect">
+            <a:avLst/>
+          </a:prstGeom>
+          <a:noFill/>
+        </p:spPr>
+        <p:txBody>
+          <a:bodyPr wrap="square" rtlCol="0">
+            <a:spAutoFit/>
+          </a:bodyPr>
+          <a:lstStyle/>
+          <a:p>
+            <a:r>
+              <a:rPr lang="en-NL" sz="1050" dirty="0"/>
+              <a:t>recursive call</a:t>
+            </a:r>
+          </a:p>
+        </p:txBody>
+      </p:sp>
+      <p:sp>
+        <p:nvSpPr>
+          <p:cNvPr id="23" name="TextBox 22">
+            <a:extLst>
+              <a:ext uri="{FF2B5EF4-FFF2-40B4-BE49-F238E27FC236}">
+                <a16:creationId xmlns:a16="http://schemas.microsoft.com/office/drawing/2014/main" id="{730A8532-9FDB-0563-D80C-CF12F542813D}"/>
+              </a:ext>
+            </a:extLst>
+          </p:cNvPr>
+          <p:cNvSpPr txBox="1"/>
+          <p:nvPr/>
+        </p:nvSpPr>
+        <p:spPr>
+          <a:xfrm>
+            <a:off x="7023582" y="3714309"/>
+            <a:ext cx="985895" cy="415498"/>
+          </a:xfrm>
+          <a:prstGeom prst="rect">
+            <a:avLst/>
+          </a:prstGeom>
+          <a:noFill/>
+        </p:spPr>
+        <p:txBody>
+          <a:bodyPr wrap="square" rtlCol="0">
+            <a:spAutoFit/>
+          </a:bodyPr>
+          <a:lstStyle/>
+          <a:p>
+            <a:r>
+              <a:rPr lang="en-NL" sz="1050" dirty="0"/>
+              <a:t>return from recursion</a:t>
+            </a:r>
+          </a:p>
+        </p:txBody>
+      </p:sp>
     </p:spTree>
     <p:extLst>
       <p:ext uri="{BB962C8B-B14F-4D97-AF65-F5344CB8AC3E}">
         <p14:creationId xmlns:p14="http://schemas.microsoft.com/office/powerpoint/2010/main" val="4283867616"/>
-      </p:ext>
-    </p:extLst>
-  </p:cSld>
-  <p:clrMapOvr>
-    <a:masterClrMapping/>
-  </p:clrMapOvr>
-</p:sld>
-</file>
-
-<file path=ppt/slides/slide47.xml><?xml version="1.0" encoding="utf-8"?>
-<p:sld xmlns:a="http://schemas.openxmlformats.org/drawingml/2006/main" xmlns:r="http://schemas.openxmlformats.org/officeDocument/2006/relationships" xmlns:p="http://schemas.openxmlformats.org/presentationml/2006/main">
-  <p:cSld>
-    <p:spTree>
-      <p:nvGrpSpPr>
-        <p:cNvPr id="1" name=""/>
-        <p:cNvGrpSpPr/>
-        <p:nvPr/>
-      </p:nvGrpSpPr>
-      <p:grpSpPr>
-        <a:xfrm>
-          <a:off x="0" y="0"/>
-          <a:ext cx="0" cy="0"/>
-          <a:chOff x="0" y="0"/>
-          <a:chExt cx="0" cy="0"/>
-        </a:xfrm>
-      </p:grpSpPr>
-      <p:sp>
-        <p:nvSpPr>
-          <p:cNvPr id="6" name="Title 5"/>
-          <p:cNvSpPr>
-            <a:spLocks noGrp="1"/>
-          </p:cNvSpPr>
-          <p:nvPr>
-            <p:ph type="title"/>
-          </p:nvPr>
-        </p:nvSpPr>
-        <p:spPr/>
-        <p:txBody>
-          <a:bodyPr/>
-          <a:lstStyle/>
-          <a:p>
-            <a:r>
-              <a:rPr lang="en-US" dirty="0"/>
-              <a:t>One more example</a:t>
-            </a:r>
-          </a:p>
-        </p:txBody>
-      </p:sp>
-      <p:sp>
-        <p:nvSpPr>
-          <p:cNvPr id="4" name="Slide Number Placeholder 3"/>
-          <p:cNvSpPr>
-            <a:spLocks noGrp="1"/>
-          </p:cNvSpPr>
-          <p:nvPr>
-            <p:ph type="sldNum" sz="quarter" idx="12"/>
-          </p:nvPr>
-        </p:nvSpPr>
-        <p:spPr/>
-        <p:txBody>
-          <a:bodyPr/>
-          <a:lstStyle/>
-          <a:p>
-            <a:pPr>
-              <a:defRPr/>
-            </a:pPr>
-            <a:fld id="{F7C0A3F7-46F3-44CF-95B7-0304031AA6EA}" type="slidenum">
-              <a:rPr lang="en-US" smtClean="0"/>
-              <a:pPr>
-                <a:defRPr/>
-              </a:pPr>
-              <a:t>47</a:t>
-            </a:fld>
-            <a:endParaRPr lang="en-US"/>
-          </a:p>
-        </p:txBody>
-      </p:sp>
-      <p:sp>
-        <p:nvSpPr>
-          <p:cNvPr id="24" name="TextBox 23"/>
-          <p:cNvSpPr txBox="1"/>
-          <p:nvPr/>
-        </p:nvSpPr>
-        <p:spPr>
-          <a:xfrm>
-            <a:off x="2184391" y="2685641"/>
-            <a:ext cx="4775218" cy="1938992"/>
-          </a:xfrm>
-          <a:prstGeom prst="rect">
-            <a:avLst/>
-          </a:prstGeom>
-          <a:noFill/>
-          <a:ln>
-            <a:solidFill>
-              <a:schemeClr val="tx1"/>
-            </a:solidFill>
-          </a:ln>
-        </p:spPr>
-        <p:txBody>
-          <a:bodyPr wrap="none">
-            <a:spAutoFit/>
-          </a:bodyPr>
-          <a:lstStyle/>
-          <a:p>
-            <a:pPr>
-              <a:defRPr/>
-            </a:pPr>
-            <a:r>
-              <a:rPr lang="en-US" sz="2400" dirty="0">
-                <a:latin typeface="+mn-lt"/>
-              </a:rPr>
-              <a:t>h(x) {</a:t>
-            </a:r>
-            <a:br>
-              <a:rPr lang="en-US" sz="2400" dirty="0">
-                <a:latin typeface="+mn-lt"/>
-              </a:rPr>
-            </a:br>
-            <a:r>
-              <a:rPr lang="en-US" sz="2400" b="1" dirty="0">
-                <a:latin typeface="+mn-lt"/>
-              </a:rPr>
-              <a:t>   </a:t>
-            </a:r>
-            <a:r>
-              <a:rPr lang="en-US" sz="2400" b="1" u="sng" dirty="0">
-                <a:latin typeface="+mn-lt"/>
-              </a:rPr>
-              <a:t>if</a:t>
-            </a:r>
-            <a:r>
-              <a:rPr lang="en-US" sz="2400" b="1" dirty="0">
-                <a:latin typeface="+mn-lt"/>
-              </a:rPr>
-              <a:t>  </a:t>
-            </a:r>
-            <a:r>
-              <a:rPr lang="en-US" sz="2400" dirty="0">
-                <a:latin typeface="+mn-lt"/>
-              </a:rPr>
-              <a:t>(x</a:t>
-            </a:r>
-            <a:r>
-              <a:rPr lang="en-US" sz="2400" dirty="0">
-                <a:latin typeface="+mn-lt"/>
-                <a:sym typeface="Symbol"/>
-              </a:rPr>
-              <a:t>0)  </a:t>
-            </a:r>
-            <a:r>
-              <a:rPr lang="en-US" sz="2400" b="1" dirty="0">
-                <a:latin typeface="+mn-lt"/>
-                <a:sym typeface="Symbol"/>
-              </a:rPr>
-              <a:t>return</a:t>
-            </a:r>
-            <a:r>
-              <a:rPr lang="en-US" sz="2400" dirty="0">
-                <a:latin typeface="+mn-lt"/>
-                <a:sym typeface="Symbol"/>
-              </a:rPr>
-              <a:t> 0  </a:t>
-            </a:r>
-          </a:p>
-          <a:p>
-            <a:pPr>
-              <a:defRPr/>
-            </a:pPr>
-            <a:r>
-              <a:rPr lang="en-US" sz="2400" b="1" dirty="0">
-                <a:latin typeface="+mn-lt"/>
-                <a:sym typeface="Symbol"/>
-              </a:rPr>
-              <a:t>   </a:t>
-            </a:r>
-            <a:r>
-              <a:rPr lang="en-US" sz="2400" b="1" u="sng" dirty="0">
-                <a:latin typeface="+mn-lt"/>
-                <a:sym typeface="Symbol"/>
-              </a:rPr>
-              <a:t>if</a:t>
-            </a:r>
-            <a:r>
-              <a:rPr lang="en-US" sz="2400" dirty="0">
-                <a:latin typeface="+mn-lt"/>
-                <a:sym typeface="Symbol"/>
-              </a:rPr>
-              <a:t> (odd(x))  { x = h(x-1) ; </a:t>
-            </a:r>
-            <a:r>
-              <a:rPr lang="en-US" sz="2400" b="1" dirty="0">
-                <a:latin typeface="+mn-lt"/>
-                <a:sym typeface="Symbol"/>
-              </a:rPr>
-              <a:t>return</a:t>
-            </a:r>
-            <a:r>
-              <a:rPr lang="en-US" sz="2400" dirty="0">
-                <a:latin typeface="+mn-lt"/>
-                <a:sym typeface="Symbol"/>
-              </a:rPr>
-              <a:t> x+1 }</a:t>
-            </a:r>
-            <a:br>
-              <a:rPr lang="en-US" sz="2400" dirty="0">
-                <a:latin typeface="+mn-lt"/>
-                <a:sym typeface="Symbol"/>
-              </a:rPr>
-            </a:br>
-            <a:r>
-              <a:rPr lang="en-US" sz="2400" dirty="0">
-                <a:latin typeface="+mn-lt"/>
-                <a:sym typeface="Symbol"/>
-              </a:rPr>
-              <a:t>   </a:t>
-            </a:r>
-            <a:r>
-              <a:rPr lang="en-US" sz="2400" b="1" u="sng" dirty="0">
-                <a:latin typeface="+mn-lt"/>
-                <a:sym typeface="Symbol"/>
-              </a:rPr>
-              <a:t>else</a:t>
-            </a:r>
-            <a:r>
-              <a:rPr lang="en-US" sz="2400" dirty="0">
-                <a:latin typeface="+mn-lt"/>
-                <a:sym typeface="Symbol"/>
-              </a:rPr>
-              <a:t> { x = h(x-2) ; </a:t>
-            </a:r>
-            <a:r>
-              <a:rPr lang="en-US" sz="2400" b="1" dirty="0">
-                <a:latin typeface="+mn-lt"/>
-                <a:sym typeface="Symbol"/>
-              </a:rPr>
-              <a:t>return</a:t>
-            </a:r>
-            <a:r>
-              <a:rPr lang="en-US" sz="2400" dirty="0">
-                <a:latin typeface="+mn-lt"/>
-                <a:sym typeface="Symbol"/>
-              </a:rPr>
-              <a:t> x+2 } </a:t>
-            </a:r>
-          </a:p>
-          <a:p>
-            <a:pPr>
-              <a:defRPr/>
-            </a:pPr>
-            <a:r>
-              <a:rPr lang="en-US" sz="2400" dirty="0">
-                <a:latin typeface="+mn-lt"/>
-                <a:sym typeface="Symbol"/>
-              </a:rPr>
-              <a:t>}</a:t>
-            </a:r>
-            <a:endParaRPr lang="en-US" sz="2400" dirty="0">
-              <a:latin typeface="+mn-lt"/>
-            </a:endParaRPr>
-          </a:p>
-        </p:txBody>
-      </p:sp>
-      <p:sp>
-        <p:nvSpPr>
-          <p:cNvPr id="2" name="TextBox 1">
-            <a:extLst>
-              <a:ext uri="{FF2B5EF4-FFF2-40B4-BE49-F238E27FC236}">
-                <a16:creationId xmlns:a16="http://schemas.microsoft.com/office/drawing/2014/main" id="{1BFCBAAB-82DE-6E43-B6C3-58C49C92A7C4}"/>
-              </a:ext>
-            </a:extLst>
-          </p:cNvPr>
-          <p:cNvSpPr txBox="1"/>
-          <p:nvPr/>
-        </p:nvSpPr>
-        <p:spPr>
-          <a:xfrm>
-            <a:off x="3428097" y="1914164"/>
-            <a:ext cx="2287806" cy="369332"/>
-          </a:xfrm>
-          <a:prstGeom prst="rect">
-            <a:avLst/>
-          </a:prstGeom>
-          <a:noFill/>
-        </p:spPr>
-        <p:txBody>
-          <a:bodyPr wrap="none" rtlCol="0">
-            <a:spAutoFit/>
-          </a:bodyPr>
-          <a:lstStyle/>
-          <a:p>
-            <a:r>
-              <a:rPr lang="en-US" dirty="0"/>
-              <a:t>How about this one?</a:t>
-            </a:r>
-          </a:p>
-        </p:txBody>
-      </p:sp>
-    </p:spTree>
-    <p:extLst>
-      <p:ext uri="{BB962C8B-B14F-4D97-AF65-F5344CB8AC3E}">
-        <p14:creationId xmlns:p14="http://schemas.microsoft.com/office/powerpoint/2010/main" val="3211339176"/>
       </p:ext>
     </p:extLst>
   </p:cSld>

--- a/slides/gbt.pptx
+++ b/slides/gbt.pptx
@@ -325,7 +325,7 @@
               <a:pPr>
                 <a:defRPr/>
               </a:pPr>
-              <a:t>20-04-2026</a:t>
+              <a:t>23-04-2026</a:t>
             </a:fld>
             <a:endParaRPr lang="en-US"/>
           </a:p>
@@ -3986,7 +3986,7 @@
               <a:pPr>
                 <a:defRPr/>
               </a:pPr>
-              <a:t>20-04-2026</a:t>
+              <a:t>23-04-2026</a:t>
             </a:fld>
             <a:endParaRPr lang="en-US"/>
           </a:p>
@@ -4176,7 +4176,7 @@
               <a:pPr>
                 <a:defRPr/>
               </a:pPr>
-              <a:t>20-04-2026</a:t>
+              <a:t>23-04-2026</a:t>
             </a:fld>
             <a:endParaRPr lang="en-US"/>
           </a:p>
@@ -4376,7 +4376,7 @@
               <a:pPr>
                 <a:defRPr/>
               </a:pPr>
-              <a:t>20-04-2026</a:t>
+              <a:t>23-04-2026</a:t>
             </a:fld>
             <a:endParaRPr lang="en-US"/>
           </a:p>
@@ -4572,7 +4572,7 @@
               <a:pPr>
                 <a:defRPr/>
               </a:pPr>
-              <a:t>20-04-2026</a:t>
+              <a:t>23-04-2026</a:t>
             </a:fld>
             <a:endParaRPr lang="en-US"/>
           </a:p>
@@ -4839,7 +4839,7 @@
               <a:pPr>
                 <a:defRPr/>
               </a:pPr>
-              <a:t>20-04-2026</a:t>
+              <a:t>23-04-2026</a:t>
             </a:fld>
             <a:endParaRPr lang="en-US"/>
           </a:p>
@@ -5146,7 +5146,7 @@
               <a:pPr>
                 <a:defRPr/>
               </a:pPr>
-              <a:t>20-04-2026</a:t>
+              <a:t>23-04-2026</a:t>
             </a:fld>
             <a:endParaRPr lang="en-US"/>
           </a:p>
@@ -5587,7 +5587,7 @@
               <a:pPr>
                 <a:defRPr/>
               </a:pPr>
-              <a:t>20-04-2026</a:t>
+              <a:t>23-04-2026</a:t>
             </a:fld>
             <a:endParaRPr lang="en-US"/>
           </a:p>
@@ -5732,7 +5732,7 @@
               <a:pPr>
                 <a:defRPr/>
               </a:pPr>
-              <a:t>20-04-2026</a:t>
+              <a:t>23-04-2026</a:t>
             </a:fld>
             <a:endParaRPr lang="en-US"/>
           </a:p>
@@ -5849,7 +5849,7 @@
               <a:pPr>
                 <a:defRPr/>
               </a:pPr>
-              <a:t>20-04-2026</a:t>
+              <a:t>23-04-2026</a:t>
             </a:fld>
             <a:endParaRPr lang="en-US"/>
           </a:p>
@@ -6146,7 +6146,7 @@
               <a:pPr>
                 <a:defRPr/>
               </a:pPr>
-              <a:t>20-04-2026</a:t>
+              <a:t>23-04-2026</a:t>
             </a:fld>
             <a:endParaRPr lang="en-US"/>
           </a:p>
@@ -6426,7 +6426,7 @@
               <a:pPr>
                 <a:defRPr/>
               </a:pPr>
-              <a:t>20-04-2026</a:t>
+              <a:t>23-04-2026</a:t>
             </a:fld>
             <a:endParaRPr lang="en-US"/>
           </a:p>
@@ -6682,7 +6682,7 @@
               <a:pPr>
                 <a:defRPr/>
               </a:pPr>
-              <a:t>20-04-2026</a:t>
+              <a:t>23-04-2026</a:t>
             </a:fld>
             <a:endParaRPr lang="en-US"/>
           </a:p>
@@ -10402,7 +10402,11 @@
             <a:bodyPr wrap="none" anchor="ctr"/>
             <a:lstStyle/>
             <a:p>
-              <a:endParaRPr lang="nl-NL"/>
+              <a:endParaRPr lang="nl-NL">
+                <a:solidFill>
+                  <a:srgbClr val="FFFF00"/>
+                </a:solidFill>
+              </a:endParaRPr>
             </a:p>
           </p:txBody>
         </p:sp>
@@ -10416,8 +10420,8 @@
           </p:nvSpPr>
           <p:spPr bwMode="auto">
             <a:xfrm>
-              <a:off x="4365" y="1769"/>
-              <a:ext cx="196" cy="250"/>
+              <a:off x="4364" y="1769"/>
+              <a:ext cx="197" cy="233"/>
             </a:xfrm>
             <a:prstGeom prst="rect">
               <a:avLst/>
@@ -10438,7 +10442,11 @@
             <a:p>
               <a:pPr algn="r"/>
               <a:r>
-                <a:rPr lang="en-US"/>
+                <a:rPr lang="en-US">
+                  <a:solidFill>
+                    <a:srgbClr val="FFFF00"/>
+                  </a:solidFill>
+                </a:rPr>
                 <a:t>1</a:t>
               </a:r>
             </a:p>
@@ -10591,7 +10599,11 @@
             <a:bodyPr wrap="none" anchor="ctr"/>
             <a:lstStyle/>
             <a:p>
-              <a:endParaRPr lang="nl-NL"/>
+              <a:endParaRPr lang="nl-NL">
+                <a:solidFill>
+                  <a:srgbClr val="FFFF00"/>
+                </a:solidFill>
+              </a:endParaRPr>
             </a:p>
           </p:txBody>
         </p:sp>
@@ -10606,7 +10618,7 @@
           <p:spPr bwMode="auto">
             <a:xfrm>
               <a:off x="3915" y="2707"/>
-              <a:ext cx="196" cy="250"/>
+              <a:ext cx="197" cy="233"/>
             </a:xfrm>
             <a:prstGeom prst="rect">
               <a:avLst/>
@@ -10626,7 +10638,11 @@
             <a:lstStyle/>
             <a:p>
               <a:r>
-                <a:rPr lang="en-US"/>
+                <a:rPr lang="en-US">
+                  <a:solidFill>
+                    <a:srgbClr val="FFFF00"/>
+                  </a:solidFill>
+                </a:rPr>
                 <a:t>0</a:t>
               </a:r>
             </a:p>
@@ -10817,7 +10833,11 @@
             <a:bodyPr wrap="none" anchor="ctr"/>
             <a:lstStyle/>
             <a:p>
-              <a:endParaRPr lang="nl-NL"/>
+              <a:endParaRPr lang="nl-NL">
+                <a:solidFill>
+                  <a:srgbClr val="FFFF00"/>
+                </a:solidFill>
+              </a:endParaRPr>
             </a:p>
           </p:txBody>
         </p:sp>
@@ -10831,8 +10851,8 @@
           </p:nvSpPr>
           <p:spPr bwMode="auto">
             <a:xfrm>
-              <a:off x="4365" y="1769"/>
-              <a:ext cx="196" cy="250"/>
+              <a:off x="4364" y="1769"/>
+              <a:ext cx="197" cy="233"/>
             </a:xfrm>
             <a:prstGeom prst="rect">
               <a:avLst/>
@@ -10853,7 +10873,11 @@
             <a:p>
               <a:pPr algn="r"/>
               <a:r>
-                <a:rPr lang="en-US"/>
+                <a:rPr lang="en-US">
+                  <a:solidFill>
+                    <a:srgbClr val="FFFF00"/>
+                  </a:solidFill>
+                </a:rPr>
                 <a:t>0</a:t>
               </a:r>
             </a:p>
@@ -10924,7 +10948,11 @@
               <a:bodyPr wrap="none" anchor="ctr"/>
               <a:lstStyle/>
               <a:p>
-                <a:endParaRPr lang="nl-NL"/>
+                <a:endParaRPr lang="nl-NL">
+                  <a:solidFill>
+                    <a:srgbClr val="FFFF00"/>
+                  </a:solidFill>
+                </a:endParaRPr>
               </a:p>
             </p:txBody>
           </p:sp>
@@ -10939,7 +10967,7 @@
             <p:spPr bwMode="auto">
               <a:xfrm>
                 <a:off x="4815" y="2707"/>
-                <a:ext cx="196" cy="250"/>
+                <a:ext cx="197" cy="233"/>
               </a:xfrm>
               <a:prstGeom prst="rect">
                 <a:avLst/>
@@ -10959,7 +10987,11 @@
               <a:lstStyle/>
               <a:p>
                 <a:r>
-                  <a:rPr lang="en-US"/>
+                  <a:rPr lang="en-US">
+                    <a:solidFill>
+                      <a:srgbClr val="FFFF00"/>
+                    </a:solidFill>
+                  </a:rPr>
                   <a:t>2</a:t>
                 </a:r>
               </a:p>
@@ -11014,7 +11046,11 @@
               <a:bodyPr wrap="none" anchor="ctr"/>
               <a:lstStyle/>
               <a:p>
-                <a:endParaRPr lang="nl-NL"/>
+                <a:endParaRPr lang="nl-NL">
+                  <a:solidFill>
+                    <a:srgbClr val="FFFF00"/>
+                  </a:solidFill>
+                </a:endParaRPr>
               </a:p>
             </p:txBody>
           </p:sp>
@@ -11029,7 +11065,7 @@
             <p:spPr bwMode="auto">
               <a:xfrm>
                 <a:off x="3915" y="2707"/>
-                <a:ext cx="196" cy="250"/>
+                <a:ext cx="197" cy="233"/>
               </a:xfrm>
               <a:prstGeom prst="rect">
                 <a:avLst/>
@@ -11049,7 +11085,11 @@
               <a:lstStyle/>
               <a:p>
                 <a:r>
-                  <a:rPr lang="en-US"/>
+                  <a:rPr lang="en-US">
+                    <a:solidFill>
+                      <a:srgbClr val="FFFF00"/>
+                    </a:solidFill>
+                  </a:rPr>
                   <a:t>1</a:t>
                 </a:r>
               </a:p>
@@ -11271,7 +11311,11 @@
             <a:bodyPr wrap="none" anchor="ctr"/>
             <a:lstStyle/>
             <a:p>
-              <a:endParaRPr lang="nl-NL"/>
+              <a:endParaRPr lang="nl-NL">
+                <a:solidFill>
+                  <a:srgbClr val="FFFF00"/>
+                </a:solidFill>
+              </a:endParaRPr>
             </a:p>
           </p:txBody>
         </p:sp>
@@ -11285,8 +11329,8 @@
           </p:nvSpPr>
           <p:spPr bwMode="auto">
             <a:xfrm>
-              <a:off x="4365" y="1769"/>
-              <a:ext cx="196" cy="250"/>
+              <a:off x="4364" y="1769"/>
+              <a:ext cx="197" cy="233"/>
             </a:xfrm>
             <a:prstGeom prst="rect">
               <a:avLst/>
@@ -11307,7 +11351,11 @@
             <a:p>
               <a:pPr algn="r"/>
               <a:r>
-                <a:rPr lang="en-US"/>
+                <a:rPr lang="en-US">
+                  <a:solidFill>
+                    <a:srgbClr val="FFFF00"/>
+                  </a:solidFill>
+                </a:rPr>
                 <a:t>3</a:t>
               </a:r>
             </a:p>
@@ -11378,7 +11426,11 @@
               <a:bodyPr wrap="none" anchor="ctr"/>
               <a:lstStyle/>
               <a:p>
-                <a:endParaRPr lang="nl-NL"/>
+                <a:endParaRPr lang="nl-NL">
+                  <a:solidFill>
+                    <a:srgbClr val="FFFF00"/>
+                  </a:solidFill>
+                </a:endParaRPr>
               </a:p>
             </p:txBody>
           </p:sp>
@@ -11393,7 +11445,7 @@
             <p:spPr bwMode="auto">
               <a:xfrm>
                 <a:off x="4815" y="2707"/>
-                <a:ext cx="196" cy="250"/>
+                <a:ext cx="197" cy="233"/>
               </a:xfrm>
               <a:prstGeom prst="rect">
                 <a:avLst/>
@@ -11413,7 +11465,11 @@
               <a:lstStyle/>
               <a:p>
                 <a:r>
-                  <a:rPr lang="en-US"/>
+                  <a:rPr lang="en-US">
+                    <a:solidFill>
+                      <a:srgbClr val="FFFF00"/>
+                    </a:solidFill>
+                  </a:rPr>
                   <a:t>5</a:t>
                 </a:r>
               </a:p>
@@ -11468,7 +11524,11 @@
               <a:bodyPr wrap="none" anchor="ctr"/>
               <a:lstStyle/>
               <a:p>
-                <a:endParaRPr lang="nl-NL"/>
+                <a:endParaRPr lang="nl-NL">
+                  <a:solidFill>
+                    <a:srgbClr val="FFFF00"/>
+                  </a:solidFill>
+                </a:endParaRPr>
               </a:p>
             </p:txBody>
           </p:sp>
@@ -11483,7 +11543,7 @@
             <p:spPr bwMode="auto">
               <a:xfrm>
                 <a:off x="3915" y="2707"/>
-                <a:ext cx="196" cy="250"/>
+                <a:ext cx="197" cy="233"/>
               </a:xfrm>
               <a:prstGeom prst="rect">
                 <a:avLst/>
@@ -11503,7 +11563,11 @@
               <a:lstStyle/>
               <a:p>
                 <a:r>
-                  <a:rPr lang="en-US"/>
+                  <a:rPr lang="en-US">
+                    <a:solidFill>
+                      <a:srgbClr val="FFFF00"/>
+                    </a:solidFill>
+                  </a:rPr>
                   <a:t>4</a:t>
                 </a:r>
               </a:p>
@@ -12576,7 +12640,11 @@
             <a:bodyPr wrap="none" anchor="ctr"/>
             <a:lstStyle/>
             <a:p>
-              <a:endParaRPr lang="nl-NL"/>
+              <a:endParaRPr lang="nl-NL">
+                <a:solidFill>
+                  <a:srgbClr val="FFFF00"/>
+                </a:solidFill>
+              </a:endParaRPr>
             </a:p>
           </p:txBody>
         </p:sp>
@@ -12596,8 +12664,8 @@
           </p:nvSpPr>
           <p:spPr bwMode="auto">
             <a:xfrm>
-              <a:off x="4365" y="1769"/>
-              <a:ext cx="196" cy="250"/>
+              <a:off x="4364" y="1769"/>
+              <a:ext cx="197" cy="233"/>
             </a:xfrm>
             <a:prstGeom prst="rect">
               <a:avLst/>
@@ -12618,7 +12686,11 @@
             <a:p>
               <a:pPr algn="r"/>
               <a:r>
-                <a:rPr lang="en-US"/>
+                <a:rPr lang="en-US">
+                  <a:solidFill>
+                    <a:srgbClr val="FFFF00"/>
+                  </a:solidFill>
+                </a:rPr>
                 <a:t>1</a:t>
               </a:r>
             </a:p>
@@ -12707,7 +12779,11 @@
               <a:bodyPr wrap="none" anchor="ctr"/>
               <a:lstStyle/>
               <a:p>
-                <a:endParaRPr lang="nl-NL"/>
+                <a:endParaRPr lang="nl-NL">
+                  <a:solidFill>
+                    <a:srgbClr val="FFFF00"/>
+                  </a:solidFill>
+                </a:endParaRPr>
               </a:p>
             </p:txBody>
           </p:sp>
@@ -12728,7 +12804,7 @@
             <p:spPr bwMode="auto">
               <a:xfrm>
                 <a:off x="4815" y="2707"/>
-                <a:ext cx="196" cy="250"/>
+                <a:ext cx="197" cy="233"/>
               </a:xfrm>
               <a:prstGeom prst="rect">
                 <a:avLst/>
@@ -12748,7 +12824,11 @@
               <a:lstStyle/>
               <a:p>
                 <a:r>
-                  <a:rPr lang="en-US"/>
+                  <a:rPr lang="en-US">
+                    <a:solidFill>
+                      <a:srgbClr val="FFFF00"/>
+                    </a:solidFill>
+                  </a:rPr>
                   <a:t>2</a:t>
                 </a:r>
               </a:p>
@@ -12815,7 +12895,11 @@
               <a:bodyPr wrap="none" anchor="ctr"/>
               <a:lstStyle/>
               <a:p>
-                <a:endParaRPr lang="nl-NL"/>
+                <a:endParaRPr lang="nl-NL">
+                  <a:solidFill>
+                    <a:srgbClr val="FFFF00"/>
+                  </a:solidFill>
+                </a:endParaRPr>
               </a:p>
             </p:txBody>
           </p:sp>
@@ -12836,7 +12920,7 @@
             <p:spPr bwMode="auto">
               <a:xfrm>
                 <a:off x="3915" y="2707"/>
-                <a:ext cx="196" cy="250"/>
+                <a:ext cx="197" cy="233"/>
               </a:xfrm>
               <a:prstGeom prst="rect">
                 <a:avLst/>
@@ -12856,7 +12940,11 @@
               <a:lstStyle/>
               <a:p>
                 <a:r>
-                  <a:rPr lang="en-US"/>
+                  <a:rPr lang="en-US">
+                    <a:solidFill>
+                      <a:srgbClr val="FFFF00"/>
+                    </a:solidFill>
+                  </a:rPr>
                   <a:t>0</a:t>
                 </a:r>
               </a:p>
@@ -13106,7 +13194,11 @@
               <a:bodyPr wrap="none" anchor="ctr"/>
               <a:lstStyle/>
               <a:p>
-                <a:endParaRPr lang="nl-NL"/>
+                <a:endParaRPr lang="nl-NL">
+                  <a:solidFill>
+                    <a:srgbClr val="FFFF00"/>
+                  </a:solidFill>
+                </a:endParaRPr>
               </a:p>
             </p:txBody>
           </p:sp>
@@ -13126,8 +13218,8 @@
             </p:nvSpPr>
             <p:spPr bwMode="auto">
               <a:xfrm>
-                <a:off x="4365" y="1769"/>
-                <a:ext cx="196" cy="250"/>
+                <a:off x="4364" y="1769"/>
+                <a:ext cx="197" cy="233"/>
               </a:xfrm>
               <a:prstGeom prst="rect">
                 <a:avLst/>
@@ -13148,7 +13240,11 @@
               <a:p>
                 <a:pPr algn="r"/>
                 <a:r>
-                  <a:rPr lang="en-US"/>
+                  <a:rPr lang="en-US" dirty="0">
+                    <a:solidFill>
+                      <a:srgbClr val="FFFF00"/>
+                    </a:solidFill>
+                  </a:rPr>
                   <a:t>0</a:t>
                 </a:r>
               </a:p>
@@ -13237,7 +13333,11 @@
                 <a:bodyPr wrap="none" anchor="ctr"/>
                 <a:lstStyle/>
                 <a:p>
-                  <a:endParaRPr lang="nl-NL"/>
+                  <a:endParaRPr lang="nl-NL">
+                    <a:solidFill>
+                      <a:srgbClr val="FFFF00"/>
+                    </a:solidFill>
+                  </a:endParaRPr>
                 </a:p>
               </p:txBody>
             </p:sp>
@@ -13258,7 +13358,7 @@
               <p:spPr bwMode="auto">
                 <a:xfrm>
                   <a:off x="4815" y="2707"/>
-                  <a:ext cx="196" cy="250"/>
+                  <a:ext cx="197" cy="233"/>
                 </a:xfrm>
                 <a:prstGeom prst="rect">
                   <a:avLst/>
@@ -13278,7 +13378,11 @@
                 <a:lstStyle/>
                 <a:p>
                   <a:r>
-                    <a:rPr lang="en-US"/>
+                    <a:rPr lang="en-US">
+                      <a:solidFill>
+                        <a:srgbClr val="FFFF00"/>
+                      </a:solidFill>
+                    </a:rPr>
                     <a:t>2</a:t>
                   </a:r>
                 </a:p>
@@ -13345,7 +13449,11 @@
                 <a:bodyPr wrap="none" anchor="ctr"/>
                 <a:lstStyle/>
                 <a:p>
-                  <a:endParaRPr lang="nl-NL"/>
+                  <a:endParaRPr lang="nl-NL">
+                    <a:solidFill>
+                      <a:srgbClr val="FFFF00"/>
+                    </a:solidFill>
+                  </a:endParaRPr>
                 </a:p>
               </p:txBody>
             </p:sp>
@@ -13366,7 +13474,7 @@
               <p:spPr bwMode="auto">
                 <a:xfrm>
                   <a:off x="3915" y="2707"/>
-                  <a:ext cx="196" cy="250"/>
+                  <a:ext cx="197" cy="233"/>
                 </a:xfrm>
                 <a:prstGeom prst="rect">
                   <a:avLst/>
@@ -13386,7 +13494,11 @@
                 <a:lstStyle/>
                 <a:p>
                   <a:r>
-                    <a:rPr lang="en-US"/>
+                    <a:rPr lang="en-US">
+                      <a:solidFill>
+                        <a:srgbClr val="FFFF00"/>
+                      </a:solidFill>
+                    </a:rPr>
                     <a:t>1</a:t>
                   </a:r>
                 </a:p>
@@ -13454,7 +13566,11 @@
               <a:bodyPr wrap="none" anchor="ctr"/>
               <a:lstStyle/>
               <a:p>
-                <a:endParaRPr lang="nl-NL"/>
+                <a:endParaRPr lang="nl-NL">
+                  <a:solidFill>
+                    <a:srgbClr val="FFFF00"/>
+                  </a:solidFill>
+                </a:endParaRPr>
               </a:p>
             </p:txBody>
           </p:sp>
@@ -13475,7 +13591,7 @@
             <p:spPr bwMode="auto">
               <a:xfrm>
                 <a:off x="4365" y="3645"/>
-                <a:ext cx="196" cy="250"/>
+                <a:ext cx="197" cy="233"/>
               </a:xfrm>
               <a:prstGeom prst="rect">
                 <a:avLst/>
@@ -13495,7 +13611,11 @@
               <a:lstStyle/>
               <a:p>
                 <a:r>
-                  <a:rPr lang="en-US"/>
+                  <a:rPr lang="en-US">
+                    <a:solidFill>
+                      <a:srgbClr val="FFFF00"/>
+                    </a:solidFill>
+                  </a:rPr>
                   <a:t>6</a:t>
                 </a:r>
               </a:p>
@@ -13538,7 +13658,11 @@
             <a:bodyPr/>
             <a:lstStyle/>
             <a:p>
-              <a:endParaRPr lang="en-US"/>
+              <a:endParaRPr lang="en-US">
+                <a:solidFill>
+                  <a:srgbClr val="FFFF00"/>
+                </a:solidFill>
+              </a:endParaRPr>
             </a:p>
           </p:txBody>
         </p:sp>
@@ -13578,7 +13702,11 @@
             <a:bodyPr/>
             <a:lstStyle/>
             <a:p>
-              <a:endParaRPr lang="en-US"/>
+              <a:endParaRPr lang="en-US">
+                <a:solidFill>
+                  <a:srgbClr val="FFFF00"/>
+                </a:solidFill>
+              </a:endParaRPr>
             </a:p>
           </p:txBody>
         </p:sp>
@@ -13642,7 +13770,11 @@
               <a:bodyPr wrap="none" anchor="ctr"/>
               <a:lstStyle/>
               <a:p>
-                <a:endParaRPr lang="nl-NL"/>
+                <a:endParaRPr lang="nl-NL">
+                  <a:solidFill>
+                    <a:srgbClr val="FFFF00"/>
+                  </a:solidFill>
+                </a:endParaRPr>
               </a:p>
             </p:txBody>
           </p:sp>
@@ -13662,8 +13794,8 @@
             </p:nvSpPr>
             <p:spPr bwMode="auto">
               <a:xfrm>
-                <a:off x="4365" y="1769"/>
-                <a:ext cx="196" cy="250"/>
+                <a:off x="4364" y="1769"/>
+                <a:ext cx="197" cy="233"/>
               </a:xfrm>
               <a:prstGeom prst="rect">
                 <a:avLst/>
@@ -13684,7 +13816,11 @@
               <a:p>
                 <a:pPr algn="r"/>
                 <a:r>
-                  <a:rPr lang="en-US"/>
+                  <a:rPr lang="en-US">
+                    <a:solidFill>
+                      <a:srgbClr val="FFFF00"/>
+                    </a:solidFill>
+                  </a:rPr>
                   <a:t>3</a:t>
                 </a:r>
               </a:p>
@@ -13773,7 +13909,11 @@
                 <a:bodyPr wrap="none" anchor="ctr"/>
                 <a:lstStyle/>
                 <a:p>
-                  <a:endParaRPr lang="nl-NL"/>
+                  <a:endParaRPr lang="nl-NL">
+                    <a:solidFill>
+                      <a:srgbClr val="FFFF00"/>
+                    </a:solidFill>
+                  </a:endParaRPr>
                 </a:p>
               </p:txBody>
             </p:sp>
@@ -13794,7 +13934,7 @@
               <p:spPr bwMode="auto">
                 <a:xfrm>
                   <a:off x="4815" y="2707"/>
-                  <a:ext cx="196" cy="250"/>
+                  <a:ext cx="197" cy="233"/>
                 </a:xfrm>
                 <a:prstGeom prst="rect">
                   <a:avLst/>
@@ -13814,7 +13954,11 @@
                 <a:lstStyle/>
                 <a:p>
                   <a:r>
-                    <a:rPr lang="en-US"/>
+                    <a:rPr lang="en-US">
+                      <a:solidFill>
+                        <a:srgbClr val="FFFF00"/>
+                      </a:solidFill>
+                    </a:rPr>
                     <a:t>5</a:t>
                   </a:r>
                 </a:p>
@@ -13881,7 +14025,11 @@
                 <a:bodyPr wrap="none" anchor="ctr"/>
                 <a:lstStyle/>
                 <a:p>
-                  <a:endParaRPr lang="nl-NL"/>
+                  <a:endParaRPr lang="nl-NL">
+                    <a:solidFill>
+                      <a:srgbClr val="FFFF00"/>
+                    </a:solidFill>
+                  </a:endParaRPr>
                 </a:p>
               </p:txBody>
             </p:sp>
@@ -13902,7 +14050,7 @@
               <p:spPr bwMode="auto">
                 <a:xfrm>
                   <a:off x="3915" y="2707"/>
-                  <a:ext cx="196" cy="250"/>
+                  <a:ext cx="197" cy="233"/>
                 </a:xfrm>
                 <a:prstGeom prst="rect">
                   <a:avLst/>
@@ -13922,7 +14070,11 @@
                 <a:lstStyle/>
                 <a:p>
                   <a:r>
-                    <a:rPr lang="en-US"/>
+                    <a:rPr lang="en-US">
+                      <a:solidFill>
+                        <a:srgbClr val="FFFF00"/>
+                      </a:solidFill>
+                    </a:rPr>
                     <a:t>4</a:t>
                   </a:r>
                 </a:p>
@@ -13966,7 +14118,11 @@
             <a:bodyPr/>
             <a:lstStyle/>
             <a:p>
-              <a:endParaRPr lang="en-US"/>
+              <a:endParaRPr lang="en-US">
+                <a:solidFill>
+                  <a:srgbClr val="FFFF00"/>
+                </a:solidFill>
+              </a:endParaRPr>
             </a:p>
           </p:txBody>
         </p:sp>
@@ -14006,7 +14162,11 @@
             <a:bodyPr/>
             <a:lstStyle/>
             <a:p>
-              <a:endParaRPr lang="en-US"/>
+              <a:endParaRPr lang="en-US">
+                <a:solidFill>
+                  <a:srgbClr val="FFFF00"/>
+                </a:solidFill>
+              </a:endParaRPr>
             </a:p>
           </p:txBody>
         </p:sp>
@@ -14046,7 +14206,11 @@
             <a:bodyPr/>
             <a:lstStyle/>
             <a:p>
-              <a:endParaRPr lang="en-US"/>
+              <a:endParaRPr lang="en-US">
+                <a:solidFill>
+                  <a:srgbClr val="FFFF00"/>
+                </a:solidFill>
+              </a:endParaRPr>
             </a:p>
           </p:txBody>
         </p:sp>
@@ -14086,7 +14250,11 @@
             <a:bodyPr/>
             <a:lstStyle/>
             <a:p>
-              <a:endParaRPr lang="en-US"/>
+              <a:endParaRPr lang="en-US">
+                <a:solidFill>
+                  <a:srgbClr val="FFFF00"/>
+                </a:solidFill>
+              </a:endParaRPr>
             </a:p>
           </p:txBody>
         </p:sp>
@@ -14126,7 +14294,11 @@
             <a:bodyPr/>
             <a:lstStyle/>
             <a:p>
-              <a:endParaRPr lang="en-US"/>
+              <a:endParaRPr lang="en-US">
+                <a:solidFill>
+                  <a:srgbClr val="FFFF00"/>
+                </a:solidFill>
+              </a:endParaRPr>
             </a:p>
           </p:txBody>
         </p:sp>
@@ -14166,7 +14338,11 @@
             <a:bodyPr/>
             <a:lstStyle/>
             <a:p>
-              <a:endParaRPr lang="en-US"/>
+              <a:endParaRPr lang="en-US">
+                <a:solidFill>
+                  <a:srgbClr val="FFFF00"/>
+                </a:solidFill>
+              </a:endParaRPr>
             </a:p>
           </p:txBody>
         </p:sp>
@@ -14206,7 +14382,11 @@
             <a:bodyPr/>
             <a:lstStyle/>
             <a:p>
-              <a:endParaRPr lang="en-US"/>
+              <a:endParaRPr lang="en-US">
+                <a:solidFill>
+                  <a:srgbClr val="FFFF00"/>
+                </a:solidFill>
+              </a:endParaRPr>
             </a:p>
           </p:txBody>
         </p:sp>
@@ -14656,7 +14836,11 @@
             <a:bodyPr wrap="none" anchor="ctr"/>
             <a:lstStyle/>
             <a:p>
-              <a:endParaRPr lang="nl-NL"/>
+              <a:endParaRPr lang="nl-NL">
+                <a:solidFill>
+                  <a:srgbClr val="FFFF00"/>
+                </a:solidFill>
+              </a:endParaRPr>
             </a:p>
           </p:txBody>
         </p:sp>
@@ -14670,8 +14854,8 @@
           </p:nvSpPr>
           <p:spPr bwMode="auto">
             <a:xfrm>
-              <a:off x="4365" y="1769"/>
-              <a:ext cx="196" cy="250"/>
+              <a:off x="4364" y="1769"/>
+              <a:ext cx="197" cy="233"/>
             </a:xfrm>
             <a:prstGeom prst="rect">
               <a:avLst/>
@@ -14692,7 +14876,11 @@
             <a:p>
               <a:pPr algn="r"/>
               <a:r>
-                <a:rPr lang="en-US"/>
+                <a:rPr lang="en-US">
+                  <a:solidFill>
+                    <a:srgbClr val="FFFF00"/>
+                  </a:solidFill>
+                </a:rPr>
                 <a:t>0</a:t>
               </a:r>
             </a:p>
@@ -14763,7 +14951,11 @@
               <a:bodyPr wrap="none" anchor="ctr"/>
               <a:lstStyle/>
               <a:p>
-                <a:endParaRPr lang="nl-NL"/>
+                <a:endParaRPr lang="nl-NL">
+                  <a:solidFill>
+                    <a:srgbClr val="FFFF00"/>
+                  </a:solidFill>
+                </a:endParaRPr>
               </a:p>
             </p:txBody>
           </p:sp>
@@ -14778,7 +14970,7 @@
             <p:spPr bwMode="auto">
               <a:xfrm>
                 <a:off x="4815" y="2707"/>
-                <a:ext cx="196" cy="250"/>
+                <a:ext cx="197" cy="233"/>
               </a:xfrm>
               <a:prstGeom prst="rect">
                 <a:avLst/>
@@ -14798,7 +14990,11 @@
               <a:lstStyle/>
               <a:p>
                 <a:r>
-                  <a:rPr lang="en-US"/>
+                  <a:rPr lang="en-US">
+                    <a:solidFill>
+                      <a:srgbClr val="FFFF00"/>
+                    </a:solidFill>
+                  </a:rPr>
                   <a:t>2</a:t>
                 </a:r>
               </a:p>
@@ -14853,7 +15049,11 @@
               <a:bodyPr wrap="none" anchor="ctr"/>
               <a:lstStyle/>
               <a:p>
-                <a:endParaRPr lang="nl-NL"/>
+                <a:endParaRPr lang="nl-NL">
+                  <a:solidFill>
+                    <a:srgbClr val="FFFF00"/>
+                  </a:solidFill>
+                </a:endParaRPr>
               </a:p>
             </p:txBody>
           </p:sp>
@@ -14868,7 +15068,7 @@
             <p:spPr bwMode="auto">
               <a:xfrm>
                 <a:off x="3915" y="2707"/>
-                <a:ext cx="196" cy="250"/>
+                <a:ext cx="197" cy="233"/>
               </a:xfrm>
               <a:prstGeom prst="rect">
                 <a:avLst/>
@@ -14888,7 +15088,11 @@
               <a:lstStyle/>
               <a:p>
                 <a:r>
-                  <a:rPr lang="en-US" dirty="0"/>
+                  <a:rPr lang="en-US" dirty="0">
+                    <a:solidFill>
+                      <a:srgbClr val="FFFF00"/>
+                    </a:solidFill>
+                  </a:rPr>
                   <a:t>1</a:t>
                 </a:r>
               </a:p>
@@ -14944,7 +15148,11 @@
             <a:bodyPr wrap="none" anchor="ctr"/>
             <a:lstStyle/>
             <a:p>
-              <a:endParaRPr lang="nl-NL"/>
+              <a:endParaRPr lang="nl-NL">
+                <a:solidFill>
+                  <a:srgbClr val="FFFF00"/>
+                </a:solidFill>
+              </a:endParaRPr>
             </a:p>
           </p:txBody>
         </p:sp>
@@ -14959,7 +15167,7 @@
           <p:spPr bwMode="auto">
             <a:xfrm>
               <a:off x="4556098" y="2238363"/>
-              <a:ext cx="311150" cy="396875"/>
+              <a:ext cx="312908" cy="369329"/>
             </a:xfrm>
             <a:prstGeom prst="rect">
               <a:avLst/>
@@ -14979,7 +15187,11 @@
             <a:lstStyle/>
             <a:p>
               <a:r>
-                <a:rPr lang="en-US" dirty="0"/>
+                <a:rPr lang="en-US" dirty="0">
+                  <a:solidFill>
+                    <a:srgbClr val="FFFF00"/>
+                  </a:solidFill>
+                </a:rPr>
                 <a:t>6</a:t>
               </a:r>
             </a:p>
@@ -15102,7 +15314,11 @@
             <a:bodyPr wrap="none" anchor="ctr"/>
             <a:lstStyle/>
             <a:p>
-              <a:endParaRPr lang="nl-NL"/>
+              <a:endParaRPr lang="nl-NL">
+                <a:solidFill>
+                  <a:srgbClr val="FFFF00"/>
+                </a:solidFill>
+              </a:endParaRPr>
             </a:p>
           </p:txBody>
         </p:sp>
@@ -15116,8 +15332,8 @@
           </p:nvSpPr>
           <p:spPr bwMode="auto">
             <a:xfrm>
-              <a:off x="4365" y="1769"/>
-              <a:ext cx="196" cy="250"/>
+              <a:off x="4364" y="1769"/>
+              <a:ext cx="197" cy="233"/>
             </a:xfrm>
             <a:prstGeom prst="rect">
               <a:avLst/>
@@ -15138,7 +15354,11 @@
             <a:p>
               <a:pPr algn="r"/>
               <a:r>
-                <a:rPr lang="en-US"/>
+                <a:rPr lang="en-US">
+                  <a:solidFill>
+                    <a:srgbClr val="FFFF00"/>
+                  </a:solidFill>
+                </a:rPr>
                 <a:t>3</a:t>
               </a:r>
             </a:p>
@@ -15209,7 +15429,11 @@
               <a:bodyPr wrap="none" anchor="ctr"/>
               <a:lstStyle/>
               <a:p>
-                <a:endParaRPr lang="nl-NL"/>
+                <a:endParaRPr lang="nl-NL">
+                  <a:solidFill>
+                    <a:srgbClr val="FFFF00"/>
+                  </a:solidFill>
+                </a:endParaRPr>
               </a:p>
             </p:txBody>
           </p:sp>
@@ -15224,7 +15448,7 @@
             <p:spPr bwMode="auto">
               <a:xfrm>
                 <a:off x="4815" y="2707"/>
-                <a:ext cx="196" cy="250"/>
+                <a:ext cx="197" cy="233"/>
               </a:xfrm>
               <a:prstGeom prst="rect">
                 <a:avLst/>
@@ -15244,7 +15468,11 @@
               <a:lstStyle/>
               <a:p>
                 <a:r>
-                  <a:rPr lang="en-US"/>
+                  <a:rPr lang="en-US">
+                    <a:solidFill>
+                      <a:srgbClr val="FFFF00"/>
+                    </a:solidFill>
+                  </a:rPr>
                   <a:t>5</a:t>
                 </a:r>
               </a:p>
@@ -15299,7 +15527,11 @@
               <a:bodyPr wrap="none" anchor="ctr"/>
               <a:lstStyle/>
               <a:p>
-                <a:endParaRPr lang="nl-NL"/>
+                <a:endParaRPr lang="nl-NL">
+                  <a:solidFill>
+                    <a:srgbClr val="FFFF00"/>
+                  </a:solidFill>
+                </a:endParaRPr>
               </a:p>
             </p:txBody>
           </p:sp>
@@ -15314,7 +15546,7 @@
             <p:spPr bwMode="auto">
               <a:xfrm>
                 <a:off x="3915" y="2707"/>
-                <a:ext cx="196" cy="250"/>
+                <a:ext cx="197" cy="233"/>
               </a:xfrm>
               <a:prstGeom prst="rect">
                 <a:avLst/>
@@ -15334,7 +15566,11 @@
               <a:lstStyle/>
               <a:p>
                 <a:r>
-                  <a:rPr lang="en-US"/>
+                  <a:rPr lang="en-US">
+                    <a:solidFill>
+                      <a:srgbClr val="FFFF00"/>
+                    </a:solidFill>
+                  </a:rPr>
                   <a:t>4</a:t>
                 </a:r>
               </a:p>
@@ -15725,7 +15961,11 @@
               <a:bodyPr wrap="none" anchor="ctr"/>
               <a:lstStyle/>
               <a:p>
-                <a:endParaRPr lang="nl-NL"/>
+                <a:endParaRPr lang="nl-NL">
+                  <a:solidFill>
+                    <a:srgbClr val="FFFF00"/>
+                  </a:solidFill>
+                </a:endParaRPr>
               </a:p>
             </p:txBody>
           </p:sp>
@@ -15760,7 +16000,11 @@
               <a:lstStyle/>
               <a:p>
                 <a:r>
-                  <a:rPr lang="en-US"/>
+                  <a:rPr lang="en-US">
+                    <a:solidFill>
+                      <a:srgbClr val="FFFF00"/>
+                    </a:solidFill>
+                  </a:rPr>
                   <a:t>7</a:t>
                 </a:r>
               </a:p>
@@ -15815,7 +16059,11 @@
               <a:bodyPr wrap="none" anchor="ctr"/>
               <a:lstStyle/>
               <a:p>
-                <a:endParaRPr lang="nl-NL"/>
+                <a:endParaRPr lang="nl-NL">
+                  <a:solidFill>
+                    <a:srgbClr val="FFFF00"/>
+                  </a:solidFill>
+                </a:endParaRPr>
               </a:p>
             </p:txBody>
           </p:sp>
@@ -15850,7 +16098,11 @@
               <a:lstStyle/>
               <a:p>
                 <a:r>
-                  <a:rPr lang="en-US"/>
+                  <a:rPr lang="en-US">
+                    <a:solidFill>
+                      <a:srgbClr val="FFFF00"/>
+                    </a:solidFill>
+                  </a:rPr>
                   <a:t>8</a:t>
                 </a:r>
               </a:p>
@@ -16874,7 +17126,11 @@
             <a:bodyPr wrap="none" anchor="ctr"/>
             <a:lstStyle/>
             <a:p>
-              <a:endParaRPr lang="nl-NL"/>
+              <a:endParaRPr lang="nl-NL">
+                <a:solidFill>
+                  <a:srgbClr val="FFFF00"/>
+                </a:solidFill>
+              </a:endParaRPr>
             </a:p>
           </p:txBody>
         </p:sp>
@@ -16894,8 +17150,8 @@
           </p:nvSpPr>
           <p:spPr bwMode="auto">
             <a:xfrm>
-              <a:off x="849" y="3244"/>
-              <a:ext cx="196" cy="250"/>
+              <a:off x="848" y="3244"/>
+              <a:ext cx="197" cy="233"/>
             </a:xfrm>
             <a:prstGeom prst="rect">
               <a:avLst/>
@@ -16916,7 +17172,11 @@
             <a:p>
               <a:pPr algn="r"/>
               <a:r>
-                <a:rPr lang="en-US"/>
+                <a:rPr lang="en-US">
+                  <a:solidFill>
+                    <a:srgbClr val="FFFF00"/>
+                  </a:solidFill>
+                </a:rPr>
                 <a:t>1</a:t>
               </a:r>
             </a:p>
@@ -16983,7 +17243,11 @@
             <a:bodyPr wrap="none" anchor="ctr"/>
             <a:lstStyle/>
             <a:p>
-              <a:endParaRPr lang="nl-NL"/>
+              <a:endParaRPr lang="nl-NL">
+                <a:solidFill>
+                  <a:srgbClr val="FFFF00"/>
+                </a:solidFill>
+              </a:endParaRPr>
             </a:p>
           </p:txBody>
         </p:sp>
@@ -17004,7 +17268,7 @@
           <p:spPr bwMode="auto">
             <a:xfrm>
               <a:off x="1374" y="3549"/>
-              <a:ext cx="196" cy="250"/>
+              <a:ext cx="197" cy="233"/>
             </a:xfrm>
             <a:prstGeom prst="rect">
               <a:avLst/>
@@ -17024,7 +17288,11 @@
             <a:lstStyle/>
             <a:p>
               <a:r>
-                <a:rPr lang="en-US"/>
+                <a:rPr lang="en-US">
+                  <a:solidFill>
+                    <a:srgbClr val="FFFF00"/>
+                  </a:solidFill>
+                </a:rPr>
                 <a:t>2</a:t>
               </a:r>
             </a:p>
@@ -17091,7 +17359,11 @@
             <a:bodyPr wrap="none" anchor="ctr"/>
             <a:lstStyle/>
             <a:p>
-              <a:endParaRPr lang="nl-NL"/>
+              <a:endParaRPr lang="nl-NL">
+                <a:solidFill>
+                  <a:srgbClr val="FFFF00"/>
+                </a:solidFill>
+              </a:endParaRPr>
             </a:p>
           </p:txBody>
         </p:sp>
@@ -17112,7 +17384,7 @@
           <p:spPr bwMode="auto">
             <a:xfrm>
               <a:off x="1404" y="2937"/>
-              <a:ext cx="196" cy="250"/>
+              <a:ext cx="197" cy="233"/>
             </a:xfrm>
             <a:prstGeom prst="rect">
               <a:avLst/>
@@ -17132,7 +17404,11 @@
             <a:lstStyle/>
             <a:p>
               <a:r>
-                <a:rPr lang="en-US"/>
+                <a:rPr lang="en-US">
+                  <a:solidFill>
+                    <a:srgbClr val="FFFF00"/>
+                  </a:solidFill>
+                </a:rPr>
                 <a:t>0</a:t>
               </a:r>
             </a:p>
@@ -17639,7 +17915,11 @@
             <a:bodyPr wrap="none" anchor="ctr"/>
             <a:lstStyle/>
             <a:p>
-              <a:endParaRPr lang="nl-NL"/>
+              <a:endParaRPr lang="nl-NL">
+                <a:solidFill>
+                  <a:srgbClr val="FFFF00"/>
+                </a:solidFill>
+              </a:endParaRPr>
             </a:p>
           </p:txBody>
         </p:sp>
@@ -17653,8 +17933,8 @@
           </p:nvSpPr>
           <p:spPr bwMode="auto">
             <a:xfrm>
-              <a:off x="849" y="3244"/>
-              <a:ext cx="196" cy="250"/>
+              <a:off x="848" y="3244"/>
+              <a:ext cx="197" cy="233"/>
             </a:xfrm>
             <a:prstGeom prst="rect">
               <a:avLst/>
@@ -17675,7 +17955,11 @@
             <a:p>
               <a:pPr algn="r"/>
               <a:r>
-                <a:rPr lang="en-US"/>
+                <a:rPr lang="en-US">
+                  <a:solidFill>
+                    <a:srgbClr val="FFFF00"/>
+                  </a:solidFill>
+                </a:rPr>
                 <a:t>1</a:t>
               </a:r>
             </a:p>
@@ -17730,7 +18014,11 @@
             <a:bodyPr wrap="none" anchor="ctr"/>
             <a:lstStyle/>
             <a:p>
-              <a:endParaRPr lang="nl-NL"/>
+              <a:endParaRPr lang="nl-NL">
+                <a:solidFill>
+                  <a:srgbClr val="FFFF00"/>
+                </a:solidFill>
+              </a:endParaRPr>
             </a:p>
           </p:txBody>
         </p:sp>
@@ -17745,7 +18033,7 @@
           <p:spPr bwMode="auto">
             <a:xfrm>
               <a:off x="1374" y="3549"/>
-              <a:ext cx="196" cy="250"/>
+              <a:ext cx="197" cy="233"/>
             </a:xfrm>
             <a:prstGeom prst="rect">
               <a:avLst/>
@@ -17765,7 +18053,11 @@
             <a:lstStyle/>
             <a:p>
               <a:r>
-                <a:rPr lang="en-US"/>
+                <a:rPr lang="en-US">
+                  <a:solidFill>
+                    <a:srgbClr val="FFFF00"/>
+                  </a:solidFill>
+                </a:rPr>
                 <a:t>2</a:t>
               </a:r>
             </a:p>
@@ -17820,7 +18112,11 @@
             <a:bodyPr wrap="none" anchor="ctr"/>
             <a:lstStyle/>
             <a:p>
-              <a:endParaRPr lang="nl-NL"/>
+              <a:endParaRPr lang="nl-NL">
+                <a:solidFill>
+                  <a:srgbClr val="FFFF00"/>
+                </a:solidFill>
+              </a:endParaRPr>
             </a:p>
           </p:txBody>
         </p:sp>
@@ -17835,7 +18131,7 @@
           <p:spPr bwMode="auto">
             <a:xfrm>
               <a:off x="1404" y="2937"/>
-              <a:ext cx="196" cy="250"/>
+              <a:ext cx="197" cy="233"/>
             </a:xfrm>
             <a:prstGeom prst="rect">
               <a:avLst/>
@@ -17855,7 +18151,11 @@
             <a:lstStyle/>
             <a:p>
               <a:r>
-                <a:rPr lang="en-US"/>
+                <a:rPr lang="en-US">
+                  <a:solidFill>
+                    <a:srgbClr val="FFFF00"/>
+                  </a:solidFill>
+                </a:rPr>
                 <a:t>0</a:t>
               </a:r>
             </a:p>
@@ -18633,7 +18933,11 @@
             <a:bodyPr wrap="none" anchor="ctr"/>
             <a:lstStyle/>
             <a:p>
-              <a:endParaRPr lang="nl-NL"/>
+              <a:endParaRPr lang="nl-NL">
+                <a:solidFill>
+                  <a:srgbClr val="FFFF00"/>
+                </a:solidFill>
+              </a:endParaRPr>
             </a:p>
           </p:txBody>
         </p:sp>
@@ -18648,7 +18952,7 @@
           <p:spPr bwMode="auto">
             <a:xfrm>
               <a:off x="3408354" y="5353067"/>
-              <a:ext cx="311150" cy="396875"/>
+              <a:ext cx="312909" cy="369335"/>
             </a:xfrm>
             <a:prstGeom prst="rect">
               <a:avLst/>
@@ -18668,7 +18972,11 @@
             <a:lstStyle/>
             <a:p>
               <a:r>
-                <a:rPr lang="en-US"/>
+                <a:rPr lang="en-US">
+                  <a:solidFill>
+                    <a:srgbClr val="FFFF00"/>
+                  </a:solidFill>
+                </a:rPr>
                 <a:t>2</a:t>
               </a:r>
             </a:p>
@@ -18722,7 +19030,11 @@
               <a:bodyPr wrap="none" anchor="ctr"/>
               <a:lstStyle/>
               <a:p>
-                <a:endParaRPr lang="nl-NL"/>
+                <a:endParaRPr lang="nl-NL">
+                  <a:solidFill>
+                    <a:srgbClr val="FFFF00"/>
+                  </a:solidFill>
+                </a:endParaRPr>
               </a:p>
             </p:txBody>
           </p:sp>
@@ -18737,7 +19049,7 @@
             <p:spPr bwMode="auto">
               <a:xfrm>
                 <a:off x="1404" y="2937"/>
-                <a:ext cx="196" cy="250"/>
+                <a:ext cx="197" cy="233"/>
               </a:xfrm>
               <a:prstGeom prst="rect">
                 <a:avLst/>
@@ -18757,7 +19069,11 @@
               <a:lstStyle/>
               <a:p>
                 <a:r>
-                  <a:rPr lang="en-US"/>
+                  <a:rPr lang="en-US">
+                    <a:solidFill>
+                      <a:srgbClr val="FFFF00"/>
+                    </a:solidFill>
+                  </a:rPr>
                   <a:t>0</a:t>
                 </a:r>
               </a:p>
@@ -18794,7 +19110,11 @@
             <a:bodyPr/>
             <a:lstStyle/>
             <a:p>
-              <a:endParaRPr lang="en-US"/>
+              <a:endParaRPr lang="en-US">
+                <a:solidFill>
+                  <a:srgbClr val="FFFF00"/>
+                </a:solidFill>
+              </a:endParaRPr>
             </a:p>
           </p:txBody>
         </p:sp>
@@ -18830,7 +19150,11 @@
             <a:bodyPr wrap="none" anchor="ctr"/>
             <a:lstStyle/>
             <a:p>
-              <a:endParaRPr lang="nl-NL"/>
+              <a:endParaRPr lang="nl-NL">
+                <a:solidFill>
+                  <a:srgbClr val="FFFF00"/>
+                </a:solidFill>
+              </a:endParaRPr>
             </a:p>
           </p:txBody>
         </p:sp>
@@ -18865,7 +19189,11 @@
             <a:lstStyle/>
             <a:p>
               <a:r>
-                <a:rPr lang="en-US"/>
+                <a:rPr lang="en-US">
+                  <a:solidFill>
+                    <a:srgbClr val="FFFF00"/>
+                  </a:solidFill>
+                </a:rPr>
                 <a:t>1</a:t>
               </a:r>
             </a:p>
@@ -19365,7 +19693,11 @@
             <a:bodyPr wrap="none" anchor="ctr"/>
             <a:lstStyle/>
             <a:p>
-              <a:endParaRPr lang="nl-NL"/>
+              <a:endParaRPr lang="nl-NL">
+                <a:solidFill>
+                  <a:srgbClr val="FFFF00"/>
+                </a:solidFill>
+              </a:endParaRPr>
             </a:p>
           </p:txBody>
         </p:sp>
@@ -19379,8 +19711,8 @@
           </p:nvSpPr>
           <p:spPr bwMode="auto">
             <a:xfrm>
-              <a:off x="4365" y="1769"/>
-              <a:ext cx="196" cy="250"/>
+              <a:off x="4364" y="1769"/>
+              <a:ext cx="197" cy="233"/>
             </a:xfrm>
             <a:prstGeom prst="rect">
               <a:avLst/>
@@ -19401,7 +19733,11 @@
             <a:p>
               <a:pPr algn="r"/>
               <a:r>
-                <a:rPr lang="en-US"/>
+                <a:rPr lang="en-US">
+                  <a:solidFill>
+                    <a:srgbClr val="FFFF00"/>
+                  </a:solidFill>
+                </a:rPr>
                 <a:t>0</a:t>
               </a:r>
             </a:p>
@@ -19456,7 +19792,11 @@
             <a:bodyPr wrap="none" anchor="ctr"/>
             <a:lstStyle/>
             <a:p>
-              <a:endParaRPr lang="nl-NL"/>
+              <a:endParaRPr lang="nl-NL">
+                <a:solidFill>
+                  <a:srgbClr val="FFFF00"/>
+                </a:solidFill>
+              </a:endParaRPr>
             </a:p>
           </p:txBody>
         </p:sp>
@@ -19471,7 +19811,7 @@
           <p:spPr bwMode="auto">
             <a:xfrm>
               <a:off x="4815" y="2707"/>
-              <a:ext cx="196" cy="250"/>
+              <a:ext cx="197" cy="233"/>
             </a:xfrm>
             <a:prstGeom prst="rect">
               <a:avLst/>
@@ -19491,7 +19831,11 @@
             <a:lstStyle/>
             <a:p>
               <a:r>
-                <a:rPr lang="en-US"/>
+                <a:rPr lang="en-US">
+                  <a:solidFill>
+                    <a:srgbClr val="FFFF00"/>
+                  </a:solidFill>
+                </a:rPr>
                 <a:t>2</a:t>
               </a:r>
             </a:p>
@@ -19546,7 +19890,11 @@
             <a:bodyPr wrap="none" anchor="ctr"/>
             <a:lstStyle/>
             <a:p>
-              <a:endParaRPr lang="nl-NL"/>
+              <a:endParaRPr lang="nl-NL">
+                <a:solidFill>
+                  <a:srgbClr val="FFFF00"/>
+                </a:solidFill>
+              </a:endParaRPr>
             </a:p>
           </p:txBody>
         </p:sp>
@@ -19561,7 +19909,7 @@
           <p:spPr bwMode="auto">
             <a:xfrm>
               <a:off x="3915" y="2707"/>
-              <a:ext cx="196" cy="250"/>
+              <a:ext cx="197" cy="233"/>
             </a:xfrm>
             <a:prstGeom prst="rect">
               <a:avLst/>
@@ -19581,7 +19929,11 @@
             <a:lstStyle/>
             <a:p>
               <a:r>
-                <a:rPr lang="en-US"/>
+                <a:rPr lang="en-US">
+                  <a:solidFill>
+                    <a:srgbClr val="FFFF00"/>
+                  </a:solidFill>
+                </a:rPr>
                 <a:t>1</a:t>
               </a:r>
             </a:p>
@@ -19704,7 +20056,11 @@
             <a:bodyPr wrap="none" anchor="ctr"/>
             <a:lstStyle/>
             <a:p>
-              <a:endParaRPr lang="nl-NL"/>
+              <a:endParaRPr lang="nl-NL">
+                <a:solidFill>
+                  <a:srgbClr val="FFFF00"/>
+                </a:solidFill>
+              </a:endParaRPr>
             </a:p>
           </p:txBody>
         </p:sp>
@@ -19718,8 +20074,8 @@
           </p:nvSpPr>
           <p:spPr bwMode="auto">
             <a:xfrm>
-              <a:off x="4365" y="1769"/>
-              <a:ext cx="196" cy="250"/>
+              <a:off x="4364" y="1769"/>
+              <a:ext cx="197" cy="233"/>
             </a:xfrm>
             <a:prstGeom prst="rect">
               <a:avLst/>
@@ -19740,7 +20096,11 @@
             <a:p>
               <a:pPr algn="r"/>
               <a:r>
-                <a:rPr lang="en-US"/>
+                <a:rPr lang="en-US">
+                  <a:solidFill>
+                    <a:srgbClr val="FFFF00"/>
+                  </a:solidFill>
+                </a:rPr>
                 <a:t>3</a:t>
               </a:r>
             </a:p>
@@ -20093,7 +20453,11 @@
             <a:bodyPr wrap="none" anchor="ctr"/>
             <a:lstStyle/>
             <a:p>
-              <a:endParaRPr lang="nl-NL"/>
+              <a:endParaRPr lang="nl-NL">
+                <a:solidFill>
+                  <a:srgbClr val="FFFF00"/>
+                </a:solidFill>
+              </a:endParaRPr>
             </a:p>
           </p:txBody>
         </p:sp>
@@ -20108,7 +20472,7 @@
           <p:spPr bwMode="auto">
             <a:xfrm>
               <a:off x="4365" y="3645"/>
-              <a:ext cx="196" cy="250"/>
+              <a:ext cx="197" cy="233"/>
             </a:xfrm>
             <a:prstGeom prst="rect">
               <a:avLst/>
@@ -20128,7 +20492,11 @@
             <a:lstStyle/>
             <a:p>
               <a:r>
-                <a:rPr lang="en-US"/>
+                <a:rPr lang="en-US">
+                  <a:solidFill>
+                    <a:srgbClr val="FFFF00"/>
+                  </a:solidFill>
+                </a:rPr>
                 <a:t>6</a:t>
               </a:r>
             </a:p>
@@ -20837,7 +21205,11 @@
               <a:bodyPr wrap="none" anchor="ctr"/>
               <a:lstStyle/>
               <a:p>
-                <a:endParaRPr lang="nl-NL"/>
+                <a:endParaRPr lang="nl-NL">
+                  <a:solidFill>
+                    <a:srgbClr val="FFFF00"/>
+                  </a:solidFill>
+                </a:endParaRPr>
               </a:p>
             </p:txBody>
           </p:sp>
@@ -20852,7 +21224,7 @@
             <p:spPr bwMode="auto">
               <a:xfrm>
                 <a:off x="761" y="3397"/>
-                <a:ext cx="196" cy="250"/>
+                <a:ext cx="197" cy="233"/>
               </a:xfrm>
               <a:prstGeom prst="rect">
                 <a:avLst/>
@@ -20872,7 +21244,11 @@
               <a:lstStyle/>
               <a:p>
                 <a:r>
-                  <a:rPr lang="en-US"/>
+                  <a:rPr lang="en-US">
+                    <a:solidFill>
+                      <a:srgbClr val="FFFF00"/>
+                    </a:solidFill>
+                  </a:rPr>
                   <a:t>5</a:t>
                 </a:r>
               </a:p>
@@ -20927,7 +21303,11 @@
               <a:bodyPr wrap="none" anchor="ctr"/>
               <a:lstStyle/>
               <a:p>
-                <a:endParaRPr lang="nl-NL"/>
+                <a:endParaRPr lang="nl-NL">
+                  <a:solidFill>
+                    <a:srgbClr val="FFFF00"/>
+                  </a:solidFill>
+                </a:endParaRPr>
               </a:p>
             </p:txBody>
           </p:sp>
@@ -20941,8 +21321,8 @@
             </p:nvSpPr>
             <p:spPr bwMode="auto">
               <a:xfrm>
-                <a:off x="4365" y="1769"/>
-                <a:ext cx="196" cy="250"/>
+                <a:off x="4364" y="1769"/>
+                <a:ext cx="197" cy="233"/>
               </a:xfrm>
               <a:prstGeom prst="rect">
                 <a:avLst/>
@@ -20963,7 +21343,11 @@
               <a:p>
                 <a:pPr algn="r"/>
                 <a:r>
-                  <a:rPr lang="en-US"/>
+                  <a:rPr lang="en-US">
+                    <a:solidFill>
+                      <a:srgbClr val="FFFF00"/>
+                    </a:solidFill>
+                  </a:rPr>
                   <a:t>0</a:t>
                 </a:r>
               </a:p>
@@ -21018,7 +21402,11 @@
               <a:bodyPr wrap="none" anchor="ctr"/>
               <a:lstStyle/>
               <a:p>
-                <a:endParaRPr lang="nl-NL"/>
+                <a:endParaRPr lang="nl-NL">
+                  <a:solidFill>
+                    <a:srgbClr val="FFFF00"/>
+                  </a:solidFill>
+                </a:endParaRPr>
               </a:p>
             </p:txBody>
           </p:sp>
@@ -21033,7 +21421,7 @@
             <p:spPr bwMode="auto">
               <a:xfrm>
                 <a:off x="4815" y="2707"/>
-                <a:ext cx="196" cy="250"/>
+                <a:ext cx="197" cy="233"/>
               </a:xfrm>
               <a:prstGeom prst="rect">
                 <a:avLst/>
@@ -21053,7 +21441,11 @@
               <a:lstStyle/>
               <a:p>
                 <a:r>
-                  <a:rPr lang="en-US"/>
+                  <a:rPr lang="en-US">
+                    <a:solidFill>
+                      <a:srgbClr val="FFFF00"/>
+                    </a:solidFill>
+                  </a:rPr>
                   <a:t>2</a:t>
                 </a:r>
               </a:p>
@@ -21108,7 +21500,11 @@
               <a:bodyPr wrap="none" anchor="ctr"/>
               <a:lstStyle/>
               <a:p>
-                <a:endParaRPr lang="nl-NL"/>
+                <a:endParaRPr lang="nl-NL">
+                  <a:solidFill>
+                    <a:srgbClr val="FFFF00"/>
+                  </a:solidFill>
+                </a:endParaRPr>
               </a:p>
             </p:txBody>
           </p:sp>
@@ -21123,7 +21519,7 @@
             <p:spPr bwMode="auto">
               <a:xfrm>
                 <a:off x="3915" y="2707"/>
-                <a:ext cx="196" cy="250"/>
+                <a:ext cx="197" cy="233"/>
               </a:xfrm>
               <a:prstGeom prst="rect">
                 <a:avLst/>
@@ -21143,7 +21539,11 @@
               <a:lstStyle/>
               <a:p>
                 <a:r>
-                  <a:rPr lang="en-US"/>
+                  <a:rPr lang="en-US">
+                    <a:solidFill>
+                      <a:srgbClr val="FFFF00"/>
+                    </a:solidFill>
+                  </a:rPr>
                   <a:t>1</a:t>
                 </a:r>
               </a:p>
@@ -21180,7 +21580,11 @@
             <a:bodyPr/>
             <a:lstStyle/>
             <a:p>
-              <a:endParaRPr lang="en-US"/>
+              <a:endParaRPr lang="en-US">
+                <a:solidFill>
+                  <a:srgbClr val="FFFF00"/>
+                </a:solidFill>
+              </a:endParaRPr>
             </a:p>
           </p:txBody>
         </p:sp>
@@ -21214,7 +21618,11 @@
             <a:bodyPr/>
             <a:lstStyle/>
             <a:p>
-              <a:endParaRPr lang="en-US"/>
+              <a:endParaRPr lang="en-US">
+                <a:solidFill>
+                  <a:srgbClr val="FFFF00"/>
+                </a:solidFill>
+              </a:endParaRPr>
             </a:p>
           </p:txBody>
         </p:sp>
@@ -21266,7 +21674,11 @@
               <a:bodyPr wrap="none" anchor="ctr"/>
               <a:lstStyle/>
               <a:p>
-                <a:endParaRPr lang="nl-NL"/>
+                <a:endParaRPr lang="nl-NL">
+                  <a:solidFill>
+                    <a:srgbClr val="FFFF00"/>
+                  </a:solidFill>
+                </a:endParaRPr>
               </a:p>
             </p:txBody>
           </p:sp>
@@ -21280,8 +21692,8 @@
             </p:nvSpPr>
             <p:spPr bwMode="auto">
               <a:xfrm>
-                <a:off x="4365" y="1769"/>
-                <a:ext cx="196" cy="250"/>
+                <a:off x="4364" y="1769"/>
+                <a:ext cx="197" cy="233"/>
               </a:xfrm>
               <a:prstGeom prst="rect">
                 <a:avLst/>
@@ -21302,7 +21714,11 @@
               <a:p>
                 <a:pPr algn="r"/>
                 <a:r>
-                  <a:rPr lang="en-US"/>
+                  <a:rPr lang="en-US">
+                    <a:solidFill>
+                      <a:srgbClr val="FFFF00"/>
+                    </a:solidFill>
+                  </a:rPr>
                   <a:t>3</a:t>
                 </a:r>
               </a:p>
@@ -21357,7 +21773,11 @@
               <a:bodyPr wrap="none" anchor="ctr"/>
               <a:lstStyle/>
               <a:p>
-                <a:endParaRPr lang="nl-NL"/>
+                <a:endParaRPr lang="nl-NL">
+                  <a:solidFill>
+                    <a:srgbClr val="FFFF00"/>
+                  </a:solidFill>
+                </a:endParaRPr>
               </a:p>
             </p:txBody>
           </p:sp>
@@ -21372,7 +21792,7 @@
             <p:spPr bwMode="auto">
               <a:xfrm>
                 <a:off x="3915" y="2707"/>
-                <a:ext cx="196" cy="250"/>
+                <a:ext cx="197" cy="233"/>
               </a:xfrm>
               <a:prstGeom prst="rect">
                 <a:avLst/>
@@ -21392,7 +21812,11 @@
               <a:lstStyle/>
               <a:p>
                 <a:r>
-                  <a:rPr lang="en-US"/>
+                  <a:rPr lang="en-US">
+                    <a:solidFill>
+                      <a:srgbClr val="FFFF00"/>
+                    </a:solidFill>
+                  </a:rPr>
                   <a:t>4</a:t>
                 </a:r>
               </a:p>
@@ -21429,7 +21853,11 @@
             <a:bodyPr/>
             <a:lstStyle/>
             <a:p>
-              <a:endParaRPr lang="en-US"/>
+              <a:endParaRPr lang="en-US">
+                <a:solidFill>
+                  <a:srgbClr val="FFFF00"/>
+                </a:solidFill>
+              </a:endParaRPr>
             </a:p>
           </p:txBody>
         </p:sp>
@@ -21463,7 +21891,11 @@
             <a:bodyPr/>
             <a:lstStyle/>
             <a:p>
-              <a:endParaRPr lang="en-US"/>
+              <a:endParaRPr lang="en-US">
+                <a:solidFill>
+                  <a:srgbClr val="FFFF00"/>
+                </a:solidFill>
+              </a:endParaRPr>
             </a:p>
           </p:txBody>
         </p:sp>
@@ -21497,7 +21929,11 @@
             <a:bodyPr/>
             <a:lstStyle/>
             <a:p>
-              <a:endParaRPr lang="en-US"/>
+              <a:endParaRPr lang="en-US">
+                <a:solidFill>
+                  <a:srgbClr val="FFFF00"/>
+                </a:solidFill>
+              </a:endParaRPr>
             </a:p>
           </p:txBody>
         </p:sp>
@@ -21531,7 +21967,11 @@
             <a:bodyPr/>
             <a:lstStyle/>
             <a:p>
-              <a:endParaRPr lang="en-US"/>
+              <a:endParaRPr lang="en-US">
+                <a:solidFill>
+                  <a:srgbClr val="FFFF00"/>
+                </a:solidFill>
+              </a:endParaRPr>
             </a:p>
           </p:txBody>
         </p:sp>
@@ -21565,7 +22005,11 @@
             <a:bodyPr/>
             <a:lstStyle/>
             <a:p>
-              <a:endParaRPr lang="en-US"/>
+              <a:endParaRPr lang="en-US">
+                <a:solidFill>
+                  <a:srgbClr val="FFFF00"/>
+                </a:solidFill>
+              </a:endParaRPr>
             </a:p>
           </p:txBody>
         </p:sp>
@@ -21599,7 +22043,11 @@
             <a:bodyPr/>
             <a:lstStyle/>
             <a:p>
-              <a:endParaRPr lang="en-US"/>
+              <a:endParaRPr lang="en-US">
+                <a:solidFill>
+                  <a:srgbClr val="FFFF00"/>
+                </a:solidFill>
+              </a:endParaRPr>
             </a:p>
           </p:txBody>
         </p:sp>
@@ -21633,7 +22081,11 @@
             <a:bodyPr/>
             <a:lstStyle/>
             <a:p>
-              <a:endParaRPr lang="en-US"/>
+              <a:endParaRPr lang="en-US">
+                <a:solidFill>
+                  <a:srgbClr val="FFFF00"/>
+                </a:solidFill>
+              </a:endParaRPr>
             </a:p>
           </p:txBody>
         </p:sp>
@@ -21685,7 +22137,11 @@
               <a:bodyPr wrap="none" anchor="ctr"/>
               <a:lstStyle/>
               <a:p>
-                <a:endParaRPr lang="nl-NL"/>
+                <a:endParaRPr lang="nl-NL">
+                  <a:solidFill>
+                    <a:srgbClr val="FFFF00"/>
+                  </a:solidFill>
+                </a:endParaRPr>
               </a:p>
             </p:txBody>
           </p:sp>
@@ -21700,7 +22156,7 @@
             <p:spPr bwMode="auto">
               <a:xfrm>
                 <a:off x="4365" y="3645"/>
-                <a:ext cx="196" cy="250"/>
+                <a:ext cx="197" cy="233"/>
               </a:xfrm>
               <a:prstGeom prst="rect">
                 <a:avLst/>
@@ -21720,7 +22176,11 @@
               <a:lstStyle/>
               <a:p>
                 <a:r>
-                  <a:rPr lang="en-US"/>
+                  <a:rPr lang="en-US">
+                    <a:solidFill>
+                      <a:srgbClr val="FFFF00"/>
+                    </a:solidFill>
+                  </a:rPr>
                   <a:t>6</a:t>
                 </a:r>
               </a:p>
@@ -21757,7 +22217,11 @@
             <a:bodyPr/>
             <a:lstStyle/>
             <a:p>
-              <a:endParaRPr lang="en-US"/>
+              <a:endParaRPr lang="en-US">
+                <a:solidFill>
+                  <a:srgbClr val="FFFF00"/>
+                </a:solidFill>
+              </a:endParaRPr>
             </a:p>
           </p:txBody>
         </p:sp>
@@ -23037,7 +23501,11 @@
               <a:bodyPr wrap="none" anchor="ctr"/>
               <a:lstStyle/>
               <a:p>
-                <a:endParaRPr lang="nl-NL"/>
+                <a:endParaRPr lang="nl-NL">
+                  <a:solidFill>
+                    <a:srgbClr val="FFFF00"/>
+                  </a:solidFill>
+                </a:endParaRPr>
               </a:p>
             </p:txBody>
           </p:sp>
@@ -23052,7 +23520,7 @@
             <p:spPr bwMode="auto">
               <a:xfrm>
                 <a:off x="761" y="3397"/>
-                <a:ext cx="196" cy="250"/>
+                <a:ext cx="197" cy="233"/>
               </a:xfrm>
               <a:prstGeom prst="rect">
                 <a:avLst/>
@@ -23072,7 +23540,11 @@
               <a:lstStyle/>
               <a:p>
                 <a:r>
-                  <a:rPr lang="en-US"/>
+                  <a:rPr lang="en-US">
+                    <a:solidFill>
+                      <a:srgbClr val="FFFF00"/>
+                    </a:solidFill>
+                  </a:rPr>
                   <a:t>5</a:t>
                 </a:r>
               </a:p>
@@ -23127,7 +23599,11 @@
               <a:bodyPr wrap="none" anchor="ctr"/>
               <a:lstStyle/>
               <a:p>
-                <a:endParaRPr lang="nl-NL"/>
+                <a:endParaRPr lang="nl-NL">
+                  <a:solidFill>
+                    <a:srgbClr val="FFFF00"/>
+                  </a:solidFill>
+                </a:endParaRPr>
               </a:p>
             </p:txBody>
           </p:sp>
@@ -23141,8 +23617,8 @@
             </p:nvSpPr>
             <p:spPr bwMode="auto">
               <a:xfrm>
-                <a:off x="4365" y="1769"/>
-                <a:ext cx="196" cy="250"/>
+                <a:off x="4364" y="1769"/>
+                <a:ext cx="197" cy="233"/>
               </a:xfrm>
               <a:prstGeom prst="rect">
                 <a:avLst/>
@@ -23163,7 +23639,11 @@
               <a:p>
                 <a:pPr algn="r"/>
                 <a:r>
-                  <a:rPr lang="en-US"/>
+                  <a:rPr lang="en-US">
+                    <a:solidFill>
+                      <a:srgbClr val="FFFF00"/>
+                    </a:solidFill>
+                  </a:rPr>
                   <a:t>0</a:t>
                 </a:r>
               </a:p>
@@ -23218,7 +23698,11 @@
               <a:bodyPr wrap="none" anchor="ctr"/>
               <a:lstStyle/>
               <a:p>
-                <a:endParaRPr lang="nl-NL"/>
+                <a:endParaRPr lang="nl-NL">
+                  <a:solidFill>
+                    <a:srgbClr val="FFFF00"/>
+                  </a:solidFill>
+                </a:endParaRPr>
               </a:p>
             </p:txBody>
           </p:sp>
@@ -23233,7 +23717,7 @@
             <p:spPr bwMode="auto">
               <a:xfrm>
                 <a:off x="4815" y="2707"/>
-                <a:ext cx="196" cy="250"/>
+                <a:ext cx="197" cy="233"/>
               </a:xfrm>
               <a:prstGeom prst="rect">
                 <a:avLst/>
@@ -23253,7 +23737,11 @@
               <a:lstStyle/>
               <a:p>
                 <a:r>
-                  <a:rPr lang="en-US"/>
+                  <a:rPr lang="en-US">
+                    <a:solidFill>
+                      <a:srgbClr val="FFFF00"/>
+                    </a:solidFill>
+                  </a:rPr>
                   <a:t>2</a:t>
                 </a:r>
               </a:p>
@@ -23308,7 +23796,11 @@
               <a:bodyPr wrap="none" anchor="ctr"/>
               <a:lstStyle/>
               <a:p>
-                <a:endParaRPr lang="nl-NL"/>
+                <a:endParaRPr lang="nl-NL">
+                  <a:solidFill>
+                    <a:srgbClr val="FFFF00"/>
+                  </a:solidFill>
+                </a:endParaRPr>
               </a:p>
             </p:txBody>
           </p:sp>
@@ -23323,7 +23815,7 @@
             <p:spPr bwMode="auto">
               <a:xfrm>
                 <a:off x="3915" y="2707"/>
-                <a:ext cx="196" cy="250"/>
+                <a:ext cx="197" cy="233"/>
               </a:xfrm>
               <a:prstGeom prst="rect">
                 <a:avLst/>
@@ -23343,7 +23835,11 @@
               <a:lstStyle/>
               <a:p>
                 <a:r>
-                  <a:rPr lang="en-US"/>
+                  <a:rPr lang="en-US">
+                    <a:solidFill>
+                      <a:srgbClr val="FFFF00"/>
+                    </a:solidFill>
+                  </a:rPr>
                   <a:t>1</a:t>
                 </a:r>
               </a:p>
@@ -23380,7 +23876,11 @@
             <a:bodyPr/>
             <a:lstStyle/>
             <a:p>
-              <a:endParaRPr lang="en-US"/>
+              <a:endParaRPr lang="en-US">
+                <a:solidFill>
+                  <a:srgbClr val="FFFF00"/>
+                </a:solidFill>
+              </a:endParaRPr>
             </a:p>
           </p:txBody>
         </p:sp>
@@ -23414,7 +23914,11 @@
             <a:bodyPr/>
             <a:lstStyle/>
             <a:p>
-              <a:endParaRPr lang="en-US"/>
+              <a:endParaRPr lang="en-US">
+                <a:solidFill>
+                  <a:srgbClr val="FFFF00"/>
+                </a:solidFill>
+              </a:endParaRPr>
             </a:p>
           </p:txBody>
         </p:sp>
@@ -23466,7 +23970,11 @@
               <a:bodyPr wrap="none" anchor="ctr"/>
               <a:lstStyle/>
               <a:p>
-                <a:endParaRPr lang="nl-NL"/>
+                <a:endParaRPr lang="nl-NL">
+                  <a:solidFill>
+                    <a:srgbClr val="FFFF00"/>
+                  </a:solidFill>
+                </a:endParaRPr>
               </a:p>
             </p:txBody>
           </p:sp>
@@ -23480,8 +23988,8 @@
             </p:nvSpPr>
             <p:spPr bwMode="auto">
               <a:xfrm>
-                <a:off x="4365" y="1769"/>
-                <a:ext cx="196" cy="250"/>
+                <a:off x="4364" y="1769"/>
+                <a:ext cx="197" cy="233"/>
               </a:xfrm>
               <a:prstGeom prst="rect">
                 <a:avLst/>
@@ -23502,7 +24010,11 @@
               <a:p>
                 <a:pPr algn="r"/>
                 <a:r>
-                  <a:rPr lang="en-US"/>
+                  <a:rPr lang="en-US">
+                    <a:solidFill>
+                      <a:srgbClr val="FFFF00"/>
+                    </a:solidFill>
+                  </a:rPr>
                   <a:t>3</a:t>
                 </a:r>
               </a:p>
@@ -23557,7 +24069,11 @@
               <a:bodyPr wrap="none" anchor="ctr"/>
               <a:lstStyle/>
               <a:p>
-                <a:endParaRPr lang="nl-NL"/>
+                <a:endParaRPr lang="nl-NL">
+                  <a:solidFill>
+                    <a:srgbClr val="FFFF00"/>
+                  </a:solidFill>
+                </a:endParaRPr>
               </a:p>
             </p:txBody>
           </p:sp>
@@ -23572,7 +24088,7 @@
             <p:spPr bwMode="auto">
               <a:xfrm>
                 <a:off x="3915" y="2707"/>
-                <a:ext cx="196" cy="250"/>
+                <a:ext cx="197" cy="233"/>
               </a:xfrm>
               <a:prstGeom prst="rect">
                 <a:avLst/>
@@ -23592,7 +24108,11 @@
               <a:lstStyle/>
               <a:p>
                 <a:r>
-                  <a:rPr lang="en-US"/>
+                  <a:rPr lang="en-US">
+                    <a:solidFill>
+                      <a:srgbClr val="FFFF00"/>
+                    </a:solidFill>
+                  </a:rPr>
                   <a:t>4</a:t>
                 </a:r>
               </a:p>
@@ -23629,7 +24149,11 @@
             <a:bodyPr/>
             <a:lstStyle/>
             <a:p>
-              <a:endParaRPr lang="en-US"/>
+              <a:endParaRPr lang="en-US">
+                <a:solidFill>
+                  <a:srgbClr val="FFFF00"/>
+                </a:solidFill>
+              </a:endParaRPr>
             </a:p>
           </p:txBody>
         </p:sp>
@@ -23663,7 +24187,11 @@
             <a:bodyPr/>
             <a:lstStyle/>
             <a:p>
-              <a:endParaRPr lang="en-US"/>
+              <a:endParaRPr lang="en-US">
+                <a:solidFill>
+                  <a:srgbClr val="FFFF00"/>
+                </a:solidFill>
+              </a:endParaRPr>
             </a:p>
           </p:txBody>
         </p:sp>
@@ -23697,7 +24225,11 @@
             <a:bodyPr/>
             <a:lstStyle/>
             <a:p>
-              <a:endParaRPr lang="en-US"/>
+              <a:endParaRPr lang="en-US">
+                <a:solidFill>
+                  <a:srgbClr val="FFFF00"/>
+                </a:solidFill>
+              </a:endParaRPr>
             </a:p>
           </p:txBody>
         </p:sp>
@@ -23731,7 +24263,11 @@
             <a:bodyPr/>
             <a:lstStyle/>
             <a:p>
-              <a:endParaRPr lang="en-US"/>
+              <a:endParaRPr lang="en-US">
+                <a:solidFill>
+                  <a:srgbClr val="FFFF00"/>
+                </a:solidFill>
+              </a:endParaRPr>
             </a:p>
           </p:txBody>
         </p:sp>
@@ -23765,7 +24301,11 @@
             <a:bodyPr/>
             <a:lstStyle/>
             <a:p>
-              <a:endParaRPr lang="en-US"/>
+              <a:endParaRPr lang="en-US">
+                <a:solidFill>
+                  <a:srgbClr val="FFFF00"/>
+                </a:solidFill>
+              </a:endParaRPr>
             </a:p>
           </p:txBody>
         </p:sp>
@@ -23799,7 +24339,11 @@
             <a:bodyPr/>
             <a:lstStyle/>
             <a:p>
-              <a:endParaRPr lang="en-US"/>
+              <a:endParaRPr lang="en-US">
+                <a:solidFill>
+                  <a:srgbClr val="FFFF00"/>
+                </a:solidFill>
+              </a:endParaRPr>
             </a:p>
           </p:txBody>
         </p:sp>
@@ -23833,7 +24377,11 @@
             <a:bodyPr/>
             <a:lstStyle/>
             <a:p>
-              <a:endParaRPr lang="en-US"/>
+              <a:endParaRPr lang="en-US">
+                <a:solidFill>
+                  <a:srgbClr val="FFFF00"/>
+                </a:solidFill>
+              </a:endParaRPr>
             </a:p>
           </p:txBody>
         </p:sp>
@@ -23885,7 +24433,11 @@
               <a:bodyPr wrap="none" anchor="ctr"/>
               <a:lstStyle/>
               <a:p>
-                <a:endParaRPr lang="nl-NL"/>
+                <a:endParaRPr lang="nl-NL">
+                  <a:solidFill>
+                    <a:srgbClr val="FFFF00"/>
+                  </a:solidFill>
+                </a:endParaRPr>
               </a:p>
             </p:txBody>
           </p:sp>
@@ -23900,7 +24452,7 @@
             <p:spPr bwMode="auto">
               <a:xfrm>
                 <a:off x="4365" y="3645"/>
-                <a:ext cx="196" cy="250"/>
+                <a:ext cx="197" cy="233"/>
               </a:xfrm>
               <a:prstGeom prst="rect">
                 <a:avLst/>
@@ -23920,7 +24472,11 @@
               <a:lstStyle/>
               <a:p>
                 <a:r>
-                  <a:rPr lang="en-US"/>
+                  <a:rPr lang="en-US">
+                    <a:solidFill>
+                      <a:srgbClr val="FFFF00"/>
+                    </a:solidFill>
+                  </a:rPr>
                   <a:t>6</a:t>
                 </a:r>
               </a:p>
@@ -23957,7 +24513,11 @@
             <a:bodyPr/>
             <a:lstStyle/>
             <a:p>
-              <a:endParaRPr lang="en-US"/>
+              <a:endParaRPr lang="en-US">
+                <a:solidFill>
+                  <a:srgbClr val="FFFF00"/>
+                </a:solidFill>
+              </a:endParaRPr>
             </a:p>
           </p:txBody>
         </p:sp>
@@ -26983,7 +27543,7 @@
           <p:nvPr>
             <p:extLst>
               <p:ext uri="{D42A27DB-BD31-4B8C-83A1-F6EECF244321}">
-                <p14:modId xmlns:p14="http://schemas.microsoft.com/office/powerpoint/2010/main" val="1511201008"/>
+                <p14:modId xmlns:p14="http://schemas.microsoft.com/office/powerpoint/2010/main" val="2280231921"/>
               </p:ext>
             </p:extLst>
           </p:nvPr>
@@ -27388,7 +27948,7 @@
                             <a:schemeClr val="tx1"/>
                           </a:solidFill>
                         </a:rPr>
-                        <a:t> = [2,1,0,2]</a:t>
+                        <a:t> = [2,0,1,2]</a:t>
                       </a:r>
                     </a:p>
                   </a:txBody>
@@ -32259,7 +32819,7 @@
             </a:pPr>
             <a:r>
               <a:rPr lang="en-US" sz="1200" dirty="0"/>
-              <a:t>This allows non-cyclic logics to be represented as circuits. E.g. the non-cyclic path [1,2,4,6,7] in the original program is represented as a circuit [1,2,4,6,7,1] in the modified CFG. </a:t>
+              <a:t>This allows non-cyclic logics to be represented as circuits. E.g. the non-cyclic path [0,1,2,4,6,7] in the original program is represented as a circuit [0,1,2,4,6,7,0] in the modified CFG. </a:t>
             </a:r>
           </a:p>
           <a:p>
@@ -39617,7 +40177,11 @@
             <a:bodyPr wrap="none" anchor="ctr"/>
             <a:lstStyle/>
             <a:p>
-              <a:endParaRPr lang="nl-NL"/>
+              <a:endParaRPr lang="nl-NL">
+                <a:solidFill>
+                  <a:srgbClr val="FFFF00"/>
+                </a:solidFill>
+              </a:endParaRPr>
             </a:p>
           </p:txBody>
         </p:sp>
@@ -39632,7 +40196,7 @@
           <p:spPr bwMode="auto">
             <a:xfrm>
               <a:off x="4815" y="2707"/>
-              <a:ext cx="196" cy="250"/>
+              <a:ext cx="197" cy="233"/>
             </a:xfrm>
             <a:prstGeom prst="rect">
               <a:avLst/>
@@ -39652,7 +40216,11 @@
             <a:lstStyle/>
             <a:p>
               <a:r>
-                <a:rPr lang="en-US"/>
+                <a:rPr lang="en-US">
+                  <a:solidFill>
+                    <a:srgbClr val="FFFF00"/>
+                  </a:solidFill>
+                </a:rPr>
                 <a:t>2</a:t>
               </a:r>
             </a:p>
@@ -39707,7 +40275,11 @@
             <a:bodyPr wrap="none" anchor="ctr"/>
             <a:lstStyle/>
             <a:p>
-              <a:endParaRPr lang="nl-NL"/>
+              <a:endParaRPr lang="nl-NL">
+                <a:solidFill>
+                  <a:srgbClr val="FFFF00"/>
+                </a:solidFill>
+              </a:endParaRPr>
             </a:p>
           </p:txBody>
         </p:sp>
@@ -39722,7 +40294,7 @@
           <p:spPr bwMode="auto">
             <a:xfrm>
               <a:off x="3915" y="2707"/>
-              <a:ext cx="196" cy="250"/>
+              <a:ext cx="197" cy="233"/>
             </a:xfrm>
             <a:prstGeom prst="rect">
               <a:avLst/>
@@ -39742,7 +40314,11 @@
             <a:lstStyle/>
             <a:p>
               <a:r>
-                <a:rPr lang="en-US"/>
+                <a:rPr lang="en-US">
+                  <a:solidFill>
+                    <a:srgbClr val="FFFF00"/>
+                  </a:solidFill>
+                </a:rPr>
                 <a:t>1</a:t>
               </a:r>
             </a:p>
@@ -39831,7 +40407,11 @@
             <a:bodyPr wrap="none" anchor="ctr"/>
             <a:lstStyle/>
             <a:p>
-              <a:endParaRPr lang="nl-NL"/>
+              <a:endParaRPr lang="nl-NL">
+                <a:solidFill>
+                  <a:srgbClr val="FFFF00"/>
+                </a:solidFill>
+              </a:endParaRPr>
             </a:p>
           </p:txBody>
         </p:sp>
@@ -39845,8 +40425,8 @@
           </p:nvSpPr>
           <p:spPr bwMode="auto">
             <a:xfrm>
-              <a:off x="4365" y="1769"/>
-              <a:ext cx="196" cy="250"/>
+              <a:off x="4364" y="1769"/>
+              <a:ext cx="197" cy="233"/>
             </a:xfrm>
             <a:prstGeom prst="rect">
               <a:avLst/>
@@ -39867,7 +40447,11 @@
             <a:p>
               <a:pPr algn="r"/>
               <a:r>
-                <a:rPr lang="en-US"/>
+                <a:rPr lang="en-US">
+                  <a:solidFill>
+                    <a:srgbClr val="FFFF00"/>
+                  </a:solidFill>
+                </a:rPr>
                 <a:t>3</a:t>
               </a:r>
             </a:p>
@@ -40244,7 +40828,11 @@
             <a:bodyPr wrap="none" anchor="ctr"/>
             <a:lstStyle/>
             <a:p>
-              <a:endParaRPr lang="nl-NL"/>
+              <a:endParaRPr lang="nl-NL">
+                <a:solidFill>
+                  <a:srgbClr val="FFFF00"/>
+                </a:solidFill>
+              </a:endParaRPr>
             </a:p>
           </p:txBody>
         </p:sp>
@@ -40280,7 +40868,11 @@
             <a:p>
               <a:pPr algn="r"/>
               <a:r>
-                <a:rPr lang="en-US" dirty="0"/>
+                <a:rPr lang="en-US" dirty="0">
+                  <a:solidFill>
+                    <a:srgbClr val="FFFF00"/>
+                  </a:solidFill>
+                </a:rPr>
                 <a:t>4</a:t>
               </a:r>
             </a:p>
@@ -41124,7 +41716,11 @@
             <a:bodyPr wrap="none" anchor="ctr"/>
             <a:lstStyle/>
             <a:p>
-              <a:endParaRPr lang="nl-NL"/>
+              <a:endParaRPr lang="nl-NL">
+                <a:solidFill>
+                  <a:srgbClr val="FFFF00"/>
+                </a:solidFill>
+              </a:endParaRPr>
             </a:p>
           </p:txBody>
         </p:sp>
@@ -41139,7 +41735,7 @@
           <p:spPr bwMode="auto">
             <a:xfrm>
               <a:off x="4815" y="2707"/>
-              <a:ext cx="196" cy="250"/>
+              <a:ext cx="197" cy="233"/>
             </a:xfrm>
             <a:prstGeom prst="rect">
               <a:avLst/>
@@ -41159,7 +41755,11 @@
             <a:lstStyle/>
             <a:p>
               <a:r>
-                <a:rPr lang="en-US"/>
+                <a:rPr lang="en-US">
+                  <a:solidFill>
+                    <a:srgbClr val="FFFF00"/>
+                  </a:solidFill>
+                </a:rPr>
                 <a:t>2</a:t>
               </a:r>
             </a:p>
@@ -41214,7 +41814,11 @@
             <a:bodyPr wrap="none" anchor="ctr"/>
             <a:lstStyle/>
             <a:p>
-              <a:endParaRPr lang="nl-NL"/>
+              <a:endParaRPr lang="nl-NL">
+                <a:solidFill>
+                  <a:srgbClr val="FFFF00"/>
+                </a:solidFill>
+              </a:endParaRPr>
             </a:p>
           </p:txBody>
         </p:sp>
@@ -41229,7 +41833,7 @@
           <p:spPr bwMode="auto">
             <a:xfrm>
               <a:off x="3915" y="2707"/>
-              <a:ext cx="196" cy="250"/>
+              <a:ext cx="197" cy="233"/>
             </a:xfrm>
             <a:prstGeom prst="rect">
               <a:avLst/>
@@ -41249,7 +41853,11 @@
             <a:lstStyle/>
             <a:p>
               <a:r>
-                <a:rPr lang="en-US"/>
+                <a:rPr lang="en-US" dirty="0">
+                  <a:solidFill>
+                    <a:srgbClr val="FFFF00"/>
+                  </a:solidFill>
+                </a:rPr>
                 <a:t>1</a:t>
               </a:r>
             </a:p>
@@ -41338,7 +41946,11 @@
             <a:bodyPr wrap="none" anchor="ctr"/>
             <a:lstStyle/>
             <a:p>
-              <a:endParaRPr lang="nl-NL"/>
+              <a:endParaRPr lang="nl-NL">
+                <a:solidFill>
+                  <a:srgbClr val="FFFF00"/>
+                </a:solidFill>
+              </a:endParaRPr>
             </a:p>
           </p:txBody>
         </p:sp>
@@ -41352,8 +41964,8 @@
           </p:nvSpPr>
           <p:spPr bwMode="auto">
             <a:xfrm>
-              <a:off x="4365" y="1769"/>
-              <a:ext cx="196" cy="250"/>
+              <a:off x="4364" y="1769"/>
+              <a:ext cx="197" cy="233"/>
             </a:xfrm>
             <a:prstGeom prst="rect">
               <a:avLst/>
@@ -41374,7 +41986,11 @@
             <a:p>
               <a:pPr algn="r"/>
               <a:r>
-                <a:rPr lang="en-US"/>
+                <a:rPr lang="en-US">
+                  <a:solidFill>
+                    <a:srgbClr val="FFFF00"/>
+                  </a:solidFill>
+                </a:rPr>
                 <a:t>3</a:t>
               </a:r>
             </a:p>
@@ -41697,7 +42313,11 @@
             <a:bodyPr wrap="none" anchor="ctr"/>
             <a:lstStyle/>
             <a:p>
-              <a:endParaRPr lang="nl-NL"/>
+              <a:endParaRPr lang="nl-NL">
+                <a:solidFill>
+                  <a:srgbClr val="FFFF00"/>
+                </a:solidFill>
+              </a:endParaRPr>
             </a:p>
           </p:txBody>
         </p:sp>
@@ -41733,7 +42353,11 @@
             <a:p>
               <a:pPr algn="r"/>
               <a:r>
-                <a:rPr lang="en-US" dirty="0"/>
+                <a:rPr lang="en-US" dirty="0">
+                  <a:solidFill>
+                    <a:srgbClr val="FFFF00"/>
+                  </a:solidFill>
+                </a:rPr>
                 <a:t>4</a:t>
               </a:r>
             </a:p>
